--- a/Pregrado/Investigacion en ciencia y tecnologia/Clases/Sesion 01 - Presentación del curso · docente · estudiantes · ACAs/Presentacion.pptx
+++ b/Pregrado/Investigacion en ciencia y tecnologia/Clases/Sesion 01 - Presentación del curso · docente · estudiantes · ACAs/Presentacion.pptx
@@ -13,6 +13,19 @@
     <p:sldId id="261" r:id="rId12"/>
     <p:sldId id="262" r:id="rId13"/>
     <p:sldId id="263" r:id="rId14"/>
+    <p:sldId id="264" r:id="rId15"/>
+    <p:sldId id="265" r:id="rId16"/>
+    <p:sldId id="266" r:id="rId17"/>
+    <p:sldId id="267" r:id="rId18"/>
+    <p:sldId id="268" r:id="rId19"/>
+    <p:sldId id="269" r:id="rId20"/>
+    <p:sldId id="270" r:id="rId21"/>
+    <p:sldId id="271" r:id="rId22"/>
+    <p:sldId id="272" r:id="rId23"/>
+    <p:sldId id="273" r:id="rId24"/>
+    <p:sldId id="274" r:id="rId25"/>
+    <p:sldId id="275" r:id="rId26"/>
+    <p:sldId id="276" r:id="rId27"/>
   </p:sldIdLst>
   <p:sldSz cx="12191695" cy="6858000" type="screen4x3"/>
   <p:notesSz cx="6858000" cy="9144000"/>
@@ -3407,6 +3420,5621 @@
 </p:sld>
 </file>
 
+<file path=ppt/slides/slide10.xml><?xml version="1.0" encoding="utf-8"?>
+<p:sld xmlns:a="http://schemas.openxmlformats.org/drawingml/2006/main" xmlns:p="http://schemas.openxmlformats.org/presentationml/2006/main" xmlns:r="http://schemas.openxmlformats.org/officeDocument/2006/relationships">
+  <p:cSld>
+    <p:bg>
+      <p:bgPr>
+        <a:solidFill>
+          <a:srgbClr val="FFFFFF"/>
+        </a:solidFill>
+        <a:effectLst/>
+      </p:bgPr>
+    </p:bg>
+    <p:spTree>
+      <p:nvGrpSpPr>
+        <p:cNvPr id="1" name=""/>
+        <p:cNvGrpSpPr/>
+        <p:nvPr/>
+      </p:nvGrpSpPr>
+      <p:grpSpPr/>
+      <p:sp>
+        <p:nvSpPr>
+          <p:cNvPr id="2" name="Rectangle 1"/>
+          <p:cNvSpPr/>
+          <p:nvPr/>
+        </p:nvSpPr>
+        <p:spPr>
+          <a:xfrm>
+            <a:off x="0" y="0"/>
+            <a:ext cx="12191695" cy="1188720"/>
+          </a:xfrm>
+          <a:prstGeom prst="rect">
+            <a:avLst/>
+          </a:prstGeom>
+          <a:solidFill>
+            <a:srgbClr val="0C2340"/>
+          </a:solidFill>
+          <a:ln>
+            <a:noFill/>
+          </a:ln>
+          <a:effectLst/>
+        </p:spPr>
+        <p:style>
+          <a:lnRef idx="1">
+            <a:schemeClr val="accent1"/>
+          </a:lnRef>
+          <a:fillRef idx="3">
+            <a:schemeClr val="accent1"/>
+          </a:fillRef>
+          <a:effectRef idx="2">
+            <a:schemeClr val="accent1"/>
+          </a:effectRef>
+          <a:fontRef idx="minor">
+            <a:schemeClr val="lt1"/>
+          </a:fontRef>
+        </p:style>
+        <p:txBody>
+          <a:bodyPr rtlCol="0" anchor="ctr"/>
+          <a:lstStyle/>
+          <a:p>
+            <a:pPr algn="ctr"/>
+          </a:p>
+        </p:txBody>
+      </p:sp>
+      <p:sp>
+        <p:nvSpPr>
+          <p:cNvPr id="3" name="TextBox 2"/>
+          <p:cNvSpPr txBox="1"/>
+          <p:nvPr/>
+        </p:nvSpPr>
+        <p:spPr>
+          <a:xfrm>
+            <a:off x="640080" y="0"/>
+            <a:ext cx="9082735" cy="1188720"/>
+          </a:xfrm>
+          <a:prstGeom prst="rect">
+            <a:avLst/>
+          </a:prstGeom>
+          <a:noFill/>
+        </p:spPr>
+        <p:txBody>
+          <a:bodyPr wrap="square" anchor="ctr" lIns="0" rIns="0" tIns="0" bIns="0">
+            <a:spAutoFit/>
+          </a:bodyPr>
+          <a:lstStyle/>
+          <a:p>
+            <a:pPr algn="ctr"/>
+            <a:r>
+              <a:rPr sz="2600" b="1" i="0">
+                <a:solidFill>
+                  <a:srgbClr val="FFFFFF"/>
+                </a:solidFill>
+                <a:latin typeface="Calibri"/>
+              </a:rPr>
+              <a:t>Las ACAs, una por una: qué se entrega y qué se mira</a:t>
+            </a:r>
+          </a:p>
+        </p:txBody>
+      </p:sp>
+      <p:graphicFrame>
+        <p:nvGraphicFramePr>
+          <p:cNvPr id="4" name="Table 3"/>
+          <p:cNvGraphicFramePr>
+            <a:graphicFrameLocks noGrp="1"/>
+          </p:cNvGraphicFramePr>
+          <p:nvPr/>
+        </p:nvGraphicFramePr>
+        <p:xfrm>
+          <a:off x="640080" y="1691639"/>
+          <a:ext cx="10911533" cy="2011680"/>
+        </p:xfrm>
+        <a:graphic>
+          <a:graphicData uri="http://schemas.openxmlformats.org/drawingml/2006/table">
+            <a:tbl>
+              <a:tblPr>
+                <a:tableStyleId>{2D5ABB26-0587-4C30-8999-92F81FD0307C}</a:tableStyleId>
+              </a:tblPr>
+              <a:tblGrid>
+                <a:gridCol w="916935"/>
+                <a:gridCol w="2750807"/>
+                <a:gridCol w="3117581"/>
+                <a:gridCol w="4126210"/>
+              </a:tblGrid>
+              <a:tr h="502920">
+                <a:tc>
+                  <a:txBody>
+                    <a:bodyPr/>
+                    <a:lstStyle/>
+                    <a:p>
+                      <a:pPr algn="l"/>
+                      <a:r>
+                        <a:rPr sz="1300" b="1" i="0">
+                          <a:solidFill>
+                            <a:srgbClr val="FFFFFF"/>
+                          </a:solidFill>
+                          <a:latin typeface="Calibri"/>
+                        </a:rPr>
+                        <a:t>ACA</a:t>
+                      </a:r>
+                    </a:p>
+                  </a:txBody>
+                  <a:tcPr anchor="ctr" marL="109728" marR="91440" marT="36576" marB="36576">
+                    <a:solidFill>
+                      <a:srgbClr val="0C2340"/>
+                    </a:solidFill>
+                  </a:tcPr>
+                </a:tc>
+                <a:tc>
+                  <a:txBody>
+                    <a:bodyPr/>
+                    <a:lstStyle/>
+                    <a:p>
+                      <a:pPr algn="l"/>
+                      <a:r>
+                        <a:rPr sz="1300" b="1" i="0">
+                          <a:solidFill>
+                            <a:srgbClr val="FFFFFF"/>
+                          </a:solidFill>
+                          <a:latin typeface="Calibri"/>
+                        </a:rPr>
+                        <a:t>Qué entrega</a:t>
+                      </a:r>
+                    </a:p>
+                  </a:txBody>
+                  <a:tcPr anchor="ctr" marL="109728" marR="91440" marT="36576" marB="36576">
+                    <a:solidFill>
+                      <a:srgbClr val="0C2340"/>
+                    </a:solidFill>
+                  </a:tcPr>
+                </a:tc>
+                <a:tc>
+                  <a:txBody>
+                    <a:bodyPr/>
+                    <a:lstStyle/>
+                    <a:p>
+                      <a:pPr algn="l"/>
+                      <a:r>
+                        <a:rPr sz="1300" b="1" i="0">
+                          <a:solidFill>
+                            <a:srgbClr val="FFFFFF"/>
+                          </a:solidFill>
+                          <a:latin typeface="Calibri"/>
+                        </a:rPr>
+                        <a:t>Qué mira el Docente</a:t>
+                      </a:r>
+                    </a:p>
+                  </a:txBody>
+                  <a:tcPr anchor="ctr" marL="109728" marR="91440" marT="36576" marB="36576">
+                    <a:solidFill>
+                      <a:srgbClr val="0C2340"/>
+                    </a:solidFill>
+                  </a:tcPr>
+                </a:tc>
+                <a:tc>
+                  <a:txBody>
+                    <a:bodyPr/>
+                    <a:lstStyle/>
+                    <a:p>
+                      <a:pPr algn="l"/>
+                      <a:r>
+                        <a:rPr sz="1300" b="1" i="0">
+                          <a:solidFill>
+                            <a:srgbClr val="FFFFFF"/>
+                          </a:solidFill>
+                          <a:latin typeface="Calibri"/>
+                        </a:rPr>
+                        <a:t>Flojo vs. bueno</a:t>
+                      </a:r>
+                    </a:p>
+                  </a:txBody>
+                  <a:tcPr anchor="ctr" marL="109728" marR="91440" marT="36576" marB="36576">
+                    <a:solidFill>
+                      <a:srgbClr val="0C2340"/>
+                    </a:solidFill>
+                  </a:tcPr>
+                </a:tc>
+              </a:tr>
+              <a:tr h="502920">
+                <a:tc>
+                  <a:txBody>
+                    <a:bodyPr/>
+                    <a:lstStyle/>
+                    <a:p>
+                      <a:pPr algn="l"/>
+                      <a:r>
+                        <a:rPr sz="1100" b="1" i="0">
+                          <a:solidFill>
+                            <a:srgbClr val="2B2B2B"/>
+                          </a:solidFill>
+                          <a:latin typeface="Calibri"/>
+                        </a:rPr>
+                        <a:t>ACA 1</a:t>
+                      </a:r>
+                    </a:p>
+                  </a:txBody>
+                  <a:tcPr anchor="ctr" marL="109728" marR="91440" marT="36576" marB="36576">
+                    <a:solidFill>
+                      <a:srgbClr val="FFFFFF"/>
+                    </a:solidFill>
+                  </a:tcPr>
+                </a:tc>
+                <a:tc>
+                  <a:txBody>
+                    <a:bodyPr/>
+                    <a:lstStyle/>
+                    <a:p>
+                      <a:pPr algn="l"/>
+                      <a:r>
+                        <a:rPr sz="1100" b="0" i="0">
+                          <a:solidFill>
+                            <a:srgbClr val="2B2B2B"/>
+                          </a:solidFill>
+                          <a:latin typeface="Calibri"/>
+                        </a:rPr>
+                        <a:t>Primer avance del artículo: título, introducción breve, problema y primeras referencias</a:t>
+                      </a:r>
+                    </a:p>
+                  </a:txBody>
+                  <a:tcPr anchor="ctr" marL="109728" marR="91440" marT="36576" marB="36576">
+                    <a:solidFill>
+                      <a:srgbClr val="FFFFFF"/>
+                    </a:solidFill>
+                  </a:tcPr>
+                </a:tc>
+                <a:tc>
+                  <a:txBody>
+                    <a:bodyPr/>
+                    <a:lstStyle/>
+                    <a:p>
+                      <a:pPr algn="l"/>
+                      <a:r>
+                        <a:rPr sz="1100" b="0" i="0">
+                          <a:solidFill>
+                            <a:srgbClr val="2B2B2B"/>
+                          </a:solidFill>
+                          <a:latin typeface="Calibri"/>
+                        </a:rPr>
+                        <a:t>Que el problema se entienda sin conocerlo a usted y que las fuentes existan de verdad</a:t>
+                      </a:r>
+                    </a:p>
+                  </a:txBody>
+                  <a:tcPr anchor="ctr" marL="109728" marR="91440" marT="36576" marB="36576">
+                    <a:solidFill>
+                      <a:srgbClr val="FFFFFF"/>
+                    </a:solidFill>
+                  </a:tcPr>
+                </a:tc>
+                <a:tc>
+                  <a:txBody>
+                    <a:bodyPr/>
+                    <a:lstStyle/>
+                    <a:p>
+                      <a:pPr algn="l"/>
+                      <a:r>
+                        <a:rPr sz="1100" b="0" i="0">
+                          <a:solidFill>
+                            <a:srgbClr val="2B2B2B"/>
+                          </a:solidFill>
+                          <a:latin typeface="Calibri"/>
+                        </a:rPr>
+                        <a:t>Flojo: párrafos largos sin problema visible · Bueno: media página donde se ve contexto, vacío y propósito</a:t>
+                      </a:r>
+                    </a:p>
+                  </a:txBody>
+                  <a:tcPr anchor="ctr" marL="109728" marR="91440" marT="36576" marB="36576">
+                    <a:solidFill>
+                      <a:srgbClr val="FFFFFF"/>
+                    </a:solidFill>
+                  </a:tcPr>
+                </a:tc>
+              </a:tr>
+              <a:tr h="502920">
+                <a:tc>
+                  <a:txBody>
+                    <a:bodyPr/>
+                    <a:lstStyle/>
+                    <a:p>
+                      <a:pPr algn="l"/>
+                      <a:r>
+                        <a:rPr sz="1100" b="1" i="0">
+                          <a:solidFill>
+                            <a:srgbClr val="2B2B2B"/>
+                          </a:solidFill>
+                          <a:latin typeface="Calibri"/>
+                        </a:rPr>
+                        <a:t>ACA 2</a:t>
+                      </a:r>
+                    </a:p>
+                  </a:txBody>
+                  <a:tcPr anchor="ctr" marL="109728" marR="91440" marT="36576" marB="36576">
+                    <a:solidFill>
+                      <a:srgbClr val="F2F2F2"/>
+                    </a:solidFill>
+                  </a:tcPr>
+                </a:tc>
+                <a:tc>
+                  <a:txBody>
+                    <a:bodyPr/>
+                    <a:lstStyle/>
+                    <a:p>
+                      <a:pPr algn="l"/>
+                      <a:r>
+                        <a:rPr sz="1100" b="0" i="0">
+                          <a:solidFill>
+                            <a:srgbClr val="2B2B2B"/>
+                          </a:solidFill>
+                          <a:latin typeface="Calibri"/>
+                        </a:rPr>
+                        <a:t>Planteamiento del problema y pregunta de investigación</a:t>
+                      </a:r>
+                    </a:p>
+                  </a:txBody>
+                  <a:tcPr anchor="ctr" marL="109728" marR="91440" marT="36576" marB="36576">
+                    <a:solidFill>
+                      <a:srgbClr val="F2F2F2"/>
+                    </a:solidFill>
+                  </a:tcPr>
+                </a:tc>
+                <a:tc>
+                  <a:txBody>
+                    <a:bodyPr/>
+                    <a:lstStyle/>
+                    <a:p>
+                      <a:pPr algn="l"/>
+                      <a:r>
+                        <a:rPr sz="1100" b="0" i="0">
+                          <a:solidFill>
+                            <a:srgbClr val="2B2B2B"/>
+                          </a:solidFill>
+                          <a:latin typeface="Calibri"/>
+                        </a:rPr>
+                        <a:t>Coherencia entre problema, pregunta y evidencia; que la pregunta sea investigable</a:t>
+                      </a:r>
+                    </a:p>
+                  </a:txBody>
+                  <a:tcPr anchor="ctr" marL="109728" marR="91440" marT="36576" marB="36576">
+                    <a:solidFill>
+                      <a:srgbClr val="F2F2F2"/>
+                    </a:solidFill>
+                  </a:tcPr>
+                </a:tc>
+                <a:tc>
+                  <a:txBody>
+                    <a:bodyPr/>
+                    <a:lstStyle/>
+                    <a:p>
+                      <a:pPr algn="l"/>
+                      <a:r>
+                        <a:rPr sz="1100" b="0" i="0">
+                          <a:solidFill>
+                            <a:srgbClr val="2B2B2B"/>
+                          </a:solidFill>
+                          <a:latin typeface="Calibri"/>
+                        </a:rPr>
+                        <a:t>Flojo: pregunta que se responde sí/no · Bueno: pregunta con “cómo”, “qué” o “en qué medida”, anclada a un contexto</a:t>
+                      </a:r>
+                    </a:p>
+                  </a:txBody>
+                  <a:tcPr anchor="ctr" marL="109728" marR="91440" marT="36576" marB="36576">
+                    <a:solidFill>
+                      <a:srgbClr val="F2F2F2"/>
+                    </a:solidFill>
+                  </a:tcPr>
+                </a:tc>
+              </a:tr>
+              <a:tr h="502920">
+                <a:tc>
+                  <a:txBody>
+                    <a:bodyPr/>
+                    <a:lstStyle/>
+                    <a:p>
+                      <a:pPr algn="l"/>
+                      <a:r>
+                        <a:rPr sz="1100" b="1" i="0">
+                          <a:solidFill>
+                            <a:srgbClr val="2B2B2B"/>
+                          </a:solidFill>
+                          <a:latin typeface="Calibri"/>
+                        </a:rPr>
+                        <a:t>ACA 3</a:t>
+                      </a:r>
+                    </a:p>
+                  </a:txBody>
+                  <a:tcPr anchor="ctr" marL="109728" marR="91440" marT="36576" marB="36576">
+                    <a:solidFill>
+                      <a:srgbClr val="FFFFFF"/>
+                    </a:solidFill>
+                  </a:tcPr>
+                </a:tc>
+                <a:tc>
+                  <a:txBody>
+                    <a:bodyPr/>
+                    <a:lstStyle/>
+                    <a:p>
+                      <a:pPr algn="l"/>
+                      <a:r>
+                        <a:rPr sz="1100" b="0" i="0">
+                          <a:solidFill>
+                            <a:srgbClr val="2B2B2B"/>
+                          </a:solidFill>
+                          <a:latin typeface="Calibri"/>
+                        </a:rPr>
+                        <a:t>Avance consolidado: marco / revisión con fuentes y referencias en APA 7</a:t>
+                      </a:r>
+                    </a:p>
+                  </a:txBody>
+                  <a:tcPr anchor="ctr" marL="109728" marR="91440" marT="36576" marB="36576">
+                    <a:solidFill>
+                      <a:srgbClr val="FFFFFF"/>
+                    </a:solidFill>
+                  </a:tcPr>
+                </a:tc>
+                <a:tc>
+                  <a:txBody>
+                    <a:bodyPr/>
+                    <a:lstStyle/>
+                    <a:p>
+                      <a:pPr algn="l"/>
+                      <a:r>
+                        <a:rPr sz="1100" b="0" i="0">
+                          <a:solidFill>
+                            <a:srgbClr val="2B2B2B"/>
+                          </a:solidFill>
+                          <a:latin typeface="Calibri"/>
+                        </a:rPr>
+                        <a:t>Que cada fuente ayude a responder la pregunta y que el documento se lea como un todo</a:t>
+                      </a:r>
+                    </a:p>
+                  </a:txBody>
+                  <a:tcPr anchor="ctr" marL="109728" marR="91440" marT="36576" marB="36576">
+                    <a:solidFill>
+                      <a:srgbClr val="FFFFFF"/>
+                    </a:solidFill>
+                  </a:tcPr>
+                </a:tc>
+                <a:tc>
+                  <a:txBody>
+                    <a:bodyPr/>
+                    <a:lstStyle/>
+                    <a:p>
+                      <a:pPr algn="l"/>
+                      <a:r>
+                        <a:rPr sz="1100" b="0" i="0">
+                          <a:solidFill>
+                            <a:srgbClr val="2B2B2B"/>
+                          </a:solidFill>
+                          <a:latin typeface="Calibri"/>
+                        </a:rPr>
+                        <a:t>Flojo: collage de definiciones copiadas · Bueno: fuentes agrupadas por concepto y usadas como argumento</a:t>
+                      </a:r>
+                    </a:p>
+                  </a:txBody>
+                  <a:tcPr anchor="ctr" marL="109728" marR="91440" marT="36576" marB="36576">
+                    <a:solidFill>
+                      <a:srgbClr val="FFFFFF"/>
+                    </a:solidFill>
+                  </a:tcPr>
+                </a:tc>
+              </a:tr>
+            </a:tbl>
+          </a:graphicData>
+        </a:graphic>
+      </p:graphicFrame>
+      <p:sp>
+        <p:nvSpPr>
+          <p:cNvPr id="5" name="TextBox 4"/>
+          <p:cNvSpPr txBox="1"/>
+          <p:nvPr/>
+        </p:nvSpPr>
+        <p:spPr>
+          <a:xfrm>
+            <a:off x="640080" y="3840480"/>
+            <a:ext cx="10911535" cy="548640"/>
+          </a:xfrm>
+          <a:prstGeom prst="rect">
+            <a:avLst/>
+          </a:prstGeom>
+          <a:noFill/>
+        </p:spPr>
+        <p:txBody>
+          <a:bodyPr wrap="square" anchor="t" lIns="0" rIns="0" tIns="0" bIns="0">
+            <a:spAutoFit/>
+          </a:bodyPr>
+          <a:lstStyle/>
+          <a:p>
+            <a:r>
+              <a:rPr sz="1200" b="0" i="1">
+                <a:solidFill>
+                  <a:srgbClr val="2B2B2B"/>
+                </a:solidFill>
+                <a:latin typeface="Calibri"/>
+              </a:rPr>
+              <a:t>Enunciado completo, criterios y </a:t>
+            </a:r>
+            <a:r>
+              <a:rPr sz="1200" b="1" i="1">
+                <a:solidFill>
+                  <a:srgbClr val="2B2B2B"/>
+                </a:solidFill>
+                <a:latin typeface="Calibri"/>
+              </a:rPr>
+              <a:t>fechas exactas</a:t>
+            </a:r>
+            <a:r>
+              <a:rPr sz="1200" b="0" i="1">
+                <a:solidFill>
+                  <a:srgbClr val="2B2B2B"/>
+                </a:solidFill>
+                <a:latin typeface="Calibri"/>
+              </a:rPr>
+              <a:t>: `Clases/Recursos/ACAs/`. No se copian aquí para que nunca queden desactualizadas.</a:t>
+            </a:r>
+          </a:p>
+        </p:txBody>
+      </p:sp>
+      <p:sp>
+        <p:nvSpPr>
+          <p:cNvPr id="6" name="TextBox 5"/>
+          <p:cNvSpPr txBox="1"/>
+          <p:nvPr/>
+        </p:nvSpPr>
+        <p:spPr>
+          <a:xfrm>
+            <a:off x="2194560" y="6446520"/>
+            <a:ext cx="5943600" cy="274320"/>
+          </a:xfrm>
+          <a:prstGeom prst="rect">
+            <a:avLst/>
+          </a:prstGeom>
+          <a:noFill/>
+        </p:spPr>
+        <p:txBody>
+          <a:bodyPr wrap="square" anchor="t" lIns="0" rIns="0" tIns="0" bIns="0">
+            <a:spAutoFit/>
+          </a:bodyPr>
+          <a:lstStyle/>
+          <a:p>
+            <a:pPr algn="l"/>
+            <a:r>
+              <a:rPr sz="1000" b="1" i="0">
+                <a:solidFill>
+                  <a:srgbClr val="8F989D"/>
+                </a:solidFill>
+                <a:latin typeface="Calibri"/>
+              </a:rPr>
+              <a:t>Inicio 5:10 pm</a:t>
+            </a:r>
+          </a:p>
+        </p:txBody>
+      </p:sp>
+      <p:sp>
+        <p:nvSpPr>
+          <p:cNvPr id="7" name="TextBox 6"/>
+          <p:cNvSpPr txBox="1"/>
+          <p:nvPr/>
+        </p:nvSpPr>
+        <p:spPr>
+          <a:xfrm>
+            <a:off x="11094415" y="6446520"/>
+            <a:ext cx="548640" cy="274320"/>
+          </a:xfrm>
+          <a:prstGeom prst="rect">
+            <a:avLst/>
+          </a:prstGeom>
+          <a:noFill/>
+        </p:spPr>
+        <p:txBody>
+          <a:bodyPr wrap="square" anchor="t" lIns="0" rIns="0" tIns="0" bIns="0">
+            <a:spAutoFit/>
+          </a:bodyPr>
+          <a:lstStyle/>
+          <a:p>
+            <a:pPr algn="r"/>
+            <a:r>
+              <a:rPr sz="1000" b="1" i="0">
+                <a:solidFill>
+                  <a:srgbClr val="8F989D"/>
+                </a:solidFill>
+                <a:latin typeface="Calibri"/>
+              </a:rPr>
+              <a:t>10</a:t>
+            </a:r>
+          </a:p>
+        </p:txBody>
+      </p:sp>
+    </p:spTree>
+  </p:cSld>
+  <p:clrMapOvr>
+    <a:masterClrMapping/>
+  </p:clrMapOvr>
+</p:sld>
+</file>
+
+<file path=ppt/slides/slide11.xml><?xml version="1.0" encoding="utf-8"?>
+<p:sld xmlns:a="http://schemas.openxmlformats.org/drawingml/2006/main" xmlns:p="http://schemas.openxmlformats.org/presentationml/2006/main" xmlns:r="http://schemas.openxmlformats.org/officeDocument/2006/relationships">
+  <p:cSld>
+    <p:bg>
+      <p:bgPr>
+        <a:solidFill>
+          <a:srgbClr val="FFFFFF"/>
+        </a:solidFill>
+        <a:effectLst/>
+      </p:bgPr>
+    </p:bg>
+    <p:spTree>
+      <p:nvGrpSpPr>
+        <p:cNvPr id="1" name=""/>
+        <p:cNvGrpSpPr/>
+        <p:nvPr/>
+      </p:nvGrpSpPr>
+      <p:grpSpPr/>
+      <p:sp>
+        <p:nvSpPr>
+          <p:cNvPr id="2" name="Rectangle 1"/>
+          <p:cNvSpPr/>
+          <p:nvPr/>
+        </p:nvSpPr>
+        <p:spPr>
+          <a:xfrm>
+            <a:off x="0" y="0"/>
+            <a:ext cx="12191695" cy="1188720"/>
+          </a:xfrm>
+          <a:prstGeom prst="rect">
+            <a:avLst/>
+          </a:prstGeom>
+          <a:solidFill>
+            <a:srgbClr val="0C2340"/>
+          </a:solidFill>
+          <a:ln>
+            <a:noFill/>
+          </a:ln>
+          <a:effectLst/>
+        </p:spPr>
+        <p:style>
+          <a:lnRef idx="1">
+            <a:schemeClr val="accent1"/>
+          </a:lnRef>
+          <a:fillRef idx="3">
+            <a:schemeClr val="accent1"/>
+          </a:fillRef>
+          <a:effectRef idx="2">
+            <a:schemeClr val="accent1"/>
+          </a:effectRef>
+          <a:fontRef idx="minor">
+            <a:schemeClr val="lt1"/>
+          </a:fontRef>
+        </p:style>
+        <p:txBody>
+          <a:bodyPr rtlCol="0" anchor="ctr"/>
+          <a:lstStyle/>
+          <a:p>
+            <a:pPr algn="ctr"/>
+          </a:p>
+        </p:txBody>
+      </p:sp>
+      <p:sp>
+        <p:nvSpPr>
+          <p:cNvPr id="3" name="TextBox 2"/>
+          <p:cNvSpPr txBox="1"/>
+          <p:nvPr/>
+        </p:nvSpPr>
+        <p:spPr>
+          <a:xfrm>
+            <a:off x="640080" y="0"/>
+            <a:ext cx="9082735" cy="1188720"/>
+          </a:xfrm>
+          <a:prstGeom prst="rect">
+            <a:avLst/>
+          </a:prstGeom>
+          <a:noFill/>
+        </p:spPr>
+        <p:txBody>
+          <a:bodyPr wrap="square" anchor="ctr" lIns="0" rIns="0" tIns="0" bIns="0">
+            <a:spAutoFit/>
+          </a:bodyPr>
+          <a:lstStyle/>
+          <a:p>
+            <a:pPr algn="ctr"/>
+            <a:r>
+              <a:rPr sz="2600" b="1" i="0">
+                <a:solidFill>
+                  <a:srgbClr val="FFFFFF"/>
+                </a:solidFill>
+                <a:latin typeface="Calibri"/>
+              </a:rPr>
+              <a:t>Cómo se entrega, paso a paso</a:t>
+            </a:r>
+          </a:p>
+        </p:txBody>
+      </p:sp>
+      <p:sp>
+        <p:nvSpPr>
+          <p:cNvPr id="4" name="TextBox 3"/>
+          <p:cNvSpPr txBox="1"/>
+          <p:nvPr/>
+        </p:nvSpPr>
+        <p:spPr>
+          <a:xfrm>
+            <a:off x="640080" y="1691639"/>
+            <a:ext cx="10911535" cy="4617720"/>
+          </a:xfrm>
+          <a:prstGeom prst="rect">
+            <a:avLst/>
+          </a:prstGeom>
+          <a:noFill/>
+        </p:spPr>
+        <p:txBody>
+          <a:bodyPr wrap="square" anchor="t" lIns="0" rIns="0" tIns="0" bIns="0">
+            <a:spAutoFit/>
+          </a:bodyPr>
+          <a:lstStyle/>
+          <a:p>
+            <a:pPr>
+              <a:spcAft>
+                <a:spcPts val="1000"/>
+              </a:spcAft>
+            </a:pPr>
+            <a:r>
+              <a:rPr sz="1600" b="0" i="0">
+                <a:solidFill>
+                  <a:srgbClr val="2B2B2B"/>
+                </a:solidFill>
+                <a:latin typeface="Calibri"/>
+              </a:rPr>
+              <a:t>–   </a:t>
+            </a:r>
+            <a:r>
+              <a:rPr sz="1600" b="1" i="0">
+                <a:solidFill>
+                  <a:srgbClr val="2B2B2B"/>
+                </a:solidFill>
+                <a:latin typeface="Calibri"/>
+              </a:rPr>
+              <a:t>1.</a:t>
+            </a:r>
+            <a:r>
+              <a:rPr sz="1600" b="0" i="0">
+                <a:solidFill>
+                  <a:srgbClr val="2B2B2B"/>
+                </a:solidFill>
+                <a:latin typeface="Calibri"/>
+              </a:rPr>
+              <a:t> Escriba en </a:t>
+            </a:r>
+            <a:r>
+              <a:rPr sz="1600" b="1" i="0">
+                <a:solidFill>
+                  <a:srgbClr val="2B2B2B"/>
+                </a:solidFill>
+                <a:latin typeface="Calibri"/>
+              </a:rPr>
+              <a:t>Google Docs</a:t>
+            </a:r>
+            <a:r>
+              <a:rPr sz="1600" b="0" i="0">
+                <a:solidFill>
+                  <a:srgbClr val="2B2B2B"/>
+                </a:solidFill>
+                <a:latin typeface="Calibri"/>
+              </a:rPr>
+              <a:t>, sobre la </a:t>
+            </a:r>
+            <a:r>
+              <a:rPr sz="1600" b="1" i="0">
+                <a:solidFill>
+                  <a:srgbClr val="2B2B2B"/>
+                </a:solidFill>
+                <a:latin typeface="Calibri"/>
+              </a:rPr>
+              <a:t>plantilla APA CUN</a:t>
+            </a:r>
+            <a:r>
+              <a:rPr sz="1600" b="0" i="0">
+                <a:solidFill>
+                  <a:srgbClr val="2B2B2B"/>
+                </a:solidFill>
+                <a:latin typeface="Calibri"/>
+              </a:rPr>
+              <a:t> que está en `Clases/Recursos/` (ábrala con *Archivo → Abrir con → Documentos de Google*).</a:t>
+            </a:r>
+          </a:p>
+          <a:p>
+            <a:pPr>
+              <a:spcAft>
+                <a:spcPts val="1000"/>
+              </a:spcAft>
+            </a:pPr>
+            <a:r>
+              <a:rPr sz="1600" b="0" i="0">
+                <a:solidFill>
+                  <a:srgbClr val="2B2B2B"/>
+                </a:solidFill>
+                <a:latin typeface="Calibri"/>
+              </a:rPr>
+              <a:t>–   </a:t>
+            </a:r>
+            <a:r>
+              <a:rPr sz="1600" b="1" i="0">
+                <a:solidFill>
+                  <a:srgbClr val="2B2B2B"/>
+                </a:solidFill>
+                <a:latin typeface="Calibri"/>
+              </a:rPr>
+              <a:t>2.</a:t>
+            </a:r>
+            <a:r>
+              <a:rPr sz="1600" b="0" i="0">
+                <a:solidFill>
+                  <a:srgbClr val="2B2B2B"/>
+                </a:solidFill>
+                <a:latin typeface="Calibri"/>
+              </a:rPr>
+              <a:t> Nombre el archivo así: `SNN_Tema_Apellido`. Ejemplo: `S02_LineaInvestigacion_Perez`.</a:t>
+            </a:r>
+          </a:p>
+          <a:p>
+            <a:pPr>
+              <a:spcAft>
+                <a:spcPts val="1000"/>
+              </a:spcAft>
+            </a:pPr>
+            <a:r>
+              <a:rPr sz="1600" b="0" i="0">
+                <a:solidFill>
+                  <a:srgbClr val="2B2B2B"/>
+                </a:solidFill>
+                <a:latin typeface="Calibri"/>
+              </a:rPr>
+              <a:t>–   </a:t>
+            </a:r>
+            <a:r>
+              <a:rPr sz="1600" b="1" i="0">
+                <a:solidFill>
+                  <a:srgbClr val="2B2B2B"/>
+                </a:solidFill>
+                <a:latin typeface="Calibri"/>
+              </a:rPr>
+              <a:t>3.</a:t>
+            </a:r>
+            <a:r>
+              <a:rPr sz="1600" b="0" i="0">
+                <a:solidFill>
+                  <a:srgbClr val="2B2B2B"/>
+                </a:solidFill>
+                <a:latin typeface="Calibri"/>
+              </a:rPr>
+              <a:t> Exporte a </a:t>
+            </a:r>
+            <a:r>
+              <a:rPr sz="1600" b="1" i="0">
+                <a:solidFill>
+                  <a:srgbClr val="2B2B2B"/>
+                </a:solidFill>
+                <a:latin typeface="Calibri"/>
+              </a:rPr>
+              <a:t>PDF</a:t>
+            </a:r>
+            <a:r>
+              <a:rPr sz="1600" b="0" i="0">
+                <a:solidFill>
+                  <a:srgbClr val="2B2B2B"/>
+                </a:solidFill>
+                <a:latin typeface="Calibri"/>
+              </a:rPr>
+              <a:t> al entregar (*Archivo → Descargar → PDF*), salvo que el Docente pida el enlace del documento.</a:t>
+            </a:r>
+          </a:p>
+          <a:p>
+            <a:pPr>
+              <a:spcAft>
+                <a:spcPts val="1000"/>
+              </a:spcAft>
+            </a:pPr>
+            <a:r>
+              <a:rPr sz="1600" b="0" i="0">
+                <a:solidFill>
+                  <a:srgbClr val="2B2B2B"/>
+                </a:solidFill>
+                <a:latin typeface="Calibri"/>
+              </a:rPr>
+              <a:t>–   </a:t>
+            </a:r>
+            <a:r>
+              <a:rPr sz="1600" b="1" i="0">
+                <a:solidFill>
+                  <a:srgbClr val="2B2B2B"/>
+                </a:solidFill>
+                <a:latin typeface="Calibri"/>
+              </a:rPr>
+              <a:t>4.</a:t>
+            </a:r>
+            <a:r>
+              <a:rPr sz="1600" b="0" i="0">
+                <a:solidFill>
+                  <a:srgbClr val="2B2B2B"/>
+                </a:solidFill>
+                <a:latin typeface="Calibri"/>
+              </a:rPr>
+              <a:t> Suba el archivo a </a:t>
+            </a:r>
+            <a:r>
+              <a:rPr sz="1600" b="1" i="0">
+                <a:solidFill>
+                  <a:srgbClr val="2B2B2B"/>
+                </a:solidFill>
+                <a:latin typeface="Calibri"/>
+              </a:rPr>
+              <a:t>CDigital</a:t>
+            </a:r>
+            <a:r>
+              <a:rPr sz="1600" b="0" i="0">
+                <a:solidFill>
+                  <a:srgbClr val="2B2B2B"/>
+                </a:solidFill>
+                <a:latin typeface="Calibri"/>
+              </a:rPr>
+              <a:t>, en el espacio de esa sesión: [URL CDigital — campus del curso pendiente]</a:t>
+            </a:r>
+          </a:p>
+          <a:p>
+            <a:pPr>
+              <a:spcAft>
+                <a:spcPts val="1000"/>
+              </a:spcAft>
+            </a:pPr>
+            <a:r>
+              <a:rPr sz="1600" b="0" i="0">
+                <a:solidFill>
+                  <a:srgbClr val="2B2B2B"/>
+                </a:solidFill>
+                <a:latin typeface="Calibri"/>
+              </a:rPr>
+              <a:t>–   </a:t>
+            </a:r>
+            <a:r>
+              <a:rPr sz="1600" b="1" i="0">
+                <a:solidFill>
+                  <a:srgbClr val="2B2B2B"/>
+                </a:solidFill>
+                <a:latin typeface="Calibri"/>
+              </a:rPr>
+              <a:t>5.</a:t>
+            </a:r>
+            <a:r>
+              <a:rPr sz="1600" b="0" i="0">
+                <a:solidFill>
+                  <a:srgbClr val="2B2B2B"/>
+                </a:solidFill>
+                <a:latin typeface="Calibri"/>
+              </a:rPr>
+              <a:t> Verifique el estado: </a:t>
+            </a:r>
+            <a:r>
+              <a:rPr sz="1600" b="1" i="0">
+                <a:solidFill>
+                  <a:srgbClr val="2B2B2B"/>
+                </a:solidFill>
+                <a:latin typeface="Calibri"/>
+              </a:rPr>
+              <a:t>subido no es lo mismo que entregado</a:t>
+            </a:r>
+            <a:r>
+              <a:rPr sz="1600" b="0" i="0">
+                <a:solidFill>
+                  <a:srgbClr val="2B2B2B"/>
+                </a:solidFill>
+                <a:latin typeface="Calibri"/>
+              </a:rPr>
+              <a:t>. Si el campus lo permite, guarde la captura del envío.</a:t>
+            </a:r>
+          </a:p>
+          <a:p>
+            <a:pPr>
+              <a:spcAft>
+                <a:spcPts val="1000"/>
+              </a:spcAft>
+            </a:pPr>
+            <a:r>
+              <a:rPr sz="1600" b="0" i="0">
+                <a:solidFill>
+                  <a:srgbClr val="2B2B2B"/>
+                </a:solidFill>
+                <a:latin typeface="Calibri"/>
+              </a:rPr>
+              <a:t>–   </a:t>
+            </a:r>
+            <a:r>
+              <a:rPr sz="1600" b="1" i="0">
+                <a:solidFill>
+                  <a:srgbClr val="2B2B2B"/>
+                </a:solidFill>
+                <a:latin typeface="Calibri"/>
+              </a:rPr>
+              <a:t>Si entrega tarde:</a:t>
+            </a:r>
+            <a:r>
+              <a:rPr sz="1600" b="0" i="0">
+                <a:solidFill>
+                  <a:srgbClr val="2B2B2B"/>
+                </a:solidFill>
+                <a:latin typeface="Calibri"/>
+              </a:rPr>
+              <a:t> avise al Docente </a:t>
+            </a:r>
+            <a:r>
+              <a:rPr sz="1600" b="1" i="0">
+                <a:solidFill>
+                  <a:srgbClr val="2B2B2B"/>
+                </a:solidFill>
+                <a:latin typeface="Calibri"/>
+              </a:rPr>
+              <a:t>antes</a:t>
+            </a:r>
+            <a:r>
+              <a:rPr sz="1600" b="0" i="0">
+                <a:solidFill>
+                  <a:srgbClr val="2B2B2B"/>
+                </a:solidFill>
+                <a:latin typeface="Calibri"/>
+              </a:rPr>
+              <a:t> del cierre, no después. Se recibe, pero se califica sobre lo que haya dentro del plazo.</a:t>
+            </a:r>
+          </a:p>
+          <a:p>
+            <a:pPr>
+              <a:spcAft>
+                <a:spcPts val="1000"/>
+              </a:spcAft>
+            </a:pPr>
+            <a:r>
+              <a:rPr sz="1600" b="0" i="0">
+                <a:solidFill>
+                  <a:srgbClr val="2B2B2B"/>
+                </a:solidFill>
+                <a:latin typeface="Calibri"/>
+              </a:rPr>
+              <a:t>–   </a:t>
+            </a:r>
+            <a:r>
+              <a:rPr sz="1600" b="1" i="0">
+                <a:solidFill>
+                  <a:srgbClr val="2B2B2B"/>
+                </a:solidFill>
+                <a:latin typeface="Calibri"/>
+              </a:rPr>
+              <a:t>Lo que no está en CDigital, no está entregado.</a:t>
+            </a:r>
+            <a:r>
+              <a:rPr sz="1600" b="0" i="0">
+                <a:solidFill>
+                  <a:srgbClr val="2B2B2B"/>
+                </a:solidFill>
+                <a:latin typeface="Calibri"/>
+              </a:rPr>
+              <a:t> No se reciben trabajos por WhatsApp ni por correo personal.</a:t>
+            </a:r>
+          </a:p>
+        </p:txBody>
+      </p:sp>
+      <p:sp>
+        <p:nvSpPr>
+          <p:cNvPr id="5" name="TextBox 4"/>
+          <p:cNvSpPr txBox="1"/>
+          <p:nvPr/>
+        </p:nvSpPr>
+        <p:spPr>
+          <a:xfrm>
+            <a:off x="2194560" y="6446520"/>
+            <a:ext cx="5943600" cy="274320"/>
+          </a:xfrm>
+          <a:prstGeom prst="rect">
+            <a:avLst/>
+          </a:prstGeom>
+          <a:noFill/>
+        </p:spPr>
+        <p:txBody>
+          <a:bodyPr wrap="square" anchor="t" lIns="0" rIns="0" tIns="0" bIns="0">
+            <a:spAutoFit/>
+          </a:bodyPr>
+          <a:lstStyle/>
+          <a:p>
+            <a:pPr algn="l"/>
+            <a:r>
+              <a:rPr sz="1000" b="1" i="0">
+                <a:solidFill>
+                  <a:srgbClr val="8F989D"/>
+                </a:solidFill>
+                <a:latin typeface="Calibri"/>
+              </a:rPr>
+              <a:t>Inicio 5:10 pm</a:t>
+            </a:r>
+          </a:p>
+        </p:txBody>
+      </p:sp>
+      <p:sp>
+        <p:nvSpPr>
+          <p:cNvPr id="6" name="TextBox 5"/>
+          <p:cNvSpPr txBox="1"/>
+          <p:nvPr/>
+        </p:nvSpPr>
+        <p:spPr>
+          <a:xfrm>
+            <a:off x="11094415" y="6446520"/>
+            <a:ext cx="548640" cy="274320"/>
+          </a:xfrm>
+          <a:prstGeom prst="rect">
+            <a:avLst/>
+          </a:prstGeom>
+          <a:noFill/>
+        </p:spPr>
+        <p:txBody>
+          <a:bodyPr wrap="square" anchor="t" lIns="0" rIns="0" tIns="0" bIns="0">
+            <a:spAutoFit/>
+          </a:bodyPr>
+          <a:lstStyle/>
+          <a:p>
+            <a:pPr algn="r"/>
+            <a:r>
+              <a:rPr sz="1000" b="1" i="0">
+                <a:solidFill>
+                  <a:srgbClr val="8F989D"/>
+                </a:solidFill>
+                <a:latin typeface="Calibri"/>
+              </a:rPr>
+              <a:t>11</a:t>
+            </a:r>
+          </a:p>
+        </p:txBody>
+      </p:sp>
+      <p:sp>
+        <p:nvSpPr>
+          <p:cNvPr id="7" name="TextBox 6"/>
+          <p:cNvSpPr txBox="1"/>
+          <p:nvPr/>
+        </p:nvSpPr>
+        <p:spPr>
+          <a:xfrm>
+            <a:off x="640080" y="5943600"/>
+            <a:ext cx="9997135" cy="457200"/>
+          </a:xfrm>
+          <a:prstGeom prst="rect">
+            <a:avLst/>
+          </a:prstGeom>
+          <a:noFill/>
+        </p:spPr>
+        <p:txBody>
+          <a:bodyPr wrap="square" anchor="t" lIns="0" rIns="0" tIns="0" bIns="0">
+            <a:spAutoFit/>
+          </a:bodyPr>
+          <a:lstStyle/>
+          <a:p>
+            <a:r>
+              <a:rPr sz="1200" b="0" i="1">
+                <a:solidFill>
+                  <a:srgbClr val="2B2B2B"/>
+                </a:solidFill>
+                <a:latin typeface="Calibri"/>
+              </a:rPr>
+              <a:t>Un solo archivo por entrega, con su apellido. Nada de `final_final_v3.docx`.</a:t>
+            </a:r>
+          </a:p>
+        </p:txBody>
+      </p:sp>
+    </p:spTree>
+  </p:cSld>
+  <p:clrMapOvr>
+    <a:masterClrMapping/>
+  </p:clrMapOvr>
+</p:sld>
+</file>
+
+<file path=ppt/slides/slide12.xml><?xml version="1.0" encoding="utf-8"?>
+<p:sld xmlns:a="http://schemas.openxmlformats.org/drawingml/2006/main" xmlns:p="http://schemas.openxmlformats.org/presentationml/2006/main" xmlns:r="http://schemas.openxmlformats.org/officeDocument/2006/relationships">
+  <p:cSld>
+    <p:bg>
+      <p:bgPr>
+        <a:solidFill>
+          <a:srgbClr val="FFFFFF"/>
+        </a:solidFill>
+        <a:effectLst/>
+      </p:bgPr>
+    </p:bg>
+    <p:spTree>
+      <p:nvGrpSpPr>
+        <p:cNvPr id="1" name=""/>
+        <p:cNvGrpSpPr/>
+        <p:nvPr/>
+      </p:nvGrpSpPr>
+      <p:grpSpPr/>
+      <p:sp>
+        <p:nvSpPr>
+          <p:cNvPr id="2" name="Rectangle 1"/>
+          <p:cNvSpPr/>
+          <p:nvPr/>
+        </p:nvSpPr>
+        <p:spPr>
+          <a:xfrm>
+            <a:off x="0" y="0"/>
+            <a:ext cx="12191695" cy="1188720"/>
+          </a:xfrm>
+          <a:prstGeom prst="rect">
+            <a:avLst/>
+          </a:prstGeom>
+          <a:solidFill>
+            <a:srgbClr val="0C2340"/>
+          </a:solidFill>
+          <a:ln>
+            <a:noFill/>
+          </a:ln>
+          <a:effectLst/>
+        </p:spPr>
+        <p:style>
+          <a:lnRef idx="1">
+            <a:schemeClr val="accent1"/>
+          </a:lnRef>
+          <a:fillRef idx="3">
+            <a:schemeClr val="accent1"/>
+          </a:fillRef>
+          <a:effectRef idx="2">
+            <a:schemeClr val="accent1"/>
+          </a:effectRef>
+          <a:fontRef idx="minor">
+            <a:schemeClr val="lt1"/>
+          </a:fontRef>
+        </p:style>
+        <p:txBody>
+          <a:bodyPr rtlCol="0" anchor="ctr"/>
+          <a:lstStyle/>
+          <a:p>
+            <a:pPr algn="ctr"/>
+          </a:p>
+        </p:txBody>
+      </p:sp>
+      <p:sp>
+        <p:nvSpPr>
+          <p:cNvPr id="3" name="TextBox 2"/>
+          <p:cNvSpPr txBox="1"/>
+          <p:nvPr/>
+        </p:nvSpPr>
+        <p:spPr>
+          <a:xfrm>
+            <a:off x="640080" y="0"/>
+            <a:ext cx="9082735" cy="1188720"/>
+          </a:xfrm>
+          <a:prstGeom prst="rect">
+            <a:avLst/>
+          </a:prstGeom>
+          <a:noFill/>
+        </p:spPr>
+        <p:txBody>
+          <a:bodyPr wrap="square" anchor="ctr" lIns="0" rIns="0" tIns="0" bIns="0">
+            <a:spAutoFit/>
+          </a:bodyPr>
+          <a:lstStyle/>
+          <a:p>
+            <a:pPr algn="ctr"/>
+            <a:r>
+              <a:rPr sz="2600" b="1" i="0">
+                <a:solidFill>
+                  <a:srgbClr val="FFFFFF"/>
+                </a:solidFill>
+                <a:latin typeface="Calibri"/>
+              </a:rPr>
+              <a:t>Integridad académica: citar es parte del trabajo</a:t>
+            </a:r>
+          </a:p>
+        </p:txBody>
+      </p:sp>
+      <p:sp>
+        <p:nvSpPr>
+          <p:cNvPr id="4" name="TextBox 3"/>
+          <p:cNvSpPr txBox="1"/>
+          <p:nvPr/>
+        </p:nvSpPr>
+        <p:spPr>
+          <a:xfrm>
+            <a:off x="640080" y="1691639"/>
+            <a:ext cx="10911535" cy="4617720"/>
+          </a:xfrm>
+          <a:prstGeom prst="rect">
+            <a:avLst/>
+          </a:prstGeom>
+          <a:noFill/>
+        </p:spPr>
+        <p:txBody>
+          <a:bodyPr wrap="square" anchor="t" lIns="0" rIns="0" tIns="0" bIns="0">
+            <a:spAutoFit/>
+          </a:bodyPr>
+          <a:lstStyle/>
+          <a:p>
+            <a:pPr>
+              <a:spcAft>
+                <a:spcPts val="1000"/>
+              </a:spcAft>
+            </a:pPr>
+            <a:r>
+              <a:rPr sz="1600" b="0" i="0">
+                <a:solidFill>
+                  <a:srgbClr val="2B2B2B"/>
+                </a:solidFill>
+                <a:latin typeface="Calibri"/>
+              </a:rPr>
+              <a:t>–   Todo lo que no es suyo se </a:t>
+            </a:r>
+            <a:r>
+              <a:rPr sz="1600" b="1" i="0">
+                <a:solidFill>
+                  <a:srgbClr val="2B2B2B"/>
+                </a:solidFill>
+                <a:latin typeface="Calibri"/>
+              </a:rPr>
+              <a:t>cita en APA 7</a:t>
+            </a:r>
+            <a:r>
+              <a:rPr sz="1600" b="0" i="0">
+                <a:solidFill>
+                  <a:srgbClr val="2B2B2B"/>
+                </a:solidFill>
+                <a:latin typeface="Calibri"/>
+              </a:rPr>
+              <a:t>: ideas, datos, tablas, figuras y código.</a:t>
+            </a:r>
+          </a:p>
+          <a:p>
+            <a:pPr>
+              <a:spcAft>
+                <a:spcPts val="1000"/>
+              </a:spcAft>
+            </a:pPr>
+            <a:r>
+              <a:rPr sz="1600" b="0" i="0">
+                <a:solidFill>
+                  <a:srgbClr val="2B2B2B"/>
+                </a:solidFill>
+                <a:latin typeface="Calibri"/>
+              </a:rPr>
+              <a:t>–   </a:t>
+            </a:r>
+            <a:r>
+              <a:rPr sz="1600" b="1" i="0">
+                <a:solidFill>
+                  <a:srgbClr val="2B2B2B"/>
+                </a:solidFill>
+                <a:latin typeface="Calibri"/>
+              </a:rPr>
+              <a:t>Parafrasear</a:t>
+            </a:r>
+            <a:r>
+              <a:rPr sz="1600" b="0" i="0">
+                <a:solidFill>
+                  <a:srgbClr val="2B2B2B"/>
+                </a:solidFill>
+                <a:latin typeface="Calibri"/>
+              </a:rPr>
+              <a:t> es reescribir con sus palabras </a:t>
+            </a:r>
+            <a:r>
+              <a:rPr sz="1600" b="1" i="0">
+                <a:solidFill>
+                  <a:srgbClr val="2B2B2B"/>
+                </a:solidFill>
+                <a:latin typeface="Calibri"/>
+              </a:rPr>
+              <a:t>y citar igual</a:t>
+            </a:r>
+            <a:r>
+              <a:rPr sz="1600" b="0" i="0">
+                <a:solidFill>
+                  <a:srgbClr val="2B2B2B"/>
+                </a:solidFill>
+                <a:latin typeface="Calibri"/>
+              </a:rPr>
+              <a:t>. Cambiar dos palabras no es parafrasear.</a:t>
+            </a:r>
+          </a:p>
+          <a:p>
+            <a:pPr>
+              <a:spcAft>
+                <a:spcPts val="1000"/>
+              </a:spcAft>
+            </a:pPr>
+            <a:r>
+              <a:rPr sz="1600" b="0" i="0">
+                <a:solidFill>
+                  <a:srgbClr val="2B2B2B"/>
+                </a:solidFill>
+                <a:latin typeface="Calibri"/>
+              </a:rPr>
+              <a:t>–   Cuenta como </a:t>
+            </a:r>
+            <a:r>
+              <a:rPr sz="1600" b="1" i="0">
+                <a:solidFill>
+                  <a:srgbClr val="2B2B2B"/>
+                </a:solidFill>
+                <a:latin typeface="Calibri"/>
+              </a:rPr>
+              <a:t>plagio</a:t>
+            </a:r>
+            <a:r>
+              <a:rPr sz="1600" b="0" i="0">
+                <a:solidFill>
+                  <a:srgbClr val="2B2B2B"/>
+                </a:solidFill>
+                <a:latin typeface="Calibri"/>
+              </a:rPr>
+              <a:t>:</a:t>
+            </a:r>
+          </a:p>
+          <a:p>
+            <a:pPr lvl="1">
+              <a:spcAft>
+                <a:spcPts val="600"/>
+              </a:spcAft>
+            </a:pPr>
+            <a:r>
+              <a:rPr sz="1500" b="0" i="0">
+                <a:solidFill>
+                  <a:srgbClr val="2B2B2B"/>
+                </a:solidFill>
+                <a:latin typeface="Calibri"/>
+              </a:rPr>
+              <a:t>●   Copiar y pegar sin comillas ni referencia.</a:t>
+            </a:r>
+          </a:p>
+          <a:p>
+            <a:pPr lvl="1">
+              <a:spcAft>
+                <a:spcPts val="600"/>
+              </a:spcAft>
+            </a:pPr>
+            <a:r>
+              <a:rPr sz="1500" b="0" i="0">
+                <a:solidFill>
+                  <a:srgbClr val="2B2B2B"/>
+                </a:solidFill>
+                <a:latin typeface="Calibri"/>
+              </a:rPr>
+              <a:t>●   Traducir un texto ajeno y presentarlo como propio.</a:t>
+            </a:r>
+          </a:p>
+          <a:p>
+            <a:pPr lvl="1">
+              <a:spcAft>
+                <a:spcPts val="600"/>
+              </a:spcAft>
+            </a:pPr>
+            <a:r>
+              <a:rPr sz="1500" b="0" i="0">
+                <a:solidFill>
+                  <a:srgbClr val="2B2B2B"/>
+                </a:solidFill>
+                <a:latin typeface="Calibri"/>
+              </a:rPr>
+              <a:t>●   Entregar un trabajo de otro estudiante, o uno suyo de otro semestre, como si fuera nuevo.</a:t>
+            </a:r>
+          </a:p>
+          <a:p>
+            <a:pPr>
+              <a:spcAft>
+                <a:spcPts val="1000"/>
+              </a:spcAft>
+            </a:pPr>
+            <a:r>
+              <a:rPr sz="1600" b="0" i="0">
+                <a:solidFill>
+                  <a:srgbClr val="2B2B2B"/>
+                </a:solidFill>
+                <a:latin typeface="Calibri"/>
+              </a:rPr>
+              <a:t>–   Si se detecta plagio se activa el </a:t>
+            </a:r>
+            <a:r>
+              <a:rPr sz="1600" b="1" i="0">
+                <a:solidFill>
+                  <a:srgbClr val="2B2B2B"/>
+                </a:solidFill>
+                <a:latin typeface="Calibri"/>
+              </a:rPr>
+              <a:t>debido proceso institucional</a:t>
+            </a:r>
+            <a:r>
+              <a:rPr sz="1600" b="0" i="0">
+                <a:solidFill>
+                  <a:srgbClr val="2B2B2B"/>
+                </a:solidFill>
+                <a:latin typeface="Calibri"/>
+              </a:rPr>
+              <a:t>: no es algo que el Docente resuelva en privado.</a:t>
+            </a:r>
+          </a:p>
+          <a:p>
+            <a:pPr>
+              <a:spcAft>
+                <a:spcPts val="1000"/>
+              </a:spcAft>
+            </a:pPr>
+            <a:r>
+              <a:rPr sz="1600" b="0" i="0">
+                <a:solidFill>
+                  <a:srgbClr val="2B2B2B"/>
+                </a:solidFill>
+                <a:latin typeface="Calibri"/>
+              </a:rPr>
+              <a:t>–   Cómo evitarlo sin sufrir: </a:t>
+            </a:r>
+            <a:r>
+              <a:rPr sz="1600" b="1" i="0">
+                <a:solidFill>
+                  <a:srgbClr val="2B2B2B"/>
+                </a:solidFill>
+                <a:latin typeface="Calibri"/>
+              </a:rPr>
+              <a:t>anote la fuente en el instante</a:t>
+            </a:r>
+            <a:r>
+              <a:rPr sz="1600" b="0" i="0">
+                <a:solidFill>
+                  <a:srgbClr val="2B2B2B"/>
+                </a:solidFill>
+                <a:latin typeface="Calibri"/>
+              </a:rPr>
+              <a:t> en que pega algo en su documento. Recuperarla después cuesta el triple.</a:t>
+            </a:r>
+          </a:p>
+        </p:txBody>
+      </p:sp>
+      <p:sp>
+        <p:nvSpPr>
+          <p:cNvPr id="5" name="TextBox 4"/>
+          <p:cNvSpPr txBox="1"/>
+          <p:nvPr/>
+        </p:nvSpPr>
+        <p:spPr>
+          <a:xfrm>
+            <a:off x="2194560" y="6446520"/>
+            <a:ext cx="5943600" cy="274320"/>
+          </a:xfrm>
+          <a:prstGeom prst="rect">
+            <a:avLst/>
+          </a:prstGeom>
+          <a:noFill/>
+        </p:spPr>
+        <p:txBody>
+          <a:bodyPr wrap="square" anchor="t" lIns="0" rIns="0" tIns="0" bIns="0">
+            <a:spAutoFit/>
+          </a:bodyPr>
+          <a:lstStyle/>
+          <a:p>
+            <a:pPr algn="l"/>
+            <a:r>
+              <a:rPr sz="1000" b="1" i="0">
+                <a:solidFill>
+                  <a:srgbClr val="8F989D"/>
+                </a:solidFill>
+                <a:latin typeface="Calibri"/>
+              </a:rPr>
+              <a:t>Inicio 5:10 pm</a:t>
+            </a:r>
+          </a:p>
+        </p:txBody>
+      </p:sp>
+      <p:sp>
+        <p:nvSpPr>
+          <p:cNvPr id="6" name="TextBox 5"/>
+          <p:cNvSpPr txBox="1"/>
+          <p:nvPr/>
+        </p:nvSpPr>
+        <p:spPr>
+          <a:xfrm>
+            <a:off x="11094415" y="6446520"/>
+            <a:ext cx="548640" cy="274320"/>
+          </a:xfrm>
+          <a:prstGeom prst="rect">
+            <a:avLst/>
+          </a:prstGeom>
+          <a:noFill/>
+        </p:spPr>
+        <p:txBody>
+          <a:bodyPr wrap="square" anchor="t" lIns="0" rIns="0" tIns="0" bIns="0">
+            <a:spAutoFit/>
+          </a:bodyPr>
+          <a:lstStyle/>
+          <a:p>
+            <a:pPr algn="r"/>
+            <a:r>
+              <a:rPr sz="1000" b="1" i="0">
+                <a:solidFill>
+                  <a:srgbClr val="8F989D"/>
+                </a:solidFill>
+                <a:latin typeface="Calibri"/>
+              </a:rPr>
+              <a:t>12</a:t>
+            </a:r>
+          </a:p>
+        </p:txBody>
+      </p:sp>
+      <p:sp>
+        <p:nvSpPr>
+          <p:cNvPr id="7" name="TextBox 6"/>
+          <p:cNvSpPr txBox="1"/>
+          <p:nvPr/>
+        </p:nvSpPr>
+        <p:spPr>
+          <a:xfrm>
+            <a:off x="640080" y="5943600"/>
+            <a:ext cx="9997135" cy="457200"/>
+          </a:xfrm>
+          <a:prstGeom prst="rect">
+            <a:avLst/>
+          </a:prstGeom>
+          <a:noFill/>
+        </p:spPr>
+        <p:txBody>
+          <a:bodyPr wrap="square" anchor="t" lIns="0" rIns="0" tIns="0" bIns="0">
+            <a:spAutoFit/>
+          </a:bodyPr>
+          <a:lstStyle/>
+          <a:p>
+            <a:r>
+              <a:rPr sz="1200" b="0" i="1">
+                <a:solidFill>
+                  <a:srgbClr val="2B2B2B"/>
+                </a:solidFill>
+                <a:latin typeface="Calibri"/>
+              </a:rPr>
+              <a:t>Herramienta del curso para citar: </a:t>
+            </a:r>
+            <a:r>
+              <a:rPr sz="1200" b="1" i="1">
+                <a:solidFill>
+                  <a:srgbClr val="2B2B2B"/>
+                </a:solidFill>
+                <a:latin typeface="Calibri"/>
+              </a:rPr>
+              <a:t>ZoteroBib (zbib.org)</a:t>
+            </a:r>
+            <a:r>
+              <a:rPr sz="1200" b="0" i="1">
+                <a:solidFill>
+                  <a:srgbClr val="2B2B2B"/>
+                </a:solidFill>
+                <a:latin typeface="Calibri"/>
+              </a:rPr>
+              <a:t> — gratis, en el navegador, sin instalar nada.</a:t>
+            </a:r>
+          </a:p>
+        </p:txBody>
+      </p:sp>
+    </p:spTree>
+  </p:cSld>
+  <p:clrMapOvr>
+    <a:masterClrMapping/>
+  </p:clrMapOvr>
+</p:sld>
+</file>
+
+<file path=ppt/slides/slide13.xml><?xml version="1.0" encoding="utf-8"?>
+<p:sld xmlns:a="http://schemas.openxmlformats.org/drawingml/2006/main" xmlns:p="http://schemas.openxmlformats.org/presentationml/2006/main" xmlns:r="http://schemas.openxmlformats.org/officeDocument/2006/relationships">
+  <p:cSld>
+    <p:bg>
+      <p:bgPr>
+        <a:solidFill>
+          <a:srgbClr val="FFFFFF"/>
+        </a:solidFill>
+        <a:effectLst/>
+      </p:bgPr>
+    </p:bg>
+    <p:spTree>
+      <p:nvGrpSpPr>
+        <p:cNvPr id="1" name=""/>
+        <p:cNvGrpSpPr/>
+        <p:nvPr/>
+      </p:nvGrpSpPr>
+      <p:grpSpPr/>
+      <p:sp>
+        <p:nvSpPr>
+          <p:cNvPr id="2" name="Rectangle 1"/>
+          <p:cNvSpPr/>
+          <p:nvPr/>
+        </p:nvSpPr>
+        <p:spPr>
+          <a:xfrm>
+            <a:off x="0" y="0"/>
+            <a:ext cx="12191695" cy="1188720"/>
+          </a:xfrm>
+          <a:prstGeom prst="rect">
+            <a:avLst/>
+          </a:prstGeom>
+          <a:solidFill>
+            <a:srgbClr val="0C2340"/>
+          </a:solidFill>
+          <a:ln>
+            <a:noFill/>
+          </a:ln>
+          <a:effectLst/>
+        </p:spPr>
+        <p:style>
+          <a:lnRef idx="1">
+            <a:schemeClr val="accent1"/>
+          </a:lnRef>
+          <a:fillRef idx="3">
+            <a:schemeClr val="accent1"/>
+          </a:fillRef>
+          <a:effectRef idx="2">
+            <a:schemeClr val="accent1"/>
+          </a:effectRef>
+          <a:fontRef idx="minor">
+            <a:schemeClr val="lt1"/>
+          </a:fontRef>
+        </p:style>
+        <p:txBody>
+          <a:bodyPr rtlCol="0" anchor="ctr"/>
+          <a:lstStyle/>
+          <a:p>
+            <a:pPr algn="ctr"/>
+          </a:p>
+        </p:txBody>
+      </p:sp>
+      <p:sp>
+        <p:nvSpPr>
+          <p:cNvPr id="3" name="TextBox 2"/>
+          <p:cNvSpPr txBox="1"/>
+          <p:nvPr/>
+        </p:nvSpPr>
+        <p:spPr>
+          <a:xfrm>
+            <a:off x="640080" y="0"/>
+            <a:ext cx="9082735" cy="1188720"/>
+          </a:xfrm>
+          <a:prstGeom prst="rect">
+            <a:avLst/>
+          </a:prstGeom>
+          <a:noFill/>
+        </p:spPr>
+        <p:txBody>
+          <a:bodyPr wrap="square" anchor="ctr" lIns="0" rIns="0" tIns="0" bIns="0">
+            <a:spAutoFit/>
+          </a:bodyPr>
+          <a:lstStyle/>
+          <a:p>
+            <a:pPr algn="ctr"/>
+            <a:r>
+              <a:rPr sz="2600" b="1" i="0">
+                <a:solidFill>
+                  <a:srgbClr val="FFFFFF"/>
+                </a:solidFill>
+                <a:latin typeface="Calibri"/>
+              </a:rPr>
+              <a:t>Inteligencia artificial generativa: reglas de la casa</a:t>
+            </a:r>
+          </a:p>
+        </p:txBody>
+      </p:sp>
+      <p:sp>
+        <p:nvSpPr>
+          <p:cNvPr id="4" name="Rounded Rectangle 3"/>
+          <p:cNvSpPr/>
+          <p:nvPr/>
+        </p:nvSpPr>
+        <p:spPr>
+          <a:xfrm>
+            <a:off x="640080" y="1737360"/>
+            <a:ext cx="10911535" cy="969264"/>
+          </a:xfrm>
+          <a:prstGeom prst="roundRect">
+            <a:avLst/>
+          </a:prstGeom>
+          <a:solidFill>
+            <a:srgbClr val="E8F5EC"/>
+          </a:solidFill>
+          <a:ln>
+            <a:noFill/>
+          </a:ln>
+          <a:effectLst/>
+        </p:spPr>
+        <p:style>
+          <a:lnRef idx="1">
+            <a:schemeClr val="accent1"/>
+          </a:lnRef>
+          <a:fillRef idx="3">
+            <a:schemeClr val="accent1"/>
+          </a:fillRef>
+          <a:effectRef idx="2">
+            <a:schemeClr val="accent1"/>
+          </a:effectRef>
+          <a:fontRef idx="minor">
+            <a:schemeClr val="lt1"/>
+          </a:fontRef>
+        </p:style>
+        <p:txBody>
+          <a:bodyPr rtlCol="0" anchor="ctr"/>
+          <a:lstStyle/>
+          <a:p>
+            <a:pPr algn="ctr"/>
+          </a:p>
+        </p:txBody>
+      </p:sp>
+      <p:sp>
+        <p:nvSpPr>
+          <p:cNvPr id="5" name="TextBox 4"/>
+          <p:cNvSpPr txBox="1"/>
+          <p:nvPr/>
+        </p:nvSpPr>
+        <p:spPr>
+          <a:xfrm>
+            <a:off x="868680" y="1847088"/>
+            <a:ext cx="10454335" cy="749808"/>
+          </a:xfrm>
+          <a:prstGeom prst="rect">
+            <a:avLst/>
+          </a:prstGeom>
+          <a:noFill/>
+        </p:spPr>
+        <p:txBody>
+          <a:bodyPr wrap="square" anchor="t" lIns="0" rIns="0" tIns="0" bIns="0">
+            <a:spAutoFit/>
+          </a:bodyPr>
+          <a:lstStyle/>
+          <a:p>
+            <a:r>
+              <a:rPr sz="1300" b="1" i="0">
+                <a:solidFill>
+                  <a:srgbClr val="0C2340"/>
+                </a:solidFill>
+                <a:latin typeface="Calibri"/>
+              </a:rPr>
+              <a:t>ℹ️ Nota institucional</a:t>
+            </a:r>
+          </a:p>
+          <a:p>
+            <a:pPr>
+              <a:spcBef>
+                <a:spcPts val="400"/>
+              </a:spcBef>
+            </a:pPr>
+            <a:r>
+              <a:rPr sz="1300" b="1" i="0">
+                <a:solidFill>
+                  <a:srgbClr val="2B2B2B"/>
+                </a:solidFill>
+                <a:latin typeface="Calibri"/>
+              </a:rPr>
+              <a:t>Sí se puede usar</a:t>
+            </a:r>
+            <a:r>
+              <a:rPr sz="1300" b="0" i="0">
+                <a:solidFill>
+                  <a:srgbClr val="2B2B2B"/>
+                </a:solidFill>
+                <a:latin typeface="Calibri"/>
+              </a:rPr>
+              <a:t> para entender un concepto, ordenar ideas o mejorar la redacción de un párrafo que ya escribió usted.</a:t>
+            </a:r>
+          </a:p>
+        </p:txBody>
+      </p:sp>
+      <p:sp>
+        <p:nvSpPr>
+          <p:cNvPr id="6" name="Rounded Rectangle 5"/>
+          <p:cNvSpPr/>
+          <p:nvPr/>
+        </p:nvSpPr>
+        <p:spPr>
+          <a:xfrm>
+            <a:off x="640080" y="2935224"/>
+            <a:ext cx="10911535" cy="969264"/>
+          </a:xfrm>
+          <a:prstGeom prst="roundRect">
+            <a:avLst/>
+          </a:prstGeom>
+          <a:solidFill>
+            <a:srgbClr val="FDECD8"/>
+          </a:solidFill>
+          <a:ln>
+            <a:noFill/>
+          </a:ln>
+          <a:effectLst/>
+        </p:spPr>
+        <p:style>
+          <a:lnRef idx="1">
+            <a:schemeClr val="accent1"/>
+          </a:lnRef>
+          <a:fillRef idx="3">
+            <a:schemeClr val="accent1"/>
+          </a:fillRef>
+          <a:effectRef idx="2">
+            <a:schemeClr val="accent1"/>
+          </a:effectRef>
+          <a:fontRef idx="minor">
+            <a:schemeClr val="lt1"/>
+          </a:fontRef>
+        </p:style>
+        <p:txBody>
+          <a:bodyPr rtlCol="0" anchor="ctr"/>
+          <a:lstStyle/>
+          <a:p>
+            <a:pPr algn="ctr"/>
+          </a:p>
+        </p:txBody>
+      </p:sp>
+      <p:sp>
+        <p:nvSpPr>
+          <p:cNvPr id="7" name="TextBox 6"/>
+          <p:cNvSpPr txBox="1"/>
+          <p:nvPr/>
+        </p:nvSpPr>
+        <p:spPr>
+          <a:xfrm>
+            <a:off x="868680" y="3044952"/>
+            <a:ext cx="10454335" cy="749808"/>
+          </a:xfrm>
+          <a:prstGeom prst="rect">
+            <a:avLst/>
+          </a:prstGeom>
+          <a:noFill/>
+        </p:spPr>
+        <p:txBody>
+          <a:bodyPr wrap="square" anchor="t" lIns="0" rIns="0" tIns="0" bIns="0">
+            <a:spAutoFit/>
+          </a:bodyPr>
+          <a:lstStyle/>
+          <a:p>
+            <a:r>
+              <a:rPr sz="1300" b="1" i="0">
+                <a:solidFill>
+                  <a:srgbClr val="0C2340"/>
+                </a:solidFill>
+                <a:latin typeface="Calibri"/>
+              </a:rPr>
+              <a:t>💡 Aclaración</a:t>
+            </a:r>
+          </a:p>
+          <a:p>
+            <a:pPr>
+              <a:spcBef>
+                <a:spcPts val="400"/>
+              </a:spcBef>
+            </a:pPr>
+            <a:r>
+              <a:rPr sz="1300" b="1" i="0">
+                <a:solidFill>
+                  <a:srgbClr val="2B2B2B"/>
+                </a:solidFill>
+                <a:latin typeface="Calibri"/>
+              </a:rPr>
+              <a:t>Se declara.</a:t>
+            </a:r>
+            <a:r>
+              <a:rPr sz="1300" b="0" i="0">
+                <a:solidFill>
+                  <a:srgbClr val="2B2B2B"/>
+                </a:solidFill>
+                <a:latin typeface="Calibri"/>
+              </a:rPr>
+              <a:t> Al final del documento, una línea: qué herramienta usó y para qué. Usarla no es falta; ocultarlo sí.</a:t>
+            </a:r>
+          </a:p>
+        </p:txBody>
+      </p:sp>
+      <p:sp>
+        <p:nvSpPr>
+          <p:cNvPr id="8" name="Rounded Rectangle 7"/>
+          <p:cNvSpPr/>
+          <p:nvPr/>
+        </p:nvSpPr>
+        <p:spPr>
+          <a:xfrm>
+            <a:off x="640080" y="4133087"/>
+            <a:ext cx="10911535" cy="1225296"/>
+          </a:xfrm>
+          <a:prstGeom prst="roundRect">
+            <a:avLst/>
+          </a:prstGeom>
+          <a:solidFill>
+            <a:srgbClr val="FBE4E4"/>
+          </a:solidFill>
+          <a:ln>
+            <a:noFill/>
+          </a:ln>
+          <a:effectLst/>
+        </p:spPr>
+        <p:style>
+          <a:lnRef idx="1">
+            <a:schemeClr val="accent1"/>
+          </a:lnRef>
+          <a:fillRef idx="3">
+            <a:schemeClr val="accent1"/>
+          </a:fillRef>
+          <a:effectRef idx="2">
+            <a:schemeClr val="accent1"/>
+          </a:effectRef>
+          <a:fontRef idx="minor">
+            <a:schemeClr val="lt1"/>
+          </a:fontRef>
+        </p:style>
+        <p:txBody>
+          <a:bodyPr rtlCol="0" anchor="ctr"/>
+          <a:lstStyle/>
+          <a:p>
+            <a:pPr algn="ctr"/>
+          </a:p>
+        </p:txBody>
+      </p:sp>
+      <p:sp>
+        <p:nvSpPr>
+          <p:cNvPr id="9" name="TextBox 8"/>
+          <p:cNvSpPr txBox="1"/>
+          <p:nvPr/>
+        </p:nvSpPr>
+        <p:spPr>
+          <a:xfrm>
+            <a:off x="868680" y="4242816"/>
+            <a:ext cx="10454335" cy="1005840"/>
+          </a:xfrm>
+          <a:prstGeom prst="rect">
+            <a:avLst/>
+          </a:prstGeom>
+          <a:noFill/>
+        </p:spPr>
+        <p:txBody>
+          <a:bodyPr wrap="square" anchor="t" lIns="0" rIns="0" tIns="0" bIns="0">
+            <a:spAutoFit/>
+          </a:bodyPr>
+          <a:lstStyle/>
+          <a:p>
+            <a:r>
+              <a:rPr sz="1300" b="1" i="0">
+                <a:solidFill>
+                  <a:srgbClr val="0C2340"/>
+                </a:solidFill>
+                <a:latin typeface="Calibri"/>
+              </a:rPr>
+              <a:t>⚠️ Importante</a:t>
+            </a:r>
+          </a:p>
+          <a:p>
+            <a:pPr>
+              <a:spcBef>
+                <a:spcPts val="400"/>
+              </a:spcBef>
+            </a:pPr>
+            <a:r>
+              <a:rPr sz="1300" b="1" i="0">
+                <a:solidFill>
+                  <a:srgbClr val="2B2B2B"/>
+                </a:solidFill>
+                <a:latin typeface="Calibri"/>
+              </a:rPr>
+              <a:t>Verifique cada fuente: estos modelos inventan citas, autores y DOIs.</a:t>
+            </a:r>
+            <a:r>
+              <a:rPr sz="1300" b="0" i="0">
+                <a:solidFill>
+                  <a:srgbClr val="2B2B2B"/>
+                </a:solidFill>
+                <a:latin typeface="Calibri"/>
+              </a:rPr>
+              <a:t> Si no abrió el artículo, no lo cite. Y si el Docente pregunta “¿por qué escribió esto?” y usted no puede explicarlo en voz alta, ese párrafo no le sirve.</a:t>
+            </a:r>
+          </a:p>
+        </p:txBody>
+      </p:sp>
+      <p:sp>
+        <p:nvSpPr>
+          <p:cNvPr id="10" name="TextBox 9"/>
+          <p:cNvSpPr txBox="1"/>
+          <p:nvPr/>
+        </p:nvSpPr>
+        <p:spPr>
+          <a:xfrm>
+            <a:off x="2194560" y="6446520"/>
+            <a:ext cx="5943600" cy="274320"/>
+          </a:xfrm>
+          <a:prstGeom prst="rect">
+            <a:avLst/>
+          </a:prstGeom>
+          <a:noFill/>
+        </p:spPr>
+        <p:txBody>
+          <a:bodyPr wrap="square" anchor="t" lIns="0" rIns="0" tIns="0" bIns="0">
+            <a:spAutoFit/>
+          </a:bodyPr>
+          <a:lstStyle/>
+          <a:p>
+            <a:pPr algn="l"/>
+            <a:r>
+              <a:rPr sz="1000" b="1" i="0">
+                <a:solidFill>
+                  <a:srgbClr val="8F989D"/>
+                </a:solidFill>
+                <a:latin typeface="Calibri"/>
+              </a:rPr>
+              <a:t>Inicio 5:10 pm</a:t>
+            </a:r>
+          </a:p>
+        </p:txBody>
+      </p:sp>
+      <p:sp>
+        <p:nvSpPr>
+          <p:cNvPr id="11" name="TextBox 10"/>
+          <p:cNvSpPr txBox="1"/>
+          <p:nvPr/>
+        </p:nvSpPr>
+        <p:spPr>
+          <a:xfrm>
+            <a:off x="11094415" y="6446520"/>
+            <a:ext cx="548640" cy="274320"/>
+          </a:xfrm>
+          <a:prstGeom prst="rect">
+            <a:avLst/>
+          </a:prstGeom>
+          <a:noFill/>
+        </p:spPr>
+        <p:txBody>
+          <a:bodyPr wrap="square" anchor="t" lIns="0" rIns="0" tIns="0" bIns="0">
+            <a:spAutoFit/>
+          </a:bodyPr>
+          <a:lstStyle/>
+          <a:p>
+            <a:pPr algn="r"/>
+            <a:r>
+              <a:rPr sz="1000" b="1" i="0">
+                <a:solidFill>
+                  <a:srgbClr val="8F989D"/>
+                </a:solidFill>
+                <a:latin typeface="Calibri"/>
+              </a:rPr>
+              <a:t>13</a:t>
+            </a:r>
+          </a:p>
+        </p:txBody>
+      </p:sp>
+    </p:spTree>
+  </p:cSld>
+  <p:clrMapOvr>
+    <a:masterClrMapping/>
+  </p:clrMapOvr>
+</p:sld>
+</file>
+
+<file path=ppt/slides/slide14.xml><?xml version="1.0" encoding="utf-8"?>
+<p:sld xmlns:a="http://schemas.openxmlformats.org/drawingml/2006/main" xmlns:p="http://schemas.openxmlformats.org/presentationml/2006/main" xmlns:r="http://schemas.openxmlformats.org/officeDocument/2006/relationships">
+  <p:cSld>
+    <p:bg>
+      <p:bgPr>
+        <a:solidFill>
+          <a:srgbClr val="FFFFFF"/>
+        </a:solidFill>
+        <a:effectLst/>
+      </p:bgPr>
+    </p:bg>
+    <p:spTree>
+      <p:nvGrpSpPr>
+        <p:cNvPr id="1" name=""/>
+        <p:cNvGrpSpPr/>
+        <p:nvPr/>
+      </p:nvGrpSpPr>
+      <p:grpSpPr/>
+      <p:sp>
+        <p:nvSpPr>
+          <p:cNvPr id="2" name="Rectangle 1"/>
+          <p:cNvSpPr/>
+          <p:nvPr/>
+        </p:nvSpPr>
+        <p:spPr>
+          <a:xfrm>
+            <a:off x="0" y="0"/>
+            <a:ext cx="12191695" cy="1188720"/>
+          </a:xfrm>
+          <a:prstGeom prst="rect">
+            <a:avLst/>
+          </a:prstGeom>
+          <a:solidFill>
+            <a:srgbClr val="0C2340"/>
+          </a:solidFill>
+          <a:ln>
+            <a:noFill/>
+          </a:ln>
+          <a:effectLst/>
+        </p:spPr>
+        <p:style>
+          <a:lnRef idx="1">
+            <a:schemeClr val="accent1"/>
+          </a:lnRef>
+          <a:fillRef idx="3">
+            <a:schemeClr val="accent1"/>
+          </a:fillRef>
+          <a:effectRef idx="2">
+            <a:schemeClr val="accent1"/>
+          </a:effectRef>
+          <a:fontRef idx="minor">
+            <a:schemeClr val="lt1"/>
+          </a:fontRef>
+        </p:style>
+        <p:txBody>
+          <a:bodyPr rtlCol="0" anchor="ctr"/>
+          <a:lstStyle/>
+          <a:p>
+            <a:pPr algn="ctr"/>
+          </a:p>
+        </p:txBody>
+      </p:sp>
+      <p:sp>
+        <p:nvSpPr>
+          <p:cNvPr id="3" name="TextBox 2"/>
+          <p:cNvSpPr txBox="1"/>
+          <p:nvPr/>
+        </p:nvSpPr>
+        <p:spPr>
+          <a:xfrm>
+            <a:off x="640080" y="0"/>
+            <a:ext cx="9082735" cy="1188720"/>
+          </a:xfrm>
+          <a:prstGeom prst="rect">
+            <a:avLst/>
+          </a:prstGeom>
+          <a:noFill/>
+        </p:spPr>
+        <p:txBody>
+          <a:bodyPr wrap="square" anchor="ctr" lIns="0" rIns="0" tIns="0" bIns="0">
+            <a:spAutoFit/>
+          </a:bodyPr>
+          <a:lstStyle/>
+          <a:p>
+            <a:pPr algn="ctr"/>
+            <a:r>
+              <a:rPr sz="2600" b="1" i="0">
+                <a:solidFill>
+                  <a:srgbClr val="FFFFFF"/>
+                </a:solidFill>
+                <a:latin typeface="Calibri"/>
+              </a:rPr>
+              <a:t>Herramientas del curso: todas gratis, todas en el navegador</a:t>
+            </a:r>
+          </a:p>
+        </p:txBody>
+      </p:sp>
+      <p:graphicFrame>
+        <p:nvGraphicFramePr>
+          <p:cNvPr id="4" name="Table 3"/>
+          <p:cNvGraphicFramePr>
+            <a:graphicFrameLocks noGrp="1"/>
+          </p:cNvGraphicFramePr>
+          <p:nvPr/>
+        </p:nvGraphicFramePr>
+        <p:xfrm>
+          <a:off x="640080" y="1691639"/>
+          <a:ext cx="10911533" cy="4526280"/>
+        </p:xfrm>
+        <a:graphic>
+          <a:graphicData uri="http://schemas.openxmlformats.org/drawingml/2006/table">
+            <a:tbl>
+              <a:tblPr>
+                <a:tableStyleId>{2D5ABB26-0587-4C30-8999-92F81FD0307C}</a:tableStyleId>
+              </a:tblPr>
+              <a:tblGrid>
+                <a:gridCol w="2384032"/>
+                <a:gridCol w="5409920"/>
+                <a:gridCol w="3117581"/>
+              </a:tblGrid>
+              <a:tr h="502920">
+                <a:tc>
+                  <a:txBody>
+                    <a:bodyPr/>
+                    <a:lstStyle/>
+                    <a:p>
+                      <a:pPr algn="l"/>
+                      <a:r>
+                        <a:rPr sz="1300" b="1" i="0">
+                          <a:solidFill>
+                            <a:srgbClr val="FFFFFF"/>
+                          </a:solidFill>
+                          <a:latin typeface="Calibri"/>
+                        </a:rPr>
+                        <a:t>Herramienta</a:t>
+                      </a:r>
+                    </a:p>
+                  </a:txBody>
+                  <a:tcPr anchor="ctr" marL="109728" marR="91440" marT="36576" marB="36576">
+                    <a:solidFill>
+                      <a:srgbClr val="0C2340"/>
+                    </a:solidFill>
+                  </a:tcPr>
+                </a:tc>
+                <a:tc>
+                  <a:txBody>
+                    <a:bodyPr/>
+                    <a:lstStyle/>
+                    <a:p>
+                      <a:pPr algn="l"/>
+                      <a:r>
+                        <a:rPr sz="1300" b="1" i="0">
+                          <a:solidFill>
+                            <a:srgbClr val="FFFFFF"/>
+                          </a:solidFill>
+                          <a:latin typeface="Calibri"/>
+                        </a:rPr>
+                        <a:t>Para qué la usamos</a:t>
+                      </a:r>
+                    </a:p>
+                  </a:txBody>
+                  <a:tcPr anchor="ctr" marL="109728" marR="91440" marT="36576" marB="36576">
+                    <a:solidFill>
+                      <a:srgbClr val="0C2340"/>
+                    </a:solidFill>
+                  </a:tcPr>
+                </a:tc>
+                <a:tc>
+                  <a:txBody>
+                    <a:bodyPr/>
+                    <a:lstStyle/>
+                    <a:p>
+                      <a:pPr algn="l"/>
+                      <a:r>
+                        <a:rPr sz="1300" b="1" i="0">
+                          <a:solidFill>
+                            <a:srgbClr val="FFFFFF"/>
+                          </a:solidFill>
+                          <a:latin typeface="Calibri"/>
+                        </a:rPr>
+                        <a:t>Cuándo aparece</a:t>
+                      </a:r>
+                    </a:p>
+                  </a:txBody>
+                  <a:tcPr anchor="ctr" marL="109728" marR="91440" marT="36576" marB="36576">
+                    <a:solidFill>
+                      <a:srgbClr val="0C2340"/>
+                    </a:solidFill>
+                  </a:tcPr>
+                </a:tc>
+              </a:tr>
+              <a:tr h="502920">
+                <a:tc>
+                  <a:txBody>
+                    <a:bodyPr/>
+                    <a:lstStyle/>
+                    <a:p>
+                      <a:pPr algn="l"/>
+                      <a:r>
+                        <a:rPr sz="1100" b="1" i="0">
+                          <a:solidFill>
+                            <a:srgbClr val="2B2B2B"/>
+                          </a:solidFill>
+                          <a:latin typeface="Calibri"/>
+                        </a:rPr>
+                        <a:t>CDigital</a:t>
+                      </a:r>
+                    </a:p>
+                  </a:txBody>
+                  <a:tcPr anchor="ctr" marL="109728" marR="91440" marT="36576" marB="36576">
+                    <a:solidFill>
+                      <a:srgbClr val="FFFFFF"/>
+                    </a:solidFill>
+                  </a:tcPr>
+                </a:tc>
+                <a:tc>
+                  <a:txBody>
+                    <a:bodyPr/>
+                    <a:lstStyle/>
+                    <a:p>
+                      <a:pPr algn="l"/>
+                      <a:r>
+                        <a:rPr sz="1100" b="0" i="0">
+                          <a:solidFill>
+                            <a:srgbClr val="2B2B2B"/>
+                          </a:solidFill>
+                          <a:latin typeface="Calibri"/>
+                        </a:rPr>
+                        <a:t>Entrega oficial, materiales, avisos y notas</a:t>
+                      </a:r>
+                    </a:p>
+                  </a:txBody>
+                  <a:tcPr anchor="ctr" marL="109728" marR="91440" marT="36576" marB="36576">
+                    <a:solidFill>
+                      <a:srgbClr val="FFFFFF"/>
+                    </a:solidFill>
+                  </a:tcPr>
+                </a:tc>
+                <a:tc>
+                  <a:txBody>
+                    <a:bodyPr/>
+                    <a:lstStyle/>
+                    <a:p>
+                      <a:pPr algn="l"/>
+                      <a:r>
+                        <a:rPr sz="1100" b="0" i="0">
+                          <a:solidFill>
+                            <a:srgbClr val="2B2B2B"/>
+                          </a:solidFill>
+                          <a:latin typeface="Calibri"/>
+                        </a:rPr>
+                        <a:t>Siempre</a:t>
+                      </a:r>
+                    </a:p>
+                  </a:txBody>
+                  <a:tcPr anchor="ctr" marL="109728" marR="91440" marT="36576" marB="36576">
+                    <a:solidFill>
+                      <a:srgbClr val="FFFFFF"/>
+                    </a:solidFill>
+                  </a:tcPr>
+                </a:tc>
+              </a:tr>
+              <a:tr h="502920">
+                <a:tc>
+                  <a:txBody>
+                    <a:bodyPr/>
+                    <a:lstStyle/>
+                    <a:p>
+                      <a:pPr algn="l"/>
+                      <a:r>
+                        <a:rPr sz="1100" b="1" i="0">
+                          <a:solidFill>
+                            <a:srgbClr val="2B2B2B"/>
+                          </a:solidFill>
+                          <a:latin typeface="Calibri"/>
+                        </a:rPr>
+                        <a:t>Google Docs</a:t>
+                      </a:r>
+                    </a:p>
+                  </a:txBody>
+                  <a:tcPr anchor="ctr" marL="109728" marR="91440" marT="36576" marB="36576">
+                    <a:solidFill>
+                      <a:srgbClr val="F2F2F2"/>
+                    </a:solidFill>
+                  </a:tcPr>
+                </a:tc>
+                <a:tc>
+                  <a:txBody>
+                    <a:bodyPr/>
+                    <a:lstStyle/>
+                    <a:p>
+                      <a:pPr algn="l"/>
+                      <a:r>
+                        <a:rPr sz="1100" b="0" i="0">
+                          <a:solidFill>
+                            <a:srgbClr val="2B2B2B"/>
+                          </a:solidFill>
+                          <a:latin typeface="Calibri"/>
+                        </a:rPr>
+                        <a:t>Escribir el artículo sobre la plantilla APA CUN</a:t>
+                      </a:r>
+                    </a:p>
+                  </a:txBody>
+                  <a:tcPr anchor="ctr" marL="109728" marR="91440" marT="36576" marB="36576">
+                    <a:solidFill>
+                      <a:srgbClr val="F2F2F2"/>
+                    </a:solidFill>
+                  </a:tcPr>
+                </a:tc>
+                <a:tc>
+                  <a:txBody>
+                    <a:bodyPr/>
+                    <a:lstStyle/>
+                    <a:p>
+                      <a:pPr algn="l"/>
+                      <a:r>
+                        <a:rPr sz="1100" b="0" i="0">
+                          <a:solidFill>
+                            <a:srgbClr val="2B2B2B"/>
+                          </a:solidFill>
+                          <a:latin typeface="Calibri"/>
+                        </a:rPr>
+                        <a:t>Todas las sesiones</a:t>
+                      </a:r>
+                    </a:p>
+                  </a:txBody>
+                  <a:tcPr anchor="ctr" marL="109728" marR="91440" marT="36576" marB="36576">
+                    <a:solidFill>
+                      <a:srgbClr val="F2F2F2"/>
+                    </a:solidFill>
+                  </a:tcPr>
+                </a:tc>
+              </a:tr>
+              <a:tr h="502920">
+                <a:tc>
+                  <a:txBody>
+                    <a:bodyPr/>
+                    <a:lstStyle/>
+                    <a:p>
+                      <a:pPr algn="l"/>
+                      <a:r>
+                        <a:rPr sz="1100" b="1" i="0">
+                          <a:solidFill>
+                            <a:srgbClr val="2B2B2B"/>
+                          </a:solidFill>
+                          <a:latin typeface="Calibri"/>
+                        </a:rPr>
+                        <a:t>Google Académico</a:t>
+                      </a:r>
+                    </a:p>
+                  </a:txBody>
+                  <a:tcPr anchor="ctr" marL="109728" marR="91440" marT="36576" marB="36576">
+                    <a:solidFill>
+                      <a:srgbClr val="FFFFFF"/>
+                    </a:solidFill>
+                  </a:tcPr>
+                </a:tc>
+                <a:tc>
+                  <a:txBody>
+                    <a:bodyPr/>
+                    <a:lstStyle/>
+                    <a:p>
+                      <a:pPr algn="l"/>
+                      <a:r>
+                        <a:rPr sz="1100" b="0" i="0">
+                          <a:solidFill>
+                            <a:srgbClr val="2B2B2B"/>
+                          </a:solidFill>
+                          <a:latin typeface="Calibri"/>
+                        </a:rPr>
+                        <a:t>Buscar literatura y ver quién cita a quién</a:t>
+                      </a:r>
+                    </a:p>
+                  </a:txBody>
+                  <a:tcPr anchor="ctr" marL="109728" marR="91440" marT="36576" marB="36576">
+                    <a:solidFill>
+                      <a:srgbClr val="FFFFFF"/>
+                    </a:solidFill>
+                  </a:tcPr>
+                </a:tc>
+                <a:tc>
+                  <a:txBody>
+                    <a:bodyPr/>
+                    <a:lstStyle/>
+                    <a:p>
+                      <a:pPr algn="l"/>
+                      <a:r>
+                        <a:rPr sz="1100" b="0" i="0">
+                          <a:solidFill>
+                            <a:srgbClr val="2B2B2B"/>
+                          </a:solidFill>
+                          <a:latin typeface="Calibri"/>
+                        </a:rPr>
+                        <a:t>Desde la Sesión 02</a:t>
+                      </a:r>
+                    </a:p>
+                  </a:txBody>
+                  <a:tcPr anchor="ctr" marL="109728" marR="91440" marT="36576" marB="36576">
+                    <a:solidFill>
+                      <a:srgbClr val="FFFFFF"/>
+                    </a:solidFill>
+                  </a:tcPr>
+                </a:tc>
+              </a:tr>
+              <a:tr h="502920">
+                <a:tc>
+                  <a:txBody>
+                    <a:bodyPr/>
+                    <a:lstStyle/>
+                    <a:p>
+                      <a:pPr algn="l"/>
+                      <a:r>
+                        <a:rPr sz="1100" b="1" i="0">
+                          <a:solidFill>
+                            <a:srgbClr val="2B2B2B"/>
+                          </a:solidFill>
+                          <a:latin typeface="Calibri"/>
+                        </a:rPr>
+                        <a:t>SciELO y Redalyc</a:t>
+                      </a:r>
+                    </a:p>
+                  </a:txBody>
+                  <a:tcPr anchor="ctr" marL="109728" marR="91440" marT="36576" marB="36576">
+                    <a:solidFill>
+                      <a:srgbClr val="F2F2F2"/>
+                    </a:solidFill>
+                  </a:tcPr>
+                </a:tc>
+                <a:tc>
+                  <a:txBody>
+                    <a:bodyPr/>
+                    <a:lstStyle/>
+                    <a:p>
+                      <a:pPr algn="l"/>
+                      <a:r>
+                        <a:rPr sz="1100" b="0" i="0">
+                          <a:solidFill>
+                            <a:srgbClr val="2B2B2B"/>
+                          </a:solidFill>
+                          <a:latin typeface="Calibri"/>
+                        </a:rPr>
+                        <a:t>Fuentes abiertas en español y portugués de Iberoamérica</a:t>
+                      </a:r>
+                    </a:p>
+                  </a:txBody>
+                  <a:tcPr anchor="ctr" marL="109728" marR="91440" marT="36576" marB="36576">
+                    <a:solidFill>
+                      <a:srgbClr val="F2F2F2"/>
+                    </a:solidFill>
+                  </a:tcPr>
+                </a:tc>
+                <a:tc>
+                  <a:txBody>
+                    <a:bodyPr/>
+                    <a:lstStyle/>
+                    <a:p>
+                      <a:pPr algn="l"/>
+                      <a:r>
+                        <a:rPr sz="1100" b="0" i="0">
+                          <a:solidFill>
+                            <a:srgbClr val="2B2B2B"/>
+                          </a:solidFill>
+                          <a:latin typeface="Calibri"/>
+                        </a:rPr>
+                        <a:t>Sesión de búsqueda y marco</a:t>
+                      </a:r>
+                    </a:p>
+                  </a:txBody>
+                  <a:tcPr anchor="ctr" marL="109728" marR="91440" marT="36576" marB="36576">
+                    <a:solidFill>
+                      <a:srgbClr val="F2F2F2"/>
+                    </a:solidFill>
+                  </a:tcPr>
+                </a:tc>
+              </a:tr>
+              <a:tr h="502920">
+                <a:tc>
+                  <a:txBody>
+                    <a:bodyPr/>
+                    <a:lstStyle/>
+                    <a:p>
+                      <a:pPr algn="l"/>
+                      <a:r>
+                        <a:rPr sz="1100" b="1" i="0">
+                          <a:solidFill>
+                            <a:srgbClr val="2B2B2B"/>
+                          </a:solidFill>
+                          <a:latin typeface="Calibri"/>
+                        </a:rPr>
+                        <a:t>Biblioteca CUN (web)</a:t>
+                      </a:r>
+                    </a:p>
+                  </a:txBody>
+                  <a:tcPr anchor="ctr" marL="109728" marR="91440" marT="36576" marB="36576">
+                    <a:solidFill>
+                      <a:srgbClr val="FFFFFF"/>
+                    </a:solidFill>
+                  </a:tcPr>
+                </a:tc>
+                <a:tc>
+                  <a:txBody>
+                    <a:bodyPr/>
+                    <a:lstStyle/>
+                    <a:p>
+                      <a:pPr algn="l"/>
+                      <a:r>
+                        <a:rPr sz="1100" b="0" i="0">
+                          <a:solidFill>
+                            <a:srgbClr val="2B2B2B"/>
+                          </a:solidFill>
+                          <a:latin typeface="Calibri"/>
+                        </a:rPr>
+                        <a:t>Texto completo de bases suscritas, con login institucional</a:t>
+                      </a:r>
+                    </a:p>
+                  </a:txBody>
+                  <a:tcPr anchor="ctr" marL="109728" marR="91440" marT="36576" marB="36576">
+                    <a:solidFill>
+                      <a:srgbClr val="FFFFFF"/>
+                    </a:solidFill>
+                  </a:tcPr>
+                </a:tc>
+                <a:tc>
+                  <a:txBody>
+                    <a:bodyPr/>
+                    <a:lstStyle/>
+                    <a:p>
+                      <a:pPr algn="l"/>
+                      <a:r>
+                        <a:rPr sz="1100" b="0" i="0">
+                          <a:solidFill>
+                            <a:srgbClr val="2B2B2B"/>
+                          </a:solidFill>
+                          <a:latin typeface="Calibri"/>
+                        </a:rPr>
+                        <a:t>Cuando el PDF no es de acceso abierto</a:t>
+                      </a:r>
+                    </a:p>
+                  </a:txBody>
+                  <a:tcPr anchor="ctr" marL="109728" marR="91440" marT="36576" marB="36576">
+                    <a:solidFill>
+                      <a:srgbClr val="FFFFFF"/>
+                    </a:solidFill>
+                  </a:tcPr>
+                </a:tc>
+              </a:tr>
+              <a:tr h="502920">
+                <a:tc>
+                  <a:txBody>
+                    <a:bodyPr/>
+                    <a:lstStyle/>
+                    <a:p>
+                      <a:pPr algn="l"/>
+                      <a:r>
+                        <a:rPr sz="1100" b="1" i="0">
+                          <a:solidFill>
+                            <a:srgbClr val="2B2B2B"/>
+                          </a:solidFill>
+                          <a:latin typeface="Calibri"/>
+                        </a:rPr>
+                        <a:t>ZoteroBib (zbib.org)</a:t>
+                      </a:r>
+                    </a:p>
+                  </a:txBody>
+                  <a:tcPr anchor="ctr" marL="109728" marR="91440" marT="36576" marB="36576">
+                    <a:solidFill>
+                      <a:srgbClr val="F2F2F2"/>
+                    </a:solidFill>
+                  </a:tcPr>
+                </a:tc>
+                <a:tc>
+                  <a:txBody>
+                    <a:bodyPr/>
+                    <a:lstStyle/>
+                    <a:p>
+                      <a:pPr algn="l"/>
+                      <a:r>
+                        <a:rPr sz="1100" b="0" i="0">
+                          <a:solidFill>
+                            <a:srgbClr val="2B2B2B"/>
+                          </a:solidFill>
+                          <a:latin typeface="Calibri"/>
+                        </a:rPr>
+                        <a:t>Generar referencias en APA 7 sin instalar ni registrarse</a:t>
+                      </a:r>
+                    </a:p>
+                  </a:txBody>
+                  <a:tcPr anchor="ctr" marL="109728" marR="91440" marT="36576" marB="36576">
+                    <a:solidFill>
+                      <a:srgbClr val="F2F2F2"/>
+                    </a:solidFill>
+                  </a:tcPr>
+                </a:tc>
+                <a:tc>
+                  <a:txBody>
+                    <a:bodyPr/>
+                    <a:lstStyle/>
+                    <a:p>
+                      <a:pPr algn="l"/>
+                      <a:r>
+                        <a:rPr sz="1100" b="0" i="0">
+                          <a:solidFill>
+                            <a:srgbClr val="2B2B2B"/>
+                          </a:solidFill>
+                          <a:latin typeface="Calibri"/>
+                        </a:rPr>
+                        <a:t>Cada vez que cite</a:t>
+                      </a:r>
+                    </a:p>
+                  </a:txBody>
+                  <a:tcPr anchor="ctr" marL="109728" marR="91440" marT="36576" marB="36576">
+                    <a:solidFill>
+                      <a:srgbClr val="F2F2F2"/>
+                    </a:solidFill>
+                  </a:tcPr>
+                </a:tc>
+              </a:tr>
+              <a:tr h="502920">
+                <a:tc>
+                  <a:txBody>
+                    <a:bodyPr/>
+                    <a:lstStyle/>
+                    <a:p>
+                      <a:pPr algn="l"/>
+                      <a:r>
+                        <a:rPr sz="1100" b="1" i="0">
+                          <a:solidFill>
+                            <a:srgbClr val="2B2B2B"/>
+                          </a:solidFill>
+                          <a:latin typeface="Calibri"/>
+                        </a:rPr>
+                        <a:t>Excalidraw</a:t>
+                      </a:r>
+                    </a:p>
+                  </a:txBody>
+                  <a:tcPr anchor="ctr" marL="109728" marR="91440" marT="36576" marB="36576">
+                    <a:solidFill>
+                      <a:srgbClr val="FFFFFF"/>
+                    </a:solidFill>
+                  </a:tcPr>
+                </a:tc>
+                <a:tc>
+                  <a:txBody>
+                    <a:bodyPr/>
+                    <a:lstStyle/>
+                    <a:p>
+                      <a:pPr algn="l"/>
+                      <a:r>
+                        <a:rPr sz="1100" b="0" i="0">
+                          <a:solidFill>
+                            <a:srgbClr val="2B2B2B"/>
+                          </a:solidFill>
+                          <a:latin typeface="Calibri"/>
+                        </a:rPr>
+                        <a:t>Diagramar el problema (espina de pescado, árbol de problemas)</a:t>
+                      </a:r>
+                    </a:p>
+                  </a:txBody>
+                  <a:tcPr anchor="ctr" marL="109728" marR="91440" marT="36576" marB="36576">
+                    <a:solidFill>
+                      <a:srgbClr val="FFFFFF"/>
+                    </a:solidFill>
+                  </a:tcPr>
+                </a:tc>
+                <a:tc>
+                  <a:txBody>
+                    <a:bodyPr/>
+                    <a:lstStyle/>
+                    <a:p>
+                      <a:pPr algn="l"/>
+                      <a:r>
+                        <a:rPr sz="1100" b="0" i="0">
+                          <a:solidFill>
+                            <a:srgbClr val="2B2B2B"/>
+                          </a:solidFill>
+                          <a:latin typeface="Calibri"/>
+                        </a:rPr>
+                        <a:t>Sesión de problema y pregunta</a:t>
+                      </a:r>
+                    </a:p>
+                  </a:txBody>
+                  <a:tcPr anchor="ctr" marL="109728" marR="91440" marT="36576" marB="36576">
+                    <a:solidFill>
+                      <a:srgbClr val="FFFFFF"/>
+                    </a:solidFill>
+                  </a:tcPr>
+                </a:tc>
+              </a:tr>
+              <a:tr h="502920">
+                <a:tc>
+                  <a:txBody>
+                    <a:bodyPr/>
+                    <a:lstStyle/>
+                    <a:p>
+                      <a:pPr algn="l"/>
+                      <a:r>
+                        <a:rPr sz="1100" b="1" i="0">
+                          <a:solidFill>
+                            <a:srgbClr val="2B2B2B"/>
+                          </a:solidFill>
+                          <a:latin typeface="Calibri"/>
+                        </a:rPr>
+                        <a:t>Padlet</a:t>
+                      </a:r>
+                    </a:p>
+                  </a:txBody>
+                  <a:tcPr anchor="ctr" marL="109728" marR="91440" marT="36576" marB="36576">
+                    <a:solidFill>
+                      <a:srgbClr val="F2F2F2"/>
+                    </a:solidFill>
+                  </a:tcPr>
+                </a:tc>
+                <a:tc>
+                  <a:txBody>
+                    <a:bodyPr/>
+                    <a:lstStyle/>
+                    <a:p>
+                      <a:pPr algn="l"/>
+                      <a:r>
+                        <a:rPr sz="1100" b="0" i="0">
+                          <a:solidFill>
+                            <a:srgbClr val="2B2B2B"/>
+                          </a:solidFill>
+                          <a:latin typeface="Calibri"/>
+                        </a:rPr>
+                        <a:t>Tablero donde nos presentamos como grupo</a:t>
+                      </a:r>
+                    </a:p>
+                  </a:txBody>
+                  <a:tcPr anchor="ctr" marL="109728" marR="91440" marT="36576" marB="36576">
+                    <a:solidFill>
+                      <a:srgbClr val="F2F2F2"/>
+                    </a:solidFill>
+                  </a:tcPr>
+                </a:tc>
+                <a:tc>
+                  <a:txBody>
+                    <a:bodyPr/>
+                    <a:lstStyle/>
+                    <a:p>
+                      <a:pPr algn="l"/>
+                      <a:r>
+                        <a:rPr sz="1100" b="0" i="0">
+                          <a:solidFill>
+                            <a:srgbClr val="2B2B2B"/>
+                          </a:solidFill>
+                          <a:latin typeface="Calibri"/>
+                        </a:rPr>
+                        <a:t>Hoy</a:t>
+                      </a:r>
+                    </a:p>
+                  </a:txBody>
+                  <a:tcPr anchor="ctr" marL="109728" marR="91440" marT="36576" marB="36576">
+                    <a:solidFill>
+                      <a:srgbClr val="F2F2F2"/>
+                    </a:solidFill>
+                  </a:tcPr>
+                </a:tc>
+              </a:tr>
+            </a:tbl>
+          </a:graphicData>
+        </a:graphic>
+      </p:graphicFrame>
+      <p:sp>
+        <p:nvSpPr>
+          <p:cNvPr id="5" name="TextBox 4"/>
+          <p:cNvSpPr txBox="1"/>
+          <p:nvPr/>
+        </p:nvSpPr>
+        <p:spPr>
+          <a:xfrm>
+            <a:off x="640080" y="6080760"/>
+            <a:ext cx="10911535" cy="548640"/>
+          </a:xfrm>
+          <a:prstGeom prst="rect">
+            <a:avLst/>
+          </a:prstGeom>
+          <a:noFill/>
+        </p:spPr>
+        <p:txBody>
+          <a:bodyPr wrap="square" anchor="t" lIns="0" rIns="0" tIns="0" bIns="0">
+            <a:spAutoFit/>
+          </a:bodyPr>
+          <a:lstStyle/>
+          <a:p>
+            <a:r>
+              <a:rPr sz="1200" b="0" i="1">
+                <a:solidFill>
+                  <a:srgbClr val="2B2B2B"/>
+                </a:solidFill>
+                <a:latin typeface="Calibri"/>
+              </a:rPr>
+              <a:t>No se exige instalar nada: ni Office de escritorio, ni Mendeley, ni Zotero de escritorio. Con un navegador basta.</a:t>
+            </a:r>
+          </a:p>
+        </p:txBody>
+      </p:sp>
+      <p:sp>
+        <p:nvSpPr>
+          <p:cNvPr id="6" name="TextBox 5"/>
+          <p:cNvSpPr txBox="1"/>
+          <p:nvPr/>
+        </p:nvSpPr>
+        <p:spPr>
+          <a:xfrm>
+            <a:off x="2194560" y="6446520"/>
+            <a:ext cx="5943600" cy="274320"/>
+          </a:xfrm>
+          <a:prstGeom prst="rect">
+            <a:avLst/>
+          </a:prstGeom>
+          <a:noFill/>
+        </p:spPr>
+        <p:txBody>
+          <a:bodyPr wrap="square" anchor="t" lIns="0" rIns="0" tIns="0" bIns="0">
+            <a:spAutoFit/>
+          </a:bodyPr>
+          <a:lstStyle/>
+          <a:p>
+            <a:pPr algn="l"/>
+            <a:r>
+              <a:rPr sz="1000" b="1" i="0">
+                <a:solidFill>
+                  <a:srgbClr val="8F989D"/>
+                </a:solidFill>
+                <a:latin typeface="Calibri"/>
+              </a:rPr>
+              <a:t>Inicio 5:10 pm</a:t>
+            </a:r>
+          </a:p>
+        </p:txBody>
+      </p:sp>
+      <p:sp>
+        <p:nvSpPr>
+          <p:cNvPr id="7" name="TextBox 6"/>
+          <p:cNvSpPr txBox="1"/>
+          <p:nvPr/>
+        </p:nvSpPr>
+        <p:spPr>
+          <a:xfrm>
+            <a:off x="11094415" y="6446520"/>
+            <a:ext cx="548640" cy="274320"/>
+          </a:xfrm>
+          <a:prstGeom prst="rect">
+            <a:avLst/>
+          </a:prstGeom>
+          <a:noFill/>
+        </p:spPr>
+        <p:txBody>
+          <a:bodyPr wrap="square" anchor="t" lIns="0" rIns="0" tIns="0" bIns="0">
+            <a:spAutoFit/>
+          </a:bodyPr>
+          <a:lstStyle/>
+          <a:p>
+            <a:pPr algn="r"/>
+            <a:r>
+              <a:rPr sz="1000" b="1" i="0">
+                <a:solidFill>
+                  <a:srgbClr val="8F989D"/>
+                </a:solidFill>
+                <a:latin typeface="Calibri"/>
+              </a:rPr>
+              <a:t>14</a:t>
+            </a:r>
+          </a:p>
+        </p:txBody>
+      </p:sp>
+    </p:spTree>
+  </p:cSld>
+  <p:clrMapOvr>
+    <a:masterClrMapping/>
+  </p:clrMapOvr>
+</p:sld>
+</file>
+
+<file path=ppt/slides/slide15.xml><?xml version="1.0" encoding="utf-8"?>
+<p:sld xmlns:a="http://schemas.openxmlformats.org/drawingml/2006/main" xmlns:p="http://schemas.openxmlformats.org/presentationml/2006/main" xmlns:r="http://schemas.openxmlformats.org/officeDocument/2006/relationships">
+  <p:cSld>
+    <p:bg>
+      <p:bgPr>
+        <a:solidFill>
+          <a:srgbClr val="FFFFFF"/>
+        </a:solidFill>
+        <a:effectLst/>
+      </p:bgPr>
+    </p:bg>
+    <p:spTree>
+      <p:nvGrpSpPr>
+        <p:cNvPr id="1" name=""/>
+        <p:cNvGrpSpPr/>
+        <p:nvPr/>
+      </p:nvGrpSpPr>
+      <p:grpSpPr/>
+      <p:sp>
+        <p:nvSpPr>
+          <p:cNvPr id="2" name="Rectangle 1"/>
+          <p:cNvSpPr/>
+          <p:nvPr/>
+        </p:nvSpPr>
+        <p:spPr>
+          <a:xfrm>
+            <a:off x="0" y="0"/>
+            <a:ext cx="12191695" cy="1188720"/>
+          </a:xfrm>
+          <a:prstGeom prst="rect">
+            <a:avLst/>
+          </a:prstGeom>
+          <a:solidFill>
+            <a:srgbClr val="0C2340"/>
+          </a:solidFill>
+          <a:ln>
+            <a:noFill/>
+          </a:ln>
+          <a:effectLst/>
+        </p:spPr>
+        <p:style>
+          <a:lnRef idx="1">
+            <a:schemeClr val="accent1"/>
+          </a:lnRef>
+          <a:fillRef idx="3">
+            <a:schemeClr val="accent1"/>
+          </a:fillRef>
+          <a:effectRef idx="2">
+            <a:schemeClr val="accent1"/>
+          </a:effectRef>
+          <a:fontRef idx="minor">
+            <a:schemeClr val="lt1"/>
+          </a:fontRef>
+        </p:style>
+        <p:txBody>
+          <a:bodyPr rtlCol="0" anchor="ctr"/>
+          <a:lstStyle/>
+          <a:p>
+            <a:pPr algn="ctr"/>
+          </a:p>
+        </p:txBody>
+      </p:sp>
+      <p:sp>
+        <p:nvSpPr>
+          <p:cNvPr id="3" name="TextBox 2"/>
+          <p:cNvSpPr txBox="1"/>
+          <p:nvPr/>
+        </p:nvSpPr>
+        <p:spPr>
+          <a:xfrm>
+            <a:off x="640080" y="0"/>
+            <a:ext cx="9082735" cy="1188720"/>
+          </a:xfrm>
+          <a:prstGeom prst="rect">
+            <a:avLst/>
+          </a:prstGeom>
+          <a:noFill/>
+        </p:spPr>
+        <p:txBody>
+          <a:bodyPr wrap="square" anchor="ctr" lIns="0" rIns="0" tIns="0" bIns="0">
+            <a:spAutoFit/>
+          </a:bodyPr>
+          <a:lstStyle/>
+          <a:p>
+            <a:pPr algn="ctr"/>
+            <a:r>
+              <a:rPr sz="2600" b="1" i="0">
+                <a:solidFill>
+                  <a:srgbClr val="FFFFFF"/>
+                </a:solidFill>
+                <a:latin typeface="Calibri"/>
+              </a:rPr>
+              <a:t>Cómo pedir ayuda (y cómo pedirla bien)</a:t>
+            </a:r>
+          </a:p>
+        </p:txBody>
+      </p:sp>
+      <p:sp>
+        <p:nvSpPr>
+          <p:cNvPr id="4" name="TextBox 3"/>
+          <p:cNvSpPr txBox="1"/>
+          <p:nvPr/>
+        </p:nvSpPr>
+        <p:spPr>
+          <a:xfrm>
+            <a:off x="640080" y="1691639"/>
+            <a:ext cx="10911535" cy="4617720"/>
+          </a:xfrm>
+          <a:prstGeom prst="rect">
+            <a:avLst/>
+          </a:prstGeom>
+          <a:noFill/>
+        </p:spPr>
+        <p:txBody>
+          <a:bodyPr wrap="square" anchor="t" lIns="0" rIns="0" tIns="0" bIns="0">
+            <a:spAutoFit/>
+          </a:bodyPr>
+          <a:lstStyle/>
+          <a:p>
+            <a:pPr>
+              <a:spcAft>
+                <a:spcPts val="1000"/>
+              </a:spcAft>
+            </a:pPr>
+            <a:r>
+              <a:rPr sz="1600" b="0" i="0">
+                <a:solidFill>
+                  <a:srgbClr val="2B2B2B"/>
+                </a:solidFill>
+                <a:latin typeface="Calibri"/>
+              </a:rPr>
+              <a:t>–   </a:t>
+            </a:r>
+            <a:r>
+              <a:rPr sz="1600" b="1" i="0">
+                <a:solidFill>
+                  <a:srgbClr val="2B2B2B"/>
+                </a:solidFill>
+                <a:latin typeface="Calibri"/>
+              </a:rPr>
+              <a:t>Canal oficial:</a:t>
+            </a:r>
+            <a:r>
+              <a:rPr sz="1600" b="0" i="0">
+                <a:solidFill>
+                  <a:srgbClr val="2B2B2B"/>
+                </a:solidFill>
+                <a:latin typeface="Calibri"/>
+              </a:rPr>
+              <a:t> el espacio de mensajes o foro del curso en </a:t>
+            </a:r>
+            <a:r>
+              <a:rPr sz="1600" b="1" i="0">
+                <a:solidFill>
+                  <a:srgbClr val="2B2B2B"/>
+                </a:solidFill>
+                <a:latin typeface="Calibri"/>
+              </a:rPr>
+              <a:t>CDigital</a:t>
+            </a:r>
+            <a:r>
+              <a:rPr sz="1600" b="0" i="0">
+                <a:solidFill>
+                  <a:srgbClr val="2B2B2B"/>
+                </a:solidFill>
+                <a:latin typeface="Calibri"/>
+              </a:rPr>
+              <a:t>. Lo académico queda ahí, con registro y a la vista de todos.</a:t>
+            </a:r>
+          </a:p>
+          <a:p>
+            <a:pPr>
+              <a:spcAft>
+                <a:spcPts val="1000"/>
+              </a:spcAft>
+            </a:pPr>
+            <a:r>
+              <a:rPr sz="1600" b="0" i="0">
+                <a:solidFill>
+                  <a:srgbClr val="2B2B2B"/>
+                </a:solidFill>
+                <a:latin typeface="Calibri"/>
+              </a:rPr>
+              <a:t>–   </a:t>
+            </a:r>
+            <a:r>
+              <a:rPr sz="1600" b="1" i="0">
+                <a:solidFill>
+                  <a:srgbClr val="2B2B2B"/>
+                </a:solidFill>
+                <a:latin typeface="Calibri"/>
+              </a:rPr>
+              <a:t>Correo del Docente</a:t>
+            </a:r>
+            <a:r>
+              <a:rPr sz="1600" b="0" i="0">
+                <a:solidFill>
+                  <a:srgbClr val="2B2B2B"/>
+                </a:solidFill>
+                <a:latin typeface="Calibri"/>
+              </a:rPr>
+              <a:t> (el de la slide *Docente*): para novedades personales — incapacidad, cruce de horario, situación de fuerza mayor.</a:t>
+            </a:r>
+          </a:p>
+          <a:p>
+            <a:pPr>
+              <a:spcAft>
+                <a:spcPts val="1000"/>
+              </a:spcAft>
+            </a:pPr>
+            <a:r>
+              <a:rPr sz="1600" b="0" i="0">
+                <a:solidFill>
+                  <a:srgbClr val="2B2B2B"/>
+                </a:solidFill>
+                <a:latin typeface="Calibri"/>
+              </a:rPr>
+              <a:t>–   </a:t>
+            </a:r>
+            <a:r>
+              <a:rPr sz="1600" b="1" i="0">
+                <a:solidFill>
+                  <a:srgbClr val="2B2B2B"/>
+                </a:solidFill>
+                <a:latin typeface="Calibri"/>
+              </a:rPr>
+              <a:t>Tiempo de respuesta:</a:t>
+            </a:r>
+            <a:r>
+              <a:rPr sz="1600" b="0" i="0">
+                <a:solidFill>
+                  <a:srgbClr val="2B2B2B"/>
+                </a:solidFill>
+                <a:latin typeface="Calibri"/>
+              </a:rPr>
+              <a:t> en días hábiles y, en todo caso, </a:t>
+            </a:r>
+            <a:r>
+              <a:rPr sz="1600" b="1" i="0">
+                <a:solidFill>
+                  <a:srgbClr val="2B2B2B"/>
+                </a:solidFill>
+                <a:latin typeface="Calibri"/>
+              </a:rPr>
+              <a:t>antes del siguiente encuentro</a:t>
+            </a:r>
+            <a:r>
+              <a:rPr sz="1600" b="0" i="0">
+                <a:solidFill>
+                  <a:srgbClr val="2B2B2B"/>
+                </a:solidFill>
+                <a:latin typeface="Calibri"/>
+              </a:rPr>
+              <a:t>. No espere respuesta a medianoche del día de cierre.</a:t>
+            </a:r>
+          </a:p>
+          <a:p>
+            <a:pPr>
+              <a:spcAft>
+                <a:spcPts val="1000"/>
+              </a:spcAft>
+            </a:pPr>
+            <a:r>
+              <a:rPr sz="1600" b="0" i="0">
+                <a:solidFill>
+                  <a:srgbClr val="2B2B2B"/>
+                </a:solidFill>
+                <a:latin typeface="Calibri"/>
+              </a:rPr>
+              <a:t>–   </a:t>
+            </a:r>
+            <a:r>
+              <a:rPr sz="1600" b="1" i="0">
+                <a:solidFill>
+                  <a:srgbClr val="2B2B2B"/>
+                </a:solidFill>
+                <a:latin typeface="Calibri"/>
+              </a:rPr>
+              <a:t>En clase:</a:t>
+            </a:r>
+            <a:r>
+              <a:rPr sz="1600" b="0" i="0">
+                <a:solidFill>
+                  <a:srgbClr val="2B2B2B"/>
+                </a:solidFill>
+                <a:latin typeface="Calibri"/>
+              </a:rPr>
+              <a:t> los últimos minutos son de dudas. Si la suya es larga, escríbala en el foro y se responde con detalle.</a:t>
+            </a:r>
+          </a:p>
+          <a:p>
+            <a:pPr>
+              <a:spcAft>
+                <a:spcPts val="1000"/>
+              </a:spcAft>
+            </a:pPr>
+            <a:r>
+              <a:rPr sz="1600" b="0" i="0">
+                <a:solidFill>
+                  <a:srgbClr val="2B2B2B"/>
+                </a:solidFill>
+                <a:latin typeface="Calibri"/>
+              </a:rPr>
+              <a:t>–   </a:t>
+            </a:r>
+            <a:r>
+              <a:rPr sz="1600" b="1" i="0">
+                <a:solidFill>
+                  <a:srgbClr val="2B2B2B"/>
+                </a:solidFill>
+                <a:latin typeface="Calibri"/>
+              </a:rPr>
+              <a:t>Una buena pregunta trae contexto:</a:t>
+            </a:r>
+          </a:p>
+          <a:p>
+            <a:pPr lvl="1">
+              <a:spcAft>
+                <a:spcPts val="600"/>
+              </a:spcAft>
+            </a:pPr>
+            <a:r>
+              <a:rPr sz="1500" b="0" i="0">
+                <a:solidFill>
+                  <a:srgbClr val="2B2B2B"/>
+                </a:solidFill>
+                <a:latin typeface="Calibri"/>
+              </a:rPr>
+              <a:t>●   Mal: “Docente, no entendí la ACA”.</a:t>
+            </a:r>
+          </a:p>
+          <a:p>
+            <a:pPr lvl="1">
+              <a:spcAft>
+                <a:spcPts val="600"/>
+              </a:spcAft>
+            </a:pPr>
+            <a:r>
+              <a:rPr sz="1500" b="0" i="0">
+                <a:solidFill>
+                  <a:srgbClr val="2B2B2B"/>
+                </a:solidFill>
+                <a:latin typeface="Calibri"/>
+              </a:rPr>
+              <a:t>●   Bien: “Subí mi párrafo del problema: ¿la pregunta que escribí es investigable o sigue siendo un tema?”.</a:t>
+            </a:r>
+          </a:p>
+          <a:p>
+            <a:pPr>
+              <a:spcAft>
+                <a:spcPts val="1000"/>
+              </a:spcAft>
+            </a:pPr>
+            <a:r>
+              <a:rPr sz="1600" b="0" i="0">
+                <a:solidFill>
+                  <a:srgbClr val="2B2B2B"/>
+                </a:solidFill>
+                <a:latin typeface="Calibri"/>
+              </a:rPr>
+              <a:t>–   Si va a faltar, avise </a:t>
+            </a:r>
+            <a:r>
+              <a:rPr sz="1600" b="1" i="0">
+                <a:solidFill>
+                  <a:srgbClr val="2B2B2B"/>
+                </a:solidFill>
+                <a:latin typeface="Calibri"/>
+              </a:rPr>
+              <a:t>antes</a:t>
+            </a:r>
+            <a:r>
+              <a:rPr sz="1600" b="0" i="0">
+                <a:solidFill>
+                  <a:srgbClr val="2B2B2B"/>
+                </a:solidFill>
+                <a:latin typeface="Calibri"/>
+              </a:rPr>
+              <a:t> y revise CDigital ese mismo día: material y consigna quedan publicados.</a:t>
+            </a:r>
+          </a:p>
+        </p:txBody>
+      </p:sp>
+      <p:sp>
+        <p:nvSpPr>
+          <p:cNvPr id="5" name="TextBox 4"/>
+          <p:cNvSpPr txBox="1"/>
+          <p:nvPr/>
+        </p:nvSpPr>
+        <p:spPr>
+          <a:xfrm>
+            <a:off x="2194560" y="6446520"/>
+            <a:ext cx="5943600" cy="274320"/>
+          </a:xfrm>
+          <a:prstGeom prst="rect">
+            <a:avLst/>
+          </a:prstGeom>
+          <a:noFill/>
+        </p:spPr>
+        <p:txBody>
+          <a:bodyPr wrap="square" anchor="t" lIns="0" rIns="0" tIns="0" bIns="0">
+            <a:spAutoFit/>
+          </a:bodyPr>
+          <a:lstStyle/>
+          <a:p>
+            <a:pPr algn="l"/>
+            <a:r>
+              <a:rPr sz="1000" b="1" i="0">
+                <a:solidFill>
+                  <a:srgbClr val="8F989D"/>
+                </a:solidFill>
+                <a:latin typeface="Calibri"/>
+              </a:rPr>
+              <a:t>Inicio 5:10 pm</a:t>
+            </a:r>
+          </a:p>
+        </p:txBody>
+      </p:sp>
+      <p:sp>
+        <p:nvSpPr>
+          <p:cNvPr id="6" name="TextBox 5"/>
+          <p:cNvSpPr txBox="1"/>
+          <p:nvPr/>
+        </p:nvSpPr>
+        <p:spPr>
+          <a:xfrm>
+            <a:off x="11094415" y="6446520"/>
+            <a:ext cx="548640" cy="274320"/>
+          </a:xfrm>
+          <a:prstGeom prst="rect">
+            <a:avLst/>
+          </a:prstGeom>
+          <a:noFill/>
+        </p:spPr>
+        <p:txBody>
+          <a:bodyPr wrap="square" anchor="t" lIns="0" rIns="0" tIns="0" bIns="0">
+            <a:spAutoFit/>
+          </a:bodyPr>
+          <a:lstStyle/>
+          <a:p>
+            <a:pPr algn="r"/>
+            <a:r>
+              <a:rPr sz="1000" b="1" i="0">
+                <a:solidFill>
+                  <a:srgbClr val="8F989D"/>
+                </a:solidFill>
+                <a:latin typeface="Calibri"/>
+              </a:rPr>
+              <a:t>15</a:t>
+            </a:r>
+          </a:p>
+        </p:txBody>
+      </p:sp>
+    </p:spTree>
+  </p:cSld>
+  <p:clrMapOvr>
+    <a:masterClrMapping/>
+  </p:clrMapOvr>
+</p:sld>
+</file>
+
+<file path=ppt/slides/slide16.xml><?xml version="1.0" encoding="utf-8"?>
+<p:sld xmlns:a="http://schemas.openxmlformats.org/drawingml/2006/main" xmlns:p="http://schemas.openxmlformats.org/presentationml/2006/main" xmlns:r="http://schemas.openxmlformats.org/officeDocument/2006/relationships">
+  <p:cSld>
+    <p:bg>
+      <p:bgPr>
+        <a:solidFill>
+          <a:srgbClr val="FFFFFF"/>
+        </a:solidFill>
+        <a:effectLst/>
+      </p:bgPr>
+    </p:bg>
+    <p:spTree>
+      <p:nvGrpSpPr>
+        <p:cNvPr id="1" name=""/>
+        <p:cNvGrpSpPr/>
+        <p:nvPr/>
+      </p:nvGrpSpPr>
+      <p:grpSpPr/>
+      <p:sp>
+        <p:nvSpPr>
+          <p:cNvPr id="2" name="Rectangle 1"/>
+          <p:cNvSpPr/>
+          <p:nvPr/>
+        </p:nvSpPr>
+        <p:spPr>
+          <a:xfrm>
+            <a:off x="0" y="0"/>
+            <a:ext cx="12191695" cy="1188720"/>
+          </a:xfrm>
+          <a:prstGeom prst="rect">
+            <a:avLst/>
+          </a:prstGeom>
+          <a:solidFill>
+            <a:srgbClr val="0C2340"/>
+          </a:solidFill>
+          <a:ln>
+            <a:noFill/>
+          </a:ln>
+          <a:effectLst/>
+        </p:spPr>
+        <p:style>
+          <a:lnRef idx="1">
+            <a:schemeClr val="accent1"/>
+          </a:lnRef>
+          <a:fillRef idx="3">
+            <a:schemeClr val="accent1"/>
+          </a:fillRef>
+          <a:effectRef idx="2">
+            <a:schemeClr val="accent1"/>
+          </a:effectRef>
+          <a:fontRef idx="minor">
+            <a:schemeClr val="lt1"/>
+          </a:fontRef>
+        </p:style>
+        <p:txBody>
+          <a:bodyPr rtlCol="0" anchor="ctr"/>
+          <a:lstStyle/>
+          <a:p>
+            <a:pPr algn="ctr"/>
+          </a:p>
+        </p:txBody>
+      </p:sp>
+      <p:sp>
+        <p:nvSpPr>
+          <p:cNvPr id="3" name="TextBox 2"/>
+          <p:cNvSpPr txBox="1"/>
+          <p:nvPr/>
+        </p:nvSpPr>
+        <p:spPr>
+          <a:xfrm>
+            <a:off x="640080" y="0"/>
+            <a:ext cx="9082735" cy="1188720"/>
+          </a:xfrm>
+          <a:prstGeom prst="rect">
+            <a:avLst/>
+          </a:prstGeom>
+          <a:noFill/>
+        </p:spPr>
+        <p:txBody>
+          <a:bodyPr wrap="square" anchor="ctr" lIns="0" rIns="0" tIns="0" bIns="0">
+            <a:spAutoFit/>
+          </a:bodyPr>
+          <a:lstStyle/>
+          <a:p>
+            <a:pPr algn="ctr"/>
+            <a:r>
+              <a:rPr sz="2600" b="1" i="0">
+                <a:solidFill>
+                  <a:srgbClr val="FFFFFF"/>
+                </a:solidFill>
+                <a:latin typeface="Calibri"/>
+              </a:rPr>
+              <a:t>Acuerdos de convivencia del encuentro virtual</a:t>
+            </a:r>
+          </a:p>
+        </p:txBody>
+      </p:sp>
+      <p:sp>
+        <p:nvSpPr>
+          <p:cNvPr id="4" name="Rounded Rectangle 3"/>
+          <p:cNvSpPr/>
+          <p:nvPr/>
+        </p:nvSpPr>
+        <p:spPr>
+          <a:xfrm>
+            <a:off x="640080" y="1737360"/>
+            <a:ext cx="10911535" cy="969264"/>
+          </a:xfrm>
+          <a:prstGeom prst="roundRect">
+            <a:avLst/>
+          </a:prstGeom>
+          <a:solidFill>
+            <a:srgbClr val="E8F5EC"/>
+          </a:solidFill>
+          <a:ln>
+            <a:noFill/>
+          </a:ln>
+          <a:effectLst/>
+        </p:spPr>
+        <p:style>
+          <a:lnRef idx="1">
+            <a:schemeClr val="accent1"/>
+          </a:lnRef>
+          <a:fillRef idx="3">
+            <a:schemeClr val="accent1"/>
+          </a:fillRef>
+          <a:effectRef idx="2">
+            <a:schemeClr val="accent1"/>
+          </a:effectRef>
+          <a:fontRef idx="minor">
+            <a:schemeClr val="lt1"/>
+          </a:fontRef>
+        </p:style>
+        <p:txBody>
+          <a:bodyPr rtlCol="0" anchor="ctr"/>
+          <a:lstStyle/>
+          <a:p>
+            <a:pPr algn="ctr"/>
+          </a:p>
+        </p:txBody>
+      </p:sp>
+      <p:sp>
+        <p:nvSpPr>
+          <p:cNvPr id="5" name="TextBox 4"/>
+          <p:cNvSpPr txBox="1"/>
+          <p:nvPr/>
+        </p:nvSpPr>
+        <p:spPr>
+          <a:xfrm>
+            <a:off x="868680" y="1847088"/>
+            <a:ext cx="10454335" cy="749808"/>
+          </a:xfrm>
+          <a:prstGeom prst="rect">
+            <a:avLst/>
+          </a:prstGeom>
+          <a:noFill/>
+        </p:spPr>
+        <p:txBody>
+          <a:bodyPr wrap="square" anchor="t" lIns="0" rIns="0" tIns="0" bIns="0">
+            <a:spAutoFit/>
+          </a:bodyPr>
+          <a:lstStyle/>
+          <a:p>
+            <a:r>
+              <a:rPr sz="1300" b="1" i="0">
+                <a:solidFill>
+                  <a:srgbClr val="0C2340"/>
+                </a:solidFill>
+                <a:latin typeface="Calibri"/>
+              </a:rPr>
+              <a:t>ℹ️ Nota institucional</a:t>
+            </a:r>
+          </a:p>
+          <a:p>
+            <a:pPr>
+              <a:spcBef>
+                <a:spcPts val="400"/>
+              </a:spcBef>
+            </a:pPr>
+            <a:r>
+              <a:rPr sz="1300" b="1" i="0">
+                <a:solidFill>
+                  <a:srgbClr val="2B2B2B"/>
+                </a:solidFill>
+                <a:latin typeface="Calibri"/>
+              </a:rPr>
+              <a:t>Puntualidad.</a:t>
+            </a:r>
+            <a:r>
+              <a:rPr sz="1300" b="0" i="0">
+                <a:solidFill>
+                  <a:srgbClr val="2B2B2B"/>
+                </a:solidFill>
+                <a:latin typeface="Calibri"/>
+              </a:rPr>
+              <a:t> Se empieza a la hora que indica el pie de estas diapositivas: los primeros minutos son el encuadre de la sesión, y quien llega tarde llega sin consigna.</a:t>
+            </a:r>
+          </a:p>
+        </p:txBody>
+      </p:sp>
+      <p:sp>
+        <p:nvSpPr>
+          <p:cNvPr id="6" name="Rounded Rectangle 5"/>
+          <p:cNvSpPr/>
+          <p:nvPr/>
+        </p:nvSpPr>
+        <p:spPr>
+          <a:xfrm>
+            <a:off x="640080" y="2935224"/>
+            <a:ext cx="10911535" cy="1225296"/>
+          </a:xfrm>
+          <a:prstGeom prst="roundRect">
+            <a:avLst/>
+          </a:prstGeom>
+          <a:solidFill>
+            <a:srgbClr val="FDECD8"/>
+          </a:solidFill>
+          <a:ln>
+            <a:noFill/>
+          </a:ln>
+          <a:effectLst/>
+        </p:spPr>
+        <p:style>
+          <a:lnRef idx="1">
+            <a:schemeClr val="accent1"/>
+          </a:lnRef>
+          <a:fillRef idx="3">
+            <a:schemeClr val="accent1"/>
+          </a:fillRef>
+          <a:effectRef idx="2">
+            <a:schemeClr val="accent1"/>
+          </a:effectRef>
+          <a:fontRef idx="minor">
+            <a:schemeClr val="lt1"/>
+          </a:fontRef>
+        </p:style>
+        <p:txBody>
+          <a:bodyPr rtlCol="0" anchor="ctr"/>
+          <a:lstStyle/>
+          <a:p>
+            <a:pPr algn="ctr"/>
+          </a:p>
+        </p:txBody>
+      </p:sp>
+      <p:sp>
+        <p:nvSpPr>
+          <p:cNvPr id="7" name="TextBox 6"/>
+          <p:cNvSpPr txBox="1"/>
+          <p:nvPr/>
+        </p:nvSpPr>
+        <p:spPr>
+          <a:xfrm>
+            <a:off x="868680" y="3044952"/>
+            <a:ext cx="10454335" cy="1005840"/>
+          </a:xfrm>
+          <a:prstGeom prst="rect">
+            <a:avLst/>
+          </a:prstGeom>
+          <a:noFill/>
+        </p:spPr>
+        <p:txBody>
+          <a:bodyPr wrap="square" anchor="t" lIns="0" rIns="0" tIns="0" bIns="0">
+            <a:spAutoFit/>
+          </a:bodyPr>
+          <a:lstStyle/>
+          <a:p>
+            <a:r>
+              <a:rPr sz="1300" b="1" i="0">
+                <a:solidFill>
+                  <a:srgbClr val="0C2340"/>
+                </a:solidFill>
+                <a:latin typeface="Calibri"/>
+              </a:rPr>
+              <a:t>💡 Aclaración</a:t>
+            </a:r>
+          </a:p>
+          <a:p>
+            <a:pPr>
+              <a:spcBef>
+                <a:spcPts val="400"/>
+              </a:spcBef>
+            </a:pPr>
+            <a:r>
+              <a:rPr sz="1300" b="1" i="0">
+                <a:solidFill>
+                  <a:srgbClr val="2B2B2B"/>
+                </a:solidFill>
+                <a:latin typeface="Calibri"/>
+              </a:rPr>
+              <a:t>Cámara</a:t>
+            </a:r>
+            <a:r>
+              <a:rPr sz="1300" b="0" i="0">
+                <a:solidFill>
+                  <a:srgbClr val="2B2B2B"/>
+                </a:solidFill>
+                <a:latin typeface="Calibri"/>
+              </a:rPr>
+              <a:t> encendida al saludar y durante el taller si su conexión lo permite; no es obligatoria. </a:t>
+            </a:r>
+            <a:r>
+              <a:rPr sz="1300" b="1" i="0">
+                <a:solidFill>
+                  <a:srgbClr val="2B2B2B"/>
+                </a:solidFill>
+                <a:latin typeface="Calibri"/>
+              </a:rPr>
+              <a:t>Micrófono</a:t>
+            </a:r>
+            <a:r>
+              <a:rPr sz="1300" b="0" i="0">
+                <a:solidFill>
+                  <a:srgbClr val="2B2B2B"/>
+                </a:solidFill>
+                <a:latin typeface="Calibri"/>
+              </a:rPr>
+              <a:t> apagado mientras alguien expone. Si no quiere hablar, escriba en el chat: se lee todo.</a:t>
+            </a:r>
+          </a:p>
+        </p:txBody>
+      </p:sp>
+      <p:sp>
+        <p:nvSpPr>
+          <p:cNvPr id="8" name="Rounded Rectangle 7"/>
+          <p:cNvSpPr/>
+          <p:nvPr/>
+        </p:nvSpPr>
+        <p:spPr>
+          <a:xfrm>
+            <a:off x="640080" y="4389120"/>
+            <a:ext cx="10911535" cy="969264"/>
+          </a:xfrm>
+          <a:prstGeom prst="roundRect">
+            <a:avLst/>
+          </a:prstGeom>
+          <a:solidFill>
+            <a:srgbClr val="FBE4E4"/>
+          </a:solidFill>
+          <a:ln>
+            <a:noFill/>
+          </a:ln>
+          <a:effectLst/>
+        </p:spPr>
+        <p:style>
+          <a:lnRef idx="1">
+            <a:schemeClr val="accent1"/>
+          </a:lnRef>
+          <a:fillRef idx="3">
+            <a:schemeClr val="accent1"/>
+          </a:fillRef>
+          <a:effectRef idx="2">
+            <a:schemeClr val="accent1"/>
+          </a:effectRef>
+          <a:fontRef idx="minor">
+            <a:schemeClr val="lt1"/>
+          </a:fontRef>
+        </p:style>
+        <p:txBody>
+          <a:bodyPr rtlCol="0" anchor="ctr"/>
+          <a:lstStyle/>
+          <a:p>
+            <a:pPr algn="ctr"/>
+          </a:p>
+        </p:txBody>
+      </p:sp>
+      <p:sp>
+        <p:nvSpPr>
+          <p:cNvPr id="9" name="TextBox 8"/>
+          <p:cNvSpPr txBox="1"/>
+          <p:nvPr/>
+        </p:nvSpPr>
+        <p:spPr>
+          <a:xfrm>
+            <a:off x="868680" y="4498848"/>
+            <a:ext cx="10454335" cy="749808"/>
+          </a:xfrm>
+          <a:prstGeom prst="rect">
+            <a:avLst/>
+          </a:prstGeom>
+          <a:noFill/>
+        </p:spPr>
+        <p:txBody>
+          <a:bodyPr wrap="square" anchor="t" lIns="0" rIns="0" tIns="0" bIns="0">
+            <a:spAutoFit/>
+          </a:bodyPr>
+          <a:lstStyle/>
+          <a:p>
+            <a:r>
+              <a:rPr sz="1300" b="1" i="0">
+                <a:solidFill>
+                  <a:srgbClr val="0C2340"/>
+                </a:solidFill>
+                <a:latin typeface="Calibri"/>
+              </a:rPr>
+              <a:t>⚠️ Importante</a:t>
+            </a:r>
+          </a:p>
+          <a:p>
+            <a:pPr>
+              <a:spcBef>
+                <a:spcPts val="400"/>
+              </a:spcBef>
+            </a:pPr>
+            <a:r>
+              <a:rPr sz="1300" b="1" i="0">
+                <a:solidFill>
+                  <a:srgbClr val="2B2B2B"/>
+                </a:solidFill>
+                <a:latin typeface="Calibri"/>
+              </a:rPr>
+              <a:t>Respeto en el foro y en el tablero.</a:t>
+            </a:r>
+            <a:r>
+              <a:rPr sz="1300" b="0" i="0">
+                <a:solidFill>
+                  <a:srgbClr val="2B2B2B"/>
+                </a:solidFill>
+                <a:latin typeface="Calibri"/>
+              </a:rPr>
+              <a:t> Se comenta el texto, nunca a la persona. Un comentario útil dice qué mejorar y cómo, no solo qué está mal.</a:t>
+            </a:r>
+          </a:p>
+        </p:txBody>
+      </p:sp>
+      <p:sp>
+        <p:nvSpPr>
+          <p:cNvPr id="10" name="TextBox 9"/>
+          <p:cNvSpPr txBox="1"/>
+          <p:nvPr/>
+        </p:nvSpPr>
+        <p:spPr>
+          <a:xfrm>
+            <a:off x="2194560" y="6446520"/>
+            <a:ext cx="5943600" cy="274320"/>
+          </a:xfrm>
+          <a:prstGeom prst="rect">
+            <a:avLst/>
+          </a:prstGeom>
+          <a:noFill/>
+        </p:spPr>
+        <p:txBody>
+          <a:bodyPr wrap="square" anchor="t" lIns="0" rIns="0" tIns="0" bIns="0">
+            <a:spAutoFit/>
+          </a:bodyPr>
+          <a:lstStyle/>
+          <a:p>
+            <a:pPr algn="l"/>
+            <a:r>
+              <a:rPr sz="1000" b="1" i="0">
+                <a:solidFill>
+                  <a:srgbClr val="8F989D"/>
+                </a:solidFill>
+                <a:latin typeface="Calibri"/>
+              </a:rPr>
+              <a:t>Inicio 5:10 pm</a:t>
+            </a:r>
+          </a:p>
+        </p:txBody>
+      </p:sp>
+      <p:sp>
+        <p:nvSpPr>
+          <p:cNvPr id="11" name="TextBox 10"/>
+          <p:cNvSpPr txBox="1"/>
+          <p:nvPr/>
+        </p:nvSpPr>
+        <p:spPr>
+          <a:xfrm>
+            <a:off x="11094415" y="6446520"/>
+            <a:ext cx="548640" cy="274320"/>
+          </a:xfrm>
+          <a:prstGeom prst="rect">
+            <a:avLst/>
+          </a:prstGeom>
+          <a:noFill/>
+        </p:spPr>
+        <p:txBody>
+          <a:bodyPr wrap="square" anchor="t" lIns="0" rIns="0" tIns="0" bIns="0">
+            <a:spAutoFit/>
+          </a:bodyPr>
+          <a:lstStyle/>
+          <a:p>
+            <a:pPr algn="r"/>
+            <a:r>
+              <a:rPr sz="1000" b="1" i="0">
+                <a:solidFill>
+                  <a:srgbClr val="8F989D"/>
+                </a:solidFill>
+                <a:latin typeface="Calibri"/>
+              </a:rPr>
+              <a:t>16</a:t>
+            </a:r>
+          </a:p>
+        </p:txBody>
+      </p:sp>
+    </p:spTree>
+  </p:cSld>
+  <p:clrMapOvr>
+    <a:masterClrMapping/>
+  </p:clrMapOvr>
+</p:sld>
+</file>
+
+<file path=ppt/slides/slide17.xml><?xml version="1.0" encoding="utf-8"?>
+<p:sld xmlns:a="http://schemas.openxmlformats.org/drawingml/2006/main" xmlns:p="http://schemas.openxmlformats.org/presentationml/2006/main" xmlns:r="http://schemas.openxmlformats.org/officeDocument/2006/relationships">
+  <p:cSld>
+    <p:bg>
+      <p:bgPr>
+        <a:solidFill>
+          <a:srgbClr val="FFFFFF"/>
+        </a:solidFill>
+        <a:effectLst/>
+      </p:bgPr>
+    </p:bg>
+    <p:spTree>
+      <p:nvGrpSpPr>
+        <p:cNvPr id="1" name=""/>
+        <p:cNvGrpSpPr/>
+        <p:nvPr/>
+      </p:nvGrpSpPr>
+      <p:grpSpPr/>
+      <p:sp>
+        <p:nvSpPr>
+          <p:cNvPr id="2" name="Rectangle 1"/>
+          <p:cNvSpPr/>
+          <p:nvPr/>
+        </p:nvSpPr>
+        <p:spPr>
+          <a:xfrm>
+            <a:off x="0" y="0"/>
+            <a:ext cx="12191695" cy="1188720"/>
+          </a:xfrm>
+          <a:prstGeom prst="rect">
+            <a:avLst/>
+          </a:prstGeom>
+          <a:solidFill>
+            <a:srgbClr val="0C2340"/>
+          </a:solidFill>
+          <a:ln>
+            <a:noFill/>
+          </a:ln>
+          <a:effectLst/>
+        </p:spPr>
+        <p:style>
+          <a:lnRef idx="1">
+            <a:schemeClr val="accent1"/>
+          </a:lnRef>
+          <a:fillRef idx="3">
+            <a:schemeClr val="accent1"/>
+          </a:fillRef>
+          <a:effectRef idx="2">
+            <a:schemeClr val="accent1"/>
+          </a:effectRef>
+          <a:fontRef idx="minor">
+            <a:schemeClr val="lt1"/>
+          </a:fontRef>
+        </p:style>
+        <p:txBody>
+          <a:bodyPr rtlCol="0" anchor="ctr"/>
+          <a:lstStyle/>
+          <a:p>
+            <a:pPr algn="ctr"/>
+          </a:p>
+        </p:txBody>
+      </p:sp>
+      <p:sp>
+        <p:nvSpPr>
+          <p:cNvPr id="3" name="TextBox 2"/>
+          <p:cNvSpPr txBox="1"/>
+          <p:nvPr/>
+        </p:nvSpPr>
+        <p:spPr>
+          <a:xfrm>
+            <a:off x="640080" y="0"/>
+            <a:ext cx="9082735" cy="1188720"/>
+          </a:xfrm>
+          <a:prstGeom prst="rect">
+            <a:avLst/>
+          </a:prstGeom>
+          <a:noFill/>
+        </p:spPr>
+        <p:txBody>
+          <a:bodyPr wrap="square" anchor="ctr" lIns="0" rIns="0" tIns="0" bIns="0">
+            <a:spAutoFit/>
+          </a:bodyPr>
+          <a:lstStyle/>
+          <a:p>
+            <a:pPr algn="ctr"/>
+            <a:r>
+              <a:rPr sz="2600" b="1" i="0">
+                <a:solidFill>
+                  <a:srgbClr val="FFFFFF"/>
+                </a:solidFill>
+                <a:latin typeface="Calibri"/>
+              </a:rPr>
+              <a:t>Preguntas frecuentes del primer día</a:t>
+            </a:r>
+          </a:p>
+        </p:txBody>
+      </p:sp>
+      <p:sp>
+        <p:nvSpPr>
+          <p:cNvPr id="4" name="Rounded Rectangle 3"/>
+          <p:cNvSpPr/>
+          <p:nvPr/>
+        </p:nvSpPr>
+        <p:spPr>
+          <a:xfrm>
+            <a:off x="640080" y="1737360"/>
+            <a:ext cx="10911535" cy="1225296"/>
+          </a:xfrm>
+          <a:prstGeom prst="roundRect">
+            <a:avLst/>
+          </a:prstGeom>
+          <a:solidFill>
+            <a:srgbClr val="E8F5EC"/>
+          </a:solidFill>
+          <a:ln>
+            <a:noFill/>
+          </a:ln>
+          <a:effectLst/>
+        </p:spPr>
+        <p:style>
+          <a:lnRef idx="1">
+            <a:schemeClr val="accent1"/>
+          </a:lnRef>
+          <a:fillRef idx="3">
+            <a:schemeClr val="accent1"/>
+          </a:fillRef>
+          <a:effectRef idx="2">
+            <a:schemeClr val="accent1"/>
+          </a:effectRef>
+          <a:fontRef idx="minor">
+            <a:schemeClr val="lt1"/>
+          </a:fontRef>
+        </p:style>
+        <p:txBody>
+          <a:bodyPr rtlCol="0" anchor="ctr"/>
+          <a:lstStyle/>
+          <a:p>
+            <a:pPr algn="ctr"/>
+          </a:p>
+        </p:txBody>
+      </p:sp>
+      <p:sp>
+        <p:nvSpPr>
+          <p:cNvPr id="5" name="TextBox 4"/>
+          <p:cNvSpPr txBox="1"/>
+          <p:nvPr/>
+        </p:nvSpPr>
+        <p:spPr>
+          <a:xfrm>
+            <a:off x="868680" y="1847088"/>
+            <a:ext cx="10454335" cy="1005840"/>
+          </a:xfrm>
+          <a:prstGeom prst="rect">
+            <a:avLst/>
+          </a:prstGeom>
+          <a:noFill/>
+        </p:spPr>
+        <p:txBody>
+          <a:bodyPr wrap="square" anchor="t" lIns="0" rIns="0" tIns="0" bIns="0">
+            <a:spAutoFit/>
+          </a:bodyPr>
+          <a:lstStyle/>
+          <a:p>
+            <a:r>
+              <a:rPr sz="1300" b="1" i="0">
+                <a:solidFill>
+                  <a:srgbClr val="0C2340"/>
+                </a:solidFill>
+                <a:latin typeface="Calibri"/>
+              </a:rPr>
+              <a:t>ℹ️ Nota institucional</a:t>
+            </a:r>
+          </a:p>
+          <a:p>
+            <a:pPr>
+              <a:spcBef>
+                <a:spcPts val="400"/>
+              </a:spcBef>
+            </a:pPr>
+            <a:r>
+              <a:rPr sz="1300" b="1" i="0">
+                <a:solidFill>
+                  <a:srgbClr val="2B2B2B"/>
+                </a:solidFill>
+                <a:latin typeface="Calibri"/>
+              </a:rPr>
+              <a:t>“¿Esta materia se pierde fácil?”</a:t>
+            </a:r>
+            <a:r>
+              <a:rPr sz="1300" b="0" i="0">
+                <a:solidFill>
+                  <a:srgbClr val="2B2B2B"/>
+                </a:solidFill>
+                <a:latin typeface="Calibri"/>
+              </a:rPr>
+              <a:t> No, si entrega. Se evalúa por avances acumulados: quien entrega cada corte, pasa. El riesgo no es la dificultad, es dejar todo para la última semana.</a:t>
+            </a:r>
+          </a:p>
+        </p:txBody>
+      </p:sp>
+      <p:sp>
+        <p:nvSpPr>
+          <p:cNvPr id="6" name="Rounded Rectangle 5"/>
+          <p:cNvSpPr/>
+          <p:nvPr/>
+        </p:nvSpPr>
+        <p:spPr>
+          <a:xfrm>
+            <a:off x="640080" y="3191256"/>
+            <a:ext cx="10911535" cy="1225296"/>
+          </a:xfrm>
+          <a:prstGeom prst="roundRect">
+            <a:avLst/>
+          </a:prstGeom>
+          <a:solidFill>
+            <a:srgbClr val="FDECD8"/>
+          </a:solidFill>
+          <a:ln>
+            <a:noFill/>
+          </a:ln>
+          <a:effectLst/>
+        </p:spPr>
+        <p:style>
+          <a:lnRef idx="1">
+            <a:schemeClr val="accent1"/>
+          </a:lnRef>
+          <a:fillRef idx="3">
+            <a:schemeClr val="accent1"/>
+          </a:fillRef>
+          <a:effectRef idx="2">
+            <a:schemeClr val="accent1"/>
+          </a:effectRef>
+          <a:fontRef idx="minor">
+            <a:schemeClr val="lt1"/>
+          </a:fontRef>
+        </p:style>
+        <p:txBody>
+          <a:bodyPr rtlCol="0" anchor="ctr"/>
+          <a:lstStyle/>
+          <a:p>
+            <a:pPr algn="ctr"/>
+          </a:p>
+        </p:txBody>
+      </p:sp>
+      <p:sp>
+        <p:nvSpPr>
+          <p:cNvPr id="7" name="TextBox 6"/>
+          <p:cNvSpPr txBox="1"/>
+          <p:nvPr/>
+        </p:nvSpPr>
+        <p:spPr>
+          <a:xfrm>
+            <a:off x="868680" y="3300984"/>
+            <a:ext cx="10454335" cy="1005840"/>
+          </a:xfrm>
+          <a:prstGeom prst="rect">
+            <a:avLst/>
+          </a:prstGeom>
+          <a:noFill/>
+        </p:spPr>
+        <p:txBody>
+          <a:bodyPr wrap="square" anchor="t" lIns="0" rIns="0" tIns="0" bIns="0">
+            <a:spAutoFit/>
+          </a:bodyPr>
+          <a:lstStyle/>
+          <a:p>
+            <a:r>
+              <a:rPr sz="1300" b="1" i="0">
+                <a:solidFill>
+                  <a:srgbClr val="0C2340"/>
+                </a:solidFill>
+                <a:latin typeface="Calibri"/>
+              </a:rPr>
+              <a:t>💡 Aclaración</a:t>
+            </a:r>
+          </a:p>
+          <a:p>
+            <a:pPr>
+              <a:spcBef>
+                <a:spcPts val="400"/>
+              </a:spcBef>
+            </a:pPr>
+            <a:r>
+              <a:rPr sz="1300" b="1" i="0">
+                <a:solidFill>
+                  <a:srgbClr val="2B2B2B"/>
+                </a:solidFill>
+                <a:latin typeface="Calibri"/>
+              </a:rPr>
+              <a:t>“¿Puedo trabajar solo o tiene que ser en grupo?”</a:t>
+            </a:r>
+            <a:r>
+              <a:rPr sz="1300" b="0" i="0">
+                <a:solidFill>
+                  <a:srgbClr val="2B2B2B"/>
+                </a:solidFill>
+                <a:latin typeface="Calibri"/>
+              </a:rPr>
+              <a:t> El artículo de este curso es </a:t>
+            </a:r>
+            <a:r>
+              <a:rPr sz="1300" b="1" i="0">
+                <a:solidFill>
+                  <a:srgbClr val="2B2B2B"/>
+                </a:solidFill>
+                <a:latin typeface="Calibri"/>
+              </a:rPr>
+              <a:t>individual</a:t>
+            </a:r>
+            <a:r>
+              <a:rPr sz="1300" b="0" i="0">
+                <a:solidFill>
+                  <a:srgbClr val="2B2B2B"/>
+                </a:solidFill>
+                <a:latin typeface="Calibri"/>
+              </a:rPr>
+              <a:t>, salvo que el enunciado de la ACA diga otra cosa. </a:t>
+            </a:r>
+            <a:r>
+              <a:rPr sz="1300" b="1" i="0">
+                <a:solidFill>
+                  <a:srgbClr val="2B2B2B"/>
+                </a:solidFill>
+                <a:latin typeface="Calibri"/>
+              </a:rPr>
+              <a:t>“¿Y si aún no tengo tema?”</a:t>
+            </a:r>
+            <a:r>
+              <a:rPr sz="1300" b="0" i="0">
+                <a:solidFill>
+                  <a:srgbClr val="2B2B2B"/>
+                </a:solidFill>
+                <a:latin typeface="Calibri"/>
+              </a:rPr>
+              <a:t> Hoy sale con uno tentativo; en la Sesión 02 se afina.</a:t>
+            </a:r>
+          </a:p>
+        </p:txBody>
+      </p:sp>
+      <p:sp>
+        <p:nvSpPr>
+          <p:cNvPr id="8" name="Rounded Rectangle 7"/>
+          <p:cNvSpPr/>
+          <p:nvPr/>
+        </p:nvSpPr>
+        <p:spPr>
+          <a:xfrm>
+            <a:off x="640080" y="4645152"/>
+            <a:ext cx="10911535" cy="1225296"/>
+          </a:xfrm>
+          <a:prstGeom prst="roundRect">
+            <a:avLst/>
+          </a:prstGeom>
+          <a:solidFill>
+            <a:srgbClr val="FBE4E4"/>
+          </a:solidFill>
+          <a:ln>
+            <a:noFill/>
+          </a:ln>
+          <a:effectLst/>
+        </p:spPr>
+        <p:style>
+          <a:lnRef idx="1">
+            <a:schemeClr val="accent1"/>
+          </a:lnRef>
+          <a:fillRef idx="3">
+            <a:schemeClr val="accent1"/>
+          </a:fillRef>
+          <a:effectRef idx="2">
+            <a:schemeClr val="accent1"/>
+          </a:effectRef>
+          <a:fontRef idx="minor">
+            <a:schemeClr val="lt1"/>
+          </a:fontRef>
+        </p:style>
+        <p:txBody>
+          <a:bodyPr rtlCol="0" anchor="ctr"/>
+          <a:lstStyle/>
+          <a:p>
+            <a:pPr algn="ctr"/>
+          </a:p>
+        </p:txBody>
+      </p:sp>
+      <p:sp>
+        <p:nvSpPr>
+          <p:cNvPr id="9" name="TextBox 8"/>
+          <p:cNvSpPr txBox="1"/>
+          <p:nvPr/>
+        </p:nvSpPr>
+        <p:spPr>
+          <a:xfrm>
+            <a:off x="868680" y="4754880"/>
+            <a:ext cx="10454335" cy="1005840"/>
+          </a:xfrm>
+          <a:prstGeom prst="rect">
+            <a:avLst/>
+          </a:prstGeom>
+          <a:noFill/>
+        </p:spPr>
+        <p:txBody>
+          <a:bodyPr wrap="square" anchor="t" lIns="0" rIns="0" tIns="0" bIns="0">
+            <a:spAutoFit/>
+          </a:bodyPr>
+          <a:lstStyle/>
+          <a:p>
+            <a:r>
+              <a:rPr sz="1300" b="1" i="0">
+                <a:solidFill>
+                  <a:srgbClr val="0C2340"/>
+                </a:solidFill>
+                <a:latin typeface="Calibri"/>
+              </a:rPr>
+              <a:t>⚠️ Importante</a:t>
+            </a:r>
+          </a:p>
+          <a:p>
+            <a:pPr>
+              <a:spcBef>
+                <a:spcPts val="400"/>
+              </a:spcBef>
+            </a:pPr>
+            <a:r>
+              <a:rPr sz="1300" b="1" i="0">
+                <a:solidFill>
+                  <a:srgbClr val="2B2B2B"/>
+                </a:solidFill>
+                <a:latin typeface="Calibri"/>
+              </a:rPr>
+              <a:t>“¿Me sirve un trabajo de otro semestre?”</a:t>
+            </a:r>
+            <a:r>
+              <a:rPr sz="1300" b="0" i="0">
+                <a:solidFill>
+                  <a:srgbClr val="2B2B2B"/>
+                </a:solidFill>
+                <a:latin typeface="Calibri"/>
+              </a:rPr>
+              <a:t> Puede </a:t>
+            </a:r>
+            <a:r>
+              <a:rPr sz="1300" b="1" i="0">
+                <a:solidFill>
+                  <a:srgbClr val="2B2B2B"/>
+                </a:solidFill>
+                <a:latin typeface="Calibri"/>
+              </a:rPr>
+              <a:t>partir</a:t>
+            </a:r>
+            <a:r>
+              <a:rPr sz="1300" b="0" i="0">
+                <a:solidFill>
+                  <a:srgbClr val="2B2B2B"/>
+                </a:solidFill>
+                <a:latin typeface="Calibri"/>
+              </a:rPr>
+              <a:t> de un tema suyo anterior, pero el texto debe ser nuevo y hay que citar lo que reutilice. Reentregarlo tal cual es falta académica.</a:t>
+            </a:r>
+          </a:p>
+        </p:txBody>
+      </p:sp>
+      <p:sp>
+        <p:nvSpPr>
+          <p:cNvPr id="10" name="TextBox 9"/>
+          <p:cNvSpPr txBox="1"/>
+          <p:nvPr/>
+        </p:nvSpPr>
+        <p:spPr>
+          <a:xfrm>
+            <a:off x="2194560" y="6446520"/>
+            <a:ext cx="5943600" cy="274320"/>
+          </a:xfrm>
+          <a:prstGeom prst="rect">
+            <a:avLst/>
+          </a:prstGeom>
+          <a:noFill/>
+        </p:spPr>
+        <p:txBody>
+          <a:bodyPr wrap="square" anchor="t" lIns="0" rIns="0" tIns="0" bIns="0">
+            <a:spAutoFit/>
+          </a:bodyPr>
+          <a:lstStyle/>
+          <a:p>
+            <a:pPr algn="l"/>
+            <a:r>
+              <a:rPr sz="1000" b="1" i="0">
+                <a:solidFill>
+                  <a:srgbClr val="8F989D"/>
+                </a:solidFill>
+                <a:latin typeface="Calibri"/>
+              </a:rPr>
+              <a:t>Inicio 5:10 pm</a:t>
+            </a:r>
+          </a:p>
+        </p:txBody>
+      </p:sp>
+      <p:sp>
+        <p:nvSpPr>
+          <p:cNvPr id="11" name="TextBox 10"/>
+          <p:cNvSpPr txBox="1"/>
+          <p:nvPr/>
+        </p:nvSpPr>
+        <p:spPr>
+          <a:xfrm>
+            <a:off x="11094415" y="6446520"/>
+            <a:ext cx="548640" cy="274320"/>
+          </a:xfrm>
+          <a:prstGeom prst="rect">
+            <a:avLst/>
+          </a:prstGeom>
+          <a:noFill/>
+        </p:spPr>
+        <p:txBody>
+          <a:bodyPr wrap="square" anchor="t" lIns="0" rIns="0" tIns="0" bIns="0">
+            <a:spAutoFit/>
+          </a:bodyPr>
+          <a:lstStyle/>
+          <a:p>
+            <a:pPr algn="r"/>
+            <a:r>
+              <a:rPr sz="1000" b="1" i="0">
+                <a:solidFill>
+                  <a:srgbClr val="8F989D"/>
+                </a:solidFill>
+                <a:latin typeface="Calibri"/>
+              </a:rPr>
+              <a:t>17</a:t>
+            </a:r>
+          </a:p>
+        </p:txBody>
+      </p:sp>
+    </p:spTree>
+  </p:cSld>
+  <p:clrMapOvr>
+    <a:masterClrMapping/>
+  </p:clrMapOvr>
+</p:sld>
+</file>
+
+<file path=ppt/slides/slide18.xml><?xml version="1.0" encoding="utf-8"?>
+<p:sld xmlns:a="http://schemas.openxmlformats.org/drawingml/2006/main" xmlns:p="http://schemas.openxmlformats.org/presentationml/2006/main" xmlns:r="http://schemas.openxmlformats.org/officeDocument/2006/relationships">
+  <p:cSld>
+    <p:bg>
+      <p:bgPr>
+        <a:solidFill>
+          <a:srgbClr val="FFFFFF"/>
+        </a:solidFill>
+        <a:effectLst/>
+      </p:bgPr>
+    </p:bg>
+    <p:spTree>
+      <p:nvGrpSpPr>
+        <p:cNvPr id="1" name=""/>
+        <p:cNvGrpSpPr/>
+        <p:nvPr/>
+      </p:nvGrpSpPr>
+      <p:grpSpPr/>
+      <p:sp>
+        <p:nvSpPr>
+          <p:cNvPr id="2" name="Rectangle 1"/>
+          <p:cNvSpPr/>
+          <p:nvPr/>
+        </p:nvSpPr>
+        <p:spPr>
+          <a:xfrm>
+            <a:off x="0" y="0"/>
+            <a:ext cx="12191695" cy="1188720"/>
+          </a:xfrm>
+          <a:prstGeom prst="rect">
+            <a:avLst/>
+          </a:prstGeom>
+          <a:solidFill>
+            <a:srgbClr val="0C2340"/>
+          </a:solidFill>
+          <a:ln>
+            <a:noFill/>
+          </a:ln>
+          <a:effectLst/>
+        </p:spPr>
+        <p:style>
+          <a:lnRef idx="1">
+            <a:schemeClr val="accent1"/>
+          </a:lnRef>
+          <a:fillRef idx="3">
+            <a:schemeClr val="accent1"/>
+          </a:fillRef>
+          <a:effectRef idx="2">
+            <a:schemeClr val="accent1"/>
+          </a:effectRef>
+          <a:fontRef idx="minor">
+            <a:schemeClr val="lt1"/>
+          </a:fontRef>
+        </p:style>
+        <p:txBody>
+          <a:bodyPr rtlCol="0" anchor="ctr"/>
+          <a:lstStyle/>
+          <a:p>
+            <a:pPr algn="ctr"/>
+          </a:p>
+        </p:txBody>
+      </p:sp>
+      <p:sp>
+        <p:nvSpPr>
+          <p:cNvPr id="3" name="TextBox 2"/>
+          <p:cNvSpPr txBox="1"/>
+          <p:nvPr/>
+        </p:nvSpPr>
+        <p:spPr>
+          <a:xfrm>
+            <a:off x="640080" y="0"/>
+            <a:ext cx="9082735" cy="1188720"/>
+          </a:xfrm>
+          <a:prstGeom prst="rect">
+            <a:avLst/>
+          </a:prstGeom>
+          <a:noFill/>
+        </p:spPr>
+        <p:txBody>
+          <a:bodyPr wrap="square" anchor="ctr" lIns="0" rIns="0" tIns="0" bIns="0">
+            <a:spAutoFit/>
+          </a:bodyPr>
+          <a:lstStyle/>
+          <a:p>
+            <a:pPr algn="ctr"/>
+            <a:r>
+              <a:rPr sz="2600" b="1" i="0">
+                <a:solidFill>
+                  <a:srgbClr val="FFFFFF"/>
+                </a:solidFill>
+                <a:latin typeface="Calibri"/>
+              </a:rPr>
+              <a:t>Lo que debe tener listo para la Sesión 02</a:t>
+            </a:r>
+          </a:p>
+        </p:txBody>
+      </p:sp>
+      <p:sp>
+        <p:nvSpPr>
+          <p:cNvPr id="4" name="TextBox 3"/>
+          <p:cNvSpPr txBox="1"/>
+          <p:nvPr/>
+        </p:nvSpPr>
+        <p:spPr>
+          <a:xfrm>
+            <a:off x="640080" y="1691639"/>
+            <a:ext cx="10911535" cy="4617720"/>
+          </a:xfrm>
+          <a:prstGeom prst="rect">
+            <a:avLst/>
+          </a:prstGeom>
+          <a:noFill/>
+        </p:spPr>
+        <p:txBody>
+          <a:bodyPr wrap="square" anchor="t" lIns="0" rIns="0" tIns="0" bIns="0">
+            <a:spAutoFit/>
+          </a:bodyPr>
+          <a:lstStyle/>
+          <a:p>
+            <a:pPr>
+              <a:spcAft>
+                <a:spcPts val="1000"/>
+              </a:spcAft>
+            </a:pPr>
+            <a:r>
+              <a:rPr sz="1600" b="0" i="0">
+                <a:solidFill>
+                  <a:srgbClr val="2B2B2B"/>
+                </a:solidFill>
+                <a:latin typeface="Calibri"/>
+              </a:rPr>
+              <a:t>–   </a:t>
+            </a:r>
+            <a:r>
+              <a:rPr sz="1600" b="1" i="0">
+                <a:solidFill>
+                  <a:srgbClr val="2B2B2B"/>
+                </a:solidFill>
+                <a:latin typeface="Calibri"/>
+              </a:rPr>
+              <a:t>Lectura autónoma (obligatoria):</a:t>
+            </a:r>
+            <a:r>
+              <a:rPr sz="1600" b="0" i="0">
+                <a:solidFill>
+                  <a:srgbClr val="2B2B2B"/>
+                </a:solidFill>
+                <a:latin typeface="Calibri"/>
+              </a:rPr>
+              <a:t> unidades </a:t>
+            </a:r>
+            <a:r>
+              <a:rPr sz="1600" b="1" i="0">
+                <a:solidFill>
+                  <a:srgbClr val="2B2B2B"/>
+                </a:solidFill>
+                <a:latin typeface="Calibri"/>
+              </a:rPr>
+              <a:t>U1 y U2</a:t>
+            </a:r>
+            <a:r>
+              <a:rPr sz="1600" b="0" i="0">
+                <a:solidFill>
+                  <a:srgbClr val="2B2B2B"/>
+                </a:solidFill>
+                <a:latin typeface="Calibri"/>
+              </a:rPr>
+              <a:t> del Syllabus — presentación del Syllabus y producto final (el artículo) y </a:t>
+            </a:r>
+            <a:r>
+              <a:rPr sz="1600" b="1" i="0">
+                <a:solidFill>
+                  <a:srgbClr val="2B2B2B"/>
+                </a:solidFill>
+                <a:latin typeface="Calibri"/>
+              </a:rPr>
+              <a:t>fundamentos del método científico</a:t>
+            </a:r>
+            <a:r>
+              <a:rPr sz="1600" b="0" i="0">
+                <a:solidFill>
+                  <a:srgbClr val="2B2B2B"/>
+                </a:solidFill>
+                <a:latin typeface="Calibri"/>
+              </a:rPr>
+              <a:t>.</a:t>
+            </a:r>
+          </a:p>
+          <a:p>
+            <a:pPr lvl="1">
+              <a:spcAft>
+                <a:spcPts val="600"/>
+              </a:spcAft>
+            </a:pPr>
+            <a:r>
+              <a:rPr sz="1500" b="0" i="0">
+                <a:solidFill>
+                  <a:srgbClr val="2B2B2B"/>
+                </a:solidFill>
+                <a:latin typeface="Calibri"/>
+              </a:rPr>
+              <a:t>●   Hoy no se dictaron: se leen en casa y se </a:t>
+            </a:r>
+            <a:r>
+              <a:rPr sz="1500" b="1" i="0">
+                <a:solidFill>
+                  <a:srgbClr val="2B2B2B"/>
+                </a:solidFill>
+                <a:latin typeface="Calibri"/>
+              </a:rPr>
+              <a:t>retoman al abrir la Sesión 02</a:t>
+            </a:r>
+            <a:r>
+              <a:rPr sz="1500" b="0" i="0">
+                <a:solidFill>
+                  <a:srgbClr val="2B2B2B"/>
+                </a:solidFill>
+                <a:latin typeface="Calibri"/>
+              </a:rPr>
+              <a:t> con sus dudas en la mano.</a:t>
+            </a:r>
+          </a:p>
+          <a:p>
+            <a:pPr lvl="1">
+              <a:spcAft>
+                <a:spcPts val="600"/>
+              </a:spcAft>
+            </a:pPr>
+            <a:r>
+              <a:rPr sz="1500" b="0" i="0">
+                <a:solidFill>
+                  <a:srgbClr val="2B2B2B"/>
+                </a:solidFill>
+                <a:latin typeface="Calibri"/>
+              </a:rPr>
+              <a:t>●   Dónde: material de la Sesión 01 en CDigital — [URL CDigital — campus del curso pendiente]</a:t>
+            </a:r>
+          </a:p>
+          <a:p>
+            <a:pPr lvl="1">
+              <a:spcAft>
+                <a:spcPts val="600"/>
+              </a:spcAft>
+            </a:pPr>
+            <a:r>
+              <a:rPr sz="1500" b="0" i="0">
+                <a:solidFill>
+                  <a:srgbClr val="2B2B2B"/>
+                </a:solidFill>
+                <a:latin typeface="Calibri"/>
+              </a:rPr>
+              <a:t>●   Cuánto: 30–40 minutos. Anote </a:t>
+            </a:r>
+            <a:r>
+              <a:rPr sz="1500" b="1" i="0">
+                <a:solidFill>
+                  <a:srgbClr val="2B2B2B"/>
+                </a:solidFill>
+                <a:latin typeface="Calibri"/>
+              </a:rPr>
+              <a:t>dos dudas</a:t>
+            </a:r>
+            <a:r>
+              <a:rPr sz="1500" b="0" i="0">
+                <a:solidFill>
+                  <a:srgbClr val="2B2B2B"/>
+                </a:solidFill>
+                <a:latin typeface="Calibri"/>
+              </a:rPr>
+              <a:t> para plantearlas al inicio de la próxima clase.</a:t>
+            </a:r>
+          </a:p>
+          <a:p>
+            <a:pPr>
+              <a:spcAft>
+                <a:spcPts val="1000"/>
+              </a:spcAft>
+            </a:pPr>
+            <a:r>
+              <a:rPr sz="1600" b="0" i="0">
+                <a:solidFill>
+                  <a:srgbClr val="2B2B2B"/>
+                </a:solidFill>
+                <a:latin typeface="Calibri"/>
+              </a:rPr>
+              <a:t>–   </a:t>
+            </a:r>
+            <a:r>
+              <a:rPr sz="1600" b="1" i="0">
+                <a:solidFill>
+                  <a:srgbClr val="2B2B2B"/>
+                </a:solidFill>
+                <a:latin typeface="Calibri"/>
+              </a:rPr>
+              <a:t>Escriba su tema tentativo</a:t>
+            </a:r>
+            <a:r>
+              <a:rPr sz="1600" b="0" i="0">
+                <a:solidFill>
+                  <a:srgbClr val="2B2B2B"/>
+                </a:solidFill>
+                <a:latin typeface="Calibri"/>
+              </a:rPr>
+              <a:t> en un Google Doc llamado `S01_TemaTentativo_Apellido`: una sola frase con </a:t>
+            </a:r>
+            <a:r>
+              <a:rPr sz="1600" b="1" i="0">
+                <a:solidFill>
+                  <a:srgbClr val="2B2B2B"/>
+                </a:solidFill>
+                <a:latin typeface="Calibri"/>
+              </a:rPr>
+              <a:t>actor + fenómeno + contexto</a:t>
+            </a:r>
+            <a:r>
+              <a:rPr sz="1600" b="0" i="0">
+                <a:solidFill>
+                  <a:srgbClr val="2B2B2B"/>
+                </a:solidFill>
+                <a:latin typeface="Calibri"/>
+              </a:rPr>
+              <a:t>.</a:t>
+            </a:r>
+          </a:p>
+          <a:p>
+            <a:pPr lvl="1">
+              <a:spcAft>
+                <a:spcPts val="600"/>
+              </a:spcAft>
+            </a:pPr>
+            <a:r>
+              <a:rPr sz="1500" b="0" i="0">
+                <a:solidFill>
+                  <a:srgbClr val="2B2B2B"/>
+                </a:solidFill>
+                <a:latin typeface="Calibri"/>
+              </a:rPr>
+              <a:t>●   Agregue 2–3 líneas de </a:t>
+            </a:r>
+            <a:r>
+              <a:rPr sz="1500" b="1" i="0">
+                <a:solidFill>
+                  <a:srgbClr val="2B2B2B"/>
+                </a:solidFill>
+                <a:latin typeface="Calibri"/>
+              </a:rPr>
+              <a:t>por qué le importa</a:t>
+            </a:r>
+            <a:r>
+              <a:rPr sz="1500" b="0" i="0">
+                <a:solidFill>
+                  <a:srgbClr val="2B2B2B"/>
+                </a:solidFill>
+                <a:latin typeface="Calibri"/>
+              </a:rPr>
+              <a:t> ese problema.</a:t>
+            </a:r>
+          </a:p>
+          <a:p>
+            <a:pPr lvl="1">
+              <a:spcAft>
+                <a:spcPts val="600"/>
+              </a:spcAft>
+            </a:pPr>
+            <a:r>
+              <a:rPr sz="1500" b="0" i="0">
+                <a:solidFill>
+                  <a:srgbClr val="2B2B2B"/>
+                </a:solidFill>
+                <a:latin typeface="Calibri"/>
+              </a:rPr>
+              <a:t>●   Agregue </a:t>
+            </a:r>
+            <a:r>
+              <a:rPr sz="1500" b="1" i="0">
+                <a:solidFill>
+                  <a:srgbClr val="2B2B2B"/>
+                </a:solidFill>
+                <a:latin typeface="Calibri"/>
+              </a:rPr>
+              <a:t>una fuente exploratoria</a:t>
+            </a:r>
+            <a:r>
+              <a:rPr sz="1500" b="0" i="0">
+                <a:solidFill>
+                  <a:srgbClr val="2B2B2B"/>
+                </a:solidFill>
+                <a:latin typeface="Calibri"/>
+              </a:rPr>
+              <a:t> de Google Académico: autor, año y título.</a:t>
+            </a:r>
+          </a:p>
+          <a:p>
+            <a:pPr>
+              <a:spcAft>
+                <a:spcPts val="1000"/>
+              </a:spcAft>
+            </a:pPr>
+            <a:r>
+              <a:rPr sz="1600" b="0" i="0">
+                <a:solidFill>
+                  <a:srgbClr val="2B2B2B"/>
+                </a:solidFill>
+                <a:latin typeface="Calibri"/>
+              </a:rPr>
+              <a:t>–   </a:t>
+            </a:r>
+            <a:r>
+              <a:rPr sz="1600" b="1" i="0">
+                <a:solidFill>
+                  <a:srgbClr val="2B2B2B"/>
+                </a:solidFill>
+                <a:latin typeface="Calibri"/>
+              </a:rPr>
+              <a:t>Súbalo a CDigital antes de la Sesión 02</a:t>
+            </a:r>
+            <a:r>
+              <a:rPr sz="1600" b="0" i="0">
+                <a:solidFill>
+                  <a:srgbClr val="2B2B2B"/>
+                </a:solidFill>
+                <a:latin typeface="Calibri"/>
+              </a:rPr>
+              <a:t> y </a:t>
+            </a:r>
+            <a:r>
+              <a:rPr sz="1600" b="1" i="0">
+                <a:solidFill>
+                  <a:srgbClr val="2B2B2B"/>
+                </a:solidFill>
+                <a:latin typeface="Calibri"/>
+              </a:rPr>
+              <a:t>abra el enunciado de la ACA 1</a:t>
+            </a:r>
+            <a:r>
+              <a:rPr sz="1600" b="0" i="0">
+                <a:solidFill>
+                  <a:srgbClr val="2B2B2B"/>
+                </a:solidFill>
+                <a:latin typeface="Calibri"/>
+              </a:rPr>
+              <a:t> en `Clases/Recursos/ACAs/`, con sus fechas.</a:t>
+            </a:r>
+          </a:p>
+        </p:txBody>
+      </p:sp>
+      <p:sp>
+        <p:nvSpPr>
+          <p:cNvPr id="5" name="TextBox 4"/>
+          <p:cNvSpPr txBox="1"/>
+          <p:nvPr/>
+        </p:nvSpPr>
+        <p:spPr>
+          <a:xfrm>
+            <a:off x="2194560" y="6446520"/>
+            <a:ext cx="5943600" cy="274320"/>
+          </a:xfrm>
+          <a:prstGeom prst="rect">
+            <a:avLst/>
+          </a:prstGeom>
+          <a:noFill/>
+        </p:spPr>
+        <p:txBody>
+          <a:bodyPr wrap="square" anchor="t" lIns="0" rIns="0" tIns="0" bIns="0">
+            <a:spAutoFit/>
+          </a:bodyPr>
+          <a:lstStyle/>
+          <a:p>
+            <a:pPr algn="l"/>
+            <a:r>
+              <a:rPr sz="1000" b="1" i="0">
+                <a:solidFill>
+                  <a:srgbClr val="8F989D"/>
+                </a:solidFill>
+                <a:latin typeface="Calibri"/>
+              </a:rPr>
+              <a:t>Inicio 5:10 pm</a:t>
+            </a:r>
+          </a:p>
+        </p:txBody>
+      </p:sp>
+      <p:sp>
+        <p:nvSpPr>
+          <p:cNvPr id="6" name="TextBox 5"/>
+          <p:cNvSpPr txBox="1"/>
+          <p:nvPr/>
+        </p:nvSpPr>
+        <p:spPr>
+          <a:xfrm>
+            <a:off x="11094415" y="6446520"/>
+            <a:ext cx="548640" cy="274320"/>
+          </a:xfrm>
+          <a:prstGeom prst="rect">
+            <a:avLst/>
+          </a:prstGeom>
+          <a:noFill/>
+        </p:spPr>
+        <p:txBody>
+          <a:bodyPr wrap="square" anchor="t" lIns="0" rIns="0" tIns="0" bIns="0">
+            <a:spAutoFit/>
+          </a:bodyPr>
+          <a:lstStyle/>
+          <a:p>
+            <a:pPr algn="r"/>
+            <a:r>
+              <a:rPr sz="1000" b="1" i="0">
+                <a:solidFill>
+                  <a:srgbClr val="8F989D"/>
+                </a:solidFill>
+                <a:latin typeface="Calibri"/>
+              </a:rPr>
+              <a:t>18</a:t>
+            </a:r>
+          </a:p>
+        </p:txBody>
+      </p:sp>
+      <p:sp>
+        <p:nvSpPr>
+          <p:cNvPr id="7" name="TextBox 6"/>
+          <p:cNvSpPr txBox="1"/>
+          <p:nvPr/>
+        </p:nvSpPr>
+        <p:spPr>
+          <a:xfrm>
+            <a:off x="640080" y="5943600"/>
+            <a:ext cx="9997135" cy="457200"/>
+          </a:xfrm>
+          <a:prstGeom prst="rect">
+            <a:avLst/>
+          </a:prstGeom>
+          <a:noFill/>
+        </p:spPr>
+        <p:txBody>
+          <a:bodyPr wrap="square" anchor="t" lIns="0" rIns="0" tIns="0" bIns="0">
+            <a:spAutoFit/>
+          </a:bodyPr>
+          <a:lstStyle/>
+          <a:p>
+            <a:r>
+              <a:rPr sz="1200" b="0" i="1">
+                <a:solidFill>
+                  <a:srgbClr val="2B2B2B"/>
+                </a:solidFill>
+                <a:latin typeface="Calibri"/>
+              </a:rPr>
+              <a:t>La Sesión 02 arranca con los temas de ustedes en pantalla: quien llegue sin tema escrito trabaja esa hora en blanco.</a:t>
+            </a:r>
+          </a:p>
+        </p:txBody>
+      </p:sp>
+    </p:spTree>
+  </p:cSld>
+  <p:clrMapOvr>
+    <a:masterClrMapping/>
+  </p:clrMapOvr>
+</p:sld>
+</file>
+
+<file path=ppt/slides/slide19.xml><?xml version="1.0" encoding="utf-8"?>
+<p:sld xmlns:a="http://schemas.openxmlformats.org/drawingml/2006/main" xmlns:p="http://schemas.openxmlformats.org/presentationml/2006/main" xmlns:r="http://schemas.openxmlformats.org/officeDocument/2006/relationships">
+  <p:cSld>
+    <p:bg>
+      <p:bgPr>
+        <a:solidFill>
+          <a:srgbClr val="FFFFFF"/>
+        </a:solidFill>
+        <a:effectLst/>
+      </p:bgPr>
+    </p:bg>
+    <p:spTree>
+      <p:nvGrpSpPr>
+        <p:cNvPr id="1" name=""/>
+        <p:cNvGrpSpPr/>
+        <p:nvPr/>
+      </p:nvGrpSpPr>
+      <p:grpSpPr/>
+      <p:sp>
+        <p:nvSpPr>
+          <p:cNvPr id="2" name="Rectangle 1"/>
+          <p:cNvSpPr/>
+          <p:nvPr/>
+        </p:nvSpPr>
+        <p:spPr>
+          <a:xfrm>
+            <a:off x="0" y="0"/>
+            <a:ext cx="12191695" cy="1188720"/>
+          </a:xfrm>
+          <a:prstGeom prst="rect">
+            <a:avLst/>
+          </a:prstGeom>
+          <a:solidFill>
+            <a:srgbClr val="0C2340"/>
+          </a:solidFill>
+          <a:ln>
+            <a:noFill/>
+          </a:ln>
+          <a:effectLst/>
+        </p:spPr>
+        <p:style>
+          <a:lnRef idx="1">
+            <a:schemeClr val="accent1"/>
+          </a:lnRef>
+          <a:fillRef idx="3">
+            <a:schemeClr val="accent1"/>
+          </a:fillRef>
+          <a:effectRef idx="2">
+            <a:schemeClr val="accent1"/>
+          </a:effectRef>
+          <a:fontRef idx="minor">
+            <a:schemeClr val="lt1"/>
+          </a:fontRef>
+        </p:style>
+        <p:txBody>
+          <a:bodyPr rtlCol="0" anchor="ctr"/>
+          <a:lstStyle/>
+          <a:p>
+            <a:pPr algn="ctr"/>
+          </a:p>
+        </p:txBody>
+      </p:sp>
+      <p:sp>
+        <p:nvSpPr>
+          <p:cNvPr id="3" name="TextBox 2"/>
+          <p:cNvSpPr txBox="1"/>
+          <p:nvPr/>
+        </p:nvSpPr>
+        <p:spPr>
+          <a:xfrm>
+            <a:off x="640080" y="0"/>
+            <a:ext cx="9082735" cy="1188720"/>
+          </a:xfrm>
+          <a:prstGeom prst="rect">
+            <a:avLst/>
+          </a:prstGeom>
+          <a:noFill/>
+        </p:spPr>
+        <p:txBody>
+          <a:bodyPr wrap="square" anchor="ctr" lIns="0" rIns="0" tIns="0" bIns="0">
+            <a:spAutoFit/>
+          </a:bodyPr>
+          <a:lstStyle/>
+          <a:p>
+            <a:pPr algn="ctr"/>
+            <a:r>
+              <a:rPr sz="2600" b="1" i="0">
+                <a:solidFill>
+                  <a:srgbClr val="FFFFFF"/>
+                </a:solidFill>
+                <a:latin typeface="Calibri"/>
+              </a:rPr>
+              <a:t>ACUERDOS DE TRABAJO</a:t>
+            </a:r>
+          </a:p>
+        </p:txBody>
+      </p:sp>
+      <p:sp>
+        <p:nvSpPr>
+          <p:cNvPr id="4" name="Rounded Rectangle 3"/>
+          <p:cNvSpPr/>
+          <p:nvPr/>
+        </p:nvSpPr>
+        <p:spPr>
+          <a:xfrm>
+            <a:off x="640080" y="1737360"/>
+            <a:ext cx="10911535" cy="713232"/>
+          </a:xfrm>
+          <a:prstGeom prst="roundRect">
+            <a:avLst/>
+          </a:prstGeom>
+          <a:solidFill>
+            <a:srgbClr val="E8F5EC"/>
+          </a:solidFill>
+          <a:ln>
+            <a:noFill/>
+          </a:ln>
+          <a:effectLst/>
+        </p:spPr>
+        <p:style>
+          <a:lnRef idx="1">
+            <a:schemeClr val="accent1"/>
+          </a:lnRef>
+          <a:fillRef idx="3">
+            <a:schemeClr val="accent1"/>
+          </a:fillRef>
+          <a:effectRef idx="2">
+            <a:schemeClr val="accent1"/>
+          </a:effectRef>
+          <a:fontRef idx="minor">
+            <a:schemeClr val="lt1"/>
+          </a:fontRef>
+        </p:style>
+        <p:txBody>
+          <a:bodyPr rtlCol="0" anchor="ctr"/>
+          <a:lstStyle/>
+          <a:p>
+            <a:pPr algn="ctr"/>
+          </a:p>
+        </p:txBody>
+      </p:sp>
+      <p:sp>
+        <p:nvSpPr>
+          <p:cNvPr id="5" name="TextBox 4"/>
+          <p:cNvSpPr txBox="1"/>
+          <p:nvPr/>
+        </p:nvSpPr>
+        <p:spPr>
+          <a:xfrm>
+            <a:off x="868680" y="1847088"/>
+            <a:ext cx="10454335" cy="493776"/>
+          </a:xfrm>
+          <a:prstGeom prst="rect">
+            <a:avLst/>
+          </a:prstGeom>
+          <a:noFill/>
+        </p:spPr>
+        <p:txBody>
+          <a:bodyPr wrap="square" anchor="t" lIns="0" rIns="0" tIns="0" bIns="0">
+            <a:spAutoFit/>
+          </a:bodyPr>
+          <a:lstStyle/>
+          <a:p>
+            <a:r>
+              <a:rPr sz="1300" b="1" i="0">
+                <a:solidFill>
+                  <a:srgbClr val="0C2340"/>
+                </a:solidFill>
+                <a:latin typeface="Calibri"/>
+              </a:rPr>
+              <a:t>ℹ️ Nota institucional</a:t>
+            </a:r>
+          </a:p>
+          <a:p>
+            <a:pPr>
+              <a:spcBef>
+                <a:spcPts val="400"/>
+              </a:spcBef>
+            </a:pPr>
+            <a:r>
+              <a:rPr sz="1300" b="1" i="0">
+                <a:solidFill>
+                  <a:srgbClr val="2B2B2B"/>
+                </a:solidFill>
+                <a:latin typeface="Calibri"/>
+              </a:rPr>
+              <a:t>Entrega oficial: CDigital.</a:t>
+            </a:r>
+            <a:r>
+              <a:rPr sz="1300" b="0" i="0">
+                <a:solidFill>
+                  <a:srgbClr val="2B2B2B"/>
+                </a:solidFill>
+                <a:latin typeface="Calibri"/>
+              </a:rPr>
+              <a:t> Lo que no esté ahí, no está entregado.</a:t>
+            </a:r>
+          </a:p>
+        </p:txBody>
+      </p:sp>
+      <p:sp>
+        <p:nvSpPr>
+          <p:cNvPr id="6" name="Rounded Rectangle 5"/>
+          <p:cNvSpPr/>
+          <p:nvPr/>
+        </p:nvSpPr>
+        <p:spPr>
+          <a:xfrm>
+            <a:off x="640080" y="2679191"/>
+            <a:ext cx="10911535" cy="713232"/>
+          </a:xfrm>
+          <a:prstGeom prst="roundRect">
+            <a:avLst/>
+          </a:prstGeom>
+          <a:solidFill>
+            <a:srgbClr val="FDECD8"/>
+          </a:solidFill>
+          <a:ln>
+            <a:noFill/>
+          </a:ln>
+          <a:effectLst/>
+        </p:spPr>
+        <p:style>
+          <a:lnRef idx="1">
+            <a:schemeClr val="accent1"/>
+          </a:lnRef>
+          <a:fillRef idx="3">
+            <a:schemeClr val="accent1"/>
+          </a:fillRef>
+          <a:effectRef idx="2">
+            <a:schemeClr val="accent1"/>
+          </a:effectRef>
+          <a:fontRef idx="minor">
+            <a:schemeClr val="lt1"/>
+          </a:fontRef>
+        </p:style>
+        <p:txBody>
+          <a:bodyPr rtlCol="0" anchor="ctr"/>
+          <a:lstStyle/>
+          <a:p>
+            <a:pPr algn="ctr"/>
+          </a:p>
+        </p:txBody>
+      </p:sp>
+      <p:sp>
+        <p:nvSpPr>
+          <p:cNvPr id="7" name="TextBox 6"/>
+          <p:cNvSpPr txBox="1"/>
+          <p:nvPr/>
+        </p:nvSpPr>
+        <p:spPr>
+          <a:xfrm>
+            <a:off x="868680" y="2788920"/>
+            <a:ext cx="10454335" cy="493776"/>
+          </a:xfrm>
+          <a:prstGeom prst="rect">
+            <a:avLst/>
+          </a:prstGeom>
+          <a:noFill/>
+        </p:spPr>
+        <p:txBody>
+          <a:bodyPr wrap="square" anchor="t" lIns="0" rIns="0" tIns="0" bIns="0">
+            <a:spAutoFit/>
+          </a:bodyPr>
+          <a:lstStyle/>
+          <a:p>
+            <a:r>
+              <a:rPr sz="1300" b="1" i="0">
+                <a:solidFill>
+                  <a:srgbClr val="0C2340"/>
+                </a:solidFill>
+                <a:latin typeface="Calibri"/>
+              </a:rPr>
+              <a:t>💡 Aclaración</a:t>
+            </a:r>
+          </a:p>
+          <a:p>
+            <a:pPr>
+              <a:spcBef>
+                <a:spcPts val="400"/>
+              </a:spcBef>
+            </a:pPr>
+            <a:r>
+              <a:rPr sz="1300" b="0" i="0">
+                <a:solidFill>
+                  <a:srgbClr val="2B2B2B"/>
+                </a:solidFill>
+                <a:latin typeface="Calibri"/>
+              </a:rPr>
+              <a:t>Traer el avance </a:t>
+            </a:r>
+            <a:r>
+              <a:rPr sz="1300" b="1" i="0">
+                <a:solidFill>
+                  <a:srgbClr val="2B2B2B"/>
+                </a:solidFill>
+                <a:latin typeface="Calibri"/>
+              </a:rPr>
+              <a:t>escrito</a:t>
+            </a:r>
+            <a:r>
+              <a:rPr sz="1300" b="0" i="0">
+                <a:solidFill>
+                  <a:srgbClr val="2B2B2B"/>
+                </a:solidFill>
+                <a:latin typeface="Calibri"/>
+              </a:rPr>
+              <a:t> a cada encuentro: se trabaja sobre lo que ya existe.</a:t>
+            </a:r>
+          </a:p>
+        </p:txBody>
+      </p:sp>
+      <p:sp>
+        <p:nvSpPr>
+          <p:cNvPr id="8" name="Rounded Rectangle 7"/>
+          <p:cNvSpPr/>
+          <p:nvPr/>
+        </p:nvSpPr>
+        <p:spPr>
+          <a:xfrm>
+            <a:off x="640080" y="3621024"/>
+            <a:ext cx="10911535" cy="713232"/>
+          </a:xfrm>
+          <a:prstGeom prst="roundRect">
+            <a:avLst/>
+          </a:prstGeom>
+          <a:solidFill>
+            <a:srgbClr val="FBE4E4"/>
+          </a:solidFill>
+          <a:ln>
+            <a:noFill/>
+          </a:ln>
+          <a:effectLst/>
+        </p:spPr>
+        <p:style>
+          <a:lnRef idx="1">
+            <a:schemeClr val="accent1"/>
+          </a:lnRef>
+          <a:fillRef idx="3">
+            <a:schemeClr val="accent1"/>
+          </a:fillRef>
+          <a:effectRef idx="2">
+            <a:schemeClr val="accent1"/>
+          </a:effectRef>
+          <a:fontRef idx="minor">
+            <a:schemeClr val="lt1"/>
+          </a:fontRef>
+        </p:style>
+        <p:txBody>
+          <a:bodyPr rtlCol="0" anchor="ctr"/>
+          <a:lstStyle/>
+          <a:p>
+            <a:pPr algn="ctr"/>
+          </a:p>
+        </p:txBody>
+      </p:sp>
+      <p:sp>
+        <p:nvSpPr>
+          <p:cNvPr id="9" name="TextBox 8"/>
+          <p:cNvSpPr txBox="1"/>
+          <p:nvPr/>
+        </p:nvSpPr>
+        <p:spPr>
+          <a:xfrm>
+            <a:off x="868680" y="3730752"/>
+            <a:ext cx="10454335" cy="493776"/>
+          </a:xfrm>
+          <a:prstGeom prst="rect">
+            <a:avLst/>
+          </a:prstGeom>
+          <a:noFill/>
+        </p:spPr>
+        <p:txBody>
+          <a:bodyPr wrap="square" anchor="t" lIns="0" rIns="0" tIns="0" bIns="0">
+            <a:spAutoFit/>
+          </a:bodyPr>
+          <a:lstStyle/>
+          <a:p>
+            <a:r>
+              <a:rPr sz="1300" b="1" i="0">
+                <a:solidFill>
+                  <a:srgbClr val="0C2340"/>
+                </a:solidFill>
+                <a:latin typeface="Calibri"/>
+              </a:rPr>
+              <a:t>⚠️ Importante</a:t>
+            </a:r>
+          </a:p>
+          <a:p>
+            <a:pPr>
+              <a:spcBef>
+                <a:spcPts val="400"/>
+              </a:spcBef>
+            </a:pPr>
+            <a:r>
+              <a:rPr sz="1300" b="0" i="0">
+                <a:solidFill>
+                  <a:srgbClr val="2B2B2B"/>
+                </a:solidFill>
+                <a:latin typeface="Calibri"/>
+              </a:rPr>
+              <a:t>Integridad académica: citar siempre en </a:t>
+            </a:r>
+            <a:r>
+              <a:rPr sz="1300" b="1" i="0">
+                <a:solidFill>
+                  <a:srgbClr val="2B2B2B"/>
+                </a:solidFill>
+                <a:latin typeface="Calibri"/>
+              </a:rPr>
+              <a:t>APA 7</a:t>
+            </a:r>
+            <a:r>
+              <a:rPr sz="1300" b="0" i="0">
+                <a:solidFill>
+                  <a:srgbClr val="2B2B2B"/>
+                </a:solidFill>
+                <a:latin typeface="Calibri"/>
+              </a:rPr>
+              <a:t>. El plagio tiene debido proceso.</a:t>
+            </a:r>
+          </a:p>
+        </p:txBody>
+      </p:sp>
+      <p:sp>
+        <p:nvSpPr>
+          <p:cNvPr id="10" name="TextBox 9"/>
+          <p:cNvSpPr txBox="1"/>
+          <p:nvPr/>
+        </p:nvSpPr>
+        <p:spPr>
+          <a:xfrm>
+            <a:off x="2194560" y="6446520"/>
+            <a:ext cx="5943600" cy="274320"/>
+          </a:xfrm>
+          <a:prstGeom prst="rect">
+            <a:avLst/>
+          </a:prstGeom>
+          <a:noFill/>
+        </p:spPr>
+        <p:txBody>
+          <a:bodyPr wrap="square" anchor="t" lIns="0" rIns="0" tIns="0" bIns="0">
+            <a:spAutoFit/>
+          </a:bodyPr>
+          <a:lstStyle/>
+          <a:p>
+            <a:pPr algn="l"/>
+            <a:r>
+              <a:rPr sz="1000" b="1" i="0">
+                <a:solidFill>
+                  <a:srgbClr val="8F989D"/>
+                </a:solidFill>
+                <a:latin typeface="Calibri"/>
+              </a:rPr>
+              <a:t>Inicio 5:10 pm</a:t>
+            </a:r>
+          </a:p>
+        </p:txBody>
+      </p:sp>
+      <p:sp>
+        <p:nvSpPr>
+          <p:cNvPr id="11" name="TextBox 10"/>
+          <p:cNvSpPr txBox="1"/>
+          <p:nvPr/>
+        </p:nvSpPr>
+        <p:spPr>
+          <a:xfrm>
+            <a:off x="11094415" y="6446520"/>
+            <a:ext cx="548640" cy="274320"/>
+          </a:xfrm>
+          <a:prstGeom prst="rect">
+            <a:avLst/>
+          </a:prstGeom>
+          <a:noFill/>
+        </p:spPr>
+        <p:txBody>
+          <a:bodyPr wrap="square" anchor="t" lIns="0" rIns="0" tIns="0" bIns="0">
+            <a:spAutoFit/>
+          </a:bodyPr>
+          <a:lstStyle/>
+          <a:p>
+            <a:pPr algn="r"/>
+            <a:r>
+              <a:rPr sz="1000" b="1" i="0">
+                <a:solidFill>
+                  <a:srgbClr val="8F989D"/>
+                </a:solidFill>
+                <a:latin typeface="Calibri"/>
+              </a:rPr>
+              <a:t>19</a:t>
+            </a:r>
+          </a:p>
+        </p:txBody>
+      </p:sp>
+    </p:spTree>
+  </p:cSld>
+  <p:clrMapOvr>
+    <a:masterClrMapping/>
+  </p:clrMapOvr>
+</p:sld>
+</file>
+
 <file path=ppt/slides/slide2.xml><?xml version="1.0" encoding="utf-8"?>
 <p:sld xmlns:a="http://schemas.openxmlformats.org/drawingml/2006/main" xmlns:p="http://schemas.openxmlformats.org/presentationml/2006/main" xmlns:r="http://schemas.openxmlformats.org/officeDocument/2006/relationships">
   <p:cSld>
@@ -3798,6 +9426,569 @@
                 <a:latin typeface="Calibri"/>
               </a:rPr>
               <a:t>2</a:t>
+            </a:r>
+          </a:p>
+        </p:txBody>
+      </p:sp>
+    </p:spTree>
+  </p:cSld>
+  <p:clrMapOvr>
+    <a:masterClrMapping/>
+  </p:clrMapOvr>
+</p:sld>
+</file>
+
+<file path=ppt/slides/slide20.xml><?xml version="1.0" encoding="utf-8"?>
+<p:sld xmlns:a="http://schemas.openxmlformats.org/drawingml/2006/main" xmlns:p="http://schemas.openxmlformats.org/presentationml/2006/main" xmlns:r="http://schemas.openxmlformats.org/officeDocument/2006/relationships">
+  <p:cSld>
+    <p:bg>
+      <p:bgPr>
+        <a:solidFill>
+          <a:srgbClr val="FFFFFF"/>
+        </a:solidFill>
+        <a:effectLst/>
+      </p:bgPr>
+    </p:bg>
+    <p:spTree>
+      <p:nvGrpSpPr>
+        <p:cNvPr id="1" name=""/>
+        <p:cNvGrpSpPr/>
+        <p:nvPr/>
+      </p:nvGrpSpPr>
+      <p:grpSpPr/>
+      <p:sp>
+        <p:nvSpPr>
+          <p:cNvPr id="2" name="Rectangle 1"/>
+          <p:cNvSpPr/>
+          <p:nvPr/>
+        </p:nvSpPr>
+        <p:spPr>
+          <a:xfrm>
+            <a:off x="0" y="0"/>
+            <a:ext cx="12191695" cy="1188720"/>
+          </a:xfrm>
+          <a:prstGeom prst="rect">
+            <a:avLst/>
+          </a:prstGeom>
+          <a:solidFill>
+            <a:srgbClr val="0C2340"/>
+          </a:solidFill>
+          <a:ln>
+            <a:noFill/>
+          </a:ln>
+          <a:effectLst/>
+        </p:spPr>
+        <p:style>
+          <a:lnRef idx="1">
+            <a:schemeClr val="accent1"/>
+          </a:lnRef>
+          <a:fillRef idx="3">
+            <a:schemeClr val="accent1"/>
+          </a:fillRef>
+          <a:effectRef idx="2">
+            <a:schemeClr val="accent1"/>
+          </a:effectRef>
+          <a:fontRef idx="minor">
+            <a:schemeClr val="lt1"/>
+          </a:fontRef>
+        </p:style>
+        <p:txBody>
+          <a:bodyPr rtlCol="0" anchor="ctr"/>
+          <a:lstStyle/>
+          <a:p>
+            <a:pPr algn="ctr"/>
+          </a:p>
+        </p:txBody>
+      </p:sp>
+      <p:sp>
+        <p:nvSpPr>
+          <p:cNvPr id="3" name="TextBox 2"/>
+          <p:cNvSpPr txBox="1"/>
+          <p:nvPr/>
+        </p:nvSpPr>
+        <p:spPr>
+          <a:xfrm>
+            <a:off x="640080" y="0"/>
+            <a:ext cx="9082735" cy="1188720"/>
+          </a:xfrm>
+          <a:prstGeom prst="rect">
+            <a:avLst/>
+          </a:prstGeom>
+          <a:noFill/>
+        </p:spPr>
+        <p:txBody>
+          <a:bodyPr wrap="square" anchor="ctr" lIns="0" rIns="0" tIns="0" bIns="0">
+            <a:spAutoFit/>
+          </a:bodyPr>
+          <a:lstStyle/>
+          <a:p>
+            <a:pPr algn="ctr"/>
+            <a:r>
+              <a:rPr sz="2600" b="1" i="0">
+                <a:solidFill>
+                  <a:srgbClr val="FFFFFF"/>
+                </a:solidFill>
+                <a:latin typeface="Calibri"/>
+              </a:rPr>
+              <a:t>PARA LA PRÓXIMA SESIÓN</a:t>
+            </a:r>
+          </a:p>
+        </p:txBody>
+      </p:sp>
+      <p:sp>
+        <p:nvSpPr>
+          <p:cNvPr id="4" name="TextBox 3"/>
+          <p:cNvSpPr txBox="1"/>
+          <p:nvPr/>
+        </p:nvSpPr>
+        <p:spPr>
+          <a:xfrm>
+            <a:off x="640080" y="1691639"/>
+            <a:ext cx="10911535" cy="4617720"/>
+          </a:xfrm>
+          <a:prstGeom prst="rect">
+            <a:avLst/>
+          </a:prstGeom>
+          <a:noFill/>
+        </p:spPr>
+        <p:txBody>
+          <a:bodyPr wrap="square" anchor="t" lIns="0" rIns="0" tIns="0" bIns="0">
+            <a:spAutoFit/>
+          </a:bodyPr>
+          <a:lstStyle/>
+          <a:p>
+            <a:pPr>
+              <a:spcAft>
+                <a:spcPts val="1000"/>
+              </a:spcAft>
+            </a:pPr>
+            <a:r>
+              <a:rPr sz="1600" b="0" i="0">
+                <a:solidFill>
+                  <a:srgbClr val="2B2B2B"/>
+                </a:solidFill>
+                <a:latin typeface="Calibri"/>
+              </a:rPr>
+              <a:t>–   </a:t>
+            </a:r>
+            <a:r>
+              <a:rPr sz="1600" b="1" i="0">
+                <a:solidFill>
+                  <a:srgbClr val="2B2B2B"/>
+                </a:solidFill>
+                <a:latin typeface="Calibri"/>
+              </a:rPr>
+              <a:t>Lectura autónoma:</a:t>
+            </a:r>
+            <a:r>
+              <a:rPr sz="1600" b="0" i="0">
+                <a:solidFill>
+                  <a:srgbClr val="2B2B2B"/>
+                </a:solidFill>
+                <a:latin typeface="Calibri"/>
+              </a:rPr>
+              <a:t> U1–U2 (Syllabus y producto final · fundamentos del método científico) — la retomamos al abrir la Sesión 02.</a:t>
+            </a:r>
+          </a:p>
+          <a:p>
+            <a:pPr>
+              <a:spcAft>
+                <a:spcPts val="1000"/>
+              </a:spcAft>
+            </a:pPr>
+            <a:r>
+              <a:rPr sz="1600" b="0" i="0">
+                <a:solidFill>
+                  <a:srgbClr val="2B2B2B"/>
+                </a:solidFill>
+                <a:latin typeface="Calibri"/>
+              </a:rPr>
+              <a:t>–   Revisar la </a:t>
+            </a:r>
+            <a:r>
+              <a:rPr sz="1600" b="1" i="0">
+                <a:solidFill>
+                  <a:srgbClr val="2B2B2B"/>
+                </a:solidFill>
+                <a:latin typeface="Calibri"/>
+              </a:rPr>
+              <a:t>Presentación del Curso</a:t>
+            </a:r>
+            <a:r>
+              <a:rPr sz="1600" b="0" i="0">
+                <a:solidFill>
+                  <a:srgbClr val="2B2B2B"/>
+                </a:solidFill>
+                <a:latin typeface="Calibri"/>
+              </a:rPr>
+              <a:t> completa (fechas, evaluación, contenido de todas las sesiones).</a:t>
+            </a:r>
+          </a:p>
+          <a:p>
+            <a:pPr>
+              <a:spcAft>
+                <a:spcPts val="1000"/>
+              </a:spcAft>
+            </a:pPr>
+            <a:r>
+              <a:rPr sz="1600" b="0" i="0">
+                <a:solidFill>
+                  <a:srgbClr val="2B2B2B"/>
+                </a:solidFill>
+                <a:latin typeface="Calibri"/>
+              </a:rPr>
+              <a:t>–   Abrir el enunciado de la </a:t>
+            </a:r>
+            <a:r>
+              <a:rPr sz="1600" b="1" i="0">
+                <a:solidFill>
+                  <a:srgbClr val="2B2B2B"/>
+                </a:solidFill>
+                <a:latin typeface="Calibri"/>
+              </a:rPr>
+              <a:t>ACA 1</a:t>
+            </a:r>
+            <a:r>
+              <a:rPr sz="1600" b="0" i="0">
+                <a:solidFill>
+                  <a:srgbClr val="2B2B2B"/>
+                </a:solidFill>
+                <a:latin typeface="Calibri"/>
+              </a:rPr>
+              <a:t> en `Clases/Recursos/ACAs/` y leerlo entero.</a:t>
+            </a:r>
+          </a:p>
+        </p:txBody>
+      </p:sp>
+      <p:sp>
+        <p:nvSpPr>
+          <p:cNvPr id="5" name="TextBox 4"/>
+          <p:cNvSpPr txBox="1"/>
+          <p:nvPr/>
+        </p:nvSpPr>
+        <p:spPr>
+          <a:xfrm>
+            <a:off x="2194560" y="6446520"/>
+            <a:ext cx="5943600" cy="274320"/>
+          </a:xfrm>
+          <a:prstGeom prst="rect">
+            <a:avLst/>
+          </a:prstGeom>
+          <a:noFill/>
+        </p:spPr>
+        <p:txBody>
+          <a:bodyPr wrap="square" anchor="t" lIns="0" rIns="0" tIns="0" bIns="0">
+            <a:spAutoFit/>
+          </a:bodyPr>
+          <a:lstStyle/>
+          <a:p>
+            <a:pPr algn="l"/>
+            <a:r>
+              <a:rPr sz="1000" b="1" i="0">
+                <a:solidFill>
+                  <a:srgbClr val="8F989D"/>
+                </a:solidFill>
+                <a:latin typeface="Calibri"/>
+              </a:rPr>
+              <a:t>Inicio 5:10 pm</a:t>
+            </a:r>
+          </a:p>
+        </p:txBody>
+      </p:sp>
+      <p:sp>
+        <p:nvSpPr>
+          <p:cNvPr id="6" name="TextBox 5"/>
+          <p:cNvSpPr txBox="1"/>
+          <p:nvPr/>
+        </p:nvSpPr>
+        <p:spPr>
+          <a:xfrm>
+            <a:off x="11094415" y="6446520"/>
+            <a:ext cx="548640" cy="274320"/>
+          </a:xfrm>
+          <a:prstGeom prst="rect">
+            <a:avLst/>
+          </a:prstGeom>
+          <a:noFill/>
+        </p:spPr>
+        <p:txBody>
+          <a:bodyPr wrap="square" anchor="t" lIns="0" rIns="0" tIns="0" bIns="0">
+            <a:spAutoFit/>
+          </a:bodyPr>
+          <a:lstStyle/>
+          <a:p>
+            <a:pPr algn="r"/>
+            <a:r>
+              <a:rPr sz="1000" b="1" i="0">
+                <a:solidFill>
+                  <a:srgbClr val="8F989D"/>
+                </a:solidFill>
+                <a:latin typeface="Calibri"/>
+              </a:rPr>
+              <a:t>20</a:t>
+            </a:r>
+          </a:p>
+        </p:txBody>
+      </p:sp>
+    </p:spTree>
+  </p:cSld>
+  <p:clrMapOvr>
+    <a:masterClrMapping/>
+  </p:clrMapOvr>
+</p:sld>
+</file>
+
+<file path=ppt/slides/slide21.xml><?xml version="1.0" encoding="utf-8"?>
+<p:sld xmlns:a="http://schemas.openxmlformats.org/drawingml/2006/main" xmlns:p="http://schemas.openxmlformats.org/presentationml/2006/main" xmlns:r="http://schemas.openxmlformats.org/officeDocument/2006/relationships">
+  <p:cSld>
+    <p:bg>
+      <p:bgPr>
+        <a:solidFill>
+          <a:srgbClr val="FFFFFF"/>
+        </a:solidFill>
+        <a:effectLst/>
+      </p:bgPr>
+    </p:bg>
+    <p:spTree>
+      <p:nvGrpSpPr>
+        <p:cNvPr id="1" name=""/>
+        <p:cNvGrpSpPr/>
+        <p:nvPr/>
+      </p:nvGrpSpPr>
+      <p:grpSpPr/>
+      <p:sp>
+        <p:nvSpPr>
+          <p:cNvPr id="2" name="Rectangle 1"/>
+          <p:cNvSpPr/>
+          <p:nvPr/>
+        </p:nvSpPr>
+        <p:spPr>
+          <a:xfrm>
+            <a:off x="0" y="0"/>
+            <a:ext cx="12191695" cy="164592"/>
+          </a:xfrm>
+          <a:prstGeom prst="rect">
+            <a:avLst/>
+          </a:prstGeom>
+          <a:solidFill>
+            <a:srgbClr val="007433"/>
+          </a:solidFill>
+          <a:ln>
+            <a:noFill/>
+          </a:ln>
+          <a:effectLst/>
+        </p:spPr>
+        <p:style>
+          <a:lnRef idx="1">
+            <a:schemeClr val="accent1"/>
+          </a:lnRef>
+          <a:fillRef idx="3">
+            <a:schemeClr val="accent1"/>
+          </a:fillRef>
+          <a:effectRef idx="2">
+            <a:schemeClr val="accent1"/>
+          </a:effectRef>
+          <a:fontRef idx="minor">
+            <a:schemeClr val="lt1"/>
+          </a:fontRef>
+        </p:style>
+        <p:txBody>
+          <a:bodyPr rtlCol="0" anchor="ctr"/>
+          <a:lstStyle/>
+          <a:p>
+            <a:pPr algn="ctr"/>
+          </a:p>
+        </p:txBody>
+      </p:sp>
+      <p:pic>
+        <p:nvPicPr>
+          <p:cNvPr id="3" name="Picture 2" descr="logo_cun_solo.png"/>
+          <p:cNvPicPr>
+            <a:picLocks noChangeAspect="1"/>
+          </p:cNvPicPr>
+          <p:nvPr/>
+        </p:nvPicPr>
+        <p:blipFill>
+          <a:blip r:embed="rId2"/>
+          <a:stretch>
+            <a:fillRect/>
+          </a:stretch>
+        </p:blipFill>
+        <p:spPr>
+          <a:xfrm>
+            <a:off x="10362895" y="5632704"/>
+            <a:ext cx="1371600" cy="950976"/>
+          </a:xfrm>
+          <a:prstGeom prst="rect">
+            <a:avLst/>
+          </a:prstGeom>
+        </p:spPr>
+      </p:pic>
+      <p:sp>
+        <p:nvSpPr>
+          <p:cNvPr id="4" name="TextBox 3"/>
+          <p:cNvSpPr txBox="1"/>
+          <p:nvPr/>
+        </p:nvSpPr>
+        <p:spPr>
+          <a:xfrm>
+            <a:off x="640080" y="1737360"/>
+            <a:ext cx="10911535" cy="1097280"/>
+          </a:xfrm>
+          <a:prstGeom prst="rect">
+            <a:avLst/>
+          </a:prstGeom>
+          <a:noFill/>
+        </p:spPr>
+        <p:txBody>
+          <a:bodyPr wrap="square" anchor="ctr" lIns="0" rIns="0" tIns="0" bIns="0">
+            <a:spAutoFit/>
+          </a:bodyPr>
+          <a:lstStyle/>
+          <a:p>
+            <a:pPr algn="ctr"/>
+            <a:r>
+              <a:rPr sz="3400" b="1" i="0">
+                <a:solidFill>
+                  <a:srgbClr val="0C2340"/>
+                </a:solidFill>
+                <a:latin typeface="Calibri"/>
+              </a:rPr>
+              <a:t>Cierre — Sesión 01</a:t>
+            </a:r>
+          </a:p>
+        </p:txBody>
+      </p:sp>
+      <p:sp>
+        <p:nvSpPr>
+          <p:cNvPr id="5" name="TextBox 4"/>
+          <p:cNvSpPr txBox="1"/>
+          <p:nvPr/>
+        </p:nvSpPr>
+        <p:spPr>
+          <a:xfrm>
+            <a:off x="640080" y="3017520"/>
+            <a:ext cx="10911535" cy="1645920"/>
+          </a:xfrm>
+          <a:prstGeom prst="rect">
+            <a:avLst/>
+          </a:prstGeom>
+          <a:noFill/>
+        </p:spPr>
+        <p:txBody>
+          <a:bodyPr wrap="square" anchor="t" lIns="0" rIns="0" tIns="0" bIns="0">
+            <a:spAutoFit/>
+          </a:bodyPr>
+          <a:lstStyle/>
+          <a:p>
+            <a:pPr algn="ctr">
+              <a:spcAft>
+                <a:spcPts val="600"/>
+              </a:spcAft>
+            </a:pPr>
+            <a:r>
+              <a:rPr sz="1600" b="0" i="0">
+                <a:solidFill>
+                  <a:srgbClr val="2B2B2B"/>
+                </a:solidFill>
+                <a:latin typeface="Calibri"/>
+              </a:rPr>
+              <a:t>Ya sabemos qué haremos, cómo se evalúa y quién es quién.</a:t>
+            </a:r>
+          </a:p>
+          <a:p>
+            <a:pPr algn="ctr">
+              <a:spcAft>
+                <a:spcPts val="600"/>
+              </a:spcAft>
+            </a:pPr>
+            <a:r>
+              <a:rPr sz="1600" b="1" i="0">
+                <a:solidFill>
+                  <a:srgbClr val="2B2B2B"/>
+                </a:solidFill>
+                <a:latin typeface="Calibri"/>
+              </a:rPr>
+              <a:t>Sesión 02:</a:t>
+            </a:r>
+            <a:r>
+              <a:rPr sz="1600" b="0" i="0">
+                <a:solidFill>
+                  <a:srgbClr val="2B2B2B"/>
+                </a:solidFill>
+                <a:latin typeface="Calibri"/>
+              </a:rPr>
+              <a:t> arranca el contenido del curso.</a:t>
+            </a:r>
+          </a:p>
+        </p:txBody>
+      </p:sp>
+      <p:sp>
+        <p:nvSpPr>
+          <p:cNvPr id="6" name="TextBox 5"/>
+          <p:cNvSpPr txBox="1"/>
+          <p:nvPr/>
+        </p:nvSpPr>
+        <p:spPr>
+          <a:xfrm>
+            <a:off x="640080" y="4754880"/>
+            <a:ext cx="10911535" cy="640080"/>
+          </a:xfrm>
+          <a:prstGeom prst="rect">
+            <a:avLst/>
+          </a:prstGeom>
+          <a:noFill/>
+        </p:spPr>
+        <p:txBody>
+          <a:bodyPr wrap="square" anchor="t" lIns="0" rIns="0" tIns="0" bIns="0">
+            <a:spAutoFit/>
+          </a:bodyPr>
+          <a:lstStyle/>
+          <a:p>
+            <a:pPr algn="ctr"/>
+            <a:r>
+              <a:rPr sz="2000" b="1" i="0">
+                <a:solidFill>
+                  <a:srgbClr val="007433"/>
+                </a:solidFill>
+                <a:latin typeface="Calibri"/>
+              </a:rPr>
+              <a:t>INVESTIGACIÓN, CIENCIA Y TECNOLOGÍA</a:t>
+            </a:r>
+          </a:p>
+        </p:txBody>
+      </p:sp>
+      <p:sp>
+        <p:nvSpPr>
+          <p:cNvPr id="7" name="TextBox 6"/>
+          <p:cNvSpPr txBox="1"/>
+          <p:nvPr/>
+        </p:nvSpPr>
+        <p:spPr>
+          <a:xfrm>
+            <a:off x="2194560" y="6446520"/>
+            <a:ext cx="5943600" cy="274320"/>
+          </a:xfrm>
+          <a:prstGeom prst="rect">
+            <a:avLst/>
+          </a:prstGeom>
+          <a:noFill/>
+        </p:spPr>
+        <p:txBody>
+          <a:bodyPr wrap="square" anchor="t" lIns="0" rIns="0" tIns="0" bIns="0">
+            <a:spAutoFit/>
+          </a:bodyPr>
+          <a:lstStyle/>
+          <a:p>
+            <a:pPr algn="l"/>
+            <a:r>
+              <a:rPr sz="1000" b="1" i="0">
+                <a:solidFill>
+                  <a:srgbClr val="8F989D"/>
+                </a:solidFill>
+                <a:latin typeface="Calibri"/>
+              </a:rPr>
+              <a:t>Inicio 5:10 pm</a:t>
             </a:r>
           </a:p>
         </p:txBody>
@@ -5353,65 +11544,21 @@
                 </a:solidFill>
                 <a:latin typeface="Calibri"/>
               </a:rPr>
-              <a:t>ACUERDOS DE TRABAJO</a:t>
-            </a:r>
-          </a:p>
-        </p:txBody>
-      </p:sp>
-      <p:sp>
-        <p:nvSpPr>
-          <p:cNvPr id="4" name="Rounded Rectangle 3"/>
-          <p:cNvSpPr/>
-          <p:nvPr/>
-        </p:nvSpPr>
-        <p:spPr>
-          <a:xfrm>
-            <a:off x="640080" y="1737360"/>
-            <a:ext cx="10911535" cy="713232"/>
-          </a:xfrm>
-          <a:prstGeom prst="roundRect">
-            <a:avLst/>
-          </a:prstGeom>
-          <a:solidFill>
-            <a:srgbClr val="E8F5EC"/>
-          </a:solidFill>
-          <a:ln>
-            <a:noFill/>
-          </a:ln>
-          <a:effectLst/>
-        </p:spPr>
-        <p:style>
-          <a:lnRef idx="1">
-            <a:schemeClr val="accent1"/>
-          </a:lnRef>
-          <a:fillRef idx="3">
-            <a:schemeClr val="accent1"/>
-          </a:fillRef>
-          <a:effectRef idx="2">
-            <a:schemeClr val="accent1"/>
-          </a:effectRef>
-          <a:fontRef idx="minor">
-            <a:schemeClr val="lt1"/>
-          </a:fontRef>
-        </p:style>
-        <p:txBody>
-          <a:bodyPr rtlCol="0" anchor="ctr"/>
-          <a:lstStyle/>
-          <a:p>
-            <a:pPr algn="ctr"/>
-          </a:p>
-        </p:txBody>
-      </p:sp>
-      <p:sp>
-        <p:nvSpPr>
-          <p:cNvPr id="5" name="TextBox 4"/>
+              <a:t>Cómo trabajamos: una hora en vivo, el resto en su documento</a:t>
+            </a:r>
+          </a:p>
+        </p:txBody>
+      </p:sp>
+      <p:sp>
+        <p:nvSpPr>
+          <p:cNvPr id="4" name="TextBox 3"/>
           <p:cNvSpPr txBox="1"/>
           <p:nvPr/>
         </p:nvSpPr>
         <p:spPr>
           <a:xfrm>
-            <a:off x="868680" y="1847088"/>
-            <a:ext cx="10454335" cy="493776"/>
+            <a:off x="640080" y="1691639"/>
+            <a:ext cx="10911535" cy="4617720"/>
           </a:xfrm>
           <a:prstGeom prst="rect">
             <a:avLst/>
@@ -5424,97 +11571,307 @@
           </a:bodyPr>
           <a:lstStyle/>
           <a:p>
-            <a:r>
-              <a:rPr sz="1300" b="1" i="0">
-                <a:solidFill>
-                  <a:srgbClr val="0C2340"/>
-                </a:solidFill>
-                <a:latin typeface="Calibri"/>
-              </a:rPr>
-              <a:t>ℹ️ Nota institucional</a:t>
-            </a:r>
-          </a:p>
-          <a:p>
             <a:pPr>
-              <a:spcBef>
-                <a:spcPts val="400"/>
-              </a:spcBef>
+              <a:spcAft>
+                <a:spcPts val="1000"/>
+              </a:spcAft>
             </a:pPr>
             <a:r>
-              <a:rPr sz="1300" b="1" i="0">
-                <a:solidFill>
-                  <a:srgbClr val="2B2B2B"/>
-                </a:solidFill>
-                <a:latin typeface="Calibri"/>
-              </a:rPr>
-              <a:t>Entrega oficial: CDigital.</a:t>
-            </a:r>
-            <a:r>
-              <a:rPr sz="1300" b="0" i="0">
-                <a:solidFill>
-                  <a:srgbClr val="2B2B2B"/>
-                </a:solidFill>
-                <a:latin typeface="Calibri"/>
-              </a:rPr>
-              <a:t> Lo que no esté ahí, no está entregado.</a:t>
-            </a:r>
-          </a:p>
-        </p:txBody>
-      </p:sp>
-      <p:sp>
-        <p:nvSpPr>
-          <p:cNvPr id="6" name="Rounded Rectangle 5"/>
-          <p:cNvSpPr/>
-          <p:nvPr/>
-        </p:nvSpPr>
-        <p:spPr>
-          <a:xfrm>
-            <a:off x="640080" y="2679191"/>
-            <a:ext cx="10911535" cy="713232"/>
-          </a:xfrm>
-          <a:prstGeom prst="roundRect">
-            <a:avLst/>
-          </a:prstGeom>
-          <a:solidFill>
-            <a:srgbClr val="FDECD8"/>
-          </a:solidFill>
-          <a:ln>
-            <a:noFill/>
-          </a:ln>
-          <a:effectLst/>
-        </p:spPr>
-        <p:style>
-          <a:lnRef idx="1">
-            <a:schemeClr val="accent1"/>
-          </a:lnRef>
-          <a:fillRef idx="3">
-            <a:schemeClr val="accent1"/>
-          </a:fillRef>
-          <a:effectRef idx="2">
-            <a:schemeClr val="accent1"/>
-          </a:effectRef>
-          <a:fontRef idx="minor">
-            <a:schemeClr val="lt1"/>
-          </a:fontRef>
-        </p:style>
-        <p:txBody>
-          <a:bodyPr rtlCol="0" anchor="ctr"/>
-          <a:lstStyle/>
-          <a:p>
-            <a:pPr algn="ctr"/>
-          </a:p>
-        </p:txBody>
-      </p:sp>
-      <p:sp>
-        <p:nvSpPr>
-          <p:cNvPr id="7" name="TextBox 6"/>
+              <a:rPr sz="1600" b="0" i="0">
+                <a:solidFill>
+                  <a:srgbClr val="2B2B2B"/>
+                </a:solidFill>
+                <a:latin typeface="Calibri"/>
+              </a:rPr>
+              <a:t>–   Este curso tiene </a:t>
+            </a:r>
+            <a:r>
+              <a:rPr sz="1600" b="1" i="0">
+                <a:solidFill>
+                  <a:srgbClr val="2B2B2B"/>
+                </a:solidFill>
+                <a:latin typeface="Calibri"/>
+              </a:rPr>
+              <a:t>una hora sincrónica por semana</a:t>
+            </a:r>
+            <a:r>
+              <a:rPr sz="1600" b="0" i="0">
+                <a:solidFill>
+                  <a:srgbClr val="2B2B2B"/>
+                </a:solidFill>
+                <a:latin typeface="Calibri"/>
+              </a:rPr>
+              <a:t> y </a:t>
+            </a:r>
+            <a:r>
+              <a:rPr sz="1600" b="1" i="0">
+                <a:solidFill>
+                  <a:srgbClr val="2B2B2B"/>
+                </a:solidFill>
+                <a:latin typeface="Calibri"/>
+              </a:rPr>
+              <a:t>seis encuentros</a:t>
+            </a:r>
+            <a:r>
+              <a:rPr sz="1600" b="0" i="0">
+                <a:solidFill>
+                  <a:srgbClr val="2B2B2B"/>
+                </a:solidFill>
+                <a:latin typeface="Calibri"/>
+              </a:rPr>
+              <a:t> en total. El tiempo de clase es corto: por eso no se usa para dictar.</a:t>
+            </a:r>
+          </a:p>
+          <a:p>
+            <a:pPr>
+              <a:spcAft>
+                <a:spcPts val="1000"/>
+              </a:spcAft>
+            </a:pPr>
+            <a:r>
+              <a:rPr sz="1600" b="0" i="0">
+                <a:solidFill>
+                  <a:srgbClr val="2B2B2B"/>
+                </a:solidFill>
+                <a:latin typeface="Calibri"/>
+              </a:rPr>
+              <a:t>–   </a:t>
+            </a:r>
+            <a:r>
+              <a:rPr sz="1600" b="1" i="0">
+                <a:solidFill>
+                  <a:srgbClr val="2B2B2B"/>
+                </a:solidFill>
+                <a:latin typeface="Calibri"/>
+              </a:rPr>
+              <a:t>Antes de cada encuentro:</a:t>
+            </a:r>
+            <a:r>
+              <a:rPr sz="1600" b="0" i="0">
+                <a:solidFill>
+                  <a:srgbClr val="2B2B2B"/>
+                </a:solidFill>
+                <a:latin typeface="Calibri"/>
+              </a:rPr>
+              <a:t> usted revisa el material que el Docente deja en CDigital (10–20 min) y llega sabiendo de qué se va a hablar.</a:t>
+            </a:r>
+          </a:p>
+          <a:p>
+            <a:pPr>
+              <a:spcAft>
+                <a:spcPts val="1000"/>
+              </a:spcAft>
+            </a:pPr>
+            <a:r>
+              <a:rPr sz="1600" b="0" i="0">
+                <a:solidFill>
+                  <a:srgbClr val="2B2B2B"/>
+                </a:solidFill>
+                <a:latin typeface="Calibri"/>
+              </a:rPr>
+              <a:t>–   </a:t>
+            </a:r>
+            <a:r>
+              <a:rPr sz="1600" b="1" i="0">
+                <a:solidFill>
+                  <a:srgbClr val="2B2B2B"/>
+                </a:solidFill>
+                <a:latin typeface="Calibri"/>
+              </a:rPr>
+              <a:t>Durante el encuentro:</a:t>
+            </a:r>
+            <a:r>
+              <a:rPr sz="1600" b="0" i="0">
+                <a:solidFill>
+                  <a:srgbClr val="2B2B2B"/>
+                </a:solidFill>
+                <a:latin typeface="Calibri"/>
+              </a:rPr>
+              <a:t> explicación breve, un ejemplo modelado en pantalla y </a:t>
+            </a:r>
+            <a:r>
+              <a:rPr sz="1600" b="1" i="0">
+                <a:solidFill>
+                  <a:srgbClr val="2B2B2B"/>
+                </a:solidFill>
+                <a:latin typeface="Calibri"/>
+              </a:rPr>
+              <a:t>taller sobre su propio documento</a:t>
+            </a:r>
+            <a:r>
+              <a:rPr sz="1600" b="0" i="0">
+                <a:solidFill>
+                  <a:srgbClr val="2B2B2B"/>
+                </a:solidFill>
+                <a:latin typeface="Calibri"/>
+              </a:rPr>
+              <a:t>. No se toma dictado.</a:t>
+            </a:r>
+          </a:p>
+          <a:p>
+            <a:pPr>
+              <a:spcAft>
+                <a:spcPts val="1000"/>
+              </a:spcAft>
+            </a:pPr>
+            <a:r>
+              <a:rPr sz="1600" b="0" i="0">
+                <a:solidFill>
+                  <a:srgbClr val="2B2B2B"/>
+                </a:solidFill>
+                <a:latin typeface="Calibri"/>
+              </a:rPr>
+              <a:t>–   </a:t>
+            </a:r>
+            <a:r>
+              <a:rPr sz="1600" b="1" i="0">
+                <a:solidFill>
+                  <a:srgbClr val="2B2B2B"/>
+                </a:solidFill>
+                <a:latin typeface="Calibri"/>
+              </a:rPr>
+              <a:t>Después del encuentro:</a:t>
+            </a:r>
+            <a:r>
+              <a:rPr sz="1600" b="0" i="0">
+                <a:solidFill>
+                  <a:srgbClr val="2B2B2B"/>
+                </a:solidFill>
+                <a:latin typeface="Calibri"/>
+              </a:rPr>
+              <a:t> usted termina el avance y lo sube a CDigital antes de la siguiente clase.</a:t>
+            </a:r>
+          </a:p>
+          <a:p>
+            <a:pPr>
+              <a:spcAft>
+                <a:spcPts val="1000"/>
+              </a:spcAft>
+            </a:pPr>
+            <a:r>
+              <a:rPr sz="1600" b="0" i="0">
+                <a:solidFill>
+                  <a:srgbClr val="2B2B2B"/>
+                </a:solidFill>
+                <a:latin typeface="Calibri"/>
+              </a:rPr>
+              <a:t>–   </a:t>
+            </a:r>
+            <a:r>
+              <a:rPr sz="1600" b="1" i="0">
+                <a:solidFill>
+                  <a:srgbClr val="2B2B2B"/>
+                </a:solidFill>
+                <a:latin typeface="Calibri"/>
+              </a:rPr>
+              <a:t>Qué traer siempre</a:t>
+            </a:r>
+            <a:r>
+              <a:rPr sz="1600" b="0" i="0">
+                <a:solidFill>
+                  <a:srgbClr val="2B2B2B"/>
+                </a:solidFill>
+                <a:latin typeface="Calibri"/>
+              </a:rPr>
+              <a:t>, sin excepción:</a:t>
+            </a:r>
+          </a:p>
+          <a:p>
+            <a:pPr lvl="1">
+              <a:spcAft>
+                <a:spcPts val="600"/>
+              </a:spcAft>
+            </a:pPr>
+            <a:r>
+              <a:rPr sz="1500" b="0" i="0">
+                <a:solidFill>
+                  <a:srgbClr val="2B2B2B"/>
+                </a:solidFill>
+                <a:latin typeface="Calibri"/>
+              </a:rPr>
+              <a:t>●   Su documento del artículo </a:t>
+            </a:r>
+            <a:r>
+              <a:rPr sz="1500" b="1" i="0">
+                <a:solidFill>
+                  <a:srgbClr val="2B2B2B"/>
+                </a:solidFill>
+                <a:latin typeface="Calibri"/>
+              </a:rPr>
+              <a:t>abierto</a:t>
+            </a:r>
+            <a:r>
+              <a:rPr sz="1500" b="0" i="0">
+                <a:solidFill>
+                  <a:srgbClr val="2B2B2B"/>
+                </a:solidFill>
+                <a:latin typeface="Calibri"/>
+              </a:rPr>
+              <a:t> en Google Docs.</a:t>
+            </a:r>
+          </a:p>
+          <a:p>
+            <a:pPr lvl="1">
+              <a:spcAft>
+                <a:spcPts val="600"/>
+              </a:spcAft>
+            </a:pPr>
+            <a:r>
+              <a:rPr sz="1500" b="0" i="0">
+                <a:solidFill>
+                  <a:srgbClr val="2B2B2B"/>
+                </a:solidFill>
+                <a:latin typeface="Calibri"/>
+              </a:rPr>
+              <a:t>●   Una </a:t>
+            </a:r>
+            <a:r>
+              <a:rPr sz="1500" b="1" i="0">
+                <a:solidFill>
+                  <a:srgbClr val="2B2B2B"/>
+                </a:solidFill>
+                <a:latin typeface="Calibri"/>
+              </a:rPr>
+              <a:t>duda concreta escrita</a:t>
+            </a:r>
+            <a:r>
+              <a:rPr sz="1500" b="0" i="0">
+                <a:solidFill>
+                  <a:srgbClr val="2B2B2B"/>
+                </a:solidFill>
+                <a:latin typeface="Calibri"/>
+              </a:rPr>
+              <a:t> (no “no entendí nada”).</a:t>
+            </a:r>
+          </a:p>
+          <a:p>
+            <a:pPr lvl="1">
+              <a:spcAft>
+                <a:spcPts val="600"/>
+              </a:spcAft>
+            </a:pPr>
+            <a:r>
+              <a:rPr sz="1500" b="0" i="0">
+                <a:solidFill>
+                  <a:srgbClr val="2B2B2B"/>
+                </a:solidFill>
+                <a:latin typeface="Calibri"/>
+              </a:rPr>
+              <a:t>●   Con qué escribir: si se conecta desde el celular, tenga a mano dónde redactar.</a:t>
+            </a:r>
+          </a:p>
+        </p:txBody>
+      </p:sp>
+      <p:sp>
+        <p:nvSpPr>
+          <p:cNvPr id="5" name="TextBox 4"/>
           <p:cNvSpPr txBox="1"/>
           <p:nvPr/>
         </p:nvSpPr>
         <p:spPr>
           <a:xfrm>
-            <a:off x="868680" y="2788920"/>
-            <a:ext cx="10454335" cy="493776"/>
+            <a:off x="2194560" y="6446520"/>
+            <a:ext cx="5943600" cy="274320"/>
           </a:xfrm>
           <a:prstGeom prst="rect">
             <a:avLst/>
@@ -5527,106 +11884,29 @@
           </a:bodyPr>
           <a:lstStyle/>
           <a:p>
-            <a:r>
-              <a:rPr sz="1300" b="1" i="0">
-                <a:solidFill>
-                  <a:srgbClr val="0C2340"/>
-                </a:solidFill>
-                <a:latin typeface="Calibri"/>
-              </a:rPr>
-              <a:t>💡 Aclaración</a:t>
-            </a:r>
-          </a:p>
-          <a:p>
-            <a:pPr>
-              <a:spcBef>
-                <a:spcPts val="400"/>
-              </a:spcBef>
-            </a:pPr>
-            <a:r>
-              <a:rPr sz="1300" b="0" i="0">
-                <a:solidFill>
-                  <a:srgbClr val="2B2B2B"/>
-                </a:solidFill>
-                <a:latin typeface="Calibri"/>
-              </a:rPr>
-              <a:t>Traer el avance </a:t>
-            </a:r>
-            <a:r>
-              <a:rPr sz="1300" b="1" i="0">
-                <a:solidFill>
-                  <a:srgbClr val="2B2B2B"/>
-                </a:solidFill>
-                <a:latin typeface="Calibri"/>
-              </a:rPr>
-              <a:t>escrito</a:t>
-            </a:r>
-            <a:r>
-              <a:rPr sz="1300" b="0" i="0">
-                <a:solidFill>
-                  <a:srgbClr val="2B2B2B"/>
-                </a:solidFill>
-                <a:latin typeface="Calibri"/>
-              </a:rPr>
-              <a:t> a cada encuentro: se trabaja sobre lo que ya existe.</a:t>
-            </a:r>
-          </a:p>
-        </p:txBody>
-      </p:sp>
-      <p:sp>
-        <p:nvSpPr>
-          <p:cNvPr id="8" name="Rounded Rectangle 7"/>
-          <p:cNvSpPr/>
-          <p:nvPr/>
-        </p:nvSpPr>
-        <p:spPr>
-          <a:xfrm>
-            <a:off x="640080" y="3621024"/>
-            <a:ext cx="10911535" cy="713232"/>
-          </a:xfrm>
-          <a:prstGeom prst="roundRect">
-            <a:avLst/>
-          </a:prstGeom>
-          <a:solidFill>
-            <a:srgbClr val="FBE4E4"/>
-          </a:solidFill>
-          <a:ln>
-            <a:noFill/>
-          </a:ln>
-          <a:effectLst/>
-        </p:spPr>
-        <p:style>
-          <a:lnRef idx="1">
-            <a:schemeClr val="accent1"/>
-          </a:lnRef>
-          <a:fillRef idx="3">
-            <a:schemeClr val="accent1"/>
-          </a:fillRef>
-          <a:effectRef idx="2">
-            <a:schemeClr val="accent1"/>
-          </a:effectRef>
-          <a:fontRef idx="minor">
-            <a:schemeClr val="lt1"/>
-          </a:fontRef>
-        </p:style>
-        <p:txBody>
-          <a:bodyPr rtlCol="0" anchor="ctr"/>
-          <a:lstStyle/>
-          <a:p>
-            <a:pPr algn="ctr"/>
-          </a:p>
-        </p:txBody>
-      </p:sp>
-      <p:sp>
-        <p:nvSpPr>
-          <p:cNvPr id="9" name="TextBox 8"/>
+            <a:pPr algn="l"/>
+            <a:r>
+              <a:rPr sz="1000" b="1" i="0">
+                <a:solidFill>
+                  <a:srgbClr val="8F989D"/>
+                </a:solidFill>
+                <a:latin typeface="Calibri"/>
+              </a:rPr>
+              <a:t>Inicio 5:10 pm</a:t>
+            </a:r>
+          </a:p>
+        </p:txBody>
+      </p:sp>
+      <p:sp>
+        <p:nvSpPr>
+          <p:cNvPr id="6" name="TextBox 5"/>
           <p:cNvSpPr txBox="1"/>
           <p:nvPr/>
         </p:nvSpPr>
         <p:spPr>
           <a:xfrm>
-            <a:off x="868680" y="3730752"/>
-            <a:ext cx="10454335" cy="493776"/>
+            <a:off x="11094415" y="6446520"/>
+            <a:ext cx="548640" cy="274320"/>
           </a:xfrm>
           <a:prstGeom prst="rect">
             <a:avLst/>
@@ -5639,62 +11919,29 @@
           </a:bodyPr>
           <a:lstStyle/>
           <a:p>
-            <a:r>
-              <a:rPr sz="1300" b="1" i="0">
-                <a:solidFill>
-                  <a:srgbClr val="0C2340"/>
-                </a:solidFill>
-                <a:latin typeface="Calibri"/>
-              </a:rPr>
-              <a:t>⚠️ Importante</a:t>
-            </a:r>
-          </a:p>
-          <a:p>
-            <a:pPr>
-              <a:spcBef>
-                <a:spcPts val="400"/>
-              </a:spcBef>
-            </a:pPr>
-            <a:r>
-              <a:rPr sz="1300" b="0" i="0">
-                <a:solidFill>
-                  <a:srgbClr val="2B2B2B"/>
-                </a:solidFill>
-                <a:latin typeface="Calibri"/>
-              </a:rPr>
-              <a:t>Integridad académica: citar siempre en </a:t>
-            </a:r>
-            <a:r>
-              <a:rPr sz="1300" b="1" i="0">
-                <a:solidFill>
-                  <a:srgbClr val="2B2B2B"/>
-                </a:solidFill>
-                <a:latin typeface="Calibri"/>
-              </a:rPr>
-              <a:t>APA 7</a:t>
-            </a:r>
-            <a:r>
-              <a:rPr sz="1300" b="0" i="0">
-                <a:solidFill>
-                  <a:srgbClr val="2B2B2B"/>
-                </a:solidFill>
-                <a:latin typeface="Calibri"/>
-              </a:rPr>
-              <a:t>. El plagio tiene debido proceso.</a:t>
-            </a:r>
-          </a:p>
-        </p:txBody>
-      </p:sp>
-      <p:sp>
-        <p:nvSpPr>
-          <p:cNvPr id="10" name="TextBox 9"/>
+            <a:pPr algn="r"/>
+            <a:r>
+              <a:rPr sz="1000" b="1" i="0">
+                <a:solidFill>
+                  <a:srgbClr val="8F989D"/>
+                </a:solidFill>
+                <a:latin typeface="Calibri"/>
+              </a:rPr>
+              <a:t>6</a:t>
+            </a:r>
+          </a:p>
+        </p:txBody>
+      </p:sp>
+      <p:sp>
+        <p:nvSpPr>
+          <p:cNvPr id="7" name="TextBox 6"/>
           <p:cNvSpPr txBox="1"/>
           <p:nvPr/>
         </p:nvSpPr>
         <p:spPr>
           <a:xfrm>
-            <a:off x="2194560" y="6446520"/>
-            <a:ext cx="5943600" cy="274320"/>
+            <a:off x="640080" y="5943600"/>
+            <a:ext cx="9997135" cy="457200"/>
           </a:xfrm>
           <a:prstGeom prst="rect">
             <a:avLst/>
@@ -5707,50 +11954,32 @@
           </a:bodyPr>
           <a:lstStyle/>
           <a:p>
-            <a:pPr algn="l"/>
-            <a:r>
-              <a:rPr sz="1000" b="1" i="0">
-                <a:solidFill>
-                  <a:srgbClr val="8F989D"/>
-                </a:solidFill>
-                <a:latin typeface="Calibri"/>
-              </a:rPr>
-              <a:t>Inicio 5:10 pm</a:t>
-            </a:r>
-          </a:p>
-        </p:txBody>
-      </p:sp>
-      <p:sp>
-        <p:nvSpPr>
-          <p:cNvPr id="11" name="TextBox 10"/>
-          <p:cNvSpPr txBox="1"/>
-          <p:nvPr/>
-        </p:nvSpPr>
-        <p:spPr>
-          <a:xfrm>
-            <a:off x="11094415" y="6446520"/>
-            <a:ext cx="548640" cy="274320"/>
-          </a:xfrm>
-          <a:prstGeom prst="rect">
-            <a:avLst/>
-          </a:prstGeom>
-          <a:noFill/>
-        </p:spPr>
-        <p:txBody>
-          <a:bodyPr wrap="square" anchor="t" lIns="0" rIns="0" tIns="0" bIns="0">
-            <a:spAutoFit/>
-          </a:bodyPr>
-          <a:lstStyle/>
-          <a:p>
-            <a:pPr algn="r"/>
-            <a:r>
-              <a:rPr sz="1000" b="1" i="0">
-                <a:solidFill>
-                  <a:srgbClr val="8F989D"/>
-                </a:solidFill>
-                <a:latin typeface="Calibri"/>
-              </a:rPr>
-              <a:t>6</a:t>
+            <a:r>
+              <a:rPr sz="1200" b="0" i="1">
+                <a:solidFill>
+                  <a:srgbClr val="2B2B2B"/>
+                </a:solidFill>
+                <a:latin typeface="Calibri"/>
+              </a:rPr>
+              <a:t>Regla del curso: </a:t>
+            </a:r>
+            <a:r>
+              <a:rPr sz="1200" b="1" i="1">
+                <a:solidFill>
+                  <a:srgbClr val="2B2B2B"/>
+                </a:solidFill>
+                <a:latin typeface="Calibri"/>
+              </a:rPr>
+              <a:t>se trabaja sobre lo que ya existe</a:t>
+            </a:r>
+            <a:r>
+              <a:rPr sz="1200" b="0" i="1">
+                <a:solidFill>
+                  <a:srgbClr val="2B2B2B"/>
+                </a:solidFill>
+                <a:latin typeface="Calibri"/>
+              </a:rPr>
+              <a:t>. Quien llega sin documento abierto pierde la hora de taller.</a:t>
             </a:r>
           </a:p>
         </p:txBody>
@@ -5855,21 +12084,563 @@
                 </a:solidFill>
                 <a:latin typeface="Calibri"/>
               </a:rPr>
-              <a:t>PARA LA PRÓXIMA SESIÓN</a:t>
-            </a:r>
-          </a:p>
-        </p:txBody>
-      </p:sp>
-      <p:sp>
-        <p:nvSpPr>
-          <p:cNvPr id="4" name="TextBox 3"/>
+              <a:t>Mapa del curso: las 6 sesiones de un vistazo</a:t>
+            </a:r>
+          </a:p>
+        </p:txBody>
+      </p:sp>
+      <p:graphicFrame>
+        <p:nvGraphicFramePr>
+          <p:cNvPr id="4" name="Table 3"/>
+          <p:cNvGraphicFramePr>
+            <a:graphicFrameLocks noGrp="1"/>
+          </p:cNvGraphicFramePr>
+          <p:nvPr/>
+        </p:nvGraphicFramePr>
+        <p:xfrm>
+          <a:off x="640080" y="1691639"/>
+          <a:ext cx="10911534" cy="3520440"/>
+        </p:xfrm>
+        <a:graphic>
+          <a:graphicData uri="http://schemas.openxmlformats.org/drawingml/2006/table">
+            <a:tbl>
+              <a:tblPr>
+                <a:tableStyleId>{2D5ABB26-0587-4C30-8999-92F81FD0307C}</a:tableStyleId>
+              </a:tblPr>
+              <a:tblGrid>
+                <a:gridCol w="1100322"/>
+                <a:gridCol w="5134840"/>
+                <a:gridCol w="4676372"/>
+              </a:tblGrid>
+              <a:tr h="502920">
+                <a:tc>
+                  <a:txBody>
+                    <a:bodyPr/>
+                    <a:lstStyle/>
+                    <a:p>
+                      <a:pPr algn="l"/>
+                      <a:r>
+                        <a:rPr sz="1300" b="1" i="0">
+                          <a:solidFill>
+                            <a:srgbClr val="FFFFFF"/>
+                          </a:solidFill>
+                          <a:latin typeface="Calibri"/>
+                        </a:rPr>
+                        <a:t>Sesión</a:t>
+                      </a:r>
+                    </a:p>
+                  </a:txBody>
+                  <a:tcPr anchor="ctr" marL="109728" marR="91440" marT="36576" marB="36576">
+                    <a:solidFill>
+                      <a:srgbClr val="0C2340"/>
+                    </a:solidFill>
+                  </a:tcPr>
+                </a:tc>
+                <a:tc>
+                  <a:txBody>
+                    <a:bodyPr/>
+                    <a:lstStyle/>
+                    <a:p>
+                      <a:pPr algn="l"/>
+                      <a:r>
+                        <a:rPr sz="1300" b="1" i="0">
+                          <a:solidFill>
+                            <a:srgbClr val="FFFFFF"/>
+                          </a:solidFill>
+                          <a:latin typeface="Calibri"/>
+                        </a:rPr>
+                        <a:t>De qué se ocupa</a:t>
+                      </a:r>
+                    </a:p>
+                  </a:txBody>
+                  <a:tcPr anchor="ctr" marL="109728" marR="91440" marT="36576" marB="36576">
+                    <a:solidFill>
+                      <a:srgbClr val="0C2340"/>
+                    </a:solidFill>
+                  </a:tcPr>
+                </a:tc>
+                <a:tc>
+                  <a:txBody>
+                    <a:bodyPr/>
+                    <a:lstStyle/>
+                    <a:p>
+                      <a:pPr algn="l"/>
+                      <a:r>
+                        <a:rPr sz="1300" b="1" i="0">
+                          <a:solidFill>
+                            <a:srgbClr val="FFFFFF"/>
+                          </a:solidFill>
+                          <a:latin typeface="Calibri"/>
+                        </a:rPr>
+                        <a:t>Con qué sale usted de ahí</a:t>
+                      </a:r>
+                    </a:p>
+                  </a:txBody>
+                  <a:tcPr anchor="ctr" marL="109728" marR="91440" marT="36576" marB="36576">
+                    <a:solidFill>
+                      <a:srgbClr val="0C2340"/>
+                    </a:solidFill>
+                  </a:tcPr>
+                </a:tc>
+              </a:tr>
+              <a:tr h="502920">
+                <a:tc>
+                  <a:txBody>
+                    <a:bodyPr/>
+                    <a:lstStyle/>
+                    <a:p>
+                      <a:pPr algn="l"/>
+                      <a:r>
+                        <a:rPr sz="1200" b="1" i="0">
+                          <a:solidFill>
+                            <a:srgbClr val="2B2B2B"/>
+                          </a:solidFill>
+                          <a:latin typeface="Calibri"/>
+                        </a:rPr>
+                        <a:t>01</a:t>
+                      </a:r>
+                    </a:p>
+                  </a:txBody>
+                  <a:tcPr anchor="ctr" marL="109728" marR="91440" marT="36576" marB="36576">
+                    <a:solidFill>
+                      <a:srgbClr val="FFFFFF"/>
+                    </a:solidFill>
+                  </a:tcPr>
+                </a:tc>
+                <a:tc>
+                  <a:txBody>
+                    <a:bodyPr/>
+                    <a:lstStyle/>
+                    <a:p>
+                      <a:pPr algn="l"/>
+                      <a:r>
+                        <a:rPr sz="1200" b="0" i="0">
+                          <a:solidFill>
+                            <a:srgbClr val="2B2B2B"/>
+                          </a:solidFill>
+                          <a:latin typeface="Calibri"/>
+                        </a:rPr>
+                        <a:t>Presentación del curso, del Docente, de ustedes y de las ACAs (</a:t>
+                      </a:r>
+                      <a:r>
+                        <a:rPr sz="1200" b="1" i="0">
+                          <a:solidFill>
+                            <a:srgbClr val="2B2B2B"/>
+                          </a:solidFill>
+                          <a:latin typeface="Calibri"/>
+                        </a:rPr>
+                        <a:t>hoy</a:t>
+                      </a:r>
+                      <a:r>
+                        <a:rPr sz="1200" b="0" i="0">
+                          <a:solidFill>
+                            <a:srgbClr val="2B2B2B"/>
+                          </a:solidFill>
+                          <a:latin typeface="Calibri"/>
+                        </a:rPr>
+                        <a:t>)</a:t>
+                      </a:r>
+                    </a:p>
+                  </a:txBody>
+                  <a:tcPr anchor="ctr" marL="109728" marR="91440" marT="36576" marB="36576">
+                    <a:solidFill>
+                      <a:srgbClr val="FFFFFF"/>
+                    </a:solidFill>
+                  </a:tcPr>
+                </a:tc>
+                <a:tc>
+                  <a:txBody>
+                    <a:bodyPr/>
+                    <a:lstStyle/>
+                    <a:p>
+                      <a:pPr algn="l"/>
+                      <a:r>
+                        <a:rPr sz="1200" b="0" i="0">
+                          <a:solidFill>
+                            <a:srgbClr val="2B2B2B"/>
+                          </a:solidFill>
+                          <a:latin typeface="Calibri"/>
+                        </a:rPr>
+                        <a:t>El encuadre completo y su encargo autónomo</a:t>
+                      </a:r>
+                    </a:p>
+                  </a:txBody>
+                  <a:tcPr anchor="ctr" marL="109728" marR="91440" marT="36576" marB="36576">
+                    <a:solidFill>
+                      <a:srgbClr val="FFFFFF"/>
+                    </a:solidFill>
+                  </a:tcPr>
+                </a:tc>
+              </a:tr>
+              <a:tr h="502920">
+                <a:tc>
+                  <a:txBody>
+                    <a:bodyPr/>
+                    <a:lstStyle/>
+                    <a:p>
+                      <a:pPr algn="l"/>
+                      <a:r>
+                        <a:rPr sz="1200" b="1" i="0">
+                          <a:solidFill>
+                            <a:srgbClr val="2B2B2B"/>
+                          </a:solidFill>
+                          <a:latin typeface="Calibri"/>
+                        </a:rPr>
+                        <a:t>02</a:t>
+                      </a:r>
+                    </a:p>
+                  </a:txBody>
+                  <a:tcPr anchor="ctr" marL="109728" marR="91440" marT="36576" marB="36576">
+                    <a:solidFill>
+                      <a:srgbClr val="F2F2F2"/>
+                    </a:solidFill>
+                  </a:tcPr>
+                </a:tc>
+                <a:tc>
+                  <a:txBody>
+                    <a:bodyPr/>
+                    <a:lstStyle/>
+                    <a:p>
+                      <a:pPr algn="l"/>
+                      <a:r>
+                        <a:rPr sz="1200" b="0" i="0">
+                          <a:solidFill>
+                            <a:srgbClr val="2B2B2B"/>
+                          </a:solidFill>
+                          <a:latin typeface="Calibri"/>
+                        </a:rPr>
+                        <a:t>MinCiencias y las 6 líneas de Ingeniería del programa</a:t>
+                      </a:r>
+                    </a:p>
+                  </a:txBody>
+                  <a:tcPr anchor="ctr" marL="109728" marR="91440" marT="36576" marB="36576">
+                    <a:solidFill>
+                      <a:srgbClr val="F2F2F2"/>
+                    </a:solidFill>
+                  </a:tcPr>
+                </a:tc>
+                <a:tc>
+                  <a:txBody>
+                    <a:bodyPr/>
+                    <a:lstStyle/>
+                    <a:p>
+                      <a:pPr algn="l"/>
+                      <a:r>
+                        <a:rPr sz="1200" b="0" i="0">
+                          <a:solidFill>
+                            <a:srgbClr val="2B2B2B"/>
+                          </a:solidFill>
+                          <a:latin typeface="Calibri"/>
+                        </a:rPr>
+                        <a:t>Su línea elegida y justificada por escrito</a:t>
+                      </a:r>
+                    </a:p>
+                  </a:txBody>
+                  <a:tcPr anchor="ctr" marL="109728" marR="91440" marT="36576" marB="36576">
+                    <a:solidFill>
+                      <a:srgbClr val="F2F2F2"/>
+                    </a:solidFill>
+                  </a:tcPr>
+                </a:tc>
+              </a:tr>
+              <a:tr h="502920">
+                <a:tc>
+                  <a:txBody>
+                    <a:bodyPr/>
+                    <a:lstStyle/>
+                    <a:p>
+                      <a:pPr algn="l"/>
+                      <a:r>
+                        <a:rPr sz="1200" b="1" i="0">
+                          <a:solidFill>
+                            <a:srgbClr val="2B2B2B"/>
+                          </a:solidFill>
+                          <a:latin typeface="Calibri"/>
+                        </a:rPr>
+                        <a:t>03</a:t>
+                      </a:r>
+                    </a:p>
+                  </a:txBody>
+                  <a:tcPr anchor="ctr" marL="109728" marR="91440" marT="36576" marB="36576">
+                    <a:solidFill>
+                      <a:srgbClr val="FFFFFF"/>
+                    </a:solidFill>
+                  </a:tcPr>
+                </a:tc>
+                <a:tc>
+                  <a:txBody>
+                    <a:bodyPr/>
+                    <a:lstStyle/>
+                    <a:p>
+                      <a:pPr algn="l"/>
+                      <a:r>
+                        <a:rPr sz="1200" b="0" i="0">
+                          <a:solidFill>
+                            <a:srgbClr val="2B2B2B"/>
+                          </a:solidFill>
+                          <a:latin typeface="Calibri"/>
+                        </a:rPr>
+                        <a:t>Prueba parcial y 1.er avance del artículo</a:t>
+                      </a:r>
+                    </a:p>
+                  </a:txBody>
+                  <a:tcPr anchor="ctr" marL="109728" marR="91440" marT="36576" marB="36576">
+                    <a:solidFill>
+                      <a:srgbClr val="FFFFFF"/>
+                    </a:solidFill>
+                  </a:tcPr>
+                </a:tc>
+                <a:tc>
+                  <a:txBody>
+                    <a:bodyPr/>
+                    <a:lstStyle/>
+                    <a:p>
+                      <a:pPr algn="l"/>
+                      <a:r>
+                        <a:rPr sz="1200" b="0" i="0">
+                          <a:solidFill>
+                            <a:srgbClr val="2B2B2B"/>
+                          </a:solidFill>
+                          <a:latin typeface="Calibri"/>
+                        </a:rPr>
+                        <a:t>El borrador mínimo viable del artículo</a:t>
+                      </a:r>
+                    </a:p>
+                  </a:txBody>
+                  <a:tcPr anchor="ctr" marL="109728" marR="91440" marT="36576" marB="36576">
+                    <a:solidFill>
+                      <a:srgbClr val="FFFFFF"/>
+                    </a:solidFill>
+                  </a:tcPr>
+                </a:tc>
+              </a:tr>
+              <a:tr h="502920">
+                <a:tc>
+                  <a:txBody>
+                    <a:bodyPr/>
+                    <a:lstStyle/>
+                    <a:p>
+                      <a:pPr algn="l"/>
+                      <a:r>
+                        <a:rPr sz="1200" b="1" i="0">
+                          <a:solidFill>
+                            <a:srgbClr val="2B2B2B"/>
+                          </a:solidFill>
+                          <a:latin typeface="Calibri"/>
+                        </a:rPr>
+                        <a:t>04</a:t>
+                      </a:r>
+                    </a:p>
+                  </a:txBody>
+                  <a:tcPr anchor="ctr" marL="109728" marR="91440" marT="36576" marB="36576">
+                    <a:solidFill>
+                      <a:srgbClr val="F2F2F2"/>
+                    </a:solidFill>
+                  </a:tcPr>
+                </a:tc>
+                <a:tc>
+                  <a:txBody>
+                    <a:bodyPr/>
+                    <a:lstStyle/>
+                    <a:p>
+                      <a:pPr algn="l"/>
+                      <a:r>
+                        <a:rPr sz="1200" b="0" i="0">
+                          <a:solidFill>
+                            <a:srgbClr val="2B2B2B"/>
+                          </a:solidFill>
+                          <a:latin typeface="Calibri"/>
+                        </a:rPr>
+                        <a:t>Identificación de problemas y pregunta de investigación</a:t>
+                      </a:r>
+                    </a:p>
+                  </a:txBody>
+                  <a:tcPr anchor="ctr" marL="109728" marR="91440" marT="36576" marB="36576">
+                    <a:solidFill>
+                      <a:srgbClr val="F2F2F2"/>
+                    </a:solidFill>
+                  </a:tcPr>
+                </a:tc>
+                <a:tc>
+                  <a:txBody>
+                    <a:bodyPr/>
+                    <a:lstStyle/>
+                    <a:p>
+                      <a:pPr algn="l"/>
+                      <a:r>
+                        <a:rPr sz="1200" b="0" i="0">
+                          <a:solidFill>
+                            <a:srgbClr val="2B2B2B"/>
+                          </a:solidFill>
+                          <a:latin typeface="Calibri"/>
+                        </a:rPr>
+                        <a:t>Su pregunta redactada y su diagrama del problema</a:t>
+                      </a:r>
+                    </a:p>
+                  </a:txBody>
+                  <a:tcPr anchor="ctr" marL="109728" marR="91440" marT="36576" marB="36576">
+                    <a:solidFill>
+                      <a:srgbClr val="F2F2F2"/>
+                    </a:solidFill>
+                  </a:tcPr>
+                </a:tc>
+              </a:tr>
+              <a:tr h="502920">
+                <a:tc>
+                  <a:txBody>
+                    <a:bodyPr/>
+                    <a:lstStyle/>
+                    <a:p>
+                      <a:pPr algn="l"/>
+                      <a:r>
+                        <a:rPr sz="1200" b="1" i="0">
+                          <a:solidFill>
+                            <a:srgbClr val="2B2B2B"/>
+                          </a:solidFill>
+                          <a:latin typeface="Calibri"/>
+                        </a:rPr>
+                        <a:t>05</a:t>
+                      </a:r>
+                    </a:p>
+                  </a:txBody>
+                  <a:tcPr anchor="ctr" marL="109728" marR="91440" marT="36576" marB="36576">
+                    <a:solidFill>
+                      <a:srgbClr val="FFFFFF"/>
+                    </a:solidFill>
+                  </a:tcPr>
+                </a:tc>
+                <a:tc>
+                  <a:txBody>
+                    <a:bodyPr/>
+                    <a:lstStyle/>
+                    <a:p>
+                      <a:pPr algn="l"/>
+                      <a:r>
+                        <a:rPr sz="1200" b="0" i="0">
+                          <a:solidFill>
+                            <a:srgbClr val="2B2B2B"/>
+                          </a:solidFill>
+                          <a:latin typeface="Calibri"/>
+                        </a:rPr>
+                        <a:t>Formulación del planteamiento del problema</a:t>
+                      </a:r>
+                    </a:p>
+                  </a:txBody>
+                  <a:tcPr anchor="ctr" marL="109728" marR="91440" marT="36576" marB="36576">
+                    <a:solidFill>
+                      <a:srgbClr val="FFFFFF"/>
+                    </a:solidFill>
+                  </a:tcPr>
+                </a:tc>
+                <a:tc>
+                  <a:txBody>
+                    <a:bodyPr/>
+                    <a:lstStyle/>
+                    <a:p>
+                      <a:pPr algn="l"/>
+                      <a:r>
+                        <a:rPr sz="1200" b="0" i="0">
+                          <a:solidFill>
+                            <a:srgbClr val="2B2B2B"/>
+                          </a:solidFill>
+                          <a:latin typeface="Calibri"/>
+                        </a:rPr>
+                        <a:t>El planteamiento escrito y sostenido con evidencia</a:t>
+                      </a:r>
+                    </a:p>
+                  </a:txBody>
+                  <a:tcPr anchor="ctr" marL="109728" marR="91440" marT="36576" marB="36576">
+                    <a:solidFill>
+                      <a:srgbClr val="FFFFFF"/>
+                    </a:solidFill>
+                  </a:tcPr>
+                </a:tc>
+              </a:tr>
+              <a:tr h="502920">
+                <a:tc>
+                  <a:txBody>
+                    <a:bodyPr/>
+                    <a:lstStyle/>
+                    <a:p>
+                      <a:pPr algn="l"/>
+                      <a:r>
+                        <a:rPr sz="1200" b="1" i="0">
+                          <a:solidFill>
+                            <a:srgbClr val="2B2B2B"/>
+                          </a:solidFill>
+                          <a:latin typeface="Calibri"/>
+                        </a:rPr>
+                        <a:t>06</a:t>
+                      </a:r>
+                    </a:p>
+                  </a:txBody>
+                  <a:tcPr anchor="ctr" marL="109728" marR="91440" marT="36576" marB="36576">
+                    <a:solidFill>
+                      <a:srgbClr val="F2F2F2"/>
+                    </a:solidFill>
+                  </a:tcPr>
+                </a:tc>
+                <a:tc>
+                  <a:txBody>
+                    <a:bodyPr/>
+                    <a:lstStyle/>
+                    <a:p>
+                      <a:pPr algn="l"/>
+                      <a:r>
+                        <a:rPr sz="1200" b="0" i="0">
+                          <a:solidFill>
+                            <a:srgbClr val="2B2B2B"/>
+                          </a:solidFill>
+                          <a:latin typeface="Calibri"/>
+                        </a:rPr>
+                        <a:t>Bases de datos, gestores de citas y marco teórico (sesión combinada)</a:t>
+                      </a:r>
+                    </a:p>
+                  </a:txBody>
+                  <a:tcPr anchor="ctr" marL="109728" marR="91440" marT="36576" marB="36576">
+                    <a:solidFill>
+                      <a:srgbClr val="F2F2F2"/>
+                    </a:solidFill>
+                  </a:tcPr>
+                </a:tc>
+                <a:tc>
+                  <a:txBody>
+                    <a:bodyPr/>
+                    <a:lstStyle/>
+                    <a:p>
+                      <a:pPr algn="l"/>
+                      <a:r>
+                        <a:rPr sz="1200" b="0" i="0">
+                          <a:solidFill>
+                            <a:srgbClr val="2B2B2B"/>
+                          </a:solidFill>
+                          <a:latin typeface="Calibri"/>
+                        </a:rPr>
+                        <a:t>Fichas de lectura y una página de marco citada</a:t>
+                      </a:r>
+                    </a:p>
+                  </a:txBody>
+                  <a:tcPr anchor="ctr" marL="109728" marR="91440" marT="36576" marB="36576">
+                    <a:solidFill>
+                      <a:srgbClr val="F2F2F2"/>
+                    </a:solidFill>
+                  </a:tcPr>
+                </a:tc>
+              </a:tr>
+            </a:tbl>
+          </a:graphicData>
+        </a:graphic>
+      </p:graphicFrame>
+      <p:sp>
+        <p:nvSpPr>
+          <p:cNvPr id="5" name="TextBox 4"/>
           <p:cNvSpPr txBox="1"/>
           <p:nvPr/>
         </p:nvSpPr>
         <p:spPr>
           <a:xfrm>
-            <a:off x="640080" y="1691639"/>
-            <a:ext cx="10911535" cy="4617720"/>
+            <a:off x="640080" y="5349240"/>
+            <a:ext cx="10911535" cy="548640"/>
           </a:xfrm>
           <a:prstGeom prst="rect">
             <a:avLst/>
@@ -5882,112 +12653,57 @@
           </a:bodyPr>
           <a:lstStyle/>
           <a:p>
-            <a:pPr>
-              <a:spcAft>
-                <a:spcPts val="1000"/>
-              </a:spcAft>
-            </a:pPr>
-            <a:r>
-              <a:rPr sz="1600" b="0" i="0">
-                <a:solidFill>
-                  <a:srgbClr val="2B2B2B"/>
-                </a:solidFill>
-                <a:latin typeface="Calibri"/>
-              </a:rPr>
-              <a:t>–   </a:t>
-            </a:r>
-            <a:r>
-              <a:rPr sz="1600" b="1" i="0">
-                <a:solidFill>
-                  <a:srgbClr val="2B2B2B"/>
-                </a:solidFill>
-                <a:latin typeface="Calibri"/>
-              </a:rPr>
-              <a:t>Lectura autónoma:</a:t>
-            </a:r>
-            <a:r>
-              <a:rPr sz="1600" b="0" i="0">
-                <a:solidFill>
-                  <a:srgbClr val="2B2B2B"/>
-                </a:solidFill>
-                <a:latin typeface="Calibri"/>
-              </a:rPr>
-              <a:t> U1–U2 (Syllabus y producto final · fundamentos del método científico) — la retomamos al abrir la Sesión 02.</a:t>
-            </a:r>
-          </a:p>
-          <a:p>
-            <a:pPr>
-              <a:spcAft>
-                <a:spcPts val="1000"/>
-              </a:spcAft>
-            </a:pPr>
-            <a:r>
-              <a:rPr sz="1600" b="0" i="0">
-                <a:solidFill>
-                  <a:srgbClr val="2B2B2B"/>
-                </a:solidFill>
-                <a:latin typeface="Calibri"/>
-              </a:rPr>
-              <a:t>–   Revisar la </a:t>
-            </a:r>
-            <a:r>
-              <a:rPr sz="1600" b="1" i="0">
-                <a:solidFill>
-                  <a:srgbClr val="2B2B2B"/>
-                </a:solidFill>
-                <a:latin typeface="Calibri"/>
-              </a:rPr>
-              <a:t>Presentación del Curso</a:t>
-            </a:r>
-            <a:r>
-              <a:rPr sz="1600" b="0" i="0">
-                <a:solidFill>
-                  <a:srgbClr val="2B2B2B"/>
-                </a:solidFill>
-                <a:latin typeface="Calibri"/>
-              </a:rPr>
-              <a:t> completa (fechas, evaluación, contenido de todas las sesiones).</a:t>
-            </a:r>
-          </a:p>
-          <a:p>
-            <a:pPr>
-              <a:spcAft>
-                <a:spcPts val="1000"/>
-              </a:spcAft>
-            </a:pPr>
-            <a:r>
-              <a:rPr sz="1600" b="0" i="0">
-                <a:solidFill>
-                  <a:srgbClr val="2B2B2B"/>
-                </a:solidFill>
-                <a:latin typeface="Calibri"/>
-              </a:rPr>
-              <a:t>–   Abrir el enunciado de la </a:t>
-            </a:r>
-            <a:r>
-              <a:rPr sz="1600" b="1" i="0">
-                <a:solidFill>
-                  <a:srgbClr val="2B2B2B"/>
-                </a:solidFill>
-                <a:latin typeface="Calibri"/>
-              </a:rPr>
-              <a:t>ACA 1</a:t>
-            </a:r>
-            <a:r>
-              <a:rPr sz="1600" b="0" i="0">
-                <a:solidFill>
-                  <a:srgbClr val="2B2B2B"/>
-                </a:solidFill>
-                <a:latin typeface="Calibri"/>
-              </a:rPr>
-              <a:t> en `Clases/Recursos/ACAs/` y leerlo entero.</a:t>
-            </a:r>
-          </a:p>
-        </p:txBody>
-      </p:sp>
-      <p:sp>
-        <p:nvSpPr>
-          <p:cNvPr id="5" name="TextBox 4"/>
+            <a:r>
+              <a:rPr sz="1200" b="0" i="1">
+                <a:solidFill>
+                  <a:srgbClr val="2B2B2B"/>
+                </a:solidFill>
+                <a:latin typeface="Calibri"/>
+              </a:rPr>
+              <a:t>Las unidades </a:t>
+            </a:r>
+            <a:r>
+              <a:rPr sz="1200" b="1" i="1">
+                <a:solidFill>
+                  <a:srgbClr val="2B2B2B"/>
+                </a:solidFill>
+                <a:latin typeface="Calibri"/>
+              </a:rPr>
+              <a:t>U1 y U2</a:t>
+            </a:r>
+            <a:r>
+              <a:rPr sz="1200" b="0" i="1">
+                <a:solidFill>
+                  <a:srgbClr val="2B2B2B"/>
+                </a:solidFill>
+                <a:latin typeface="Calibri"/>
+              </a:rPr>
+              <a:t> del Syllabus no desaparecen: pasan a </a:t>
+            </a:r>
+            <a:r>
+              <a:rPr sz="1200" b="1" i="1">
+                <a:solidFill>
+                  <a:srgbClr val="2B2B2B"/>
+                </a:solidFill>
+                <a:latin typeface="Calibri"/>
+              </a:rPr>
+              <a:t>lectura autónoma</a:t>
+            </a:r>
+            <a:r>
+              <a:rPr sz="1200" b="0" i="1">
+                <a:solidFill>
+                  <a:srgbClr val="2B2B2B"/>
+                </a:solidFill>
+                <a:latin typeface="Calibri"/>
+              </a:rPr>
+              <a:t> y se retoman al abrir la Sesión 02.</a:t>
+            </a:r>
+          </a:p>
+        </p:txBody>
+      </p:sp>
+      <p:sp>
+        <p:nvSpPr>
+          <p:cNvPr id="6" name="TextBox 5"/>
           <p:cNvSpPr txBox="1"/>
           <p:nvPr/>
         </p:nvSpPr>
@@ -6022,7 +12738,7 @@
       </p:sp>
       <p:sp>
         <p:nvSpPr>
-          <p:cNvPr id="6" name="TextBox 5"/>
+          <p:cNvPr id="7" name="TextBox 6"/>
           <p:cNvSpPr txBox="1"/>
           <p:nvPr/>
         </p:nvSpPr>
@@ -6090,13 +12806,13 @@
         <p:spPr>
           <a:xfrm>
             <a:off x="0" y="0"/>
-            <a:ext cx="12191695" cy="164592"/>
+            <a:ext cx="12191695" cy="1188720"/>
           </a:xfrm>
           <a:prstGeom prst="rect">
             <a:avLst/>
           </a:prstGeom>
           <a:solidFill>
-            <a:srgbClr val="007433"/>
+            <a:srgbClr val="0C2340"/>
           </a:solidFill>
           <a:ln>
             <a:noFill/>
@@ -6125,40 +12841,16 @@
           </a:p>
         </p:txBody>
       </p:sp>
-      <p:pic>
-        <p:nvPicPr>
-          <p:cNvPr id="3" name="Picture 2" descr="logo_cun_solo.png"/>
-          <p:cNvPicPr>
-            <a:picLocks noChangeAspect="1"/>
-          </p:cNvPicPr>
-          <p:nvPr/>
-        </p:nvPicPr>
-        <p:blipFill>
-          <a:blip r:embed="rId2"/>
-          <a:stretch>
-            <a:fillRect/>
-          </a:stretch>
-        </p:blipFill>
-        <p:spPr>
-          <a:xfrm>
-            <a:off x="10362895" y="5632704"/>
-            <a:ext cx="1371600" cy="950976"/>
-          </a:xfrm>
-          <a:prstGeom prst="rect">
-            <a:avLst/>
-          </a:prstGeom>
-        </p:spPr>
-      </p:pic>
-      <p:sp>
-        <p:nvSpPr>
-          <p:cNvPr id="4" name="TextBox 3"/>
+      <p:sp>
+        <p:nvSpPr>
+          <p:cNvPr id="3" name="TextBox 2"/>
           <p:cNvSpPr txBox="1"/>
           <p:nvPr/>
         </p:nvSpPr>
         <p:spPr>
           <a:xfrm>
-            <a:off x="640080" y="1737360"/>
-            <a:ext cx="10911535" cy="1097280"/>
+            <a:off x="640080" y="0"/>
+            <a:ext cx="9082735" cy="1188720"/>
           </a:xfrm>
           <a:prstGeom prst="rect">
             <a:avLst/>
@@ -6173,27 +12865,27 @@
           <a:p>
             <a:pPr algn="ctr"/>
             <a:r>
-              <a:rPr sz="3400" b="1" i="0">
-                <a:solidFill>
-                  <a:srgbClr val="0C2340"/>
-                </a:solidFill>
-                <a:latin typeface="Calibri"/>
-              </a:rPr>
-              <a:t>Cierre — Sesión 01</a:t>
-            </a:r>
-          </a:p>
-        </p:txBody>
-      </p:sp>
-      <p:sp>
-        <p:nvSpPr>
-          <p:cNvPr id="5" name="TextBox 4"/>
+              <a:rPr sz="2600" b="1" i="0">
+                <a:solidFill>
+                  <a:srgbClr val="FFFFFF"/>
+                </a:solidFill>
+                <a:latin typeface="Calibri"/>
+              </a:rPr>
+              <a:t>Qué se llevan al final: un artículo, no seis talleres sueltos</a:t>
+            </a:r>
+          </a:p>
+        </p:txBody>
+      </p:sp>
+      <p:sp>
+        <p:nvSpPr>
+          <p:cNvPr id="4" name="TextBox 3"/>
           <p:cNvSpPr txBox="1"/>
           <p:nvPr/>
         </p:nvSpPr>
         <p:spPr>
           <a:xfrm>
-            <a:off x="640080" y="3017520"/>
-            <a:ext cx="10911535" cy="1645920"/>
+            <a:off x="640080" y="1691639"/>
+            <a:ext cx="10911535" cy="4617720"/>
           </a:xfrm>
           <a:prstGeom prst="rect">
             <a:avLst/>
@@ -6206,35 +12898,284 @@
           </a:bodyPr>
           <a:lstStyle/>
           <a:p>
-            <a:pPr algn="ctr">
+            <a:pPr>
+              <a:spcAft>
+                <a:spcPts val="1000"/>
+              </a:spcAft>
+            </a:pPr>
+            <a:r>
+              <a:rPr sz="1600" b="0" i="0">
+                <a:solidFill>
+                  <a:srgbClr val="2B2B2B"/>
+                </a:solidFill>
+                <a:latin typeface="Calibri"/>
+              </a:rPr>
+              <a:t>–   El producto de este curso es </a:t>
+            </a:r>
+            <a:r>
+              <a:rPr sz="1600" b="1" i="0">
+                <a:solidFill>
+                  <a:srgbClr val="2B2B2B"/>
+                </a:solidFill>
+                <a:latin typeface="Calibri"/>
+              </a:rPr>
+              <a:t>un artículo de investigación</a:t>
+            </a:r>
+            <a:r>
+              <a:rPr sz="1600" b="0" i="0">
+                <a:solidFill>
+                  <a:srgbClr val="2B2B2B"/>
+                </a:solidFill>
+                <a:latin typeface="Calibri"/>
+              </a:rPr>
+              <a:t> escrito por usted.</a:t>
+            </a:r>
+          </a:p>
+          <a:p>
+            <a:pPr>
+              <a:spcAft>
+                <a:spcPts val="1000"/>
+              </a:spcAft>
+            </a:pPr>
+            <a:r>
+              <a:rPr sz="1600" b="0" i="0">
+                <a:solidFill>
+                  <a:srgbClr val="2B2B2B"/>
+                </a:solidFill>
+                <a:latin typeface="Calibri"/>
+              </a:rPr>
+              <a:t>–   No son seis entregas independientes: </a:t>
+            </a:r>
+            <a:r>
+              <a:rPr sz="1600" b="1" i="0">
+                <a:solidFill>
+                  <a:srgbClr val="2B2B2B"/>
+                </a:solidFill>
+                <a:latin typeface="Calibri"/>
+              </a:rPr>
+              <a:t>cada sesión agrega una sección al mismo documento</a:t>
+            </a:r>
+            <a:r>
+              <a:rPr sz="1600" b="0" i="0">
+                <a:solidFill>
+                  <a:srgbClr val="2B2B2B"/>
+                </a:solidFill>
+                <a:latin typeface="Calibri"/>
+              </a:rPr>
+              <a:t>.</a:t>
+            </a:r>
+          </a:p>
+          <a:p>
+            <a:pPr>
+              <a:spcAft>
+                <a:spcPts val="1000"/>
+              </a:spcAft>
+            </a:pPr>
+            <a:r>
+              <a:rPr sz="1600" b="0" i="0">
+                <a:solidFill>
+                  <a:srgbClr val="2B2B2B"/>
+                </a:solidFill>
+                <a:latin typeface="Calibri"/>
+              </a:rPr>
+              <a:t>–   Al cerrar el periodo, ese archivo debe contener como mínimo:</a:t>
+            </a:r>
+          </a:p>
+          <a:p>
+            <a:pPr lvl="1">
               <a:spcAft>
                 <a:spcPts val="600"/>
               </a:spcAft>
             </a:pPr>
             <a:r>
-              <a:rPr sz="1600" b="0" i="0">
-                <a:solidFill>
-                  <a:srgbClr val="2B2B2B"/>
-                </a:solidFill>
-                <a:latin typeface="Calibri"/>
-              </a:rPr>
-              <a:t>Ya sabemos qué haremos, cómo se evalúa y quién es quién.</a:t>
-            </a:r>
-          </a:p>
-          <a:p>
-            <a:pPr algn="ctr">
+              <a:rPr sz="1500" b="0" i="0">
+                <a:solidFill>
+                  <a:srgbClr val="2B2B2B"/>
+                </a:solidFill>
+                <a:latin typeface="Calibri"/>
+              </a:rPr>
+              <a:t>●   Un </a:t>
+            </a:r>
+            <a:r>
+              <a:rPr sz="1500" b="1" i="0">
+                <a:solidFill>
+                  <a:srgbClr val="2B2B2B"/>
+                </a:solidFill>
+                <a:latin typeface="Calibri"/>
+              </a:rPr>
+              <a:t>título</a:t>
+            </a:r>
+            <a:r>
+              <a:rPr sz="1500" b="0" i="0">
+                <a:solidFill>
+                  <a:srgbClr val="2B2B2B"/>
+                </a:solidFill>
+                <a:latin typeface="Calibri"/>
+              </a:rPr>
+              <a:t> y una </a:t>
+            </a:r>
+            <a:r>
+              <a:rPr sz="1500" b="1" i="0">
+                <a:solidFill>
+                  <a:srgbClr val="2B2B2B"/>
+                </a:solidFill>
+                <a:latin typeface="Calibri"/>
+              </a:rPr>
+              <a:t>introducción</a:t>
+            </a:r>
+            <a:r>
+              <a:rPr sz="1500" b="0" i="0">
+                <a:solidFill>
+                  <a:srgbClr val="2B2B2B"/>
+                </a:solidFill>
+                <a:latin typeface="Calibri"/>
+              </a:rPr>
+              <a:t> breves.</a:t>
+            </a:r>
+          </a:p>
+          <a:p>
+            <a:pPr lvl="1">
               <a:spcAft>
                 <a:spcPts val="600"/>
               </a:spcAft>
             </a:pPr>
             <a:r>
+              <a:rPr sz="1500" b="0" i="0">
+                <a:solidFill>
+                  <a:srgbClr val="2B2B2B"/>
+                </a:solidFill>
+                <a:latin typeface="Calibri"/>
+              </a:rPr>
+              <a:t>●   El </a:t>
+            </a:r>
+            <a:r>
+              <a:rPr sz="1500" b="1" i="0">
+                <a:solidFill>
+                  <a:srgbClr val="2B2B2B"/>
+                </a:solidFill>
+                <a:latin typeface="Calibri"/>
+              </a:rPr>
+              <a:t>problema</a:t>
+            </a:r>
+            <a:r>
+              <a:rPr sz="1500" b="0" i="0">
+                <a:solidFill>
+                  <a:srgbClr val="2B2B2B"/>
+                </a:solidFill>
+                <a:latin typeface="Calibri"/>
+              </a:rPr>
+              <a:t> y la </a:t>
+            </a:r>
+            <a:r>
+              <a:rPr sz="1500" b="1" i="0">
+                <a:solidFill>
+                  <a:srgbClr val="2B2B2B"/>
+                </a:solidFill>
+                <a:latin typeface="Calibri"/>
+              </a:rPr>
+              <a:t>pregunta</a:t>
+            </a:r>
+            <a:r>
+              <a:rPr sz="1500" b="0" i="0">
+                <a:solidFill>
+                  <a:srgbClr val="2B2B2B"/>
+                </a:solidFill>
+                <a:latin typeface="Calibri"/>
+              </a:rPr>
+              <a:t> de investigación.</a:t>
+            </a:r>
+          </a:p>
+          <a:p>
+            <a:pPr lvl="1">
+              <a:spcAft>
+                <a:spcPts val="600"/>
+              </a:spcAft>
+            </a:pPr>
+            <a:r>
+              <a:rPr sz="1500" b="0" i="0">
+                <a:solidFill>
+                  <a:srgbClr val="2B2B2B"/>
+                </a:solidFill>
+                <a:latin typeface="Calibri"/>
+              </a:rPr>
+              <a:t>●   Un </a:t>
+            </a:r>
+            <a:r>
+              <a:rPr sz="1500" b="1" i="0">
+                <a:solidFill>
+                  <a:srgbClr val="2B2B2B"/>
+                </a:solidFill>
+                <a:latin typeface="Calibri"/>
+              </a:rPr>
+              <a:t>marco / revisión de literatura</a:t>
+            </a:r>
+            <a:r>
+              <a:rPr sz="1500" b="0" i="0">
+                <a:solidFill>
+                  <a:srgbClr val="2B2B2B"/>
+                </a:solidFill>
+                <a:latin typeface="Calibri"/>
+              </a:rPr>
+              <a:t> con fuentes citadas.</a:t>
+            </a:r>
+          </a:p>
+          <a:p>
+            <a:pPr lvl="1">
+              <a:spcAft>
+                <a:spcPts val="600"/>
+              </a:spcAft>
+            </a:pPr>
+            <a:r>
+              <a:rPr sz="1500" b="0" i="0">
+                <a:solidFill>
+                  <a:srgbClr val="2B2B2B"/>
+                </a:solidFill>
+                <a:latin typeface="Calibri"/>
+              </a:rPr>
+              <a:t>●   La </a:t>
+            </a:r>
+            <a:r>
+              <a:rPr sz="1500" b="1" i="0">
+                <a:solidFill>
+                  <a:srgbClr val="2B2B2B"/>
+                </a:solidFill>
+                <a:latin typeface="Calibri"/>
+              </a:rPr>
+              <a:t>lista de referencias</a:t>
+            </a:r>
+            <a:r>
+              <a:rPr sz="1500" b="0" i="0">
+                <a:solidFill>
+                  <a:srgbClr val="2B2B2B"/>
+                </a:solidFill>
+                <a:latin typeface="Calibri"/>
+              </a:rPr>
+              <a:t> completa en APA 7.</a:t>
+            </a:r>
+          </a:p>
+          <a:p>
+            <a:pPr>
+              <a:spcAft>
+                <a:spcPts val="1000"/>
+              </a:spcAft>
+            </a:pPr>
+            <a:r>
+              <a:rPr sz="1600" b="0" i="0">
+                <a:solidFill>
+                  <a:srgbClr val="2B2B2B"/>
+                </a:solidFill>
+                <a:latin typeface="Calibri"/>
+              </a:rPr>
+              <a:t>–   Para qué le sirve después: es la </a:t>
+            </a:r>
+            <a:r>
               <a:rPr sz="1600" b="1" i="0">
                 <a:solidFill>
                   <a:srgbClr val="2B2B2B"/>
                 </a:solidFill>
                 <a:latin typeface="Calibri"/>
               </a:rPr>
-              <a:t>Sesión 02:</a:t>
+              <a:t>semilla de su trabajo de grado</a:t>
             </a:r>
             <a:r>
               <a:rPr sz="1600" b="0" i="0">
@@ -6243,21 +13184,21 @@
                 </a:solidFill>
                 <a:latin typeface="Calibri"/>
               </a:rPr>
-              <a:t> arranca el contenido del curso.</a:t>
-            </a:r>
-          </a:p>
-        </p:txBody>
-      </p:sp>
-      <p:sp>
-        <p:nvSpPr>
-          <p:cNvPr id="6" name="TextBox 5"/>
+              <a:t>, sirve para postularse a un semillero y le enseña a sostener una idea con evidencia, no con opinión.</a:t>
+            </a:r>
+          </a:p>
+        </p:txBody>
+      </p:sp>
+      <p:sp>
+        <p:nvSpPr>
+          <p:cNvPr id="5" name="TextBox 4"/>
           <p:cNvSpPr txBox="1"/>
           <p:nvPr/>
         </p:nvSpPr>
         <p:spPr>
           <a:xfrm>
-            <a:off x="640080" y="4754880"/>
-            <a:ext cx="10911535" cy="640080"/>
+            <a:off x="2194560" y="6446520"/>
+            <a:ext cx="5943600" cy="274320"/>
           </a:xfrm>
           <a:prstGeom prst="rect">
             <a:avLst/>
@@ -6270,29 +13211,29 @@
           </a:bodyPr>
           <a:lstStyle/>
           <a:p>
-            <a:pPr algn="ctr"/>
-            <a:r>
-              <a:rPr sz="2000" b="1" i="0">
-                <a:solidFill>
-                  <a:srgbClr val="007433"/>
-                </a:solidFill>
-                <a:latin typeface="Calibri"/>
-              </a:rPr>
-              <a:t>INVESTIGACIÓN, CIENCIA Y TECNOLOGÍA</a:t>
-            </a:r>
-          </a:p>
-        </p:txBody>
-      </p:sp>
-      <p:sp>
-        <p:nvSpPr>
-          <p:cNvPr id="7" name="TextBox 6"/>
+            <a:pPr algn="l"/>
+            <a:r>
+              <a:rPr sz="1000" b="1" i="0">
+                <a:solidFill>
+                  <a:srgbClr val="8F989D"/>
+                </a:solidFill>
+                <a:latin typeface="Calibri"/>
+              </a:rPr>
+              <a:t>Inicio 5:10 pm</a:t>
+            </a:r>
+          </a:p>
+        </p:txBody>
+      </p:sp>
+      <p:sp>
+        <p:nvSpPr>
+          <p:cNvPr id="6" name="TextBox 5"/>
           <p:cNvSpPr txBox="1"/>
           <p:nvPr/>
         </p:nvSpPr>
         <p:spPr>
           <a:xfrm>
-            <a:off x="2194560" y="6446520"/>
-            <a:ext cx="5943600" cy="274320"/>
+            <a:off x="11094415" y="6446520"/>
+            <a:ext cx="548640" cy="274320"/>
           </a:xfrm>
           <a:prstGeom prst="rect">
             <a:avLst/>
@@ -6305,6 +13246,507 @@
           </a:bodyPr>
           <a:lstStyle/>
           <a:p>
+            <a:pPr algn="r"/>
+            <a:r>
+              <a:rPr sz="1000" b="1" i="0">
+                <a:solidFill>
+                  <a:srgbClr val="8F989D"/>
+                </a:solidFill>
+                <a:latin typeface="Calibri"/>
+              </a:rPr>
+              <a:t>8</a:t>
+            </a:r>
+          </a:p>
+        </p:txBody>
+      </p:sp>
+      <p:sp>
+        <p:nvSpPr>
+          <p:cNvPr id="7" name="TextBox 6"/>
+          <p:cNvSpPr txBox="1"/>
+          <p:nvPr/>
+        </p:nvSpPr>
+        <p:spPr>
+          <a:xfrm>
+            <a:off x="640080" y="5943600"/>
+            <a:ext cx="9997135" cy="457200"/>
+          </a:xfrm>
+          <a:prstGeom prst="rect">
+            <a:avLst/>
+          </a:prstGeom>
+          <a:noFill/>
+        </p:spPr>
+        <p:txBody>
+          <a:bodyPr wrap="square" anchor="t" lIns="0" rIns="0" tIns="0" bIns="0">
+            <a:spAutoFit/>
+          </a:bodyPr>
+          <a:lstStyle/>
+          <a:p>
+            <a:r>
+              <a:rPr sz="1200" b="0" i="1">
+                <a:solidFill>
+                  <a:srgbClr val="2B2B2B"/>
+                </a:solidFill>
+                <a:latin typeface="Calibri"/>
+              </a:rPr>
+              <a:t>Lema del curso: </a:t>
+            </a:r>
+            <a:r>
+              <a:rPr sz="1200" b="1" i="1">
+                <a:solidFill>
+                  <a:srgbClr val="2B2B2B"/>
+                </a:solidFill>
+                <a:latin typeface="Calibri"/>
+              </a:rPr>
+              <a:t>calidad sobre extensión</a:t>
+            </a:r>
+            <a:r>
+              <a:rPr sz="1200" b="0" i="1">
+                <a:solidFill>
+                  <a:srgbClr val="2B2B2B"/>
+                </a:solidFill>
+                <a:latin typeface="Calibri"/>
+              </a:rPr>
+              <a:t>. Media página bien planteada vale más que cinco de relleno.</a:t>
+            </a:r>
+          </a:p>
+        </p:txBody>
+      </p:sp>
+    </p:spTree>
+  </p:cSld>
+  <p:clrMapOvr>
+    <a:masterClrMapping/>
+  </p:clrMapOvr>
+</p:sld>
+</file>
+
+<file path=ppt/slides/slide9.xml><?xml version="1.0" encoding="utf-8"?>
+<p:sld xmlns:a="http://schemas.openxmlformats.org/drawingml/2006/main" xmlns:p="http://schemas.openxmlformats.org/presentationml/2006/main" xmlns:r="http://schemas.openxmlformats.org/officeDocument/2006/relationships">
+  <p:cSld>
+    <p:bg>
+      <p:bgPr>
+        <a:solidFill>
+          <a:srgbClr val="FFFFFF"/>
+        </a:solidFill>
+        <a:effectLst/>
+      </p:bgPr>
+    </p:bg>
+    <p:spTree>
+      <p:nvGrpSpPr>
+        <p:cNvPr id="1" name=""/>
+        <p:cNvGrpSpPr/>
+        <p:nvPr/>
+      </p:nvGrpSpPr>
+      <p:grpSpPr/>
+      <p:sp>
+        <p:nvSpPr>
+          <p:cNvPr id="2" name="Rectangle 1"/>
+          <p:cNvSpPr/>
+          <p:nvPr/>
+        </p:nvSpPr>
+        <p:spPr>
+          <a:xfrm>
+            <a:off x="0" y="0"/>
+            <a:ext cx="12191695" cy="1188720"/>
+          </a:xfrm>
+          <a:prstGeom prst="rect">
+            <a:avLst/>
+          </a:prstGeom>
+          <a:solidFill>
+            <a:srgbClr val="0C2340"/>
+          </a:solidFill>
+          <a:ln>
+            <a:noFill/>
+          </a:ln>
+          <a:effectLst/>
+        </p:spPr>
+        <p:style>
+          <a:lnRef idx="1">
+            <a:schemeClr val="accent1"/>
+          </a:lnRef>
+          <a:fillRef idx="3">
+            <a:schemeClr val="accent1"/>
+          </a:fillRef>
+          <a:effectRef idx="2">
+            <a:schemeClr val="accent1"/>
+          </a:effectRef>
+          <a:fontRef idx="minor">
+            <a:schemeClr val="lt1"/>
+          </a:fontRef>
+        </p:style>
+        <p:txBody>
+          <a:bodyPr rtlCol="0" anchor="ctr"/>
+          <a:lstStyle/>
+          <a:p>
+            <a:pPr algn="ctr"/>
+          </a:p>
+        </p:txBody>
+      </p:sp>
+      <p:sp>
+        <p:nvSpPr>
+          <p:cNvPr id="3" name="TextBox 2"/>
+          <p:cNvSpPr txBox="1"/>
+          <p:nvPr/>
+        </p:nvSpPr>
+        <p:spPr>
+          <a:xfrm>
+            <a:off x="640080" y="0"/>
+            <a:ext cx="9082735" cy="1188720"/>
+          </a:xfrm>
+          <a:prstGeom prst="rect">
+            <a:avLst/>
+          </a:prstGeom>
+          <a:noFill/>
+        </p:spPr>
+        <p:txBody>
+          <a:bodyPr wrap="square" anchor="ctr" lIns="0" rIns="0" tIns="0" bIns="0">
+            <a:spAutoFit/>
+          </a:bodyPr>
+          <a:lstStyle/>
+          <a:p>
+            <a:pPr algn="ctr"/>
+            <a:r>
+              <a:rPr sz="2600" b="1" i="0">
+                <a:solidFill>
+                  <a:srgbClr val="FFFFFF"/>
+                </a:solidFill>
+                <a:latin typeface="Calibri"/>
+              </a:rPr>
+              <a:t>Este es un periodo corto: qué implica para usted</a:t>
+            </a:r>
+          </a:p>
+        </p:txBody>
+      </p:sp>
+      <p:sp>
+        <p:nvSpPr>
+          <p:cNvPr id="4" name="Rounded Rectangle 3"/>
+          <p:cNvSpPr/>
+          <p:nvPr/>
+        </p:nvSpPr>
+        <p:spPr>
+          <a:xfrm>
+            <a:off x="640080" y="1737360"/>
+            <a:ext cx="10911535" cy="969264"/>
+          </a:xfrm>
+          <a:prstGeom prst="roundRect">
+            <a:avLst/>
+          </a:prstGeom>
+          <a:solidFill>
+            <a:srgbClr val="E8F5EC"/>
+          </a:solidFill>
+          <a:ln>
+            <a:noFill/>
+          </a:ln>
+          <a:effectLst/>
+        </p:spPr>
+        <p:style>
+          <a:lnRef idx="1">
+            <a:schemeClr val="accent1"/>
+          </a:lnRef>
+          <a:fillRef idx="3">
+            <a:schemeClr val="accent1"/>
+          </a:fillRef>
+          <a:effectRef idx="2">
+            <a:schemeClr val="accent1"/>
+          </a:effectRef>
+          <a:fontRef idx="minor">
+            <a:schemeClr val="lt1"/>
+          </a:fontRef>
+        </p:style>
+        <p:txBody>
+          <a:bodyPr rtlCol="0" anchor="ctr"/>
+          <a:lstStyle/>
+          <a:p>
+            <a:pPr algn="ctr"/>
+          </a:p>
+        </p:txBody>
+      </p:sp>
+      <p:sp>
+        <p:nvSpPr>
+          <p:cNvPr id="5" name="TextBox 4"/>
+          <p:cNvSpPr txBox="1"/>
+          <p:nvPr/>
+        </p:nvSpPr>
+        <p:spPr>
+          <a:xfrm>
+            <a:off x="868680" y="1847088"/>
+            <a:ext cx="10454335" cy="749808"/>
+          </a:xfrm>
+          <a:prstGeom prst="rect">
+            <a:avLst/>
+          </a:prstGeom>
+          <a:noFill/>
+        </p:spPr>
+        <p:txBody>
+          <a:bodyPr wrap="square" anchor="t" lIns="0" rIns="0" tIns="0" bIns="0">
+            <a:spAutoFit/>
+          </a:bodyPr>
+          <a:lstStyle/>
+          <a:p>
+            <a:r>
+              <a:rPr sz="1300" b="1" i="0">
+                <a:solidFill>
+                  <a:srgbClr val="0C2340"/>
+                </a:solidFill>
+                <a:latin typeface="Calibri"/>
+              </a:rPr>
+              <a:t>ℹ️ Nota institucional</a:t>
+            </a:r>
+          </a:p>
+          <a:p>
+            <a:pPr>
+              <a:spcBef>
+                <a:spcPts val="400"/>
+              </a:spcBef>
+            </a:pPr>
+            <a:r>
+              <a:rPr sz="1300" b="1" i="0">
+                <a:solidFill>
+                  <a:srgbClr val="2B2B2B"/>
+                </a:solidFill>
+                <a:latin typeface="Calibri"/>
+              </a:rPr>
+              <a:t>Son seis encuentros.</a:t>
+            </a:r>
+            <a:r>
+              <a:rPr sz="1300" b="0" i="0">
+                <a:solidFill>
+                  <a:srgbClr val="2B2B2B"/>
+                </a:solidFill>
+                <a:latin typeface="Calibri"/>
+              </a:rPr>
+              <a:t> Faltar a uno es perder cerca de la sexta parte del curso. Si falta, revise CDigital ese mismo día: la consigna queda publicada.</a:t>
+            </a:r>
+          </a:p>
+        </p:txBody>
+      </p:sp>
+      <p:sp>
+        <p:nvSpPr>
+          <p:cNvPr id="6" name="Rounded Rectangle 5"/>
+          <p:cNvSpPr/>
+          <p:nvPr/>
+        </p:nvSpPr>
+        <p:spPr>
+          <a:xfrm>
+            <a:off x="640080" y="2935224"/>
+            <a:ext cx="10911535" cy="969264"/>
+          </a:xfrm>
+          <a:prstGeom prst="roundRect">
+            <a:avLst/>
+          </a:prstGeom>
+          <a:solidFill>
+            <a:srgbClr val="FDECD8"/>
+          </a:solidFill>
+          <a:ln>
+            <a:noFill/>
+          </a:ln>
+          <a:effectLst/>
+        </p:spPr>
+        <p:style>
+          <a:lnRef idx="1">
+            <a:schemeClr val="accent1"/>
+          </a:lnRef>
+          <a:fillRef idx="3">
+            <a:schemeClr val="accent1"/>
+          </a:fillRef>
+          <a:effectRef idx="2">
+            <a:schemeClr val="accent1"/>
+          </a:effectRef>
+          <a:fontRef idx="minor">
+            <a:schemeClr val="lt1"/>
+          </a:fontRef>
+        </p:style>
+        <p:txBody>
+          <a:bodyPr rtlCol="0" anchor="ctr"/>
+          <a:lstStyle/>
+          <a:p>
+            <a:pPr algn="ctr"/>
+          </a:p>
+        </p:txBody>
+      </p:sp>
+      <p:sp>
+        <p:nvSpPr>
+          <p:cNvPr id="7" name="TextBox 6"/>
+          <p:cNvSpPr txBox="1"/>
+          <p:nvPr/>
+        </p:nvSpPr>
+        <p:spPr>
+          <a:xfrm>
+            <a:off x="868680" y="3044952"/>
+            <a:ext cx="10454335" cy="749808"/>
+          </a:xfrm>
+          <a:prstGeom prst="rect">
+            <a:avLst/>
+          </a:prstGeom>
+          <a:noFill/>
+        </p:spPr>
+        <p:txBody>
+          <a:bodyPr wrap="square" anchor="t" lIns="0" rIns="0" tIns="0" bIns="0">
+            <a:spAutoFit/>
+          </a:bodyPr>
+          <a:lstStyle/>
+          <a:p>
+            <a:r>
+              <a:rPr sz="1300" b="1" i="0">
+                <a:solidFill>
+                  <a:srgbClr val="0C2340"/>
+                </a:solidFill>
+                <a:latin typeface="Calibri"/>
+              </a:rPr>
+              <a:t>💡 Aclaración</a:t>
+            </a:r>
+          </a:p>
+          <a:p>
+            <a:pPr>
+              <a:spcBef>
+                <a:spcPts val="400"/>
+              </a:spcBef>
+            </a:pPr>
+            <a:r>
+              <a:rPr sz="1300" b="1" i="0">
+                <a:solidFill>
+                  <a:srgbClr val="2B2B2B"/>
+                </a:solidFill>
+                <a:latin typeface="Calibri"/>
+              </a:rPr>
+              <a:t>Una sesión combina varias unidades</a:t>
+            </a:r>
+            <a:r>
+              <a:rPr sz="1300" b="0" i="0">
+                <a:solidFill>
+                  <a:srgbClr val="2B2B2B"/>
+                </a:solidFill>
+                <a:latin typeface="Calibri"/>
+              </a:rPr>
+              <a:t> del Syllabus (bases de datos + gestores + marco teórico). Es la más densa del periodo: a esa se llega con las lecturas hechas.</a:t>
+            </a:r>
+          </a:p>
+        </p:txBody>
+      </p:sp>
+      <p:sp>
+        <p:nvSpPr>
+          <p:cNvPr id="8" name="Rounded Rectangle 7"/>
+          <p:cNvSpPr/>
+          <p:nvPr/>
+        </p:nvSpPr>
+        <p:spPr>
+          <a:xfrm>
+            <a:off x="640080" y="4133087"/>
+            <a:ext cx="10911535" cy="969264"/>
+          </a:xfrm>
+          <a:prstGeom prst="roundRect">
+            <a:avLst/>
+          </a:prstGeom>
+          <a:solidFill>
+            <a:srgbClr val="FBE4E4"/>
+          </a:solidFill>
+          <a:ln>
+            <a:noFill/>
+          </a:ln>
+          <a:effectLst/>
+        </p:spPr>
+        <p:style>
+          <a:lnRef idx="1">
+            <a:schemeClr val="accent1"/>
+          </a:lnRef>
+          <a:fillRef idx="3">
+            <a:schemeClr val="accent1"/>
+          </a:fillRef>
+          <a:effectRef idx="2">
+            <a:schemeClr val="accent1"/>
+          </a:effectRef>
+          <a:fontRef idx="minor">
+            <a:schemeClr val="lt1"/>
+          </a:fontRef>
+        </p:style>
+        <p:txBody>
+          <a:bodyPr rtlCol="0" anchor="ctr"/>
+          <a:lstStyle/>
+          <a:p>
+            <a:pPr algn="ctr"/>
+          </a:p>
+        </p:txBody>
+      </p:sp>
+      <p:sp>
+        <p:nvSpPr>
+          <p:cNvPr id="9" name="TextBox 8"/>
+          <p:cNvSpPr txBox="1"/>
+          <p:nvPr/>
+        </p:nvSpPr>
+        <p:spPr>
+          <a:xfrm>
+            <a:off x="868680" y="4242816"/>
+            <a:ext cx="10454335" cy="749808"/>
+          </a:xfrm>
+          <a:prstGeom prst="rect">
+            <a:avLst/>
+          </a:prstGeom>
+          <a:noFill/>
+        </p:spPr>
+        <p:txBody>
+          <a:bodyPr wrap="square" anchor="t" lIns="0" rIns="0" tIns="0" bIns="0">
+            <a:spAutoFit/>
+          </a:bodyPr>
+          <a:lstStyle/>
+          <a:p>
+            <a:r>
+              <a:rPr sz="1300" b="1" i="0">
+                <a:solidFill>
+                  <a:srgbClr val="0C2340"/>
+                </a:solidFill>
+                <a:latin typeface="Calibri"/>
+              </a:rPr>
+              <a:t>⚠️ Importante</a:t>
+            </a:r>
+          </a:p>
+          <a:p>
+            <a:pPr>
+              <a:spcBef>
+                <a:spcPts val="400"/>
+              </a:spcBef>
+            </a:pPr>
+            <a:r>
+              <a:rPr sz="1300" b="1" i="0">
+                <a:solidFill>
+                  <a:srgbClr val="2B2B2B"/>
+                </a:solidFill>
+                <a:latin typeface="Calibri"/>
+              </a:rPr>
+              <a:t>Los avances se acumulan.</a:t>
+            </a:r>
+            <a:r>
+              <a:rPr sz="1300" b="0" i="0">
+                <a:solidFill>
+                  <a:srgbClr val="2B2B2B"/>
+                </a:solidFill>
+                <a:latin typeface="Calibri"/>
+              </a:rPr>
+              <a:t> Si no entrega el de una sesión, el de la siguiente sale mal, porque se construye encima. Aquí no hay “me pongo al día la última semana”.</a:t>
+            </a:r>
+          </a:p>
+        </p:txBody>
+      </p:sp>
+      <p:sp>
+        <p:nvSpPr>
+          <p:cNvPr id="10" name="TextBox 9"/>
+          <p:cNvSpPr txBox="1"/>
+          <p:nvPr/>
+        </p:nvSpPr>
+        <p:spPr>
+          <a:xfrm>
+            <a:off x="2194560" y="6446520"/>
+            <a:ext cx="5943600" cy="274320"/>
+          </a:xfrm>
+          <a:prstGeom prst="rect">
+            <a:avLst/>
+          </a:prstGeom>
+          <a:noFill/>
+        </p:spPr>
+        <p:txBody>
+          <a:bodyPr wrap="square" anchor="t" lIns="0" rIns="0" tIns="0" bIns="0">
+            <a:spAutoFit/>
+          </a:bodyPr>
+          <a:lstStyle/>
+          <a:p>
             <a:pPr algn="l"/>
             <a:r>
               <a:rPr sz="1000" b="1" i="0">
@@ -6314,6 +13756,41 @@
                 <a:latin typeface="Calibri"/>
               </a:rPr>
               <a:t>Inicio 5:10 pm</a:t>
+            </a:r>
+          </a:p>
+        </p:txBody>
+      </p:sp>
+      <p:sp>
+        <p:nvSpPr>
+          <p:cNvPr id="11" name="TextBox 10"/>
+          <p:cNvSpPr txBox="1"/>
+          <p:nvPr/>
+        </p:nvSpPr>
+        <p:spPr>
+          <a:xfrm>
+            <a:off x="11094415" y="6446520"/>
+            <a:ext cx="548640" cy="274320"/>
+          </a:xfrm>
+          <a:prstGeom prst="rect">
+            <a:avLst/>
+          </a:prstGeom>
+          <a:noFill/>
+        </p:spPr>
+        <p:txBody>
+          <a:bodyPr wrap="square" anchor="t" lIns="0" rIns="0" tIns="0" bIns="0">
+            <a:spAutoFit/>
+          </a:bodyPr>
+          <a:lstStyle/>
+          <a:p>
+            <a:pPr algn="r"/>
+            <a:r>
+              <a:rPr sz="1000" b="1" i="0">
+                <a:solidFill>
+                  <a:srgbClr val="8F989D"/>
+                </a:solidFill>
+                <a:latin typeface="Calibri"/>
+              </a:rPr>
+              <a:t>9</a:t>
             </a:r>
           </a:p>
         </p:txBody>

--- a/Pregrado/Investigacion en ciencia y tecnologia/Clases/Sesion 01 - Presentación del curso · docente · estudiantes · ACAs/Presentacion.pptx
+++ b/Pregrado/Investigacion en ciencia y tecnologia/Clases/Sesion 01 - Presentación del curso · docente · estudiantes · ACAs/Presentacion.pptx
@@ -3373,41 +3373,6 @@
                 <a:latin typeface="Calibri"/>
               </a:rPr>
               <a:t> INVESTIGACIÓN, CIENCIA Y TECNOLOGÍA</a:t>
-            </a:r>
-          </a:p>
-        </p:txBody>
-      </p:sp>
-      <p:sp>
-        <p:nvSpPr>
-          <p:cNvPr id="7" name="TextBox 6"/>
-          <p:cNvSpPr txBox="1"/>
-          <p:nvPr/>
-        </p:nvSpPr>
-        <p:spPr>
-          <a:xfrm>
-            <a:off x="2194560" y="6446520"/>
-            <a:ext cx="5943600" cy="274320"/>
-          </a:xfrm>
-          <a:prstGeom prst="rect">
-            <a:avLst/>
-          </a:prstGeom>
-          <a:noFill/>
-        </p:spPr>
-        <p:txBody>
-          <a:bodyPr wrap="square" anchor="t" lIns="0" rIns="0" tIns="0" bIns="0">
-            <a:spAutoFit/>
-          </a:bodyPr>
-          <a:lstStyle/>
-          <a:p>
-            <a:pPr algn="l"/>
-            <a:r>
-              <a:rPr sz="1000" b="1" i="0">
-                <a:solidFill>
-                  <a:srgbClr val="8F989D"/>
-                </a:solidFill>
-                <a:latin typeface="Calibri"/>
-              </a:rPr>
-              <a:t>Inicio 5:10 pm</a:t>
             </a:r>
           </a:p>
         </p:txBody>
@@ -3981,41 +3946,6 @@
         </p:nvSpPr>
         <p:spPr>
           <a:xfrm>
-            <a:off x="2194560" y="6446520"/>
-            <a:ext cx="5943600" cy="274320"/>
-          </a:xfrm>
-          <a:prstGeom prst="rect">
-            <a:avLst/>
-          </a:prstGeom>
-          <a:noFill/>
-        </p:spPr>
-        <p:txBody>
-          <a:bodyPr wrap="square" anchor="t" lIns="0" rIns="0" tIns="0" bIns="0">
-            <a:spAutoFit/>
-          </a:bodyPr>
-          <a:lstStyle/>
-          <a:p>
-            <a:pPr algn="l"/>
-            <a:r>
-              <a:rPr sz="1000" b="1" i="0">
-                <a:solidFill>
-                  <a:srgbClr val="8F989D"/>
-                </a:solidFill>
-                <a:latin typeface="Calibri"/>
-              </a:rPr>
-              <a:t>Inicio 5:10 pm</a:t>
-            </a:r>
-          </a:p>
-        </p:txBody>
-      </p:sp>
-      <p:sp>
-        <p:nvSpPr>
-          <p:cNvPr id="7" name="TextBox 6"/>
-          <p:cNvSpPr txBox="1"/>
-          <p:nvPr/>
-        </p:nvSpPr>
-        <p:spPr>
-          <a:xfrm>
             <a:off x="11094415" y="6446520"/>
             <a:ext cx="548640" cy="274320"/>
           </a:xfrm>
@@ -4525,8 +4455,8 @@
         </p:nvSpPr>
         <p:spPr>
           <a:xfrm>
-            <a:off x="2194560" y="6446520"/>
-            <a:ext cx="5943600" cy="274320"/>
+            <a:off x="11094415" y="6446520"/>
+            <a:ext cx="548640" cy="274320"/>
           </a:xfrm>
           <a:prstGeom prst="rect">
             <a:avLst/>
@@ -4539,7 +4469,7 @@
           </a:bodyPr>
           <a:lstStyle/>
           <a:p>
-            <a:pPr algn="l"/>
+            <a:pPr algn="r"/>
             <a:r>
               <a:rPr sz="1000" b="1" i="0">
                 <a:solidFill>
@@ -4547,7 +4477,7 @@
                 </a:solidFill>
                 <a:latin typeface="Calibri"/>
               </a:rPr>
-              <a:t>Inicio 5:10 pm</a:t>
+              <a:t>11</a:t>
             </a:r>
           </a:p>
         </p:txBody>
@@ -4555,41 +4485,6 @@
       <p:sp>
         <p:nvSpPr>
           <p:cNvPr id="6" name="TextBox 5"/>
-          <p:cNvSpPr txBox="1"/>
-          <p:nvPr/>
-        </p:nvSpPr>
-        <p:spPr>
-          <a:xfrm>
-            <a:off x="11094415" y="6446520"/>
-            <a:ext cx="548640" cy="274320"/>
-          </a:xfrm>
-          <a:prstGeom prst="rect">
-            <a:avLst/>
-          </a:prstGeom>
-          <a:noFill/>
-        </p:spPr>
-        <p:txBody>
-          <a:bodyPr wrap="square" anchor="t" lIns="0" rIns="0" tIns="0" bIns="0">
-            <a:spAutoFit/>
-          </a:bodyPr>
-          <a:lstStyle/>
-          <a:p>
-            <a:pPr algn="r"/>
-            <a:r>
-              <a:rPr sz="1000" b="1" i="0">
-                <a:solidFill>
-                  <a:srgbClr val="8F989D"/>
-                </a:solidFill>
-                <a:latin typeface="Calibri"/>
-              </a:rPr>
-              <a:t>11</a:t>
-            </a:r>
-          </a:p>
-        </p:txBody>
-      </p:sp>
-      <p:sp>
-        <p:nvSpPr>
-          <p:cNvPr id="7" name="TextBox 6"/>
           <p:cNvSpPr txBox="1"/>
           <p:nvPr/>
         </p:nvSpPr>
@@ -4993,8 +4888,8 @@
         </p:nvSpPr>
         <p:spPr>
           <a:xfrm>
-            <a:off x="2194560" y="6446520"/>
-            <a:ext cx="5943600" cy="274320"/>
+            <a:off x="11094415" y="6446520"/>
+            <a:ext cx="548640" cy="274320"/>
           </a:xfrm>
           <a:prstGeom prst="rect">
             <a:avLst/>
@@ -5007,7 +4902,7 @@
           </a:bodyPr>
           <a:lstStyle/>
           <a:p>
-            <a:pPr algn="l"/>
+            <a:pPr algn="r"/>
             <a:r>
               <a:rPr sz="1000" b="1" i="0">
                 <a:solidFill>
@@ -5015,7 +4910,7 @@
                 </a:solidFill>
                 <a:latin typeface="Calibri"/>
               </a:rPr>
-              <a:t>Inicio 5:10 pm</a:t>
+              <a:t>12</a:t>
             </a:r>
           </a:p>
         </p:txBody>
@@ -5023,41 +4918,6 @@
       <p:sp>
         <p:nvSpPr>
           <p:cNvPr id="6" name="TextBox 5"/>
-          <p:cNvSpPr txBox="1"/>
-          <p:nvPr/>
-        </p:nvSpPr>
-        <p:spPr>
-          <a:xfrm>
-            <a:off x="11094415" y="6446520"/>
-            <a:ext cx="548640" cy="274320"/>
-          </a:xfrm>
-          <a:prstGeom prst="rect">
-            <a:avLst/>
-          </a:prstGeom>
-          <a:noFill/>
-        </p:spPr>
-        <p:txBody>
-          <a:bodyPr wrap="square" anchor="t" lIns="0" rIns="0" tIns="0" bIns="0">
-            <a:spAutoFit/>
-          </a:bodyPr>
-          <a:lstStyle/>
-          <a:p>
-            <a:pPr algn="r"/>
-            <a:r>
-              <a:rPr sz="1000" b="1" i="0">
-                <a:solidFill>
-                  <a:srgbClr val="8F989D"/>
-                </a:solidFill>
-                <a:latin typeface="Calibri"/>
-              </a:rPr>
-              <a:t>12</a:t>
-            </a:r>
-          </a:p>
-        </p:txBody>
-      </p:sp>
-      <p:sp>
-        <p:nvSpPr>
-          <p:cNvPr id="7" name="TextBox 6"/>
           <p:cNvSpPr txBox="1"/>
           <p:nvPr/>
         </p:nvSpPr>
@@ -5529,41 +5389,6 @@
         </p:nvSpPr>
         <p:spPr>
           <a:xfrm>
-            <a:off x="2194560" y="6446520"/>
-            <a:ext cx="5943600" cy="274320"/>
-          </a:xfrm>
-          <a:prstGeom prst="rect">
-            <a:avLst/>
-          </a:prstGeom>
-          <a:noFill/>
-        </p:spPr>
-        <p:txBody>
-          <a:bodyPr wrap="square" anchor="t" lIns="0" rIns="0" tIns="0" bIns="0">
-            <a:spAutoFit/>
-          </a:bodyPr>
-          <a:lstStyle/>
-          <a:p>
-            <a:pPr algn="l"/>
-            <a:r>
-              <a:rPr sz="1000" b="1" i="0">
-                <a:solidFill>
-                  <a:srgbClr val="8F989D"/>
-                </a:solidFill>
-                <a:latin typeface="Calibri"/>
-              </a:rPr>
-              <a:t>Inicio 5:10 pm</a:t>
-            </a:r>
-          </a:p>
-        </p:txBody>
-      </p:sp>
-      <p:sp>
-        <p:nvSpPr>
-          <p:cNvPr id="11" name="TextBox 10"/>
-          <p:cNvSpPr txBox="1"/>
-          <p:nvPr/>
-        </p:nvSpPr>
-        <p:spPr>
-          <a:xfrm>
             <a:off x="11094415" y="6446520"/>
             <a:ext cx="548640" cy="274320"/>
           </a:xfrm>
@@ -5706,7 +5531,7 @@
         </p:nvGraphicFramePr>
         <p:xfrm>
           <a:off x="640080" y="1691639"/>
-          <a:ext cx="10911533" cy="4526280"/>
+          <a:ext cx="10911533" cy="4023360"/>
         </p:xfrm>
         <a:graphic>
           <a:graphicData uri="http://schemas.openxmlformats.org/drawingml/2006/table">
@@ -6287,77 +6112,6 @@
                   </a:tcPr>
                 </a:tc>
               </a:tr>
-              <a:tr h="502920">
-                <a:tc>
-                  <a:txBody>
-                    <a:bodyPr/>
-                    <a:lstStyle/>
-                    <a:p>
-                      <a:pPr algn="l"/>
-                      <a:r>
-                        <a:rPr sz="1100" b="1" i="0">
-                          <a:solidFill>
-                            <a:srgbClr val="2B2B2B"/>
-                          </a:solidFill>
-                          <a:latin typeface="Calibri"/>
-                        </a:rPr>
-                        <a:t>Padlet</a:t>
-                      </a:r>
-                    </a:p>
-                  </a:txBody>
-                  <a:tcPr anchor="ctr" marL="109728" marR="91440" marT="36576" marB="36576">
-                    <a:solidFill>
-                      <a:srgbClr val="F2F2F2"/>
-                    </a:solidFill>
-                  </a:tcPr>
-                </a:tc>
-                <a:tc>
-                  <a:txBody>
-                    <a:bodyPr/>
-                    <a:lstStyle/>
-                    <a:p>
-                      <a:pPr algn="l"/>
-                      <a:r>
-                        <a:rPr sz="1100" b="0" i="0">
-                          <a:solidFill>
-                            <a:srgbClr val="2B2B2B"/>
-                          </a:solidFill>
-                          <a:latin typeface="Calibri"/>
-                        </a:rPr>
-                        <a:t>Tablero donde nos presentamos como grupo</a:t>
-                      </a:r>
-                    </a:p>
-                  </a:txBody>
-                  <a:tcPr anchor="ctr" marL="109728" marR="91440" marT="36576" marB="36576">
-                    <a:solidFill>
-                      <a:srgbClr val="F2F2F2"/>
-                    </a:solidFill>
-                  </a:tcPr>
-                </a:tc>
-                <a:tc>
-                  <a:txBody>
-                    <a:bodyPr/>
-                    <a:lstStyle/>
-                    <a:p>
-                      <a:pPr algn="l"/>
-                      <a:r>
-                        <a:rPr sz="1100" b="0" i="0">
-                          <a:solidFill>
-                            <a:srgbClr val="2B2B2B"/>
-                          </a:solidFill>
-                          <a:latin typeface="Calibri"/>
-                        </a:rPr>
-                        <a:t>Hoy</a:t>
-                      </a:r>
-                    </a:p>
-                  </a:txBody>
-                  <a:tcPr anchor="ctr" marL="109728" marR="91440" marT="36576" marB="36576">
-                    <a:solidFill>
-                      <a:srgbClr val="F2F2F2"/>
-                    </a:solidFill>
-                  </a:tcPr>
-                </a:tc>
-              </a:tr>
             </a:tbl>
           </a:graphicData>
         </a:graphic>
@@ -6370,7 +6124,7 @@
         </p:nvSpPr>
         <p:spPr>
           <a:xfrm>
-            <a:off x="640080" y="6080760"/>
+            <a:off x="640080" y="5852160"/>
             <a:ext cx="10911535" cy="548640"/>
           </a:xfrm>
           <a:prstGeom prst="rect">
@@ -6399,41 +6153,6 @@
       <p:sp>
         <p:nvSpPr>
           <p:cNvPr id="6" name="TextBox 5"/>
-          <p:cNvSpPr txBox="1"/>
-          <p:nvPr/>
-        </p:nvSpPr>
-        <p:spPr>
-          <a:xfrm>
-            <a:off x="2194560" y="6446520"/>
-            <a:ext cx="5943600" cy="274320"/>
-          </a:xfrm>
-          <a:prstGeom prst="rect">
-            <a:avLst/>
-          </a:prstGeom>
-          <a:noFill/>
-        </p:spPr>
-        <p:txBody>
-          <a:bodyPr wrap="square" anchor="t" lIns="0" rIns="0" tIns="0" bIns="0">
-            <a:spAutoFit/>
-          </a:bodyPr>
-          <a:lstStyle/>
-          <a:p>
-            <a:pPr algn="l"/>
-            <a:r>
-              <a:rPr sz="1000" b="1" i="0">
-                <a:solidFill>
-                  <a:srgbClr val="8F989D"/>
-                </a:solidFill>
-                <a:latin typeface="Calibri"/>
-              </a:rPr>
-              <a:t>Inicio 5:10 pm</a:t>
-            </a:r>
-          </a:p>
-        </p:txBody>
-      </p:sp>
-      <p:sp>
-        <p:nvSpPr>
-          <p:cNvPr id="7" name="TextBox 6"/>
           <p:cNvSpPr txBox="1"/>
           <p:nvPr/>
         </p:nvSpPr>
@@ -6865,41 +6584,6 @@
         </p:nvSpPr>
         <p:spPr>
           <a:xfrm>
-            <a:off x="2194560" y="6446520"/>
-            <a:ext cx="5943600" cy="274320"/>
-          </a:xfrm>
-          <a:prstGeom prst="rect">
-            <a:avLst/>
-          </a:prstGeom>
-          <a:noFill/>
-        </p:spPr>
-        <p:txBody>
-          <a:bodyPr wrap="square" anchor="t" lIns="0" rIns="0" tIns="0" bIns="0">
-            <a:spAutoFit/>
-          </a:bodyPr>
-          <a:lstStyle/>
-          <a:p>
-            <a:pPr algn="l"/>
-            <a:r>
-              <a:rPr sz="1000" b="1" i="0">
-                <a:solidFill>
-                  <a:srgbClr val="8F989D"/>
-                </a:solidFill>
-                <a:latin typeface="Calibri"/>
-              </a:rPr>
-              <a:t>Inicio 5:10 pm</a:t>
-            </a:r>
-          </a:p>
-        </p:txBody>
-      </p:sp>
-      <p:sp>
-        <p:nvSpPr>
-          <p:cNvPr id="6" name="TextBox 5"/>
-          <p:cNvSpPr txBox="1"/>
-          <p:nvPr/>
-        </p:nvSpPr>
-        <p:spPr>
-          <a:xfrm>
             <a:off x="11094415" y="6446520"/>
             <a:ext cx="548640" cy="274320"/>
           </a:xfrm>
@@ -7367,41 +7051,6 @@
         </p:nvSpPr>
         <p:spPr>
           <a:xfrm>
-            <a:off x="2194560" y="6446520"/>
-            <a:ext cx="5943600" cy="274320"/>
-          </a:xfrm>
-          <a:prstGeom prst="rect">
-            <a:avLst/>
-          </a:prstGeom>
-          <a:noFill/>
-        </p:spPr>
-        <p:txBody>
-          <a:bodyPr wrap="square" anchor="t" lIns="0" rIns="0" tIns="0" bIns="0">
-            <a:spAutoFit/>
-          </a:bodyPr>
-          <a:lstStyle/>
-          <a:p>
-            <a:pPr algn="l"/>
-            <a:r>
-              <a:rPr sz="1000" b="1" i="0">
-                <a:solidFill>
-                  <a:srgbClr val="8F989D"/>
-                </a:solidFill>
-                <a:latin typeface="Calibri"/>
-              </a:rPr>
-              <a:t>Inicio 5:10 pm</a:t>
-            </a:r>
-          </a:p>
-        </p:txBody>
-      </p:sp>
-      <p:sp>
-        <p:nvSpPr>
-          <p:cNvPr id="11" name="TextBox 10"/>
-          <p:cNvSpPr txBox="1"/>
-          <p:nvPr/>
-        </p:nvSpPr>
-        <p:spPr>
-          <a:xfrm>
             <a:off x="11094415" y="6446520"/>
             <a:ext cx="548640" cy="274320"/>
           </a:xfrm>
@@ -7905,41 +7554,6 @@
         </p:nvSpPr>
         <p:spPr>
           <a:xfrm>
-            <a:off x="2194560" y="6446520"/>
-            <a:ext cx="5943600" cy="274320"/>
-          </a:xfrm>
-          <a:prstGeom prst="rect">
-            <a:avLst/>
-          </a:prstGeom>
-          <a:noFill/>
-        </p:spPr>
-        <p:txBody>
-          <a:bodyPr wrap="square" anchor="t" lIns="0" rIns="0" tIns="0" bIns="0">
-            <a:spAutoFit/>
-          </a:bodyPr>
-          <a:lstStyle/>
-          <a:p>
-            <a:pPr algn="l"/>
-            <a:r>
-              <a:rPr sz="1000" b="1" i="0">
-                <a:solidFill>
-                  <a:srgbClr val="8F989D"/>
-                </a:solidFill>
-                <a:latin typeface="Calibri"/>
-              </a:rPr>
-              <a:t>Inicio 5:10 pm</a:t>
-            </a:r>
-          </a:p>
-        </p:txBody>
-      </p:sp>
-      <p:sp>
-        <p:nvSpPr>
-          <p:cNvPr id="11" name="TextBox 10"/>
-          <p:cNvSpPr txBox="1"/>
-          <p:nvPr/>
-        </p:nvSpPr>
-        <p:spPr>
-          <a:xfrm>
             <a:off x="11094415" y="6446520"/>
             <a:ext cx="548640" cy="274320"/>
           </a:xfrm>
@@ -8429,8 +8043,8 @@
         </p:nvSpPr>
         <p:spPr>
           <a:xfrm>
-            <a:off x="2194560" y="6446520"/>
-            <a:ext cx="5943600" cy="274320"/>
+            <a:off x="11094415" y="6446520"/>
+            <a:ext cx="548640" cy="274320"/>
           </a:xfrm>
           <a:prstGeom prst="rect">
             <a:avLst/>
@@ -8443,7 +8057,7 @@
           </a:bodyPr>
           <a:lstStyle/>
           <a:p>
-            <a:pPr algn="l"/>
+            <a:pPr algn="r"/>
             <a:r>
               <a:rPr sz="1000" b="1" i="0">
                 <a:solidFill>
@@ -8451,7 +8065,7 @@
                 </a:solidFill>
                 <a:latin typeface="Calibri"/>
               </a:rPr>
-              <a:t>Inicio 5:10 pm</a:t>
+              <a:t>18</a:t>
             </a:r>
           </a:p>
         </p:txBody>
@@ -8459,41 +8073,6 @@
       <p:sp>
         <p:nvSpPr>
           <p:cNvPr id="6" name="TextBox 5"/>
-          <p:cNvSpPr txBox="1"/>
-          <p:nvPr/>
-        </p:nvSpPr>
-        <p:spPr>
-          <a:xfrm>
-            <a:off x="11094415" y="6446520"/>
-            <a:ext cx="548640" cy="274320"/>
-          </a:xfrm>
-          <a:prstGeom prst="rect">
-            <a:avLst/>
-          </a:prstGeom>
-          <a:noFill/>
-        </p:spPr>
-        <p:txBody>
-          <a:bodyPr wrap="square" anchor="t" lIns="0" rIns="0" tIns="0" bIns="0">
-            <a:spAutoFit/>
-          </a:bodyPr>
-          <a:lstStyle/>
-          <a:p>
-            <a:pPr algn="r"/>
-            <a:r>
-              <a:rPr sz="1000" b="1" i="0">
-                <a:solidFill>
-                  <a:srgbClr val="8F989D"/>
-                </a:solidFill>
-                <a:latin typeface="Calibri"/>
-              </a:rPr>
-              <a:t>18</a:t>
-            </a:r>
-          </a:p>
-        </p:txBody>
-      </p:sp>
-      <p:sp>
-        <p:nvSpPr>
-          <p:cNvPr id="7" name="TextBox 6"/>
           <p:cNvSpPr txBox="1"/>
           <p:nvPr/>
         </p:nvSpPr>
@@ -8965,41 +8544,6 @@
         </p:nvSpPr>
         <p:spPr>
           <a:xfrm>
-            <a:off x="2194560" y="6446520"/>
-            <a:ext cx="5943600" cy="274320"/>
-          </a:xfrm>
-          <a:prstGeom prst="rect">
-            <a:avLst/>
-          </a:prstGeom>
-          <a:noFill/>
-        </p:spPr>
-        <p:txBody>
-          <a:bodyPr wrap="square" anchor="t" lIns="0" rIns="0" tIns="0" bIns="0">
-            <a:spAutoFit/>
-          </a:bodyPr>
-          <a:lstStyle/>
-          <a:p>
-            <a:pPr algn="l"/>
-            <a:r>
-              <a:rPr sz="1000" b="1" i="0">
-                <a:solidFill>
-                  <a:srgbClr val="8F989D"/>
-                </a:solidFill>
-                <a:latin typeface="Calibri"/>
-              </a:rPr>
-              <a:t>Inicio 5:10 pm</a:t>
-            </a:r>
-          </a:p>
-        </p:txBody>
-      </p:sp>
-      <p:sp>
-        <p:nvSpPr>
-          <p:cNvPr id="11" name="TextBox 10"/>
-          <p:cNvSpPr txBox="1"/>
-          <p:nvPr/>
-        </p:nvSpPr>
-        <p:spPr>
-          <a:xfrm>
             <a:off x="11094415" y="6446520"/>
             <a:ext cx="548640" cy="274320"/>
           </a:xfrm>
@@ -9368,41 +8912,6 @@
         </p:nvSpPr>
         <p:spPr>
           <a:xfrm>
-            <a:off x="2194560" y="6446520"/>
-            <a:ext cx="5943600" cy="274320"/>
-          </a:xfrm>
-          <a:prstGeom prst="rect">
-            <a:avLst/>
-          </a:prstGeom>
-          <a:noFill/>
-        </p:spPr>
-        <p:txBody>
-          <a:bodyPr wrap="square" anchor="t" lIns="0" rIns="0" tIns="0" bIns="0">
-            <a:spAutoFit/>
-          </a:bodyPr>
-          <a:lstStyle/>
-          <a:p>
-            <a:pPr algn="l"/>
-            <a:r>
-              <a:rPr sz="1000" b="1" i="0">
-                <a:solidFill>
-                  <a:srgbClr val="8F989D"/>
-                </a:solidFill>
-                <a:latin typeface="Calibri"/>
-              </a:rPr>
-              <a:t>Inicio 5:10 pm</a:t>
-            </a:r>
-          </a:p>
-        </p:txBody>
-      </p:sp>
-      <p:sp>
-        <p:nvSpPr>
-          <p:cNvPr id="7" name="TextBox 6"/>
-          <p:cNvSpPr txBox="1"/>
-          <p:nvPr/>
-        </p:nvSpPr>
-        <p:spPr>
-          <a:xfrm>
             <a:off x="11094415" y="6446520"/>
             <a:ext cx="548640" cy="274320"/>
           </a:xfrm>
@@ -9668,41 +9177,6 @@
         </p:nvSpPr>
         <p:spPr>
           <a:xfrm>
-            <a:off x="2194560" y="6446520"/>
-            <a:ext cx="5943600" cy="274320"/>
-          </a:xfrm>
-          <a:prstGeom prst="rect">
-            <a:avLst/>
-          </a:prstGeom>
-          <a:noFill/>
-        </p:spPr>
-        <p:txBody>
-          <a:bodyPr wrap="square" anchor="t" lIns="0" rIns="0" tIns="0" bIns="0">
-            <a:spAutoFit/>
-          </a:bodyPr>
-          <a:lstStyle/>
-          <a:p>
-            <a:pPr algn="l"/>
-            <a:r>
-              <a:rPr sz="1000" b="1" i="0">
-                <a:solidFill>
-                  <a:srgbClr val="8F989D"/>
-                </a:solidFill>
-                <a:latin typeface="Calibri"/>
-              </a:rPr>
-              <a:t>Inicio 5:10 pm</a:t>
-            </a:r>
-          </a:p>
-        </p:txBody>
-      </p:sp>
-      <p:sp>
-        <p:nvSpPr>
-          <p:cNvPr id="6" name="TextBox 5"/>
-          <p:cNvSpPr txBox="1"/>
-          <p:nvPr/>
-        </p:nvSpPr>
-        <p:spPr>
-          <a:xfrm>
             <a:off x="11094415" y="6446520"/>
             <a:ext cx="548640" cy="274320"/>
           </a:xfrm>
@@ -9958,41 +9432,6 @@
           </a:p>
         </p:txBody>
       </p:sp>
-      <p:sp>
-        <p:nvSpPr>
-          <p:cNvPr id="7" name="TextBox 6"/>
-          <p:cNvSpPr txBox="1"/>
-          <p:nvPr/>
-        </p:nvSpPr>
-        <p:spPr>
-          <a:xfrm>
-            <a:off x="2194560" y="6446520"/>
-            <a:ext cx="5943600" cy="274320"/>
-          </a:xfrm>
-          <a:prstGeom prst="rect">
-            <a:avLst/>
-          </a:prstGeom>
-          <a:noFill/>
-        </p:spPr>
-        <p:txBody>
-          <a:bodyPr wrap="square" anchor="t" lIns="0" rIns="0" tIns="0" bIns="0">
-            <a:spAutoFit/>
-          </a:bodyPr>
-          <a:lstStyle/>
-          <a:p>
-            <a:pPr algn="l"/>
-            <a:r>
-              <a:rPr sz="1000" b="1" i="0">
-                <a:solidFill>
-                  <a:srgbClr val="8F989D"/>
-                </a:solidFill>
-                <a:latin typeface="Calibri"/>
-              </a:rPr>
-              <a:t>Inicio 5:10 pm</a:t>
-            </a:r>
-          </a:p>
-        </p:txBody>
-      </p:sp>
     </p:spTree>
   </p:cSld>
   <p:clrMapOvr>
@@ -10275,41 +9714,6 @@
         </p:nvSpPr>
         <p:spPr>
           <a:xfrm>
-            <a:off x="2194560" y="6446520"/>
-            <a:ext cx="5943600" cy="274320"/>
-          </a:xfrm>
-          <a:prstGeom prst="rect">
-            <a:avLst/>
-          </a:prstGeom>
-          <a:noFill/>
-        </p:spPr>
-        <p:txBody>
-          <a:bodyPr wrap="square" anchor="t" lIns="0" rIns="0" tIns="0" bIns="0">
-            <a:spAutoFit/>
-          </a:bodyPr>
-          <a:lstStyle/>
-          <a:p>
-            <a:pPr algn="l"/>
-            <a:r>
-              <a:rPr sz="1000" b="1" i="0">
-                <a:solidFill>
-                  <a:srgbClr val="8F989D"/>
-                </a:solidFill>
-                <a:latin typeface="Calibri"/>
-              </a:rPr>
-              <a:t>Inicio 5:10 pm</a:t>
-            </a:r>
-          </a:p>
-        </p:txBody>
-      </p:sp>
-      <p:sp>
-        <p:nvSpPr>
-          <p:cNvPr id="9" name="TextBox 8"/>
-          <p:cNvSpPr txBox="1"/>
-          <p:nvPr/>
-        </p:nvSpPr>
-        <p:spPr>
-          <a:xfrm>
             <a:off x="11094415" y="6446520"/>
             <a:ext cx="548640" cy="274320"/>
           </a:xfrm>
@@ -10795,41 +10199,6 @@
       <p:sp>
         <p:nvSpPr>
           <p:cNvPr id="10" name="TextBox 9"/>
-          <p:cNvSpPr txBox="1"/>
-          <p:nvPr/>
-        </p:nvSpPr>
-        <p:spPr>
-          <a:xfrm>
-            <a:off x="2194560" y="6446520"/>
-            <a:ext cx="5943600" cy="274320"/>
-          </a:xfrm>
-          <a:prstGeom prst="rect">
-            <a:avLst/>
-          </a:prstGeom>
-          <a:noFill/>
-        </p:spPr>
-        <p:txBody>
-          <a:bodyPr wrap="square" anchor="t" lIns="0" rIns="0" tIns="0" bIns="0">
-            <a:spAutoFit/>
-          </a:bodyPr>
-          <a:lstStyle/>
-          <a:p>
-            <a:pPr algn="l"/>
-            <a:r>
-              <a:rPr sz="1000" b="1" i="0">
-                <a:solidFill>
-                  <a:srgbClr val="8F989D"/>
-                </a:solidFill>
-                <a:latin typeface="Calibri"/>
-              </a:rPr>
-              <a:t>Inicio 5:10 pm</a:t>
-            </a:r>
-          </a:p>
-        </p:txBody>
-      </p:sp>
-      <p:sp>
-        <p:nvSpPr>
-          <p:cNvPr id="11" name="TextBox 10"/>
           <p:cNvSpPr txBox="1"/>
           <p:nvPr/>
         </p:nvSpPr>
@@ -11382,41 +10751,6 @@
         </p:nvSpPr>
         <p:spPr>
           <a:xfrm>
-            <a:off x="2194560" y="6446520"/>
-            <a:ext cx="5943600" cy="274320"/>
-          </a:xfrm>
-          <a:prstGeom prst="rect">
-            <a:avLst/>
-          </a:prstGeom>
-          <a:noFill/>
-        </p:spPr>
-        <p:txBody>
-          <a:bodyPr wrap="square" anchor="t" lIns="0" rIns="0" tIns="0" bIns="0">
-            <a:spAutoFit/>
-          </a:bodyPr>
-          <a:lstStyle/>
-          <a:p>
-            <a:pPr algn="l"/>
-            <a:r>
-              <a:rPr sz="1000" b="1" i="0">
-                <a:solidFill>
-                  <a:srgbClr val="8F989D"/>
-                </a:solidFill>
-                <a:latin typeface="Calibri"/>
-              </a:rPr>
-              <a:t>Inicio 5:10 pm</a:t>
-            </a:r>
-          </a:p>
-        </p:txBody>
-      </p:sp>
-      <p:sp>
-        <p:nvSpPr>
-          <p:cNvPr id="8" name="TextBox 7"/>
-          <p:cNvSpPr txBox="1"/>
-          <p:nvPr/>
-        </p:nvSpPr>
-        <p:spPr>
-          <a:xfrm>
             <a:off x="11094415" y="6446520"/>
             <a:ext cx="548640" cy="274320"/>
           </a:xfrm>
@@ -11870,8 +11204,8 @@
         </p:nvSpPr>
         <p:spPr>
           <a:xfrm>
-            <a:off x="2194560" y="6446520"/>
-            <a:ext cx="5943600" cy="274320"/>
+            <a:off x="11094415" y="6446520"/>
+            <a:ext cx="548640" cy="274320"/>
           </a:xfrm>
           <a:prstGeom prst="rect">
             <a:avLst/>
@@ -11884,7 +11218,7 @@
           </a:bodyPr>
           <a:lstStyle/>
           <a:p>
-            <a:pPr algn="l"/>
+            <a:pPr algn="r"/>
             <a:r>
               <a:rPr sz="1000" b="1" i="0">
                 <a:solidFill>
@@ -11892,7 +11226,7 @@
                 </a:solidFill>
                 <a:latin typeface="Calibri"/>
               </a:rPr>
-              <a:t>Inicio 5:10 pm</a:t>
+              <a:t>6</a:t>
             </a:r>
           </a:p>
         </p:txBody>
@@ -11900,41 +11234,6 @@
       <p:sp>
         <p:nvSpPr>
           <p:cNvPr id="6" name="TextBox 5"/>
-          <p:cNvSpPr txBox="1"/>
-          <p:nvPr/>
-        </p:nvSpPr>
-        <p:spPr>
-          <a:xfrm>
-            <a:off x="11094415" y="6446520"/>
-            <a:ext cx="548640" cy="274320"/>
-          </a:xfrm>
-          <a:prstGeom prst="rect">
-            <a:avLst/>
-          </a:prstGeom>
-          <a:noFill/>
-        </p:spPr>
-        <p:txBody>
-          <a:bodyPr wrap="square" anchor="t" lIns="0" rIns="0" tIns="0" bIns="0">
-            <a:spAutoFit/>
-          </a:bodyPr>
-          <a:lstStyle/>
-          <a:p>
-            <a:pPr algn="r"/>
-            <a:r>
-              <a:rPr sz="1000" b="1" i="0">
-                <a:solidFill>
-                  <a:srgbClr val="8F989D"/>
-                </a:solidFill>
-                <a:latin typeface="Calibri"/>
-              </a:rPr>
-              <a:t>6</a:t>
-            </a:r>
-          </a:p>
-        </p:txBody>
-      </p:sp>
-      <p:sp>
-        <p:nvSpPr>
-          <p:cNvPr id="7" name="TextBox 6"/>
           <p:cNvSpPr txBox="1"/>
           <p:nvPr/>
         </p:nvSpPr>
@@ -12709,41 +12008,6 @@
         </p:nvSpPr>
         <p:spPr>
           <a:xfrm>
-            <a:off x="2194560" y="6446520"/>
-            <a:ext cx="5943600" cy="274320"/>
-          </a:xfrm>
-          <a:prstGeom prst="rect">
-            <a:avLst/>
-          </a:prstGeom>
-          <a:noFill/>
-        </p:spPr>
-        <p:txBody>
-          <a:bodyPr wrap="square" anchor="t" lIns="0" rIns="0" tIns="0" bIns="0">
-            <a:spAutoFit/>
-          </a:bodyPr>
-          <a:lstStyle/>
-          <a:p>
-            <a:pPr algn="l"/>
-            <a:r>
-              <a:rPr sz="1000" b="1" i="0">
-                <a:solidFill>
-                  <a:srgbClr val="8F989D"/>
-                </a:solidFill>
-                <a:latin typeface="Calibri"/>
-              </a:rPr>
-              <a:t>Inicio 5:10 pm</a:t>
-            </a:r>
-          </a:p>
-        </p:txBody>
-      </p:sp>
-      <p:sp>
-        <p:nvSpPr>
-          <p:cNvPr id="7" name="TextBox 6"/>
-          <p:cNvSpPr txBox="1"/>
-          <p:nvPr/>
-        </p:nvSpPr>
-        <p:spPr>
-          <a:xfrm>
             <a:off x="11094415" y="6446520"/>
             <a:ext cx="548640" cy="274320"/>
           </a:xfrm>
@@ -13197,8 +12461,8 @@
         </p:nvSpPr>
         <p:spPr>
           <a:xfrm>
-            <a:off x="2194560" y="6446520"/>
-            <a:ext cx="5943600" cy="274320"/>
+            <a:off x="11094415" y="6446520"/>
+            <a:ext cx="548640" cy="274320"/>
           </a:xfrm>
           <a:prstGeom prst="rect">
             <a:avLst/>
@@ -13211,7 +12475,7 @@
           </a:bodyPr>
           <a:lstStyle/>
           <a:p>
-            <a:pPr algn="l"/>
+            <a:pPr algn="r"/>
             <a:r>
               <a:rPr sz="1000" b="1" i="0">
                 <a:solidFill>
@@ -13219,7 +12483,7 @@
                 </a:solidFill>
                 <a:latin typeface="Calibri"/>
               </a:rPr>
-              <a:t>Inicio 5:10 pm</a:t>
+              <a:t>8</a:t>
             </a:r>
           </a:p>
         </p:txBody>
@@ -13227,41 +12491,6 @@
       <p:sp>
         <p:nvSpPr>
           <p:cNvPr id="6" name="TextBox 5"/>
-          <p:cNvSpPr txBox="1"/>
-          <p:nvPr/>
-        </p:nvSpPr>
-        <p:spPr>
-          <a:xfrm>
-            <a:off x="11094415" y="6446520"/>
-            <a:ext cx="548640" cy="274320"/>
-          </a:xfrm>
-          <a:prstGeom prst="rect">
-            <a:avLst/>
-          </a:prstGeom>
-          <a:noFill/>
-        </p:spPr>
-        <p:txBody>
-          <a:bodyPr wrap="square" anchor="t" lIns="0" rIns="0" tIns="0" bIns="0">
-            <a:spAutoFit/>
-          </a:bodyPr>
-          <a:lstStyle/>
-          <a:p>
-            <a:pPr algn="r"/>
-            <a:r>
-              <a:rPr sz="1000" b="1" i="0">
-                <a:solidFill>
-                  <a:srgbClr val="8F989D"/>
-                </a:solidFill>
-                <a:latin typeface="Calibri"/>
-              </a:rPr>
-              <a:t>8</a:t>
-            </a:r>
-          </a:p>
-        </p:txBody>
-      </p:sp>
-      <p:sp>
-        <p:nvSpPr>
-          <p:cNvPr id="7" name="TextBox 6"/>
           <p:cNvSpPr txBox="1"/>
           <p:nvPr/>
         </p:nvSpPr>
@@ -13728,41 +12957,6 @@
       <p:sp>
         <p:nvSpPr>
           <p:cNvPr id="10" name="TextBox 9"/>
-          <p:cNvSpPr txBox="1"/>
-          <p:nvPr/>
-        </p:nvSpPr>
-        <p:spPr>
-          <a:xfrm>
-            <a:off x="2194560" y="6446520"/>
-            <a:ext cx="5943600" cy="274320"/>
-          </a:xfrm>
-          <a:prstGeom prst="rect">
-            <a:avLst/>
-          </a:prstGeom>
-          <a:noFill/>
-        </p:spPr>
-        <p:txBody>
-          <a:bodyPr wrap="square" anchor="t" lIns="0" rIns="0" tIns="0" bIns="0">
-            <a:spAutoFit/>
-          </a:bodyPr>
-          <a:lstStyle/>
-          <a:p>
-            <a:pPr algn="l"/>
-            <a:r>
-              <a:rPr sz="1000" b="1" i="0">
-                <a:solidFill>
-                  <a:srgbClr val="8F989D"/>
-                </a:solidFill>
-                <a:latin typeface="Calibri"/>
-              </a:rPr>
-              <a:t>Inicio 5:10 pm</a:t>
-            </a:r>
-          </a:p>
-        </p:txBody>
-      </p:sp>
-      <p:sp>
-        <p:nvSpPr>
-          <p:cNvPr id="11" name="TextBox 10"/>
           <p:cNvSpPr txBox="1"/>
           <p:nvPr/>
         </p:nvSpPr>

--- a/Pregrado/Investigacion en ciencia y tecnologia/Clases/Sesion 01 - Presentación del curso · docente · estudiantes · ACAs/Presentacion.pptx
+++ b/Pregrado/Investigacion en ciencia y tecnologia/Clases/Sesion 01 - Presentación del curso · docente · estudiantes · ACAs/Presentacion.pptx
@@ -7824,7 +7824,25 @@
                 </a:solidFill>
                 <a:latin typeface="Calibri"/>
               </a:rPr>
-              <a:t>●   Dónde: material de la Sesión 01 en CDigital — [URL CDigital — campus del curso pendiente]</a:t>
+              <a:t>●   </a:t>
+            </a:r>
+            <a:r>
+              <a:rPr sz="1500" b="1" i="0">
+                <a:solidFill>
+                  <a:srgbClr val="2B2B2B"/>
+                </a:solidFill>
+                <a:latin typeface="Calibri"/>
+              </a:rPr>
+              <a:t>Dónde está:</a:t>
+            </a:r>
+            <a:r>
+              <a:rPr sz="1500" b="0" i="0">
+                <a:solidFill>
+                  <a:srgbClr val="2B2B2B"/>
+                </a:solidFill>
+                <a:latin typeface="Calibri"/>
+              </a:rPr>
+              <a:t> ya viene en tu carpeta del curso, en `Sesion 01 - …/` (el PDF y el archivo `Lectura autonoma - Sesion 01.txt` con la cita y el enlace). También queda publicada en CDigital.</a:t>
             </a:r>
           </a:p>
           <a:p>

--- a/Pregrado/Investigacion en ciencia y tecnologia/Clases/Sesion 01 - Presentación del curso · docente · estudiantes · ACAs/Presentacion.pptx
+++ b/Pregrado/Investigacion en ciencia y tecnologia/Clases/Sesion 01 - Presentación del curso · docente · estudiantes · ACAs/Presentacion.pptx
@@ -3347,7 +3347,7 @@
                 </a:solidFill>
                 <a:latin typeface="Calibri"/>
               </a:rPr>
-              <a:t> el curso · el Docente · ustedes · las ACAs</a:t>
+              <a:t> el curso · el Docente · ustedes · cómo se evalúa</a:t>
             </a:r>
           </a:p>
           <a:p>
@@ -3477,7 +3477,7 @@
                 </a:solidFill>
                 <a:latin typeface="Calibri"/>
               </a:rPr>
-              <a:t>Las ACAs, una por una: qué se entrega y qué se mira</a:t>
+              <a:t>Corte por corte: qué hay en el aula y qué se prepara</a:t>
             </a:r>
           </a:p>
         </p:txBody>
@@ -3501,10 +3501,10 @@
                 <a:tableStyleId>{2D5ABB26-0587-4C30-8999-92F81FD0307C}</a:tableStyleId>
               </a:tblPr>
               <a:tblGrid>
-                <a:gridCol w="916935"/>
-                <a:gridCol w="2750807"/>
+                <a:gridCol w="825242"/>
                 <a:gridCol w="3117581"/>
-                <a:gridCol w="4126210"/>
+                <a:gridCol w="3300968"/>
+                <a:gridCol w="3667742"/>
               </a:tblGrid>
               <a:tr h="502920">
                 <a:tc>
@@ -3520,7 +3520,7 @@
                           </a:solidFill>
                           <a:latin typeface="Calibri"/>
                         </a:rPr>
-                        <a:t>ACA</a:t>
+                        <a:t>Corte</a:t>
                       </a:r>
                     </a:p>
                   </a:txBody>
@@ -3543,7 +3543,7 @@
                           </a:solidFill>
                           <a:latin typeface="Calibri"/>
                         </a:rPr>
-                        <a:t>Qué entrega</a:t>
+                        <a:t>Qué hay en el aula (CDigital)</a:t>
                       </a:r>
                     </a:p>
                   </a:txBody>
@@ -3566,7 +3566,7 @@
                           </a:solidFill>
                           <a:latin typeface="Calibri"/>
                         </a:rPr>
-                        <a:t>Qué mira el Docente</a:t>
+                        <a:t>Qué se prepara para eso</a:t>
                       </a:r>
                     </a:p>
                   </a:txBody>
@@ -3614,7 +3614,57 @@
                           </a:solidFill>
                           <a:latin typeface="Calibri"/>
                         </a:rPr>
-                        <a:t>ACA 1</a:t>
+                        <a:t>Corte 1</a:t>
+                      </a:r>
+                    </a:p>
+                  </a:txBody>
+                  <a:tcPr anchor="ctr" marL="109728" marR="91440" marT="36576" marB="36576">
+                    <a:solidFill>
+                      <a:srgbClr val="FFFFFF"/>
+                    </a:solidFill>
+                  </a:tcPr>
+                </a:tc>
+                <a:tc>
+                  <a:txBody>
+                    <a:bodyPr/>
+                    <a:lstStyle/>
+                    <a:p>
+                      <a:pPr algn="l"/>
+                      <a:r>
+                        <a:rPr sz="1100" b="1" i="0">
+                          <a:solidFill>
+                            <a:srgbClr val="2B2B2B"/>
+                          </a:solidFill>
+                          <a:latin typeface="Calibri"/>
+                        </a:rPr>
+                        <a:t>Quiz 1</a:t>
+                      </a:r>
+                      <a:r>
+                        <a:rPr sz="1100" b="0" i="0">
+                          <a:solidFill>
+                            <a:srgbClr val="2B2B2B"/>
+                          </a:solidFill>
+                          <a:latin typeface="Calibri"/>
+                        </a:rPr>
+                        <a:t> y </a:t>
+                      </a:r>
+                      <a:r>
+                        <a:rPr sz="1100" b="1" i="0">
+                          <a:solidFill>
+                            <a:srgbClr val="2B2B2B"/>
+                          </a:solidFill>
+                          <a:latin typeface="Calibri"/>
+                        </a:rPr>
+                        <a:t>Parcial 1</a:t>
+                      </a:r>
+                      <a:r>
+                        <a:rPr sz="1100" b="0" i="0">
+                          <a:solidFill>
+                            <a:srgbClr val="2B2B2B"/>
+                          </a:solidFill>
+                          <a:latin typeface="Calibri"/>
+                        </a:rPr>
+                        <a:t>: cuestionarios que se resuelven en el aula, dentro de su ventana. No se sube archivo.</a:t>
                       </a:r>
                     </a:p>
                   </a:txBody>
@@ -3637,30 +3687,7 @@
                           </a:solidFill>
                           <a:latin typeface="Calibri"/>
                         </a:rPr>
-                        <a:t>Primer avance del artículo: título, introducción breve, problema y primeras referencias</a:t>
-                      </a:r>
-                    </a:p>
-                  </a:txBody>
-                  <a:tcPr anchor="ctr" marL="109728" marR="91440" marT="36576" marB="36576">
-                    <a:solidFill>
-                      <a:srgbClr val="FFFFFF"/>
-                    </a:solidFill>
-                  </a:tcPr>
-                </a:tc>
-                <a:tc>
-                  <a:txBody>
-                    <a:bodyPr/>
-                    <a:lstStyle/>
-                    <a:p>
-                      <a:pPr algn="l"/>
-                      <a:r>
-                        <a:rPr sz="1100" b="0" i="0">
-                          <a:solidFill>
-                            <a:srgbClr val="2B2B2B"/>
-                          </a:solidFill>
-                          <a:latin typeface="Calibri"/>
-                        </a:rPr>
-                        <a:t>Que el problema se entienda sin conocerlo a usted y que las fuentes existan de verdad</a:t>
+                        <a:t>Línea de investigación elegida y justificada + primer avance del artículo: título, introducción breve, problema y primeras referencias. Guías: `Quiz 1 (6%)` y `Parcial 1 (24%)`.</a:t>
                       </a:r>
                     </a:p>
                   </a:txBody>
@@ -3708,7 +3735,57 @@
                           </a:solidFill>
                           <a:latin typeface="Calibri"/>
                         </a:rPr>
-                        <a:t>ACA 2</a:t>
+                        <a:t>Corte 2</a:t>
+                      </a:r>
+                    </a:p>
+                  </a:txBody>
+                  <a:tcPr anchor="ctr" marL="109728" marR="91440" marT="36576" marB="36576">
+                    <a:solidFill>
+                      <a:srgbClr val="F2F2F2"/>
+                    </a:solidFill>
+                  </a:tcPr>
+                </a:tc>
+                <a:tc>
+                  <a:txBody>
+                    <a:bodyPr/>
+                    <a:lstStyle/>
+                    <a:p>
+                      <a:pPr algn="l"/>
+                      <a:r>
+                        <a:rPr sz="1100" b="1" i="0">
+                          <a:solidFill>
+                            <a:srgbClr val="2B2B2B"/>
+                          </a:solidFill>
+                          <a:latin typeface="Calibri"/>
+                        </a:rPr>
+                        <a:t>Quiz 2</a:t>
+                      </a:r>
+                      <a:r>
+                        <a:rPr sz="1100" b="0" i="0">
+                          <a:solidFill>
+                            <a:srgbClr val="2B2B2B"/>
+                          </a:solidFill>
+                          <a:latin typeface="Calibri"/>
+                        </a:rPr>
+                        <a:t> y </a:t>
+                      </a:r>
+                      <a:r>
+                        <a:rPr sz="1100" b="1" i="0">
+                          <a:solidFill>
+                            <a:srgbClr val="2B2B2B"/>
+                          </a:solidFill>
+                          <a:latin typeface="Calibri"/>
+                        </a:rPr>
+                        <a:t>Parcial 2</a:t>
+                      </a:r>
+                      <a:r>
+                        <a:rPr sz="1100" b="0" i="0">
+                          <a:solidFill>
+                            <a:srgbClr val="2B2B2B"/>
+                          </a:solidFill>
+                          <a:latin typeface="Calibri"/>
+                        </a:rPr>
+                        <a:t>: también cuestionarios en el aula.</a:t>
                       </a:r>
                     </a:p>
                   </a:txBody>
@@ -3731,30 +3808,7 @@
                           </a:solidFill>
                           <a:latin typeface="Calibri"/>
                         </a:rPr>
-                        <a:t>Planteamiento del problema y pregunta de investigación</a:t>
-                      </a:r>
-                    </a:p>
-                  </a:txBody>
-                  <a:tcPr anchor="ctr" marL="109728" marR="91440" marT="36576" marB="36576">
-                    <a:solidFill>
-                      <a:srgbClr val="F2F2F2"/>
-                    </a:solidFill>
-                  </a:tcPr>
-                </a:tc>
-                <a:tc>
-                  <a:txBody>
-                    <a:bodyPr/>
-                    <a:lstStyle/>
-                    <a:p>
-                      <a:pPr algn="l"/>
-                      <a:r>
-                        <a:rPr sz="1100" b="0" i="0">
-                          <a:solidFill>
-                            <a:srgbClr val="2B2B2B"/>
-                          </a:solidFill>
-                          <a:latin typeface="Calibri"/>
-                        </a:rPr>
-                        <a:t>Coherencia entre problema, pregunta y evidencia; que la pregunta sea investigable</a:t>
+                        <a:t>Planteamiento del problema y pregunta de investigación, sostenidos con evidencia. Guías: `Quiz 2 (9%)` y `Parcial 2 (21%)`.</a:t>
                       </a:r>
                     </a:p>
                   </a:txBody>
@@ -3802,7 +3856,93 @@
                           </a:solidFill>
                           <a:latin typeface="Calibri"/>
                         </a:rPr>
-                        <a:t>ACA 3</a:t>
+                        <a:t>Corte 3</a:t>
+                      </a:r>
+                    </a:p>
+                  </a:txBody>
+                  <a:tcPr anchor="ctr" marL="109728" marR="91440" marT="36576" marB="36576">
+                    <a:solidFill>
+                      <a:srgbClr val="FFFFFF"/>
+                    </a:solidFill>
+                  </a:tcPr>
+                </a:tc>
+                <a:tc>
+                  <a:txBody>
+                    <a:bodyPr/>
+                    <a:lstStyle/>
+                    <a:p>
+                      <a:pPr algn="l"/>
+                      <a:r>
+                        <a:rPr sz="1100" b="1" i="0">
+                          <a:solidFill>
+                            <a:srgbClr val="2B2B2B"/>
+                          </a:solidFill>
+                          <a:latin typeface="Calibri"/>
+                        </a:rPr>
+                        <a:t>ACA Final</a:t>
+                      </a:r>
+                      <a:r>
+                        <a:rPr sz="1100" b="0" i="0">
+                          <a:solidFill>
+                            <a:srgbClr val="2B2B2B"/>
+                          </a:solidFill>
+                          <a:latin typeface="Calibri"/>
+                        </a:rPr>
+                        <a:t> (tarea: el único documento que se sube) + </a:t>
+                      </a:r>
+                      <a:r>
+                        <a:rPr sz="1100" b="1" i="0">
+                          <a:solidFill>
+                            <a:srgbClr val="2B2B2B"/>
+                          </a:solidFill>
+                          <a:latin typeface="Calibri"/>
+                        </a:rPr>
+                        <a:t>Quiz 3</a:t>
+                      </a:r>
+                      <a:r>
+                        <a:rPr sz="1100" b="0" i="0">
+                          <a:solidFill>
+                            <a:srgbClr val="2B2B2B"/>
+                          </a:solidFill>
+                          <a:latin typeface="Calibri"/>
+                        </a:rPr>
+                        <a:t> + </a:t>
+                      </a:r>
+                      <a:r>
+                        <a:rPr sz="1100" b="1" i="0">
+                          <a:solidFill>
+                            <a:srgbClr val="2B2B2B"/>
+                          </a:solidFill>
+                          <a:latin typeface="Calibri"/>
+                        </a:rPr>
+                        <a:t>autoevaluación</a:t>
+                      </a:r>
+                      <a:r>
+                        <a:rPr sz="1100" b="0" i="0">
+                          <a:solidFill>
+                            <a:srgbClr val="2B2B2B"/>
+                          </a:solidFill>
+                          <a:latin typeface="Calibri"/>
+                        </a:rPr>
+                        <a:t> (cuestionario) y </a:t>
+                      </a:r>
+                      <a:r>
+                        <a:rPr sz="1100" b="1" i="0">
+                          <a:solidFill>
+                            <a:srgbClr val="2B2B2B"/>
+                          </a:solidFill>
+                          <a:latin typeface="Calibri"/>
+                        </a:rPr>
+                        <a:t>coevaluación</a:t>
+                      </a:r>
+                      <a:r>
+                        <a:rPr sz="1100" b="0" i="0">
+                          <a:solidFill>
+                            <a:srgbClr val="2B2B2B"/>
+                          </a:solidFill>
+                          <a:latin typeface="Calibri"/>
+                        </a:rPr>
+                        <a:t> (foro).</a:t>
                       </a:r>
                     </a:p>
                   </a:txBody>
@@ -3825,30 +3965,7 @@
                           </a:solidFill>
                           <a:latin typeface="Calibri"/>
                         </a:rPr>
-                        <a:t>Avance consolidado: marco / revisión con fuentes y referencias en APA 7</a:t>
-                      </a:r>
-                    </a:p>
-                  </a:txBody>
-                  <a:tcPr anchor="ctr" marL="109728" marR="91440" marT="36576" marB="36576">
-                    <a:solidFill>
-                      <a:srgbClr val="FFFFFF"/>
-                    </a:solidFill>
-                  </a:tcPr>
-                </a:tc>
-                <a:tc>
-                  <a:txBody>
-                    <a:bodyPr/>
-                    <a:lstStyle/>
-                    <a:p>
-                      <a:pPr algn="l"/>
-                      <a:r>
-                        <a:rPr sz="1100" b="0" i="0">
-                          <a:solidFill>
-                            <a:srgbClr val="2B2B2B"/>
-                          </a:solidFill>
-                          <a:latin typeface="Calibri"/>
-                        </a:rPr>
-                        <a:t>Que cada fuente ayude a responder la pregunta y que el documento se lea como un todo</a:t>
+                        <a:t>El artículo consolidado: marco / revisión con fuentes citadas y referencias en APA 7. Guías: `Quiz 3 (4%)` y `ACA Final (32,8%)`.</a:t>
                       </a:r>
                     </a:p>
                   </a:txBody>
@@ -3915,7 +4032,7 @@
                 </a:solidFill>
                 <a:latin typeface="Calibri"/>
               </a:rPr>
-              <a:t>Enunciado completo, criterios y </a:t>
+              <a:t>El peso de cada ítem está en la slide «CÓMO SE EVALÚA» de esta sesión. Enunciados y criterios: `Clases/Recursos/ACAs/`; </a:t>
             </a:r>
             <a:r>
               <a:rPr sz="1200" b="1" i="1">
@@ -3933,7 +4050,7 @@
                 </a:solidFill>
                 <a:latin typeface="Calibri"/>
               </a:rPr>
-              <a:t>: `Clases/Recursos/ACAs/`. No se copian aquí para que nunca queden desactualizadas.</a:t>
+              <a:t>, en la Presentación del Curso y en el aula — no se copian aquí para que nunca queden viejas.</a:t>
             </a:r>
           </a:p>
         </p:txBody>
@@ -6521,7 +6638,7 @@
                 </a:solidFill>
                 <a:latin typeface="Calibri"/>
               </a:rPr>
-              <a:t>●   Mal: “Docente, no entendí la ACA”.</a:t>
+              <a:t>●   Mal: “Docente, no entendí la ACA Final”.</a:t>
             </a:r>
           </a:p>
           <a:p>
@@ -7192,7 +7309,7 @@
         <p:spPr>
           <a:xfrm>
             <a:off x="640080" y="1737360"/>
-            <a:ext cx="10911535" cy="1225296"/>
+            <a:ext cx="10911535" cy="1481328"/>
           </a:xfrm>
           <a:prstGeom prst="roundRect">
             <a:avLst/>
@@ -7236,7 +7353,7 @@
         <p:spPr>
           <a:xfrm>
             <a:off x="868680" y="1847088"/>
-            <a:ext cx="10454335" cy="1005840"/>
+            <a:ext cx="10454335" cy="1261872"/>
           </a:xfrm>
           <a:prstGeom prst="rect">
             <a:avLst/>
@@ -7281,7 +7398,43 @@
                 </a:solidFill>
                 <a:latin typeface="Calibri"/>
               </a:rPr>
-              <a:t> No, si entrega. Se evalúa por avances acumulados: quien entrega cada corte, pasa. El riesgo no es la dificultad, es dejar todo para la última semana.</a:t>
+              <a:t> No, si trabaja al día. La nota se arma con </a:t>
+            </a:r>
+            <a:r>
+              <a:rPr sz="1300" b="1" i="0">
+                <a:solidFill>
+                  <a:srgbClr val="2B2B2B"/>
+                </a:solidFill>
+                <a:latin typeface="Calibri"/>
+              </a:rPr>
+              <a:t>quices y parciales</a:t>
+            </a:r>
+            <a:r>
+              <a:rPr sz="1300" b="0" i="0">
+                <a:solidFill>
+                  <a:srgbClr val="2B2B2B"/>
+                </a:solidFill>
+                <a:latin typeface="Calibri"/>
+              </a:rPr>
+              <a:t> que se resuelven en el aula y una </a:t>
+            </a:r>
+            <a:r>
+              <a:rPr sz="1300" b="1" i="0">
+                <a:solidFill>
+                  <a:srgbClr val="2B2B2B"/>
+                </a:solidFill>
+                <a:latin typeface="Calibri"/>
+              </a:rPr>
+              <a:t>ACA Final</a:t>
+            </a:r>
+            <a:r>
+              <a:rPr sz="1300" b="0" i="0">
+                <a:solidFill>
+                  <a:srgbClr val="2B2B2B"/>
+                </a:solidFill>
+                <a:latin typeface="Calibri"/>
+              </a:rPr>
+              <a:t> que acumula lo escrito: el riesgo no es la dificultad, es dejar pasar una ventana o armar el artículo la última semana.</a:t>
             </a:r>
           </a:p>
         </p:txBody>
@@ -7294,7 +7447,7 @@
         </p:nvSpPr>
         <p:spPr>
           <a:xfrm>
-            <a:off x="640080" y="3191256"/>
+            <a:off x="640080" y="3447288"/>
             <a:ext cx="10911535" cy="1225296"/>
           </a:xfrm>
           <a:prstGeom prst="roundRect">
@@ -7338,7 +7491,7 @@
         </p:nvSpPr>
         <p:spPr>
           <a:xfrm>
-            <a:off x="868680" y="3300984"/>
+            <a:off x="868680" y="3557016"/>
             <a:ext cx="10454335" cy="1005840"/>
           </a:xfrm>
           <a:prstGeom prst="rect">
@@ -7402,7 +7555,7 @@
                 </a:solidFill>
                 <a:latin typeface="Calibri"/>
               </a:rPr>
-              <a:t>, salvo que el enunciado de la ACA diga otra cosa. </a:t>
+              <a:t>, salvo que el enunciado diga otra cosa. </a:t>
             </a:r>
             <a:r>
               <a:rPr sz="1300" b="1" i="0">
@@ -7433,7 +7586,7 @@
         </p:nvSpPr>
         <p:spPr>
           <a:xfrm>
-            <a:off x="640080" y="4645152"/>
+            <a:off x="640080" y="4901184"/>
             <a:ext cx="10911535" cy="1225296"/>
           </a:xfrm>
           <a:prstGeom prst="roundRect">
@@ -7477,7 +7630,7 @@
         </p:nvSpPr>
         <p:spPr>
           <a:xfrm>
-            <a:off x="868680" y="4754880"/>
+            <a:off x="868680" y="5010912"/>
             <a:ext cx="10454335" cy="1005840"/>
           </a:xfrm>
           <a:prstGeom prst="rect">
@@ -8039,7 +8192,7 @@
                 </a:solidFill>
                 <a:latin typeface="Calibri"/>
               </a:rPr>
-              <a:t>abra el enunciado de la ACA 1</a:t>
+              <a:t>abra las dos guías del primer corte</a:t>
             </a:r>
             <a:r>
               <a:rPr sz="1600" b="0" i="0">
@@ -8048,7 +8201,7 @@
                 </a:solidFill>
                 <a:latin typeface="Calibri"/>
               </a:rPr>
-              <a:t> en `Clases/Recursos/ACAs/`, con sus fechas.</a:t>
+              <a:t> en `Clases/Recursos/ACAs/`: `Quiz 1 (6%)` y `Parcial 1 (24%)`, que es lo que se pregunta.</a:t>
             </a:r>
           </a:p>
         </p:txBody>
@@ -8874,7 +9027,7 @@
                 </a:solidFill>
                 <a:latin typeface="Calibri"/>
               </a:rPr>
-              <a:t>Las ACAs:</a:t>
+              <a:t>Cómo se evalúa:</a:t>
             </a:r>
             <a:r>
               <a:rPr sz="1600" b="0" i="0">
@@ -8883,7 +9036,7 @@
                 </a:solidFill>
                 <a:latin typeface="Calibri"/>
               </a:rPr>
-              <a:t> qué se entrega, cuánto pesa y dónde se sube.</a:t>
+              <a:t> qué ítems tiene el aula, cuánto pesa cada uno y qué se hace con él.</a:t>
             </a:r>
           </a:p>
           <a:p>
@@ -9164,25 +9317,7 @@
                 </a:solidFill>
                 <a:latin typeface="Calibri"/>
               </a:rPr>
-              <a:t>–   Abrir el enunciado de la </a:t>
-            </a:r>
-            <a:r>
-              <a:rPr sz="1600" b="1" i="0">
-                <a:solidFill>
-                  <a:srgbClr val="2B2B2B"/>
-                </a:solidFill>
-                <a:latin typeface="Calibri"/>
-              </a:rPr>
-              <a:t>ACA 1</a:t>
-            </a:r>
-            <a:r>
-              <a:rPr sz="1600" b="0" i="0">
-                <a:solidFill>
-                  <a:srgbClr val="2B2B2B"/>
-                </a:solidFill>
-                <a:latin typeface="Calibri"/>
-              </a:rPr>
-              <a:t> en `Clases/Recursos/ACAs/` y leerlo entero.</a:t>
+              <a:t>–   Abrir los enunciados de `Clases/Recursos/ACAs/`: son la guía escrita de lo que evalúa cada corte.</a:t>
             </a:r>
           </a:p>
         </p:txBody>
@@ -10349,7 +10484,7 @@
                 </a:solidFill>
                 <a:latin typeface="Calibri"/>
               </a:rPr>
-              <a:t>LAS ACAs — QUÉ SE EVALÚA</a:t>
+              <a:t>CÓMO SE EVALÚA — LOS ÍTEMS DEL AULA</a:t>
             </a:r>
           </a:p>
         </p:txBody>
@@ -10384,7 +10519,7 @@
                 </a:solidFill>
                 <a:latin typeface="Calibri"/>
               </a:rPr>
-              <a:t>Entrega oficial: </a:t>
+              <a:t>Evaluación y notas: solo en </a:t>
             </a:r>
             <a:r>
               <a:rPr sz="1500" b="1" i="0">
@@ -10394,6 +10529,33 @@
                 <a:latin typeface="Calibri"/>
               </a:rPr>
               <a:t>CDigital</a:t>
+            </a:r>
+            <a:r>
+              <a:rPr sz="1500" b="0" i="0">
+                <a:solidFill>
+                  <a:srgbClr val="2B2B2B"/>
+                </a:solidFill>
+                <a:latin typeface="Calibri"/>
+              </a:rPr>
+              <a:t> · los pesos suman </a:t>
+            </a:r>
+            <a:r>
+              <a:rPr sz="1500" b="1" i="0">
+                <a:solidFill>
+                  <a:srgbClr val="2B2B2B"/>
+                </a:solidFill>
+                <a:latin typeface="Calibri"/>
+              </a:rPr>
+              <a:t>100%</a:t>
+            </a:r>
+            <a:r>
+              <a:rPr sz="1500" b="0" i="0">
+                <a:solidFill>
+                  <a:srgbClr val="2B2B2B"/>
+                </a:solidFill>
+                <a:latin typeface="Calibri"/>
+              </a:rPr>
+              <a:t> · fechas: enunciados y Presentación del Curso</a:t>
             </a:r>
           </a:p>
         </p:txBody>
@@ -10408,7 +10570,7 @@
         </p:nvGraphicFramePr>
         <p:xfrm>
           <a:off x="640080" y="2011679"/>
-          <a:ext cx="10911533" cy="2011680"/>
+          <a:ext cx="10911533" cy="4297680"/>
         </p:xfrm>
         <a:graphic>
           <a:graphicData uri="http://schemas.openxmlformats.org/drawingml/2006/table">
@@ -10417,11 +10579,13 @@
                 <a:tableStyleId>{2D5ABB26-0587-4C30-8999-92F81FD0307C}</a:tableStyleId>
               </a:tblPr>
               <a:tblGrid>
-                <a:gridCol w="1993453"/>
-                <a:gridCol w="7763976"/>
-                <a:gridCol w="1154104"/>
+                <a:gridCol w="1833871"/>
+                <a:gridCol w="1192016"/>
+                <a:gridCol w="1192016"/>
+                <a:gridCol w="825242"/>
+                <a:gridCol w="5868388"/>
               </a:tblGrid>
-              <a:tr h="502920">
+              <a:tr h="477520">
                 <a:tc>
                   <a:txBody>
                     <a:bodyPr/>
@@ -10435,7 +10599,7 @@
                           </a:solidFill>
                           <a:latin typeface="Calibri"/>
                         </a:rPr>
-                        <a:t>ACA</a:t>
+                        <a:t>Ítem en CDigital</a:t>
                       </a:r>
                     </a:p>
                   </a:txBody>
@@ -10458,7 +10622,30 @@
                           </a:solidFill>
                           <a:latin typeface="Calibri"/>
                         </a:rPr>
-                        <a:t>Qué entregas</a:t>
+                        <a:t>Tipo</a:t>
+                      </a:r>
+                    </a:p>
+                  </a:txBody>
+                  <a:tcPr anchor="ctr" marL="109728" marR="91440" marT="36576" marB="36576">
+                    <a:solidFill>
+                      <a:srgbClr val="0C2340"/>
+                    </a:solidFill>
+                  </a:tcPr>
+                </a:tc>
+                <a:tc>
+                  <a:txBody>
+                    <a:bodyPr/>
+                    <a:lstStyle/>
+                    <a:p>
+                      <a:pPr algn="l"/>
+                      <a:r>
+                        <a:rPr sz="1300" b="1" i="0">
+                          <a:solidFill>
+                            <a:srgbClr val="FFFFFF"/>
+                          </a:solidFill>
+                          <a:latin typeface="Calibri"/>
+                        </a:rPr>
+                        <a:t>Corte (peso)</a:t>
                       </a:r>
                     </a:p>
                   </a:txBody>
@@ -10491,8 +10678,6 @@
                     </a:solidFill>
                   </a:tcPr>
                 </a:tc>
-              </a:tr>
-              <a:tr h="502920">
                 <a:tc>
                   <a:txBody>
                     <a:bodyPr/>
@@ -10500,13 +10685,38 @@
                     <a:p>
                       <a:pPr algn="l"/>
                       <a:r>
-                        <a:rPr sz="1200" b="0" i="0">
+                        <a:rPr sz="1300" b="1" i="0">
+                          <a:solidFill>
+                            <a:srgbClr val="FFFFFF"/>
+                          </a:solidFill>
+                          <a:latin typeface="Calibri"/>
+                        </a:rPr>
+                        <a:t>Qué haces con él</a:t>
+                      </a:r>
+                    </a:p>
+                  </a:txBody>
+                  <a:tcPr anchor="ctr" marL="109728" marR="91440" marT="36576" marB="36576">
+                    <a:solidFill>
+                      <a:srgbClr val="0C2340"/>
+                    </a:solidFill>
+                  </a:tcPr>
+                </a:tc>
+              </a:tr>
+              <a:tr h="477520">
+                <a:tc>
+                  <a:txBody>
+                    <a:bodyPr/>
+                    <a:lstStyle/>
+                    <a:p>
+                      <a:pPr algn="l"/>
+                      <a:r>
+                        <a:rPr sz="1100" b="1" i="0">
                           <a:solidFill>
                             <a:srgbClr val="2B2B2B"/>
                           </a:solidFill>
                           <a:latin typeface="Calibri"/>
                         </a:rPr>
-                        <a:t>ACA 1</a:t>
+                        <a:t>Quiz 1</a:t>
                       </a:r>
                     </a:p>
                   </a:txBody>
@@ -10523,13 +10733,13 @@
                     <a:p>
                       <a:pPr algn="l"/>
                       <a:r>
-                        <a:rPr sz="1200" b="0" i="0">
+                        <a:rPr sz="1100" b="0" i="0">
                           <a:solidFill>
                             <a:srgbClr val="2B2B2B"/>
                           </a:solidFill>
                           <a:latin typeface="Calibri"/>
                         </a:rPr>
-                        <a:t>Corte 1 · 1.er avance del artículo</a:t>
+                        <a:t>Cuestionario</a:t>
                       </a:r>
                     </a:p>
                   </a:txBody>
@@ -10546,13 +10756,59 @@
                     <a:p>
                       <a:pPr algn="l"/>
                       <a:r>
-                        <a:rPr sz="1200" b="0" i="0">
+                        <a:rPr sz="1100" b="0" i="0">
                           <a:solidFill>
                             <a:srgbClr val="2B2B2B"/>
                           </a:solidFill>
                           <a:latin typeface="Calibri"/>
                         </a:rPr>
-                        <a:t>30%</a:t>
+                        <a:t>1 (30%)</a:t>
+                      </a:r>
+                    </a:p>
+                  </a:txBody>
+                  <a:tcPr anchor="ctr" marL="109728" marR="91440" marT="36576" marB="36576">
+                    <a:solidFill>
+                      <a:srgbClr val="FFFFFF"/>
+                    </a:solidFill>
+                  </a:tcPr>
+                </a:tc>
+                <a:tc>
+                  <a:txBody>
+                    <a:bodyPr/>
+                    <a:lstStyle/>
+                    <a:p>
+                      <a:pPr algn="l"/>
+                      <a:r>
+                        <a:rPr sz="1100" b="1" i="0">
+                          <a:solidFill>
+                            <a:srgbClr val="2B2B2B"/>
+                          </a:solidFill>
+                          <a:latin typeface="Calibri"/>
+                        </a:rPr>
+                        <a:t>6%</a:t>
+                      </a:r>
+                    </a:p>
+                  </a:txBody>
+                  <a:tcPr anchor="ctr" marL="109728" marR="91440" marT="36576" marB="36576">
+                    <a:solidFill>
+                      <a:srgbClr val="FFFFFF"/>
+                    </a:solidFill>
+                  </a:tcPr>
+                </a:tc>
+                <a:tc>
+                  <a:txBody>
+                    <a:bodyPr/>
+                    <a:lstStyle/>
+                    <a:p>
+                      <a:pPr algn="l"/>
+                      <a:r>
+                        <a:rPr sz="1100" b="0" i="0">
+                          <a:solidFill>
+                            <a:srgbClr val="2B2B2B"/>
+                          </a:solidFill>
+                          <a:latin typeface="Calibri"/>
+                        </a:rPr>
+                        <a:t>Lo resuelves en CDigital dentro de su ventana. No se sube archivo.</a:t>
                       </a:r>
                     </a:p>
                   </a:txBody>
@@ -10563,7 +10819,7 @@
                   </a:tcPr>
                 </a:tc>
               </a:tr>
-              <a:tr h="502920">
+              <a:tr h="477520">
                 <a:tc>
                   <a:txBody>
                     <a:bodyPr/>
@@ -10571,13 +10827,13 @@
                     <a:p>
                       <a:pPr algn="l"/>
                       <a:r>
-                        <a:rPr sz="1200" b="0" i="0">
+                        <a:rPr sz="1100" b="1" i="0">
                           <a:solidFill>
                             <a:srgbClr val="2B2B2B"/>
                           </a:solidFill>
                           <a:latin typeface="Calibri"/>
                         </a:rPr>
-                        <a:t>ACA 2</a:t>
+                        <a:t>Parcial 1</a:t>
                       </a:r>
                     </a:p>
                   </a:txBody>
@@ -10594,13 +10850,13 @@
                     <a:p>
                       <a:pPr algn="l"/>
                       <a:r>
-                        <a:rPr sz="1200" b="0" i="0">
+                        <a:rPr sz="1100" b="0" i="0">
                           <a:solidFill>
                             <a:srgbClr val="2B2B2B"/>
                           </a:solidFill>
                           <a:latin typeface="Calibri"/>
                         </a:rPr>
-                        <a:t>Corte 2 · Planteamiento del problema</a:t>
+                        <a:t>Cuestionario</a:t>
                       </a:r>
                     </a:p>
                   </a:txBody>
@@ -10617,13 +10873,59 @@
                     <a:p>
                       <a:pPr algn="l"/>
                       <a:r>
-                        <a:rPr sz="1200" b="0" i="0">
+                        <a:rPr sz="1100" b="0" i="0">
                           <a:solidFill>
                             <a:srgbClr val="2B2B2B"/>
                           </a:solidFill>
                           <a:latin typeface="Calibri"/>
                         </a:rPr>
-                        <a:t>30%</a:t>
+                        <a:t>1 (30%)</a:t>
+                      </a:r>
+                    </a:p>
+                  </a:txBody>
+                  <a:tcPr anchor="ctr" marL="109728" marR="91440" marT="36576" marB="36576">
+                    <a:solidFill>
+                      <a:srgbClr val="F2F2F2"/>
+                    </a:solidFill>
+                  </a:tcPr>
+                </a:tc>
+                <a:tc>
+                  <a:txBody>
+                    <a:bodyPr/>
+                    <a:lstStyle/>
+                    <a:p>
+                      <a:pPr algn="l"/>
+                      <a:r>
+                        <a:rPr sz="1100" b="1" i="0">
+                          <a:solidFill>
+                            <a:srgbClr val="2B2B2B"/>
+                          </a:solidFill>
+                          <a:latin typeface="Calibri"/>
+                        </a:rPr>
+                        <a:t>24%</a:t>
+                      </a:r>
+                    </a:p>
+                  </a:txBody>
+                  <a:tcPr anchor="ctr" marL="109728" marR="91440" marT="36576" marB="36576">
+                    <a:solidFill>
+                      <a:srgbClr val="F2F2F2"/>
+                    </a:solidFill>
+                  </a:tcPr>
+                </a:tc>
+                <a:tc>
+                  <a:txBody>
+                    <a:bodyPr/>
+                    <a:lstStyle/>
+                    <a:p>
+                      <a:pPr algn="l"/>
+                      <a:r>
+                        <a:rPr sz="1100" b="0" i="0">
+                          <a:solidFill>
+                            <a:srgbClr val="2B2B2B"/>
+                          </a:solidFill>
+                          <a:latin typeface="Calibri"/>
+                        </a:rPr>
+                        <a:t>Lo resuelves en CDigital dentro de su ventana. No se sube archivo.</a:t>
                       </a:r>
                     </a:p>
                   </a:txBody>
@@ -10634,7 +10936,7 @@
                   </a:tcPr>
                 </a:tc>
               </a:tr>
-              <a:tr h="502920">
+              <a:tr h="477520">
                 <a:tc>
                   <a:txBody>
                     <a:bodyPr/>
@@ -10642,13 +10944,13 @@
                     <a:p>
                       <a:pPr algn="l"/>
                       <a:r>
-                        <a:rPr sz="1200" b="0" i="0">
+                        <a:rPr sz="1100" b="1" i="0">
                           <a:solidFill>
                             <a:srgbClr val="2B2B2B"/>
                           </a:solidFill>
                           <a:latin typeface="Calibri"/>
                         </a:rPr>
-                        <a:t>ACA 3</a:t>
+                        <a:t>Quiz 2</a:t>
                       </a:r>
                     </a:p>
                   </a:txBody>
@@ -10665,13 +10967,13 @@
                     <a:p>
                       <a:pPr algn="l"/>
                       <a:r>
-                        <a:rPr sz="1200" b="0" i="0">
+                        <a:rPr sz="1100" b="0" i="0">
                           <a:solidFill>
                             <a:srgbClr val="2B2B2B"/>
                           </a:solidFill>
                           <a:latin typeface="Calibri"/>
                         </a:rPr>
-                        <a:t>Corte 3 · Marco y avance consolidado</a:t>
+                        <a:t>Cuestionario</a:t>
                       </a:r>
                     </a:p>
                   </a:txBody>
@@ -10688,13 +10990,59 @@
                     <a:p>
                       <a:pPr algn="l"/>
                       <a:r>
-                        <a:rPr sz="1200" b="0" i="0">
+                        <a:rPr sz="1100" b="0" i="0">
                           <a:solidFill>
                             <a:srgbClr val="2B2B2B"/>
                           </a:solidFill>
                           <a:latin typeface="Calibri"/>
                         </a:rPr>
-                        <a:t>40%</a:t>
+                        <a:t>2 (30%)</a:t>
+                      </a:r>
+                    </a:p>
+                  </a:txBody>
+                  <a:tcPr anchor="ctr" marL="109728" marR="91440" marT="36576" marB="36576">
+                    <a:solidFill>
+                      <a:srgbClr val="FFFFFF"/>
+                    </a:solidFill>
+                  </a:tcPr>
+                </a:tc>
+                <a:tc>
+                  <a:txBody>
+                    <a:bodyPr/>
+                    <a:lstStyle/>
+                    <a:p>
+                      <a:pPr algn="l"/>
+                      <a:r>
+                        <a:rPr sz="1100" b="1" i="0">
+                          <a:solidFill>
+                            <a:srgbClr val="2B2B2B"/>
+                          </a:solidFill>
+                          <a:latin typeface="Calibri"/>
+                        </a:rPr>
+                        <a:t>9%</a:t>
+                      </a:r>
+                    </a:p>
+                  </a:txBody>
+                  <a:tcPr anchor="ctr" marL="109728" marR="91440" marT="36576" marB="36576">
+                    <a:solidFill>
+                      <a:srgbClr val="FFFFFF"/>
+                    </a:solidFill>
+                  </a:tcPr>
+                </a:tc>
+                <a:tc>
+                  <a:txBody>
+                    <a:bodyPr/>
+                    <a:lstStyle/>
+                    <a:p>
+                      <a:pPr algn="l"/>
+                      <a:r>
+                        <a:rPr sz="1100" b="0" i="0">
+                          <a:solidFill>
+                            <a:srgbClr val="2B2B2B"/>
+                          </a:solidFill>
+                          <a:latin typeface="Calibri"/>
+                        </a:rPr>
+                        <a:t>Lo resuelves en CDigital dentro de su ventana. No se sube archivo.</a:t>
                       </a:r>
                     </a:p>
                   </a:txBody>
@@ -10705,6 +11053,591 @@
                   </a:tcPr>
                 </a:tc>
               </a:tr>
+              <a:tr h="477520">
+                <a:tc>
+                  <a:txBody>
+                    <a:bodyPr/>
+                    <a:lstStyle/>
+                    <a:p>
+                      <a:pPr algn="l"/>
+                      <a:r>
+                        <a:rPr sz="1100" b="1" i="0">
+                          <a:solidFill>
+                            <a:srgbClr val="2B2B2B"/>
+                          </a:solidFill>
+                          <a:latin typeface="Calibri"/>
+                        </a:rPr>
+                        <a:t>Parcial 2</a:t>
+                      </a:r>
+                    </a:p>
+                  </a:txBody>
+                  <a:tcPr anchor="ctr" marL="109728" marR="91440" marT="36576" marB="36576">
+                    <a:solidFill>
+                      <a:srgbClr val="F2F2F2"/>
+                    </a:solidFill>
+                  </a:tcPr>
+                </a:tc>
+                <a:tc>
+                  <a:txBody>
+                    <a:bodyPr/>
+                    <a:lstStyle/>
+                    <a:p>
+                      <a:pPr algn="l"/>
+                      <a:r>
+                        <a:rPr sz="1100" b="0" i="0">
+                          <a:solidFill>
+                            <a:srgbClr val="2B2B2B"/>
+                          </a:solidFill>
+                          <a:latin typeface="Calibri"/>
+                        </a:rPr>
+                        <a:t>Cuestionario</a:t>
+                      </a:r>
+                    </a:p>
+                  </a:txBody>
+                  <a:tcPr anchor="ctr" marL="109728" marR="91440" marT="36576" marB="36576">
+                    <a:solidFill>
+                      <a:srgbClr val="F2F2F2"/>
+                    </a:solidFill>
+                  </a:tcPr>
+                </a:tc>
+                <a:tc>
+                  <a:txBody>
+                    <a:bodyPr/>
+                    <a:lstStyle/>
+                    <a:p>
+                      <a:pPr algn="l"/>
+                      <a:r>
+                        <a:rPr sz="1100" b="0" i="0">
+                          <a:solidFill>
+                            <a:srgbClr val="2B2B2B"/>
+                          </a:solidFill>
+                          <a:latin typeface="Calibri"/>
+                        </a:rPr>
+                        <a:t>2 (30%)</a:t>
+                      </a:r>
+                    </a:p>
+                  </a:txBody>
+                  <a:tcPr anchor="ctr" marL="109728" marR="91440" marT="36576" marB="36576">
+                    <a:solidFill>
+                      <a:srgbClr val="F2F2F2"/>
+                    </a:solidFill>
+                  </a:tcPr>
+                </a:tc>
+                <a:tc>
+                  <a:txBody>
+                    <a:bodyPr/>
+                    <a:lstStyle/>
+                    <a:p>
+                      <a:pPr algn="l"/>
+                      <a:r>
+                        <a:rPr sz="1100" b="1" i="0">
+                          <a:solidFill>
+                            <a:srgbClr val="2B2B2B"/>
+                          </a:solidFill>
+                          <a:latin typeface="Calibri"/>
+                        </a:rPr>
+                        <a:t>21%</a:t>
+                      </a:r>
+                    </a:p>
+                  </a:txBody>
+                  <a:tcPr anchor="ctr" marL="109728" marR="91440" marT="36576" marB="36576">
+                    <a:solidFill>
+                      <a:srgbClr val="F2F2F2"/>
+                    </a:solidFill>
+                  </a:tcPr>
+                </a:tc>
+                <a:tc>
+                  <a:txBody>
+                    <a:bodyPr/>
+                    <a:lstStyle/>
+                    <a:p>
+                      <a:pPr algn="l"/>
+                      <a:r>
+                        <a:rPr sz="1100" b="0" i="0">
+                          <a:solidFill>
+                            <a:srgbClr val="2B2B2B"/>
+                          </a:solidFill>
+                          <a:latin typeface="Calibri"/>
+                        </a:rPr>
+                        <a:t>Lo resuelves en CDigital dentro de su ventana. No se sube archivo.</a:t>
+                      </a:r>
+                    </a:p>
+                  </a:txBody>
+                  <a:tcPr anchor="ctr" marL="109728" marR="91440" marT="36576" marB="36576">
+                    <a:solidFill>
+                      <a:srgbClr val="F2F2F2"/>
+                    </a:solidFill>
+                  </a:tcPr>
+                </a:tc>
+              </a:tr>
+              <a:tr h="477520">
+                <a:tc>
+                  <a:txBody>
+                    <a:bodyPr/>
+                    <a:lstStyle/>
+                    <a:p>
+                      <a:pPr algn="l"/>
+                      <a:r>
+                        <a:rPr sz="1100" b="1" i="0">
+                          <a:solidFill>
+                            <a:srgbClr val="2B2B2B"/>
+                          </a:solidFill>
+                          <a:latin typeface="Calibri"/>
+                        </a:rPr>
+                        <a:t>ACA Final</a:t>
+                      </a:r>
+                    </a:p>
+                  </a:txBody>
+                  <a:tcPr anchor="ctr" marL="109728" marR="91440" marT="36576" marB="36576">
+                    <a:solidFill>
+                      <a:srgbClr val="FFFFFF"/>
+                    </a:solidFill>
+                  </a:tcPr>
+                </a:tc>
+                <a:tc>
+                  <a:txBody>
+                    <a:bodyPr/>
+                    <a:lstStyle/>
+                    <a:p>
+                      <a:pPr algn="l"/>
+                      <a:r>
+                        <a:rPr sz="1100" b="0" i="0">
+                          <a:solidFill>
+                            <a:srgbClr val="2B2B2B"/>
+                          </a:solidFill>
+                          <a:latin typeface="Calibri"/>
+                        </a:rPr>
+                        <a:t>Tarea</a:t>
+                      </a:r>
+                    </a:p>
+                  </a:txBody>
+                  <a:tcPr anchor="ctr" marL="109728" marR="91440" marT="36576" marB="36576">
+                    <a:solidFill>
+                      <a:srgbClr val="FFFFFF"/>
+                    </a:solidFill>
+                  </a:tcPr>
+                </a:tc>
+                <a:tc>
+                  <a:txBody>
+                    <a:bodyPr/>
+                    <a:lstStyle/>
+                    <a:p>
+                      <a:pPr algn="l"/>
+                      <a:r>
+                        <a:rPr sz="1100" b="0" i="0">
+                          <a:solidFill>
+                            <a:srgbClr val="2B2B2B"/>
+                          </a:solidFill>
+                          <a:latin typeface="Calibri"/>
+                        </a:rPr>
+                        <a:t>3 (40%)</a:t>
+                      </a:r>
+                    </a:p>
+                  </a:txBody>
+                  <a:tcPr anchor="ctr" marL="109728" marR="91440" marT="36576" marB="36576">
+                    <a:solidFill>
+                      <a:srgbClr val="FFFFFF"/>
+                    </a:solidFill>
+                  </a:tcPr>
+                </a:tc>
+                <a:tc>
+                  <a:txBody>
+                    <a:bodyPr/>
+                    <a:lstStyle/>
+                    <a:p>
+                      <a:pPr algn="l"/>
+                      <a:r>
+                        <a:rPr sz="1100" b="1" i="0">
+                          <a:solidFill>
+                            <a:srgbClr val="2B2B2B"/>
+                          </a:solidFill>
+                          <a:latin typeface="Calibri"/>
+                        </a:rPr>
+                        <a:t>32,8%</a:t>
+                      </a:r>
+                    </a:p>
+                  </a:txBody>
+                  <a:tcPr anchor="ctr" marL="109728" marR="91440" marT="36576" marB="36576">
+                    <a:solidFill>
+                      <a:srgbClr val="FFFFFF"/>
+                    </a:solidFill>
+                  </a:tcPr>
+                </a:tc>
+                <a:tc>
+                  <a:txBody>
+                    <a:bodyPr/>
+                    <a:lstStyle/>
+                    <a:p>
+                      <a:pPr algn="l"/>
+                      <a:r>
+                        <a:rPr sz="1100" b="0" i="0">
+                          <a:solidFill>
+                            <a:srgbClr val="2B2B2B"/>
+                          </a:solidFill>
+                          <a:latin typeface="Calibri"/>
+                        </a:rPr>
+                        <a:t>Subes el documento (plantilla APA CUN) al espacio de la tarea.</a:t>
+                      </a:r>
+                    </a:p>
+                  </a:txBody>
+                  <a:tcPr anchor="ctr" marL="109728" marR="91440" marT="36576" marB="36576">
+                    <a:solidFill>
+                      <a:srgbClr val="FFFFFF"/>
+                    </a:solidFill>
+                  </a:tcPr>
+                </a:tc>
+              </a:tr>
+              <a:tr h="477520">
+                <a:tc>
+                  <a:txBody>
+                    <a:bodyPr/>
+                    <a:lstStyle/>
+                    <a:p>
+                      <a:pPr algn="l"/>
+                      <a:r>
+                        <a:rPr sz="1100" b="1" i="0">
+                          <a:solidFill>
+                            <a:srgbClr val="2B2B2B"/>
+                          </a:solidFill>
+                          <a:latin typeface="Calibri"/>
+                        </a:rPr>
+                        <a:t>Quiz 3</a:t>
+                      </a:r>
+                    </a:p>
+                  </a:txBody>
+                  <a:tcPr anchor="ctr" marL="109728" marR="91440" marT="36576" marB="36576">
+                    <a:solidFill>
+                      <a:srgbClr val="F2F2F2"/>
+                    </a:solidFill>
+                  </a:tcPr>
+                </a:tc>
+                <a:tc>
+                  <a:txBody>
+                    <a:bodyPr/>
+                    <a:lstStyle/>
+                    <a:p>
+                      <a:pPr algn="l"/>
+                      <a:r>
+                        <a:rPr sz="1100" b="0" i="0">
+                          <a:solidFill>
+                            <a:srgbClr val="2B2B2B"/>
+                          </a:solidFill>
+                          <a:latin typeface="Calibri"/>
+                        </a:rPr>
+                        <a:t>Cuestionario</a:t>
+                      </a:r>
+                    </a:p>
+                  </a:txBody>
+                  <a:tcPr anchor="ctr" marL="109728" marR="91440" marT="36576" marB="36576">
+                    <a:solidFill>
+                      <a:srgbClr val="F2F2F2"/>
+                    </a:solidFill>
+                  </a:tcPr>
+                </a:tc>
+                <a:tc>
+                  <a:txBody>
+                    <a:bodyPr/>
+                    <a:lstStyle/>
+                    <a:p>
+                      <a:pPr algn="l"/>
+                      <a:r>
+                        <a:rPr sz="1100" b="0" i="0">
+                          <a:solidFill>
+                            <a:srgbClr val="2B2B2B"/>
+                          </a:solidFill>
+                          <a:latin typeface="Calibri"/>
+                        </a:rPr>
+                        <a:t>3 (40%)</a:t>
+                      </a:r>
+                    </a:p>
+                  </a:txBody>
+                  <a:tcPr anchor="ctr" marL="109728" marR="91440" marT="36576" marB="36576">
+                    <a:solidFill>
+                      <a:srgbClr val="F2F2F2"/>
+                    </a:solidFill>
+                  </a:tcPr>
+                </a:tc>
+                <a:tc>
+                  <a:txBody>
+                    <a:bodyPr/>
+                    <a:lstStyle/>
+                    <a:p>
+                      <a:pPr algn="l"/>
+                      <a:r>
+                        <a:rPr sz="1100" b="1" i="0">
+                          <a:solidFill>
+                            <a:srgbClr val="2B2B2B"/>
+                          </a:solidFill>
+                          <a:latin typeface="Calibri"/>
+                        </a:rPr>
+                        <a:t>4%</a:t>
+                      </a:r>
+                    </a:p>
+                  </a:txBody>
+                  <a:tcPr anchor="ctr" marL="109728" marR="91440" marT="36576" marB="36576">
+                    <a:solidFill>
+                      <a:srgbClr val="F2F2F2"/>
+                    </a:solidFill>
+                  </a:tcPr>
+                </a:tc>
+                <a:tc>
+                  <a:txBody>
+                    <a:bodyPr/>
+                    <a:lstStyle/>
+                    <a:p>
+                      <a:pPr algn="l"/>
+                      <a:r>
+                        <a:rPr sz="1100" b="0" i="0">
+                          <a:solidFill>
+                            <a:srgbClr val="2B2B2B"/>
+                          </a:solidFill>
+                          <a:latin typeface="Calibri"/>
+                        </a:rPr>
+                        <a:t>Lo resuelves en CDigital dentro de su ventana. No se sube archivo.</a:t>
+                      </a:r>
+                    </a:p>
+                  </a:txBody>
+                  <a:tcPr anchor="ctr" marL="109728" marR="91440" marT="36576" marB="36576">
+                    <a:solidFill>
+                      <a:srgbClr val="F2F2F2"/>
+                    </a:solidFill>
+                  </a:tcPr>
+                </a:tc>
+              </a:tr>
+              <a:tr h="477520">
+                <a:tc>
+                  <a:txBody>
+                    <a:bodyPr/>
+                    <a:lstStyle/>
+                    <a:p>
+                      <a:pPr algn="l"/>
+                      <a:r>
+                        <a:rPr sz="1100" b="1" i="0">
+                          <a:solidFill>
+                            <a:srgbClr val="2B2B2B"/>
+                          </a:solidFill>
+                          <a:latin typeface="Calibri"/>
+                        </a:rPr>
+                        <a:t>Autoevaluación</a:t>
+                      </a:r>
+                    </a:p>
+                  </a:txBody>
+                  <a:tcPr anchor="ctr" marL="109728" marR="91440" marT="36576" marB="36576">
+                    <a:solidFill>
+                      <a:srgbClr val="FFFFFF"/>
+                    </a:solidFill>
+                  </a:tcPr>
+                </a:tc>
+                <a:tc>
+                  <a:txBody>
+                    <a:bodyPr/>
+                    <a:lstStyle/>
+                    <a:p>
+                      <a:pPr algn="l"/>
+                      <a:r>
+                        <a:rPr sz="1100" b="0" i="0">
+                          <a:solidFill>
+                            <a:srgbClr val="2B2B2B"/>
+                          </a:solidFill>
+                          <a:latin typeface="Calibri"/>
+                        </a:rPr>
+                        <a:t>Cuestionario</a:t>
+                      </a:r>
+                    </a:p>
+                  </a:txBody>
+                  <a:tcPr anchor="ctr" marL="109728" marR="91440" marT="36576" marB="36576">
+                    <a:solidFill>
+                      <a:srgbClr val="FFFFFF"/>
+                    </a:solidFill>
+                  </a:tcPr>
+                </a:tc>
+                <a:tc>
+                  <a:txBody>
+                    <a:bodyPr/>
+                    <a:lstStyle/>
+                    <a:p>
+                      <a:pPr algn="l"/>
+                      <a:r>
+                        <a:rPr sz="1100" b="0" i="0">
+                          <a:solidFill>
+                            <a:srgbClr val="2B2B2B"/>
+                          </a:solidFill>
+                          <a:latin typeface="Calibri"/>
+                        </a:rPr>
+                        <a:t>3 (40%)</a:t>
+                      </a:r>
+                    </a:p>
+                  </a:txBody>
+                  <a:tcPr anchor="ctr" marL="109728" marR="91440" marT="36576" marB="36576">
+                    <a:solidFill>
+                      <a:srgbClr val="FFFFFF"/>
+                    </a:solidFill>
+                  </a:tcPr>
+                </a:tc>
+                <a:tc>
+                  <a:txBody>
+                    <a:bodyPr/>
+                    <a:lstStyle/>
+                    <a:p>
+                      <a:pPr algn="l"/>
+                      <a:r>
+                        <a:rPr sz="1100" b="1" i="0">
+                          <a:solidFill>
+                            <a:srgbClr val="2B2B2B"/>
+                          </a:solidFill>
+                          <a:latin typeface="Calibri"/>
+                        </a:rPr>
+                        <a:t>1,6%</a:t>
+                      </a:r>
+                    </a:p>
+                  </a:txBody>
+                  <a:tcPr anchor="ctr" marL="109728" marR="91440" marT="36576" marB="36576">
+                    <a:solidFill>
+                      <a:srgbClr val="FFFFFF"/>
+                    </a:solidFill>
+                  </a:tcPr>
+                </a:tc>
+                <a:tc>
+                  <a:txBody>
+                    <a:bodyPr/>
+                    <a:lstStyle/>
+                    <a:p>
+                      <a:pPr algn="l"/>
+                      <a:r>
+                        <a:rPr sz="1100" b="0" i="0">
+                          <a:solidFill>
+                            <a:srgbClr val="2B2B2B"/>
+                          </a:solidFill>
+                          <a:latin typeface="Calibri"/>
+                        </a:rPr>
+                        <a:t>La diligencias tú mismo en el aula (cuestionario individual).</a:t>
+                      </a:r>
+                    </a:p>
+                  </a:txBody>
+                  <a:tcPr anchor="ctr" marL="109728" marR="91440" marT="36576" marB="36576">
+                    <a:solidFill>
+                      <a:srgbClr val="FFFFFF"/>
+                    </a:solidFill>
+                  </a:tcPr>
+                </a:tc>
+              </a:tr>
+              <a:tr h="477520">
+                <a:tc>
+                  <a:txBody>
+                    <a:bodyPr/>
+                    <a:lstStyle/>
+                    <a:p>
+                      <a:pPr algn="l"/>
+                      <a:r>
+                        <a:rPr sz="1100" b="1" i="0">
+                          <a:solidFill>
+                            <a:srgbClr val="2B2B2B"/>
+                          </a:solidFill>
+                          <a:latin typeface="Calibri"/>
+                        </a:rPr>
+                        <a:t>Coevaluación</a:t>
+                      </a:r>
+                    </a:p>
+                  </a:txBody>
+                  <a:tcPr anchor="ctr" marL="109728" marR="91440" marT="36576" marB="36576">
+                    <a:solidFill>
+                      <a:srgbClr val="F2F2F2"/>
+                    </a:solidFill>
+                  </a:tcPr>
+                </a:tc>
+                <a:tc>
+                  <a:txBody>
+                    <a:bodyPr/>
+                    <a:lstStyle/>
+                    <a:p>
+                      <a:pPr algn="l"/>
+                      <a:r>
+                        <a:rPr sz="1100" b="0" i="0">
+                          <a:solidFill>
+                            <a:srgbClr val="2B2B2B"/>
+                          </a:solidFill>
+                          <a:latin typeface="Calibri"/>
+                        </a:rPr>
+                        <a:t>Foro</a:t>
+                      </a:r>
+                    </a:p>
+                  </a:txBody>
+                  <a:tcPr anchor="ctr" marL="109728" marR="91440" marT="36576" marB="36576">
+                    <a:solidFill>
+                      <a:srgbClr val="F2F2F2"/>
+                    </a:solidFill>
+                  </a:tcPr>
+                </a:tc>
+                <a:tc>
+                  <a:txBody>
+                    <a:bodyPr/>
+                    <a:lstStyle/>
+                    <a:p>
+                      <a:pPr algn="l"/>
+                      <a:r>
+                        <a:rPr sz="1100" b="0" i="0">
+                          <a:solidFill>
+                            <a:srgbClr val="2B2B2B"/>
+                          </a:solidFill>
+                          <a:latin typeface="Calibri"/>
+                        </a:rPr>
+                        <a:t>3 (40%)</a:t>
+                      </a:r>
+                    </a:p>
+                  </a:txBody>
+                  <a:tcPr anchor="ctr" marL="109728" marR="91440" marT="36576" marB="36576">
+                    <a:solidFill>
+                      <a:srgbClr val="F2F2F2"/>
+                    </a:solidFill>
+                  </a:tcPr>
+                </a:tc>
+                <a:tc>
+                  <a:txBody>
+                    <a:bodyPr/>
+                    <a:lstStyle/>
+                    <a:p>
+                      <a:pPr algn="l"/>
+                      <a:r>
+                        <a:rPr sz="1100" b="1" i="0">
+                          <a:solidFill>
+                            <a:srgbClr val="2B2B2B"/>
+                          </a:solidFill>
+                          <a:latin typeface="Calibri"/>
+                        </a:rPr>
+                        <a:t>1,6%</a:t>
+                      </a:r>
+                    </a:p>
+                  </a:txBody>
+                  <a:tcPr anchor="ctr" marL="109728" marR="91440" marT="36576" marB="36576">
+                    <a:solidFill>
+                      <a:srgbClr val="F2F2F2"/>
+                    </a:solidFill>
+                  </a:tcPr>
+                </a:tc>
+                <a:tc>
+                  <a:txBody>
+                    <a:bodyPr/>
+                    <a:lstStyle/>
+                    <a:p>
+                      <a:pPr algn="l"/>
+                      <a:r>
+                        <a:rPr sz="1100" b="0" i="0">
+                          <a:solidFill>
+                            <a:srgbClr val="2B2B2B"/>
+                          </a:solidFill>
+                          <a:latin typeface="Calibri"/>
+                        </a:rPr>
+                        <a:t>Participas en el foro valorando el trabajo de tus pares.</a:t>
+                      </a:r>
+                    </a:p>
+                  </a:txBody>
+                  <a:tcPr anchor="ctr" marL="109728" marR="91440" marT="36576" marB="36576">
+                    <a:solidFill>
+                      <a:srgbClr val="F2F2F2"/>
+                    </a:solidFill>
+                  </a:tcPr>
+                </a:tc>
+              </a:tr>
             </a:tbl>
           </a:graphicData>
         </a:graphic>
@@ -10712,58 +11645,6 @@
       <p:sp>
         <p:nvSpPr>
           <p:cNvPr id="6" name="TextBox 5"/>
-          <p:cNvSpPr txBox="1"/>
-          <p:nvPr/>
-        </p:nvSpPr>
-        <p:spPr>
-          <a:xfrm>
-            <a:off x="640080" y="4160520"/>
-            <a:ext cx="10911535" cy="548640"/>
-          </a:xfrm>
-          <a:prstGeom prst="rect">
-            <a:avLst/>
-          </a:prstGeom>
-          <a:noFill/>
-        </p:spPr>
-        <p:txBody>
-          <a:bodyPr wrap="square" anchor="t" lIns="0" rIns="0" tIns="0" bIns="0">
-            <a:spAutoFit/>
-          </a:bodyPr>
-          <a:lstStyle/>
-          <a:p>
-            <a:r>
-              <a:rPr sz="1200" b="0" i="1">
-                <a:solidFill>
-                  <a:srgbClr val="2B2B2B"/>
-                </a:solidFill>
-                <a:latin typeface="Calibri"/>
-              </a:rPr>
-              <a:t>Enunciado completo y </a:t>
-            </a:r>
-            <a:r>
-              <a:rPr sz="1200" b="1" i="1">
-                <a:solidFill>
-                  <a:srgbClr val="2B2B2B"/>
-                </a:solidFill>
-                <a:latin typeface="Calibri"/>
-              </a:rPr>
-              <a:t>fechas exactas</a:t>
-            </a:r>
-            <a:r>
-              <a:rPr sz="1200" b="0" i="1">
-                <a:solidFill>
-                  <a:srgbClr val="2B2B2B"/>
-                </a:solidFill>
-                <a:latin typeface="Calibri"/>
-              </a:rPr>
-              <a:t>: `Clases/Recursos/ACAs/` y la Presentación del Curso.</a:t>
-            </a:r>
-          </a:p>
-        </p:txBody>
-      </p:sp>
-      <p:sp>
-        <p:nvSpPr>
-          <p:cNvPr id="7" name="TextBox 6"/>
           <p:cNvSpPr txBox="1"/>
           <p:nvPr/>
         </p:nvSpPr>
@@ -11537,7 +12418,7 @@
                           </a:solidFill>
                           <a:latin typeface="Calibri"/>
                         </a:rPr>
-                        <a:t>Presentación del curso, del Docente, de ustedes y de las ACAs (</a:t>
+                        <a:t>Presentación del curso, del Docente, de ustedes y de cómo se evalúa (</a:t>
                       </a:r>
                       <a:r>
                         <a:rPr sz="1200" b="1" i="0">

--- a/Pregrado/Investigacion en ciencia y tecnologia/Clases/Sesion 01 - Presentación del curso · docente · estudiantes · ACAs/Presentacion.pptx
+++ b/Pregrado/Investigacion en ciencia y tecnologia/Clases/Sesion 01 - Presentación del curso · docente · estudiantes · ACAs/Presentacion.pptx
@@ -12649,7 +12649,25 @@
                           </a:solidFill>
                           <a:latin typeface="Calibri"/>
                         </a:rPr>
-                        <a:t>Identificación de problemas y pregunta de investigación</a:t>
+                        <a:t>Problema y pregunta · </a:t>
+                      </a:r>
+                      <a:r>
+                        <a:rPr sz="1200" b="1" i="0">
+                          <a:solidFill>
+                            <a:srgbClr val="2B2B2B"/>
+                          </a:solidFill>
+                          <a:latin typeface="Calibri"/>
+                        </a:rPr>
+                        <a:t>bases de datos y gestores de citas</a:t>
+                      </a:r>
+                      <a:r>
+                        <a:rPr sz="1200" b="0" i="0">
+                          <a:solidFill>
+                            <a:srgbClr val="2B2B2B"/>
+                          </a:solidFill>
+                          <a:latin typeface="Calibri"/>
+                        </a:rPr>
+                        <a:t> (sesión doble)</a:t>
                       </a:r>
                     </a:p>
                   </a:txBody>
@@ -12672,7 +12690,7 @@
                           </a:solidFill>
                           <a:latin typeface="Calibri"/>
                         </a:rPr>
-                        <a:t>Su pregunta redactada y su diagrama del problema</a:t>
+                        <a:t>Su pregunta, su diagrama y 3 fuentes citadas en APA 7</a:t>
                       </a:r>
                     </a:p>
                   </a:txBody>
@@ -12720,7 +12738,25 @@
                           </a:solidFill>
                           <a:latin typeface="Calibri"/>
                         </a:rPr>
-                        <a:t>Formulación del planteamiento del problema</a:t>
+                        <a:t>Planteamiento del problema · </a:t>
+                      </a:r>
+                      <a:r>
+                        <a:rPr sz="1200" b="1" i="0">
+                          <a:solidFill>
+                            <a:srgbClr val="2B2B2B"/>
+                          </a:solidFill>
+                          <a:latin typeface="Calibri"/>
+                        </a:rPr>
+                        <a:t>marco teórico y revisión</a:t>
+                      </a:r>
+                      <a:r>
+                        <a:rPr sz="1200" b="0" i="0">
+                          <a:solidFill>
+                            <a:srgbClr val="2B2B2B"/>
+                          </a:solidFill>
+                          <a:latin typeface="Calibri"/>
+                        </a:rPr>
+                        <a:t> (sesión doble)</a:t>
                       </a:r>
                     </a:p>
                   </a:txBody>
@@ -12743,7 +12779,7 @@
                           </a:solidFill>
                           <a:latin typeface="Calibri"/>
                         </a:rPr>
-                        <a:t>El planteamiento escrito y sostenido con evidencia</a:t>
+                        <a:t>El planteamiento con evidencia y la primera página de marco</a:t>
                       </a:r>
                     </a:p>
                   </a:txBody>
@@ -12791,7 +12827,7 @@
                           </a:solidFill>
                           <a:latin typeface="Calibri"/>
                         </a:rPr>
-                        <a:t>Bases de datos, gestores de citas y marco teórico (sesión combinada)</a:t>
+                        <a:t>Socialización del artículo y cierre del curso</a:t>
                       </a:r>
                     </a:p>
                   </a:txBody>
@@ -12814,7 +12850,7 @@
                           </a:solidFill>
                           <a:latin typeface="Calibri"/>
                         </a:rPr>
-                        <a:t>Fichas de lectura y una página de marco citada</a:t>
+                        <a:t>Su artículo sustentado, con ajustes anotados</a:t>
                       </a:r>
                     </a:p>
                   </a:txBody>
@@ -12894,7 +12930,43 @@
                 </a:solidFill>
                 <a:latin typeface="Calibri"/>
               </a:rPr>
-              <a:t> y se retoman al abrir la Sesión 02.</a:t>
+              <a:t> y se retoman al abrir la Sesión 02. Todo lo que la </a:t>
+            </a:r>
+            <a:r>
+              <a:rPr sz="1200" b="1" i="1">
+                <a:solidFill>
+                  <a:srgbClr val="2B2B2B"/>
+                </a:solidFill>
+                <a:latin typeface="Calibri"/>
+              </a:rPr>
+              <a:t>ACA Final</a:t>
+            </a:r>
+            <a:r>
+              <a:rPr sz="1200" b="0" i="1">
+                <a:solidFill>
+                  <a:srgbClr val="2B2B2B"/>
+                </a:solidFill>
+                <a:latin typeface="Calibri"/>
+              </a:rPr>
+              <a:t> califica se dicta hasta la </a:t>
+            </a:r>
+            <a:r>
+              <a:rPr sz="1200" b="1" i="1">
+                <a:solidFill>
+                  <a:srgbClr val="2B2B2B"/>
+                </a:solidFill>
+                <a:latin typeface="Calibri"/>
+              </a:rPr>
+              <a:t>Sesión 05</a:t>
+            </a:r>
+            <a:r>
+              <a:rPr sz="1200" b="0" i="1">
+                <a:solidFill>
+                  <a:srgbClr val="2B2B2B"/>
+                </a:solidFill>
+                <a:latin typeface="Calibri"/>
+              </a:rPr>
+              <a:t>; la 06 es cierre.</a:t>
             </a:r>
           </a:p>
         </p:txBody>

--- a/Pregrado/Investigacion en ciencia y tecnologia/Clases/Sesion 01 - Presentación del curso · docente · estudiantes · ACAs/Presentacion.pptx
+++ b/Pregrado/Investigacion en ciencia y tecnologia/Clases/Sesion 01 - Presentación del curso · docente · estudiantes · ACAs/Presentacion.pptx
@@ -10029,7 +10029,7 @@
                 </a:solidFill>
                 <a:latin typeface="Calibri"/>
               </a:rPr>
-              <a:t>Preséntate: quién eres y qué esperas del curso</a:t>
+              <a:t>Tablero colaborativo (Padlet)</a:t>
             </a:r>
           </a:p>
         </p:txBody>
@@ -10077,7 +10077,7 @@
                 </a:solidFill>
                 <a:latin typeface="Calibri"/>
               </a:rPr>
-              <a:t>Escanea o abre:</a:t>
+              <a:t>Escanea el QR o abre:</a:t>
             </a:r>
             <a:r>
               <a:rPr sz="1400" b="0" i="0">
@@ -10111,7 +10111,7 @@
                 </a:solidFill>
                 <a:latin typeface="Calibri"/>
               </a:rPr>
-              <a:t>nombre</a:t>
+              <a:t>tu nombre</a:t>
             </a:r>
             <a:r>
               <a:rPr sz="1400" b="0" i="0">
@@ -10120,7 +10120,7 @@
                 </a:solidFill>
                 <a:latin typeface="Calibri"/>
               </a:rPr>
-              <a:t> + </a:t>
+              <a:t> + expectativa del curso + </a:t>
             </a:r>
             <a:r>
               <a:rPr sz="1400" b="1" i="0">
@@ -10129,7 +10129,7 @@
                 </a:solidFill>
                 <a:latin typeface="Calibri"/>
               </a:rPr>
-              <a:t>expectativa del curso</a:t>
+              <a:t>idea de tema</a:t>
             </a:r>
             <a:r>
               <a:rPr sz="1400" b="0" i="0">
@@ -10138,25 +10138,7 @@
                 </a:solidFill>
                 <a:latin typeface="Calibri"/>
               </a:rPr>
-              <a:t> o </a:t>
-            </a:r>
-            <a:r>
-              <a:rPr sz="1400" b="1" i="0">
-                <a:solidFill>
-                  <a:srgbClr val="2B2B2B"/>
-                </a:solidFill>
-                <a:latin typeface="Calibri"/>
-              </a:rPr>
-              <a:t>tema de interés</a:t>
-            </a:r>
-            <a:r>
-              <a:rPr sz="1400" b="0" i="0">
-                <a:solidFill>
-                  <a:srgbClr val="2B2B2B"/>
-                </a:solidFill>
-                <a:latin typeface="Calibri"/>
-              </a:rPr>
-              <a:t> (1 frase).</a:t>
+              <a:t> para el artículo (1 frase).</a:t>
             </a:r>
           </a:p>
           <a:p>
@@ -10172,7 +10154,7 @@
                 </a:solidFill>
                 <a:latin typeface="Calibri"/>
               </a:rPr>
-              <a:t>–   Tablero oficial: </a:t>
+              <a:t>–   </a:t>
             </a:r>
             <a:r>
               <a:rPr sz="1400" b="1" i="0">
@@ -10181,7 +10163,7 @@
                 </a:solidFill>
                 <a:latin typeface="Calibri"/>
               </a:rPr>
-              <a:t>Padlet</a:t>
+              <a:t>Ahora, ~7 min.</a:t>
             </a:r>
             <a:r>
               <a:rPr sz="1400" b="0" i="0">
@@ -10190,7 +10172,7 @@
                 </a:solidFill>
                 <a:latin typeface="Calibri"/>
               </a:rPr>
-              <a:t> (mismo enlace en los 5 cursos).</a:t>
+              <a:t> Somos 20: el muro se lee entero y nadie queda sin ser visto.</a:t>
             </a:r>
           </a:p>
           <a:p>
@@ -10206,7 +10188,7 @@
                 </a:solidFill>
                 <a:latin typeface="Calibri"/>
               </a:rPr>
-              <a:t>–   Ahora (~7 min). Leemos juntos 3–4 notas (sin juzgar).</a:t>
+              <a:t>–   Después las leemos en voz alta y agrupamos expectativas — sin juzgar: de ahí salen los ejemplos con los que trabajamos el resto del curso.</a:t>
             </a:r>
           </a:p>
         </p:txBody>
